--- a/day2-deck/decks/Store Records - Review.pptx
+++ b/day2-deck/decks/Store Records - Review.pptx
@@ -10,9 +10,10 @@
     <p:sldId id="258" r:id="rId4"/>
     <p:sldId id="259" r:id="rId5"/>
     <p:sldId id="260" r:id="rId6"/>
+    <p:sldId id="261" r:id="rId7"/>
   </p:sldIdLst>
   <p:notesMasterIdLst>
-    <p:notesMasterId r:id="rId7"/>
+    <p:notesMasterId r:id="rId8"/>
   </p:notesMasterIdLst>
   <p:sldSz cx="12192000" cy="6858000"/>
   <p:notesSz cx="6858000" cy="12192000"/>
@@ -1252,6 +1253,118 @@
 </p:notes>
 </file>
 
+<file path=ppt/notesSlides/notesSlide6.xml><?xml version="1.0" encoding="utf-8"?>
+<p:notes xmlns:a="http://schemas.openxmlformats.org/drawingml/2006/main" xmlns:r="http://schemas.openxmlformats.org/officeDocument/2006/relationships" xmlns:p="http://schemas.openxmlformats.org/presentationml/2006/main">
+  <p:cSld>
+    <p:spTree>
+      <p:nvGrpSpPr>
+        <p:cNvPr id="1" name=""/>
+        <p:cNvGrpSpPr/>
+        <p:nvPr/>
+      </p:nvGrpSpPr>
+      <p:grpSpPr>
+        <a:xfrm>
+          <a:off x="0" y="0"/>
+          <a:ext cx="0" cy="0"/>
+          <a:chOff x="0" y="0"/>
+          <a:chExt cx="0" cy="0"/>
+        </a:xfrm>
+      </p:grpSpPr>
+      <p:sp>
+        <p:nvSpPr>
+          <p:cNvPr id="2" name="Slide Image Placeholder 1"/>
+          <p:cNvSpPr>
+            <a:spLocks noGrp="1" noRot="1" noChangeAspect="1"/>
+          </p:cNvSpPr>
+          <p:nvPr>
+            <p:ph type="sldImg"/>
+          </p:nvPr>
+        </p:nvSpPr>
+        <p:spPr/>
+      </p:sp>
+      <p:sp>
+        <p:nvSpPr>
+          <p:cNvPr id="3" name="Notes Placeholder 2"/>
+          <p:cNvSpPr>
+            <a:spLocks noGrp="1"/>
+          </p:cNvSpPr>
+          <p:nvPr>
+            <p:ph type="body" idx="1"/>
+          </p:nvPr>
+        </p:nvSpPr>
+        <p:spPr/>
+        <p:txBody>
+          <a:bodyPr/>
+          <a:lstStyle/>
+          <a:p>
+            <a:r>
+              <a:rPr lang="en-US" dirty="0"/>
+              <a:t>Month each record was set, by store:
+AUDI HENDERSON: parts record reset once (Jul); combined record reset twice (Apr, Jul).
+CDJR POST FALLS: service record reset once (Jul); combined record reset once (Jul).
+GMC PRESCOTT: parts record reset once (Apr); combined record reset once (Apr).
+HONDA HENDERSON: service record reset 3 times (Mar, Jun, Jul); parts record reset once (Jul); combined record reset 3 times (Mar, Jun, Jul).
+HONDA SPOKANE: service record reset 4 times (Mar, Apr, Jun, Jul); parts record reset once (Jul); combined record reset 4 times (Mar, Apr, Jun, Jul).
+HYUNDAI PRESCOTT: service record reset twice (Mar, Jul); parts record reset once (Feb); combined record reset 3 times (Feb, Mar, Jul).
+HYUNDAI ST GEORGE: service record reset 4 times (Jan, Mar, Jul, Sep).
+KIA LV: service record reset once (Sep).
+KIA ST GEORGE: service record reset twice (Apr, Jul); parts record reset once (Jul); combined record reset once (Jul).
+LEXUS: service record reset twice (Mar, May); parts record reset once (May); combined record reset once (May).
+LINCOLN: service record reset twice (Aug, Sep); parts record reset once (Mar); combined record reset 3 times (Mar, Aug, Sep).
+LR HENDERSON: service record reset twice (Aug, Sep); parts record reset once (Jul); combined record reset once (Jul).
+LR LV: service record reset once (Jul); combined record reset once (Jul).
+LR RENO: service record reset once (Aug); combined record reset once (Aug).
+MAZDA: service record reset twice (Aug, Sep); parts record reset once (Sep); combined record reset twice (Aug, Sep).
+NISSAN: service record reset 3 times (Mar, Jun, Sep); parts record reset twice (Jun, Jul); combined record reset 4 times (Mar, Jun, Jul, Sep).
+SUBARU PRESCOTT: combined record reset once (Apr).
+SUBARU ST GEORGE: service record reset twice (Jan, Mar); parts record reset 3 times (Mar, Apr, Jun); combined record reset twice (Mar, Jun).
+TOYOTA FLAGSTAFF: service record reset 3 times (Mar, Apr, May); combined record reset once (Mar).
+TOYOTA HENDERSON: service record reset twice (Apr, Jul); parts record reset 3 times (Jun, Aug, Sep); combined record reset 3 times (Apr, Jun, Jul).
+TOYOTA PRESCOTT: service record reset twice (Mar, Apr); parts record reset once (Apr); combined record reset once (Apr).
+TOYOTA SPOKANE: service record reset once (Jul); combined record reset once (Jul).
+VOLVO: service record reset twice (Apr, Jun).
+Source: Qlik - Fixed Ops Accounting TB (Family FIXED GROSS, service + parts, body shop excluded), pulled Oct 8 2026. History Jan 2021 - Sep 2026; months before a store opened are ignored. Same-store, INEOS excluded. Matches the P&amp;L for every store except GMC PRESCOTT service (TB higher by $153,746 Jan-Sep 2026, $286,430 Jan-Sep 2025; GMC PRESCOTT's combined record holds on both). Count of times a store set a new all-time monthly high, Jan-Sep 2026. SVC = service gross, PTS = parts gross, TOT = service + parts combined. Each new high counts, so a record beaten twice counts twice.</a:t>
+            </a:r>
+            <a:endParaRPr lang="en-US" dirty="0"/>
+          </a:p>
+        </p:txBody>
+      </p:sp>
+      <p:sp>
+        <p:nvSpPr>
+          <p:cNvPr id="4" name="Slide Number Placeholder 3"/>
+          <p:cNvSpPr>
+            <a:spLocks noGrp="1"/>
+          </p:cNvSpPr>
+          <p:nvPr>
+            <p:ph type="sldNum" sz="quarter" idx="10"/>
+          </p:nvPr>
+        </p:nvSpPr>
+        <p:spPr/>
+        <p:txBody>
+          <a:bodyPr/>
+          <a:lstStyle/>
+          <a:p>
+            <a:fld id="{F7021451-1387-4CA6-816F-3879F97B5CBC}" type="slidenum">
+              <a:rPr lang="en-US"/>
+              <a:t>6</a:t>
+            </a:fld>
+            <a:endParaRPr lang="en-US"/>
+          </a:p>
+        </p:txBody>
+      </p:sp>
+    </p:spTree>
+    <p:extLst>
+      <p:ext uri="{BB962C8B-B14F-4D97-AF65-F5344CB8AC3E}">
+        <p14:creationId xmlns:p14="http://schemas.microsoft.com/office/powerpoint/2010/main" val="1024086991"/>
+      </p:ext>
+    </p:extLst>
+  </p:cSld>
+  <p:clrMapOvr>
+    <a:masterClrMapping/>
+  </p:clrMapOvr>
+</p:notes>
+</file>
+
 <file path=ppt/slideLayouts/slideLayout1.xml><?xml version="1.0" encoding="utf-8"?>
 <p:sldLayout xmlns:a="http://schemas.openxmlformats.org/drawingml/2006/main" xmlns:r="http://schemas.openxmlformats.org/officeDocument/2006/relationships" xmlns:p="http://schemas.openxmlformats.org/presentationml/2006/main" preserve="1">
   <p:cSld name="DEFAULT">
@@ -12034,6 +12147,6716 @@
                 <a:cs typeface="Inter" pitchFamily="34" charset="-120"/>
               </a:rPr>
               <a:t>23 of 33 stores set a new monthly record in 2026; HONDA SPOKANE and NISSAN set the most, 9 each.</a:t>
+            </a:r>
+            <a:endParaRPr lang="en-US" sz="1600" dirty="0"/>
+          </a:p>
+        </p:txBody>
+      </p:sp>
+    </p:spTree>
+  </p:cSld>
+  <p:clrMapOvr>
+    <a:masterClrMapping/>
+  </p:clrMapOvr>
+</p:sld>
+</file>
+
+<file path=ppt/slides/slide6.xml><?xml version="1.0" encoding="utf-8"?>
+<p:sld xmlns:a="http://schemas.openxmlformats.org/drawingml/2006/main" xmlns:r="http://schemas.openxmlformats.org/officeDocument/2006/relationships" xmlns:p="http://schemas.openxmlformats.org/presentationml/2006/main">
+  <p:cSld name="Slide 6">
+    <p:bg>
+      <p:bgPr>
+        <a:solidFill>
+          <a:srgbClr val="EDEDED"/>
+        </a:solidFill>
+      </p:bgPr>
+    </p:bg>
+    <p:spTree>
+      <p:nvGrpSpPr>
+        <p:cNvPr id="1" name=""/>
+        <p:cNvGrpSpPr/>
+        <p:nvPr/>
+      </p:nvGrpSpPr>
+      <p:grpSpPr>
+        <a:xfrm>
+          <a:off x="0" y="0"/>
+          <a:ext cx="0" cy="0"/>
+          <a:chOff x="0" y="0"/>
+          <a:chExt cx="0" cy="0"/>
+        </a:xfrm>
+      </p:grpSpPr>
+      <p:sp>
+        <p:nvSpPr>
+          <p:cNvPr id="2" name="Shape 0"/>
+          <p:cNvSpPr/>
+          <p:nvPr/>
+        </p:nvSpPr>
+        <p:spPr>
+          <a:xfrm>
+            <a:off x="457200" y="402336"/>
+            <a:ext cx="50292" cy="192024"/>
+          </a:xfrm>
+          <a:prstGeom prst="rect">
+            <a:avLst/>
+          </a:prstGeom>
+          <a:solidFill>
+            <a:srgbClr val="2587C5"/>
+          </a:solidFill>
+          <a:ln/>
+        </p:spPr>
+      </p:sp>
+      <p:sp>
+        <p:nvSpPr>
+          <p:cNvPr id="3" name="Text 1"/>
+          <p:cNvSpPr txBox="1"/>
+          <p:nvPr/>
+        </p:nvSpPr>
+        <p:spPr>
+          <a:xfrm>
+            <a:off x="621792" y="338328"/>
+            <a:ext cx="8229600" cy="274320"/>
+          </a:xfrm>
+          <a:prstGeom prst="rect">
+            <a:avLst/>
+          </a:prstGeom>
+          <a:noFill/>
+          <a:ln/>
+        </p:spPr>
+        <p:txBody>
+          <a:bodyPr wrap="square" lIns="0" tIns="0" rIns="0" bIns="0" rtlCol="0" anchor="ctr"/>
+          <a:lstStyle/>
+          <a:p>
+            <a:pPr indent="0" marL="0">
+              <a:buNone/>
+            </a:pPr>
+            <a:r>
+              <a:rPr lang="en-US" sz="1400" b="1" spc="110" kern="0" dirty="0">
+                <a:solidFill>
+                  <a:srgbClr val="595959"/>
+                </a:solidFill>
+                <a:latin typeface="Inter" pitchFamily="34" charset="0"/>
+                <a:ea typeface="Inter" pitchFamily="34" charset="-122"/>
+                <a:cs typeface="Inter" pitchFamily="34" charset="-120"/>
+              </a:rPr>
+              <a:t>STORE RECORDS · OPTION: RANKER BY CATEGORY</a:t>
+            </a:r>
+            <a:endParaRPr lang="en-US" sz="1400" dirty="0"/>
+          </a:p>
+        </p:txBody>
+      </p:sp>
+      <p:sp>
+        <p:nvSpPr>
+          <p:cNvPr id="4" name="Text 2"/>
+          <p:cNvSpPr txBox="1"/>
+          <p:nvPr/>
+        </p:nvSpPr>
+        <p:spPr>
+          <a:xfrm>
+            <a:off x="457200" y="640080"/>
+            <a:ext cx="11338560" cy="502920"/>
+          </a:xfrm>
+          <a:prstGeom prst="rect">
+            <a:avLst/>
+          </a:prstGeom>
+          <a:noFill/>
+          <a:ln/>
+        </p:spPr>
+        <p:txBody>
+          <a:bodyPr wrap="square" lIns="0" tIns="0" rIns="0" bIns="0" rtlCol="0" anchor="ctr"/>
+          <a:lstStyle/>
+          <a:p>
+            <a:pPr indent="0" marL="0">
+              <a:buNone/>
+            </a:pPr>
+            <a:r>
+              <a:rPr lang="en-US" sz="2800" dirty="0">
+                <a:solidFill>
+                  <a:srgbClr val="1A1A1A"/>
+                </a:solidFill>
+                <a:latin typeface="Inter" pitchFamily="34" charset="0"/>
+                <a:ea typeface="Inter" pitchFamily="34" charset="-122"/>
+                <a:cs typeface="Inter" pitchFamily="34" charset="-120"/>
+              </a:rPr>
+              <a:t>Monthly Gross Records Set in 2026</a:t>
+            </a:r>
+            <a:endParaRPr lang="en-US" sz="2800" dirty="0"/>
+          </a:p>
+        </p:txBody>
+      </p:sp>
+      <p:sp>
+        <p:nvSpPr>
+          <p:cNvPr id="5" name="Shape 3"/>
+          <p:cNvSpPr/>
+          <p:nvPr/>
+        </p:nvSpPr>
+        <p:spPr>
+          <a:xfrm>
+            <a:off x="457200" y="1207008"/>
+            <a:ext cx="11274552" cy="4645152"/>
+          </a:xfrm>
+          <a:prstGeom prst="rect">
+            <a:avLst/>
+          </a:prstGeom>
+          <a:solidFill>
+            <a:srgbClr val="FFFFFF"/>
+          </a:solidFill>
+          <a:ln/>
+        </p:spPr>
+      </p:sp>
+      <p:sp>
+        <p:nvSpPr>
+          <p:cNvPr id="6" name="Shape 4"/>
+          <p:cNvSpPr/>
+          <p:nvPr/>
+        </p:nvSpPr>
+        <p:spPr>
+          <a:xfrm>
+            <a:off x="658368" y="1417320"/>
+            <a:ext cx="128016" cy="128016"/>
+          </a:xfrm>
+          <a:prstGeom prst="rect">
+            <a:avLst/>
+          </a:prstGeom>
+          <a:solidFill>
+            <a:srgbClr val="0B7A4A"/>
+          </a:solidFill>
+          <a:ln/>
+        </p:spPr>
+      </p:sp>
+      <p:sp>
+        <p:nvSpPr>
+          <p:cNvPr id="7" name="Text 5"/>
+          <p:cNvSpPr txBox="1"/>
+          <p:nvPr/>
+        </p:nvSpPr>
+        <p:spPr>
+          <a:xfrm>
+            <a:off x="841248" y="1316736"/>
+            <a:ext cx="873252" cy="329184"/>
+          </a:xfrm>
+          <a:prstGeom prst="rect">
+            <a:avLst/>
+          </a:prstGeom>
+          <a:noFill/>
+          <a:ln/>
+        </p:spPr>
+        <p:txBody>
+          <a:bodyPr wrap="square" lIns="0" tIns="0" rIns="0" bIns="0" rtlCol="0" anchor="ctr"/>
+          <a:lstStyle/>
+          <a:p>
+            <a:pPr indent="0" marL="0">
+              <a:buNone/>
+            </a:pPr>
+            <a:r>
+              <a:rPr lang="en-US" sz="1400" dirty="0">
+                <a:solidFill>
+                  <a:srgbClr val="1A1A1A"/>
+                </a:solidFill>
+                <a:latin typeface="Inter" pitchFamily="34" charset="0"/>
+                <a:ea typeface="Inter" pitchFamily="34" charset="-122"/>
+                <a:cs typeface="Inter" pitchFamily="34" charset="-120"/>
+              </a:rPr>
+              <a:t>Service</a:t>
+            </a:r>
+            <a:endParaRPr lang="en-US" sz="1400" dirty="0"/>
+          </a:p>
+        </p:txBody>
+      </p:sp>
+      <p:sp>
+        <p:nvSpPr>
+          <p:cNvPr id="8" name="Shape 6"/>
+          <p:cNvSpPr/>
+          <p:nvPr/>
+        </p:nvSpPr>
+        <p:spPr>
+          <a:xfrm>
+            <a:off x="1824228" y="1417320"/>
+            <a:ext cx="128016" cy="128016"/>
+          </a:xfrm>
+          <a:prstGeom prst="rect">
+            <a:avLst/>
+          </a:prstGeom>
+          <a:solidFill>
+            <a:srgbClr val="12A566"/>
+          </a:solidFill>
+          <a:ln/>
+        </p:spPr>
+      </p:sp>
+      <p:sp>
+        <p:nvSpPr>
+          <p:cNvPr id="9" name="Text 7"/>
+          <p:cNvSpPr txBox="1"/>
+          <p:nvPr/>
+        </p:nvSpPr>
+        <p:spPr>
+          <a:xfrm>
+            <a:off x="2007108" y="1316736"/>
+            <a:ext cx="681228" cy="329184"/>
+          </a:xfrm>
+          <a:prstGeom prst="rect">
+            <a:avLst/>
+          </a:prstGeom>
+          <a:noFill/>
+          <a:ln/>
+        </p:spPr>
+        <p:txBody>
+          <a:bodyPr wrap="square" lIns="0" tIns="0" rIns="0" bIns="0" rtlCol="0" anchor="ctr"/>
+          <a:lstStyle/>
+          <a:p>
+            <a:pPr indent="0" marL="0">
+              <a:buNone/>
+            </a:pPr>
+            <a:r>
+              <a:rPr lang="en-US" sz="1400" dirty="0">
+                <a:solidFill>
+                  <a:srgbClr val="1A1A1A"/>
+                </a:solidFill>
+                <a:latin typeface="Inter" pitchFamily="34" charset="0"/>
+                <a:ea typeface="Inter" pitchFamily="34" charset="-122"/>
+                <a:cs typeface="Inter" pitchFamily="34" charset="-120"/>
+              </a:rPr>
+              <a:t>Parts</a:t>
+            </a:r>
+            <a:endParaRPr lang="en-US" sz="1400" dirty="0"/>
+          </a:p>
+        </p:txBody>
+      </p:sp>
+      <p:sp>
+        <p:nvSpPr>
+          <p:cNvPr id="10" name="Shape 8"/>
+          <p:cNvSpPr/>
+          <p:nvPr/>
+        </p:nvSpPr>
+        <p:spPr>
+          <a:xfrm>
+            <a:off x="2798064" y="1417320"/>
+            <a:ext cx="128016" cy="128016"/>
+          </a:xfrm>
+          <a:prstGeom prst="rect">
+            <a:avLst/>
+          </a:prstGeom>
+          <a:solidFill>
+            <a:srgbClr val="8ED3B0"/>
+          </a:solidFill>
+          <a:ln/>
+        </p:spPr>
+      </p:sp>
+      <p:sp>
+        <p:nvSpPr>
+          <p:cNvPr id="11" name="Text 9"/>
+          <p:cNvSpPr txBox="1"/>
+          <p:nvPr/>
+        </p:nvSpPr>
+        <p:spPr>
+          <a:xfrm>
+            <a:off x="2980944" y="1316736"/>
+            <a:ext cx="969264" cy="329184"/>
+          </a:xfrm>
+          <a:prstGeom prst="rect">
+            <a:avLst/>
+          </a:prstGeom>
+          <a:noFill/>
+          <a:ln/>
+        </p:spPr>
+        <p:txBody>
+          <a:bodyPr wrap="square" lIns="0" tIns="0" rIns="0" bIns="0" rtlCol="0" anchor="ctr"/>
+          <a:lstStyle/>
+          <a:p>
+            <a:pPr indent="0" marL="0">
+              <a:buNone/>
+            </a:pPr>
+            <a:r>
+              <a:rPr lang="en-US" sz="1400" dirty="0">
+                <a:solidFill>
+                  <a:srgbClr val="1A1A1A"/>
+                </a:solidFill>
+                <a:latin typeface="Inter" pitchFamily="34" charset="0"/>
+                <a:ea typeface="Inter" pitchFamily="34" charset="-122"/>
+                <a:cs typeface="Inter" pitchFamily="34" charset="-120"/>
+              </a:rPr>
+              <a:t>Combined</a:t>
+            </a:r>
+            <a:endParaRPr lang="en-US" sz="1400" dirty="0"/>
+          </a:p>
+        </p:txBody>
+      </p:sp>
+      <p:sp>
+        <p:nvSpPr>
+          <p:cNvPr id="12" name="Text 10"/>
+          <p:cNvSpPr txBox="1"/>
+          <p:nvPr/>
+        </p:nvSpPr>
+        <p:spPr>
+          <a:xfrm>
+            <a:off x="3959352" y="1316736"/>
+            <a:ext cx="502920" cy="329184"/>
+          </a:xfrm>
+          <a:prstGeom prst="rect">
+            <a:avLst/>
+          </a:prstGeom>
+          <a:noFill/>
+          <a:ln/>
+        </p:spPr>
+        <p:txBody>
+          <a:bodyPr wrap="square" lIns="0" tIns="0" rIns="0" bIns="0" rtlCol="0" anchor="ctr"/>
+          <a:lstStyle/>
+          <a:p>
+            <a:pPr algn="r" indent="0" marL="0">
+              <a:buNone/>
+            </a:pPr>
+            <a:r>
+              <a:rPr lang="en-US" sz="1400" b="1" dirty="0">
+                <a:solidFill>
+                  <a:srgbClr val="595959"/>
+                </a:solidFill>
+                <a:latin typeface="Inter" pitchFamily="34" charset="0"/>
+                <a:ea typeface="Inter" pitchFamily="34" charset="-122"/>
+                <a:cs typeface="Inter" pitchFamily="34" charset="-120"/>
+              </a:rPr>
+              <a:t>SVC</a:t>
+            </a:r>
+            <a:endParaRPr lang="en-US" sz="1400" dirty="0"/>
+          </a:p>
+        </p:txBody>
+      </p:sp>
+      <p:sp>
+        <p:nvSpPr>
+          <p:cNvPr id="13" name="Text 11"/>
+          <p:cNvSpPr txBox="1"/>
+          <p:nvPr/>
+        </p:nvSpPr>
+        <p:spPr>
+          <a:xfrm>
+            <a:off x="4462272" y="1316736"/>
+            <a:ext cx="502920" cy="329184"/>
+          </a:xfrm>
+          <a:prstGeom prst="rect">
+            <a:avLst/>
+          </a:prstGeom>
+          <a:noFill/>
+          <a:ln/>
+        </p:spPr>
+        <p:txBody>
+          <a:bodyPr wrap="square" lIns="0" tIns="0" rIns="0" bIns="0" rtlCol="0" anchor="ctr"/>
+          <a:lstStyle/>
+          <a:p>
+            <a:pPr algn="r" indent="0" marL="0">
+              <a:buNone/>
+            </a:pPr>
+            <a:r>
+              <a:rPr lang="en-US" sz="1400" b="1" dirty="0">
+                <a:solidFill>
+                  <a:srgbClr val="595959"/>
+                </a:solidFill>
+                <a:latin typeface="Inter" pitchFamily="34" charset="0"/>
+                <a:ea typeface="Inter" pitchFamily="34" charset="-122"/>
+                <a:cs typeface="Inter" pitchFamily="34" charset="-120"/>
+              </a:rPr>
+              <a:t>PTS</a:t>
+            </a:r>
+            <a:endParaRPr lang="en-US" sz="1400" dirty="0"/>
+          </a:p>
+        </p:txBody>
+      </p:sp>
+      <p:sp>
+        <p:nvSpPr>
+          <p:cNvPr id="14" name="Text 12"/>
+          <p:cNvSpPr txBox="1"/>
+          <p:nvPr/>
+        </p:nvSpPr>
+        <p:spPr>
+          <a:xfrm>
+            <a:off x="4965192" y="1316736"/>
+            <a:ext cx="502920" cy="329184"/>
+          </a:xfrm>
+          <a:prstGeom prst="rect">
+            <a:avLst/>
+          </a:prstGeom>
+          <a:noFill/>
+          <a:ln/>
+        </p:spPr>
+        <p:txBody>
+          <a:bodyPr wrap="square" lIns="0" tIns="0" rIns="0" bIns="0" rtlCol="0" anchor="ctr"/>
+          <a:lstStyle/>
+          <a:p>
+            <a:pPr algn="r" indent="0" marL="0">
+              <a:buNone/>
+            </a:pPr>
+            <a:r>
+              <a:rPr lang="en-US" sz="1400" b="1" dirty="0">
+                <a:solidFill>
+                  <a:srgbClr val="595959"/>
+                </a:solidFill>
+                <a:latin typeface="Inter" pitchFamily="34" charset="0"/>
+                <a:ea typeface="Inter" pitchFamily="34" charset="-122"/>
+                <a:cs typeface="Inter" pitchFamily="34" charset="-120"/>
+              </a:rPr>
+              <a:t>TOT</a:t>
+            </a:r>
+            <a:endParaRPr lang="en-US" sz="1400" dirty="0"/>
+          </a:p>
+        </p:txBody>
+      </p:sp>
+      <p:sp>
+        <p:nvSpPr>
+          <p:cNvPr id="15" name="Text 13"/>
+          <p:cNvSpPr txBox="1"/>
+          <p:nvPr/>
+        </p:nvSpPr>
+        <p:spPr>
+          <a:xfrm>
+            <a:off x="5468112" y="1316736"/>
+            <a:ext cx="548640" cy="329184"/>
+          </a:xfrm>
+          <a:prstGeom prst="rect">
+            <a:avLst/>
+          </a:prstGeom>
+          <a:noFill/>
+          <a:ln/>
+        </p:spPr>
+        <p:txBody>
+          <a:bodyPr wrap="square" lIns="0" tIns="0" rIns="0" bIns="0" rtlCol="0" anchor="ctr"/>
+          <a:lstStyle/>
+          <a:p>
+            <a:pPr algn="r" indent="0" marL="0">
+              <a:buNone/>
+            </a:pPr>
+            <a:r>
+              <a:rPr lang="en-US" sz="1400" b="1" dirty="0">
+                <a:solidFill>
+                  <a:srgbClr val="1A1A1A"/>
+                </a:solidFill>
+                <a:latin typeface="Inter" pitchFamily="34" charset="0"/>
+                <a:ea typeface="Inter" pitchFamily="34" charset="-122"/>
+                <a:cs typeface="Inter" pitchFamily="34" charset="-120"/>
+              </a:rPr>
+              <a:t>ALL</a:t>
+            </a:r>
+            <a:endParaRPr lang="en-US" sz="1400" dirty="0"/>
+          </a:p>
+        </p:txBody>
+      </p:sp>
+      <p:sp>
+        <p:nvSpPr>
+          <p:cNvPr id="16" name="Shape 14"/>
+          <p:cNvSpPr/>
+          <p:nvPr/>
+        </p:nvSpPr>
+        <p:spPr>
+          <a:xfrm>
+            <a:off x="6208776" y="1417320"/>
+            <a:ext cx="128016" cy="128016"/>
+          </a:xfrm>
+          <a:prstGeom prst="rect">
+            <a:avLst/>
+          </a:prstGeom>
+          <a:solidFill>
+            <a:srgbClr val="0B7A4A"/>
+          </a:solidFill>
+          <a:ln/>
+        </p:spPr>
+      </p:sp>
+      <p:sp>
+        <p:nvSpPr>
+          <p:cNvPr id="17" name="Text 15"/>
+          <p:cNvSpPr txBox="1"/>
+          <p:nvPr/>
+        </p:nvSpPr>
+        <p:spPr>
+          <a:xfrm>
+            <a:off x="6391656" y="1316736"/>
+            <a:ext cx="873252" cy="329184"/>
+          </a:xfrm>
+          <a:prstGeom prst="rect">
+            <a:avLst/>
+          </a:prstGeom>
+          <a:noFill/>
+          <a:ln/>
+        </p:spPr>
+        <p:txBody>
+          <a:bodyPr wrap="square" lIns="0" tIns="0" rIns="0" bIns="0" rtlCol="0" anchor="ctr"/>
+          <a:lstStyle/>
+          <a:p>
+            <a:pPr indent="0" marL="0">
+              <a:buNone/>
+            </a:pPr>
+            <a:r>
+              <a:rPr lang="en-US" sz="1400" dirty="0">
+                <a:solidFill>
+                  <a:srgbClr val="1A1A1A"/>
+                </a:solidFill>
+                <a:latin typeface="Inter" pitchFamily="34" charset="0"/>
+                <a:ea typeface="Inter" pitchFamily="34" charset="-122"/>
+                <a:cs typeface="Inter" pitchFamily="34" charset="-120"/>
+              </a:rPr>
+              <a:t>Service</a:t>
+            </a:r>
+            <a:endParaRPr lang="en-US" sz="1400" dirty="0"/>
+          </a:p>
+        </p:txBody>
+      </p:sp>
+      <p:sp>
+        <p:nvSpPr>
+          <p:cNvPr id="18" name="Shape 16"/>
+          <p:cNvSpPr/>
+          <p:nvPr/>
+        </p:nvSpPr>
+        <p:spPr>
+          <a:xfrm>
+            <a:off x="7374636" y="1417320"/>
+            <a:ext cx="128016" cy="128016"/>
+          </a:xfrm>
+          <a:prstGeom prst="rect">
+            <a:avLst/>
+          </a:prstGeom>
+          <a:solidFill>
+            <a:srgbClr val="12A566"/>
+          </a:solidFill>
+          <a:ln/>
+        </p:spPr>
+      </p:sp>
+      <p:sp>
+        <p:nvSpPr>
+          <p:cNvPr id="19" name="Text 17"/>
+          <p:cNvSpPr txBox="1"/>
+          <p:nvPr/>
+        </p:nvSpPr>
+        <p:spPr>
+          <a:xfrm>
+            <a:off x="7557516" y="1316736"/>
+            <a:ext cx="681228" cy="329184"/>
+          </a:xfrm>
+          <a:prstGeom prst="rect">
+            <a:avLst/>
+          </a:prstGeom>
+          <a:noFill/>
+          <a:ln/>
+        </p:spPr>
+        <p:txBody>
+          <a:bodyPr wrap="square" lIns="0" tIns="0" rIns="0" bIns="0" rtlCol="0" anchor="ctr"/>
+          <a:lstStyle/>
+          <a:p>
+            <a:pPr indent="0" marL="0">
+              <a:buNone/>
+            </a:pPr>
+            <a:r>
+              <a:rPr lang="en-US" sz="1400" dirty="0">
+                <a:solidFill>
+                  <a:srgbClr val="1A1A1A"/>
+                </a:solidFill>
+                <a:latin typeface="Inter" pitchFamily="34" charset="0"/>
+                <a:ea typeface="Inter" pitchFamily="34" charset="-122"/>
+                <a:cs typeface="Inter" pitchFamily="34" charset="-120"/>
+              </a:rPr>
+              <a:t>Parts</a:t>
+            </a:r>
+            <a:endParaRPr lang="en-US" sz="1400" dirty="0"/>
+          </a:p>
+        </p:txBody>
+      </p:sp>
+      <p:sp>
+        <p:nvSpPr>
+          <p:cNvPr id="20" name="Shape 18"/>
+          <p:cNvSpPr/>
+          <p:nvPr/>
+        </p:nvSpPr>
+        <p:spPr>
+          <a:xfrm>
+            <a:off x="8348472" y="1417320"/>
+            <a:ext cx="128016" cy="128016"/>
+          </a:xfrm>
+          <a:prstGeom prst="rect">
+            <a:avLst/>
+          </a:prstGeom>
+          <a:solidFill>
+            <a:srgbClr val="8ED3B0"/>
+          </a:solidFill>
+          <a:ln/>
+        </p:spPr>
+      </p:sp>
+      <p:sp>
+        <p:nvSpPr>
+          <p:cNvPr id="21" name="Text 19"/>
+          <p:cNvSpPr txBox="1"/>
+          <p:nvPr/>
+        </p:nvSpPr>
+        <p:spPr>
+          <a:xfrm>
+            <a:off x="8531352" y="1316736"/>
+            <a:ext cx="969264" cy="329184"/>
+          </a:xfrm>
+          <a:prstGeom prst="rect">
+            <a:avLst/>
+          </a:prstGeom>
+          <a:noFill/>
+          <a:ln/>
+        </p:spPr>
+        <p:txBody>
+          <a:bodyPr wrap="square" lIns="0" tIns="0" rIns="0" bIns="0" rtlCol="0" anchor="ctr"/>
+          <a:lstStyle/>
+          <a:p>
+            <a:pPr indent="0" marL="0">
+              <a:buNone/>
+            </a:pPr>
+            <a:r>
+              <a:rPr lang="en-US" sz="1400" dirty="0">
+                <a:solidFill>
+                  <a:srgbClr val="1A1A1A"/>
+                </a:solidFill>
+                <a:latin typeface="Inter" pitchFamily="34" charset="0"/>
+                <a:ea typeface="Inter" pitchFamily="34" charset="-122"/>
+                <a:cs typeface="Inter" pitchFamily="34" charset="-120"/>
+              </a:rPr>
+              <a:t>Combined</a:t>
+            </a:r>
+            <a:endParaRPr lang="en-US" sz="1400" dirty="0"/>
+          </a:p>
+        </p:txBody>
+      </p:sp>
+      <p:sp>
+        <p:nvSpPr>
+          <p:cNvPr id="22" name="Text 20"/>
+          <p:cNvSpPr txBox="1"/>
+          <p:nvPr/>
+        </p:nvSpPr>
+        <p:spPr>
+          <a:xfrm>
+            <a:off x="9509760" y="1316736"/>
+            <a:ext cx="502920" cy="329184"/>
+          </a:xfrm>
+          <a:prstGeom prst="rect">
+            <a:avLst/>
+          </a:prstGeom>
+          <a:noFill/>
+          <a:ln/>
+        </p:spPr>
+        <p:txBody>
+          <a:bodyPr wrap="square" lIns="0" tIns="0" rIns="0" bIns="0" rtlCol="0" anchor="ctr"/>
+          <a:lstStyle/>
+          <a:p>
+            <a:pPr algn="r" indent="0" marL="0">
+              <a:buNone/>
+            </a:pPr>
+            <a:r>
+              <a:rPr lang="en-US" sz="1400" b="1" dirty="0">
+                <a:solidFill>
+                  <a:srgbClr val="595959"/>
+                </a:solidFill>
+                <a:latin typeface="Inter" pitchFamily="34" charset="0"/>
+                <a:ea typeface="Inter" pitchFamily="34" charset="-122"/>
+                <a:cs typeface="Inter" pitchFamily="34" charset="-120"/>
+              </a:rPr>
+              <a:t>SVC</a:t>
+            </a:r>
+            <a:endParaRPr lang="en-US" sz="1400" dirty="0"/>
+          </a:p>
+        </p:txBody>
+      </p:sp>
+      <p:sp>
+        <p:nvSpPr>
+          <p:cNvPr id="23" name="Text 21"/>
+          <p:cNvSpPr txBox="1"/>
+          <p:nvPr/>
+        </p:nvSpPr>
+        <p:spPr>
+          <a:xfrm>
+            <a:off x="10012680" y="1316736"/>
+            <a:ext cx="502920" cy="329184"/>
+          </a:xfrm>
+          <a:prstGeom prst="rect">
+            <a:avLst/>
+          </a:prstGeom>
+          <a:noFill/>
+          <a:ln/>
+        </p:spPr>
+        <p:txBody>
+          <a:bodyPr wrap="square" lIns="0" tIns="0" rIns="0" bIns="0" rtlCol="0" anchor="ctr"/>
+          <a:lstStyle/>
+          <a:p>
+            <a:pPr algn="r" indent="0" marL="0">
+              <a:buNone/>
+            </a:pPr>
+            <a:r>
+              <a:rPr lang="en-US" sz="1400" b="1" dirty="0">
+                <a:solidFill>
+                  <a:srgbClr val="595959"/>
+                </a:solidFill>
+                <a:latin typeface="Inter" pitchFamily="34" charset="0"/>
+                <a:ea typeface="Inter" pitchFamily="34" charset="-122"/>
+                <a:cs typeface="Inter" pitchFamily="34" charset="-120"/>
+              </a:rPr>
+              <a:t>PTS</a:t>
+            </a:r>
+            <a:endParaRPr lang="en-US" sz="1400" dirty="0"/>
+          </a:p>
+        </p:txBody>
+      </p:sp>
+      <p:sp>
+        <p:nvSpPr>
+          <p:cNvPr id="24" name="Text 22"/>
+          <p:cNvSpPr txBox="1"/>
+          <p:nvPr/>
+        </p:nvSpPr>
+        <p:spPr>
+          <a:xfrm>
+            <a:off x="10515600" y="1316736"/>
+            <a:ext cx="502920" cy="329184"/>
+          </a:xfrm>
+          <a:prstGeom prst="rect">
+            <a:avLst/>
+          </a:prstGeom>
+          <a:noFill/>
+          <a:ln/>
+        </p:spPr>
+        <p:txBody>
+          <a:bodyPr wrap="square" lIns="0" tIns="0" rIns="0" bIns="0" rtlCol="0" anchor="ctr"/>
+          <a:lstStyle/>
+          <a:p>
+            <a:pPr algn="r" indent="0" marL="0">
+              <a:buNone/>
+            </a:pPr>
+            <a:r>
+              <a:rPr lang="en-US" sz="1400" b="1" dirty="0">
+                <a:solidFill>
+                  <a:srgbClr val="595959"/>
+                </a:solidFill>
+                <a:latin typeface="Inter" pitchFamily="34" charset="0"/>
+                <a:ea typeface="Inter" pitchFamily="34" charset="-122"/>
+                <a:cs typeface="Inter" pitchFamily="34" charset="-120"/>
+              </a:rPr>
+              <a:t>TOT</a:t>
+            </a:r>
+            <a:endParaRPr lang="en-US" sz="1400" dirty="0"/>
+          </a:p>
+        </p:txBody>
+      </p:sp>
+      <p:sp>
+        <p:nvSpPr>
+          <p:cNvPr id="25" name="Text 23"/>
+          <p:cNvSpPr txBox="1"/>
+          <p:nvPr/>
+        </p:nvSpPr>
+        <p:spPr>
+          <a:xfrm>
+            <a:off x="11018520" y="1316736"/>
+            <a:ext cx="548640" cy="329184"/>
+          </a:xfrm>
+          <a:prstGeom prst="rect">
+            <a:avLst/>
+          </a:prstGeom>
+          <a:noFill/>
+          <a:ln/>
+        </p:spPr>
+        <p:txBody>
+          <a:bodyPr wrap="square" lIns="0" tIns="0" rIns="0" bIns="0" rtlCol="0" anchor="ctr"/>
+          <a:lstStyle/>
+          <a:p>
+            <a:pPr algn="r" indent="0" marL="0">
+              <a:buNone/>
+            </a:pPr>
+            <a:r>
+              <a:rPr lang="en-US" sz="1400" b="1" dirty="0">
+                <a:solidFill>
+                  <a:srgbClr val="1A1A1A"/>
+                </a:solidFill>
+                <a:latin typeface="Inter" pitchFamily="34" charset="0"/>
+                <a:ea typeface="Inter" pitchFamily="34" charset="-122"/>
+                <a:cs typeface="Inter" pitchFamily="34" charset="-120"/>
+              </a:rPr>
+              <a:t>ALL</a:t>
+            </a:r>
+            <a:endParaRPr lang="en-US" sz="1400" dirty="0"/>
+          </a:p>
+        </p:txBody>
+      </p:sp>
+      <p:sp>
+        <p:nvSpPr>
+          <p:cNvPr id="26" name="Text 24"/>
+          <p:cNvSpPr txBox="1"/>
+          <p:nvPr/>
+        </p:nvSpPr>
+        <p:spPr>
+          <a:xfrm>
+            <a:off x="658368" y="1700784"/>
+            <a:ext cx="1938528" cy="335280"/>
+          </a:xfrm>
+          <a:prstGeom prst="rect">
+            <a:avLst/>
+          </a:prstGeom>
+          <a:noFill/>
+          <a:ln/>
+        </p:spPr>
+        <p:txBody>
+          <a:bodyPr wrap="square" lIns="0" tIns="0" rIns="0" bIns="0" rtlCol="0" anchor="ctr"/>
+          <a:lstStyle/>
+          <a:p>
+            <a:pPr indent="0" marL="0">
+              <a:buNone/>
+            </a:pPr>
+            <a:r>
+              <a:rPr lang="en-US" sz="1300" dirty="0">
+                <a:solidFill>
+                  <a:srgbClr val="1A1A1A"/>
+                </a:solidFill>
+                <a:latin typeface="Inter" pitchFamily="34" charset="0"/>
+                <a:ea typeface="Inter" pitchFamily="34" charset="-122"/>
+                <a:cs typeface="Inter" pitchFamily="34" charset="-120"/>
+              </a:rPr>
+              <a:t>HONDA SPOKANE</a:t>
+            </a:r>
+            <a:endParaRPr lang="en-US" sz="1300" dirty="0"/>
+          </a:p>
+        </p:txBody>
+      </p:sp>
+      <p:sp>
+        <p:nvSpPr>
+          <p:cNvPr id="27" name="Shape 25"/>
+          <p:cNvSpPr/>
+          <p:nvPr/>
+        </p:nvSpPr>
+        <p:spPr>
+          <a:xfrm>
+            <a:off x="2670048" y="1776222"/>
+            <a:ext cx="540512" cy="184404"/>
+          </a:xfrm>
+          <a:prstGeom prst="rect">
+            <a:avLst/>
+          </a:prstGeom>
+          <a:solidFill>
+            <a:srgbClr val="0B7A4A"/>
+          </a:solidFill>
+          <a:ln w="9525">
+            <a:solidFill>
+              <a:srgbClr val="FFFFFF"/>
+            </a:solidFill>
+            <a:prstDash val="solid"/>
+          </a:ln>
+        </p:spPr>
+      </p:sp>
+      <p:sp>
+        <p:nvSpPr>
+          <p:cNvPr id="28" name="Shape 26"/>
+          <p:cNvSpPr/>
+          <p:nvPr/>
+        </p:nvSpPr>
+        <p:spPr>
+          <a:xfrm>
+            <a:off x="3210560" y="1776222"/>
+            <a:ext cx="135128" cy="184404"/>
+          </a:xfrm>
+          <a:prstGeom prst="rect">
+            <a:avLst/>
+          </a:prstGeom>
+          <a:solidFill>
+            <a:srgbClr val="12A566"/>
+          </a:solidFill>
+          <a:ln w="9525">
+            <a:solidFill>
+              <a:srgbClr val="FFFFFF"/>
+            </a:solidFill>
+            <a:prstDash val="solid"/>
+          </a:ln>
+        </p:spPr>
+      </p:sp>
+      <p:sp>
+        <p:nvSpPr>
+          <p:cNvPr id="29" name="Shape 27"/>
+          <p:cNvSpPr/>
+          <p:nvPr/>
+        </p:nvSpPr>
+        <p:spPr>
+          <a:xfrm>
+            <a:off x="3345688" y="1776222"/>
+            <a:ext cx="540512" cy="184404"/>
+          </a:xfrm>
+          <a:prstGeom prst="rect">
+            <a:avLst/>
+          </a:prstGeom>
+          <a:solidFill>
+            <a:srgbClr val="8ED3B0"/>
+          </a:solidFill>
+          <a:ln w="9525">
+            <a:solidFill>
+              <a:srgbClr val="FFFFFF"/>
+            </a:solidFill>
+            <a:prstDash val="solid"/>
+          </a:ln>
+        </p:spPr>
+      </p:sp>
+      <p:sp>
+        <p:nvSpPr>
+          <p:cNvPr id="30" name="Text 28"/>
+          <p:cNvSpPr txBox="1"/>
+          <p:nvPr/>
+        </p:nvSpPr>
+        <p:spPr>
+          <a:xfrm>
+            <a:off x="3959352" y="1700784"/>
+            <a:ext cx="502920" cy="335280"/>
+          </a:xfrm>
+          <a:prstGeom prst="rect">
+            <a:avLst/>
+          </a:prstGeom>
+          <a:noFill/>
+          <a:ln/>
+        </p:spPr>
+        <p:txBody>
+          <a:bodyPr wrap="square" lIns="0" tIns="0" rIns="0" bIns="0" rtlCol="0" anchor="ctr"/>
+          <a:lstStyle/>
+          <a:p>
+            <a:pPr algn="r" indent="0" marL="0">
+              <a:buNone/>
+            </a:pPr>
+            <a:r>
+              <a:rPr lang="en-US" sz="1300" dirty="0">
+                <a:solidFill>
+                  <a:srgbClr val="1A1A1A"/>
+                </a:solidFill>
+                <a:latin typeface="Inter" pitchFamily="34" charset="0"/>
+                <a:ea typeface="Inter" pitchFamily="34" charset="-122"/>
+                <a:cs typeface="Inter" pitchFamily="34" charset="-120"/>
+              </a:rPr>
+              <a:t>4</a:t>
+            </a:r>
+            <a:endParaRPr lang="en-US" sz="1300" dirty="0"/>
+          </a:p>
+        </p:txBody>
+      </p:sp>
+      <p:sp>
+        <p:nvSpPr>
+          <p:cNvPr id="31" name="Text 29"/>
+          <p:cNvSpPr txBox="1"/>
+          <p:nvPr/>
+        </p:nvSpPr>
+        <p:spPr>
+          <a:xfrm>
+            <a:off x="4462272" y="1700784"/>
+            <a:ext cx="502920" cy="335280"/>
+          </a:xfrm>
+          <a:prstGeom prst="rect">
+            <a:avLst/>
+          </a:prstGeom>
+          <a:noFill/>
+          <a:ln/>
+        </p:spPr>
+        <p:txBody>
+          <a:bodyPr wrap="square" lIns="0" tIns="0" rIns="0" bIns="0" rtlCol="0" anchor="ctr"/>
+          <a:lstStyle/>
+          <a:p>
+            <a:pPr algn="r" indent="0" marL="0">
+              <a:buNone/>
+            </a:pPr>
+            <a:r>
+              <a:rPr lang="en-US" sz="1300" dirty="0">
+                <a:solidFill>
+                  <a:srgbClr val="1A1A1A"/>
+                </a:solidFill>
+                <a:latin typeface="Inter" pitchFamily="34" charset="0"/>
+                <a:ea typeface="Inter" pitchFamily="34" charset="-122"/>
+                <a:cs typeface="Inter" pitchFamily="34" charset="-120"/>
+              </a:rPr>
+              <a:t>1</a:t>
+            </a:r>
+            <a:endParaRPr lang="en-US" sz="1300" dirty="0"/>
+          </a:p>
+        </p:txBody>
+      </p:sp>
+      <p:sp>
+        <p:nvSpPr>
+          <p:cNvPr id="32" name="Text 30"/>
+          <p:cNvSpPr txBox="1"/>
+          <p:nvPr/>
+        </p:nvSpPr>
+        <p:spPr>
+          <a:xfrm>
+            <a:off x="4965192" y="1700784"/>
+            <a:ext cx="502920" cy="335280"/>
+          </a:xfrm>
+          <a:prstGeom prst="rect">
+            <a:avLst/>
+          </a:prstGeom>
+          <a:noFill/>
+          <a:ln/>
+        </p:spPr>
+        <p:txBody>
+          <a:bodyPr wrap="square" lIns="0" tIns="0" rIns="0" bIns="0" rtlCol="0" anchor="ctr"/>
+          <a:lstStyle/>
+          <a:p>
+            <a:pPr algn="r" indent="0" marL="0">
+              <a:buNone/>
+            </a:pPr>
+            <a:r>
+              <a:rPr lang="en-US" sz="1300" dirty="0">
+                <a:solidFill>
+                  <a:srgbClr val="1A1A1A"/>
+                </a:solidFill>
+                <a:latin typeface="Inter" pitchFamily="34" charset="0"/>
+                <a:ea typeface="Inter" pitchFamily="34" charset="-122"/>
+                <a:cs typeface="Inter" pitchFamily="34" charset="-120"/>
+              </a:rPr>
+              <a:t>4</a:t>
+            </a:r>
+            <a:endParaRPr lang="en-US" sz="1300" dirty="0"/>
+          </a:p>
+        </p:txBody>
+      </p:sp>
+      <p:sp>
+        <p:nvSpPr>
+          <p:cNvPr id="33" name="Text 31"/>
+          <p:cNvSpPr txBox="1"/>
+          <p:nvPr/>
+        </p:nvSpPr>
+        <p:spPr>
+          <a:xfrm>
+            <a:off x="5468112" y="1700784"/>
+            <a:ext cx="548640" cy="335280"/>
+          </a:xfrm>
+          <a:prstGeom prst="rect">
+            <a:avLst/>
+          </a:prstGeom>
+          <a:noFill/>
+          <a:ln/>
+        </p:spPr>
+        <p:txBody>
+          <a:bodyPr wrap="square" lIns="0" tIns="0" rIns="0" bIns="0" rtlCol="0" anchor="ctr"/>
+          <a:lstStyle/>
+          <a:p>
+            <a:pPr algn="r" indent="0" marL="0">
+              <a:buNone/>
+            </a:pPr>
+            <a:r>
+              <a:rPr lang="en-US" sz="1300" b="1" dirty="0">
+                <a:solidFill>
+                  <a:srgbClr val="1A1A1A"/>
+                </a:solidFill>
+                <a:latin typeface="Inter" pitchFamily="34" charset="0"/>
+                <a:ea typeface="Inter" pitchFamily="34" charset="-122"/>
+                <a:cs typeface="Inter" pitchFamily="34" charset="-120"/>
+              </a:rPr>
+              <a:t>9</a:t>
+            </a:r>
+            <a:endParaRPr lang="en-US" sz="1300" dirty="0"/>
+          </a:p>
+        </p:txBody>
+      </p:sp>
+      <p:sp>
+        <p:nvSpPr>
+          <p:cNvPr id="34" name="Text 32"/>
+          <p:cNvSpPr txBox="1"/>
+          <p:nvPr/>
+        </p:nvSpPr>
+        <p:spPr>
+          <a:xfrm>
+            <a:off x="658368" y="2036064"/>
+            <a:ext cx="1938528" cy="335280"/>
+          </a:xfrm>
+          <a:prstGeom prst="rect">
+            <a:avLst/>
+          </a:prstGeom>
+          <a:noFill/>
+          <a:ln/>
+        </p:spPr>
+        <p:txBody>
+          <a:bodyPr wrap="square" lIns="0" tIns="0" rIns="0" bIns="0" rtlCol="0" anchor="ctr"/>
+          <a:lstStyle/>
+          <a:p>
+            <a:pPr indent="0" marL="0">
+              <a:buNone/>
+            </a:pPr>
+            <a:r>
+              <a:rPr lang="en-US" sz="1300" dirty="0">
+                <a:solidFill>
+                  <a:srgbClr val="1A1A1A"/>
+                </a:solidFill>
+                <a:latin typeface="Inter" pitchFamily="34" charset="0"/>
+                <a:ea typeface="Inter" pitchFamily="34" charset="-122"/>
+                <a:cs typeface="Inter" pitchFamily="34" charset="-120"/>
+              </a:rPr>
+              <a:t>NISSAN</a:t>
+            </a:r>
+            <a:endParaRPr lang="en-US" sz="1300" dirty="0"/>
+          </a:p>
+        </p:txBody>
+      </p:sp>
+      <p:sp>
+        <p:nvSpPr>
+          <p:cNvPr id="35" name="Shape 33"/>
+          <p:cNvSpPr/>
+          <p:nvPr/>
+        </p:nvSpPr>
+        <p:spPr>
+          <a:xfrm>
+            <a:off x="2670048" y="2111502"/>
+            <a:ext cx="405384" cy="184404"/>
+          </a:xfrm>
+          <a:prstGeom prst="rect">
+            <a:avLst/>
+          </a:prstGeom>
+          <a:solidFill>
+            <a:srgbClr val="0B7A4A"/>
+          </a:solidFill>
+          <a:ln w="9525">
+            <a:solidFill>
+              <a:srgbClr val="FFFFFF"/>
+            </a:solidFill>
+            <a:prstDash val="solid"/>
+          </a:ln>
+        </p:spPr>
+      </p:sp>
+      <p:sp>
+        <p:nvSpPr>
+          <p:cNvPr id="36" name="Shape 34"/>
+          <p:cNvSpPr/>
+          <p:nvPr/>
+        </p:nvSpPr>
+        <p:spPr>
+          <a:xfrm>
+            <a:off x="3075432" y="2111502"/>
+            <a:ext cx="270256" cy="184404"/>
+          </a:xfrm>
+          <a:prstGeom prst="rect">
+            <a:avLst/>
+          </a:prstGeom>
+          <a:solidFill>
+            <a:srgbClr val="12A566"/>
+          </a:solidFill>
+          <a:ln w="9525">
+            <a:solidFill>
+              <a:srgbClr val="FFFFFF"/>
+            </a:solidFill>
+            <a:prstDash val="solid"/>
+          </a:ln>
+        </p:spPr>
+      </p:sp>
+      <p:sp>
+        <p:nvSpPr>
+          <p:cNvPr id="37" name="Shape 35"/>
+          <p:cNvSpPr/>
+          <p:nvPr/>
+        </p:nvSpPr>
+        <p:spPr>
+          <a:xfrm>
+            <a:off x="3345688" y="2111502"/>
+            <a:ext cx="540512" cy="184404"/>
+          </a:xfrm>
+          <a:prstGeom prst="rect">
+            <a:avLst/>
+          </a:prstGeom>
+          <a:solidFill>
+            <a:srgbClr val="8ED3B0"/>
+          </a:solidFill>
+          <a:ln w="9525">
+            <a:solidFill>
+              <a:srgbClr val="FFFFFF"/>
+            </a:solidFill>
+            <a:prstDash val="solid"/>
+          </a:ln>
+        </p:spPr>
+      </p:sp>
+      <p:sp>
+        <p:nvSpPr>
+          <p:cNvPr id="38" name="Text 36"/>
+          <p:cNvSpPr txBox="1"/>
+          <p:nvPr/>
+        </p:nvSpPr>
+        <p:spPr>
+          <a:xfrm>
+            <a:off x="3959352" y="2036064"/>
+            <a:ext cx="502920" cy="335280"/>
+          </a:xfrm>
+          <a:prstGeom prst="rect">
+            <a:avLst/>
+          </a:prstGeom>
+          <a:noFill/>
+          <a:ln/>
+        </p:spPr>
+        <p:txBody>
+          <a:bodyPr wrap="square" lIns="0" tIns="0" rIns="0" bIns="0" rtlCol="0" anchor="ctr"/>
+          <a:lstStyle/>
+          <a:p>
+            <a:pPr algn="r" indent="0" marL="0">
+              <a:buNone/>
+            </a:pPr>
+            <a:r>
+              <a:rPr lang="en-US" sz="1300" dirty="0">
+                <a:solidFill>
+                  <a:srgbClr val="1A1A1A"/>
+                </a:solidFill>
+                <a:latin typeface="Inter" pitchFamily="34" charset="0"/>
+                <a:ea typeface="Inter" pitchFamily="34" charset="-122"/>
+                <a:cs typeface="Inter" pitchFamily="34" charset="-120"/>
+              </a:rPr>
+              <a:t>3</a:t>
+            </a:r>
+            <a:endParaRPr lang="en-US" sz="1300" dirty="0"/>
+          </a:p>
+        </p:txBody>
+      </p:sp>
+      <p:sp>
+        <p:nvSpPr>
+          <p:cNvPr id="39" name="Text 37"/>
+          <p:cNvSpPr txBox="1"/>
+          <p:nvPr/>
+        </p:nvSpPr>
+        <p:spPr>
+          <a:xfrm>
+            <a:off x="4462272" y="2036064"/>
+            <a:ext cx="502920" cy="335280"/>
+          </a:xfrm>
+          <a:prstGeom prst="rect">
+            <a:avLst/>
+          </a:prstGeom>
+          <a:noFill/>
+          <a:ln/>
+        </p:spPr>
+        <p:txBody>
+          <a:bodyPr wrap="square" lIns="0" tIns="0" rIns="0" bIns="0" rtlCol="0" anchor="ctr"/>
+          <a:lstStyle/>
+          <a:p>
+            <a:pPr algn="r" indent="0" marL="0">
+              <a:buNone/>
+            </a:pPr>
+            <a:r>
+              <a:rPr lang="en-US" sz="1300" dirty="0">
+                <a:solidFill>
+                  <a:srgbClr val="1A1A1A"/>
+                </a:solidFill>
+                <a:latin typeface="Inter" pitchFamily="34" charset="0"/>
+                <a:ea typeface="Inter" pitchFamily="34" charset="-122"/>
+                <a:cs typeface="Inter" pitchFamily="34" charset="-120"/>
+              </a:rPr>
+              <a:t>2</a:t>
+            </a:r>
+            <a:endParaRPr lang="en-US" sz="1300" dirty="0"/>
+          </a:p>
+        </p:txBody>
+      </p:sp>
+      <p:sp>
+        <p:nvSpPr>
+          <p:cNvPr id="40" name="Text 38"/>
+          <p:cNvSpPr txBox="1"/>
+          <p:nvPr/>
+        </p:nvSpPr>
+        <p:spPr>
+          <a:xfrm>
+            <a:off x="4965192" y="2036064"/>
+            <a:ext cx="502920" cy="335280"/>
+          </a:xfrm>
+          <a:prstGeom prst="rect">
+            <a:avLst/>
+          </a:prstGeom>
+          <a:noFill/>
+          <a:ln/>
+        </p:spPr>
+        <p:txBody>
+          <a:bodyPr wrap="square" lIns="0" tIns="0" rIns="0" bIns="0" rtlCol="0" anchor="ctr"/>
+          <a:lstStyle/>
+          <a:p>
+            <a:pPr algn="r" indent="0" marL="0">
+              <a:buNone/>
+            </a:pPr>
+            <a:r>
+              <a:rPr lang="en-US" sz="1300" dirty="0">
+                <a:solidFill>
+                  <a:srgbClr val="1A1A1A"/>
+                </a:solidFill>
+                <a:latin typeface="Inter" pitchFamily="34" charset="0"/>
+                <a:ea typeface="Inter" pitchFamily="34" charset="-122"/>
+                <a:cs typeface="Inter" pitchFamily="34" charset="-120"/>
+              </a:rPr>
+              <a:t>4</a:t>
+            </a:r>
+            <a:endParaRPr lang="en-US" sz="1300" dirty="0"/>
+          </a:p>
+        </p:txBody>
+      </p:sp>
+      <p:sp>
+        <p:nvSpPr>
+          <p:cNvPr id="41" name="Text 39"/>
+          <p:cNvSpPr txBox="1"/>
+          <p:nvPr/>
+        </p:nvSpPr>
+        <p:spPr>
+          <a:xfrm>
+            <a:off x="5468112" y="2036064"/>
+            <a:ext cx="548640" cy="335280"/>
+          </a:xfrm>
+          <a:prstGeom prst="rect">
+            <a:avLst/>
+          </a:prstGeom>
+          <a:noFill/>
+          <a:ln/>
+        </p:spPr>
+        <p:txBody>
+          <a:bodyPr wrap="square" lIns="0" tIns="0" rIns="0" bIns="0" rtlCol="0" anchor="ctr"/>
+          <a:lstStyle/>
+          <a:p>
+            <a:pPr algn="r" indent="0" marL="0">
+              <a:buNone/>
+            </a:pPr>
+            <a:r>
+              <a:rPr lang="en-US" sz="1300" b="1" dirty="0">
+                <a:solidFill>
+                  <a:srgbClr val="1A1A1A"/>
+                </a:solidFill>
+                <a:latin typeface="Inter" pitchFamily="34" charset="0"/>
+                <a:ea typeface="Inter" pitchFamily="34" charset="-122"/>
+                <a:cs typeface="Inter" pitchFamily="34" charset="-120"/>
+              </a:rPr>
+              <a:t>9</a:t>
+            </a:r>
+            <a:endParaRPr lang="en-US" sz="1300" dirty="0"/>
+          </a:p>
+        </p:txBody>
+      </p:sp>
+      <p:sp>
+        <p:nvSpPr>
+          <p:cNvPr id="42" name="Text 40"/>
+          <p:cNvSpPr txBox="1"/>
+          <p:nvPr/>
+        </p:nvSpPr>
+        <p:spPr>
+          <a:xfrm>
+            <a:off x="658368" y="2371344"/>
+            <a:ext cx="1938528" cy="335280"/>
+          </a:xfrm>
+          <a:prstGeom prst="rect">
+            <a:avLst/>
+          </a:prstGeom>
+          <a:noFill/>
+          <a:ln/>
+        </p:spPr>
+        <p:txBody>
+          <a:bodyPr wrap="square" lIns="0" tIns="0" rIns="0" bIns="0" rtlCol="0" anchor="ctr"/>
+          <a:lstStyle/>
+          <a:p>
+            <a:pPr indent="0" marL="0">
+              <a:buNone/>
+            </a:pPr>
+            <a:r>
+              <a:rPr lang="en-US" sz="1300" dirty="0">
+                <a:solidFill>
+                  <a:srgbClr val="1A1A1A"/>
+                </a:solidFill>
+                <a:latin typeface="Inter" pitchFamily="34" charset="0"/>
+                <a:ea typeface="Inter" pitchFamily="34" charset="-122"/>
+                <a:cs typeface="Inter" pitchFamily="34" charset="-120"/>
+              </a:rPr>
+              <a:t>TOYOTA HENDERSON</a:t>
+            </a:r>
+            <a:endParaRPr lang="en-US" sz="1300" dirty="0"/>
+          </a:p>
+        </p:txBody>
+      </p:sp>
+      <p:sp>
+        <p:nvSpPr>
+          <p:cNvPr id="43" name="Shape 41"/>
+          <p:cNvSpPr/>
+          <p:nvPr/>
+        </p:nvSpPr>
+        <p:spPr>
+          <a:xfrm>
+            <a:off x="2670048" y="2446782"/>
+            <a:ext cx="270256" cy="184404"/>
+          </a:xfrm>
+          <a:prstGeom prst="rect">
+            <a:avLst/>
+          </a:prstGeom>
+          <a:solidFill>
+            <a:srgbClr val="0B7A4A"/>
+          </a:solidFill>
+          <a:ln w="9525">
+            <a:solidFill>
+              <a:srgbClr val="FFFFFF"/>
+            </a:solidFill>
+            <a:prstDash val="solid"/>
+          </a:ln>
+        </p:spPr>
+      </p:sp>
+      <p:sp>
+        <p:nvSpPr>
+          <p:cNvPr id="44" name="Shape 42"/>
+          <p:cNvSpPr/>
+          <p:nvPr/>
+        </p:nvSpPr>
+        <p:spPr>
+          <a:xfrm>
+            <a:off x="2940304" y="2446782"/>
+            <a:ext cx="405384" cy="184404"/>
+          </a:xfrm>
+          <a:prstGeom prst="rect">
+            <a:avLst/>
+          </a:prstGeom>
+          <a:solidFill>
+            <a:srgbClr val="12A566"/>
+          </a:solidFill>
+          <a:ln w="9525">
+            <a:solidFill>
+              <a:srgbClr val="FFFFFF"/>
+            </a:solidFill>
+            <a:prstDash val="solid"/>
+          </a:ln>
+        </p:spPr>
+      </p:sp>
+      <p:sp>
+        <p:nvSpPr>
+          <p:cNvPr id="45" name="Shape 43"/>
+          <p:cNvSpPr/>
+          <p:nvPr/>
+        </p:nvSpPr>
+        <p:spPr>
+          <a:xfrm>
+            <a:off x="3345688" y="2446782"/>
+            <a:ext cx="405384" cy="184404"/>
+          </a:xfrm>
+          <a:prstGeom prst="rect">
+            <a:avLst/>
+          </a:prstGeom>
+          <a:solidFill>
+            <a:srgbClr val="8ED3B0"/>
+          </a:solidFill>
+          <a:ln w="9525">
+            <a:solidFill>
+              <a:srgbClr val="FFFFFF"/>
+            </a:solidFill>
+            <a:prstDash val="solid"/>
+          </a:ln>
+        </p:spPr>
+      </p:sp>
+      <p:sp>
+        <p:nvSpPr>
+          <p:cNvPr id="46" name="Text 44"/>
+          <p:cNvSpPr txBox="1"/>
+          <p:nvPr/>
+        </p:nvSpPr>
+        <p:spPr>
+          <a:xfrm>
+            <a:off x="3959352" y="2371344"/>
+            <a:ext cx="502920" cy="335280"/>
+          </a:xfrm>
+          <a:prstGeom prst="rect">
+            <a:avLst/>
+          </a:prstGeom>
+          <a:noFill/>
+          <a:ln/>
+        </p:spPr>
+        <p:txBody>
+          <a:bodyPr wrap="square" lIns="0" tIns="0" rIns="0" bIns="0" rtlCol="0" anchor="ctr"/>
+          <a:lstStyle/>
+          <a:p>
+            <a:pPr algn="r" indent="0" marL="0">
+              <a:buNone/>
+            </a:pPr>
+            <a:r>
+              <a:rPr lang="en-US" sz="1300" dirty="0">
+                <a:solidFill>
+                  <a:srgbClr val="1A1A1A"/>
+                </a:solidFill>
+                <a:latin typeface="Inter" pitchFamily="34" charset="0"/>
+                <a:ea typeface="Inter" pitchFamily="34" charset="-122"/>
+                <a:cs typeface="Inter" pitchFamily="34" charset="-120"/>
+              </a:rPr>
+              <a:t>2</a:t>
+            </a:r>
+            <a:endParaRPr lang="en-US" sz="1300" dirty="0"/>
+          </a:p>
+        </p:txBody>
+      </p:sp>
+      <p:sp>
+        <p:nvSpPr>
+          <p:cNvPr id="47" name="Text 45"/>
+          <p:cNvSpPr txBox="1"/>
+          <p:nvPr/>
+        </p:nvSpPr>
+        <p:spPr>
+          <a:xfrm>
+            <a:off x="4462272" y="2371344"/>
+            <a:ext cx="502920" cy="335280"/>
+          </a:xfrm>
+          <a:prstGeom prst="rect">
+            <a:avLst/>
+          </a:prstGeom>
+          <a:noFill/>
+          <a:ln/>
+        </p:spPr>
+        <p:txBody>
+          <a:bodyPr wrap="square" lIns="0" tIns="0" rIns="0" bIns="0" rtlCol="0" anchor="ctr"/>
+          <a:lstStyle/>
+          <a:p>
+            <a:pPr algn="r" indent="0" marL="0">
+              <a:buNone/>
+            </a:pPr>
+            <a:r>
+              <a:rPr lang="en-US" sz="1300" dirty="0">
+                <a:solidFill>
+                  <a:srgbClr val="1A1A1A"/>
+                </a:solidFill>
+                <a:latin typeface="Inter" pitchFamily="34" charset="0"/>
+                <a:ea typeface="Inter" pitchFamily="34" charset="-122"/>
+                <a:cs typeface="Inter" pitchFamily="34" charset="-120"/>
+              </a:rPr>
+              <a:t>3</a:t>
+            </a:r>
+            <a:endParaRPr lang="en-US" sz="1300" dirty="0"/>
+          </a:p>
+        </p:txBody>
+      </p:sp>
+      <p:sp>
+        <p:nvSpPr>
+          <p:cNvPr id="48" name="Text 46"/>
+          <p:cNvSpPr txBox="1"/>
+          <p:nvPr/>
+        </p:nvSpPr>
+        <p:spPr>
+          <a:xfrm>
+            <a:off x="4965192" y="2371344"/>
+            <a:ext cx="502920" cy="335280"/>
+          </a:xfrm>
+          <a:prstGeom prst="rect">
+            <a:avLst/>
+          </a:prstGeom>
+          <a:noFill/>
+          <a:ln/>
+        </p:spPr>
+        <p:txBody>
+          <a:bodyPr wrap="square" lIns="0" tIns="0" rIns="0" bIns="0" rtlCol="0" anchor="ctr"/>
+          <a:lstStyle/>
+          <a:p>
+            <a:pPr algn="r" indent="0" marL="0">
+              <a:buNone/>
+            </a:pPr>
+            <a:r>
+              <a:rPr lang="en-US" sz="1300" dirty="0">
+                <a:solidFill>
+                  <a:srgbClr val="1A1A1A"/>
+                </a:solidFill>
+                <a:latin typeface="Inter" pitchFamily="34" charset="0"/>
+                <a:ea typeface="Inter" pitchFamily="34" charset="-122"/>
+                <a:cs typeface="Inter" pitchFamily="34" charset="-120"/>
+              </a:rPr>
+              <a:t>3</a:t>
+            </a:r>
+            <a:endParaRPr lang="en-US" sz="1300" dirty="0"/>
+          </a:p>
+        </p:txBody>
+      </p:sp>
+      <p:sp>
+        <p:nvSpPr>
+          <p:cNvPr id="49" name="Text 47"/>
+          <p:cNvSpPr txBox="1"/>
+          <p:nvPr/>
+        </p:nvSpPr>
+        <p:spPr>
+          <a:xfrm>
+            <a:off x="5468112" y="2371344"/>
+            <a:ext cx="548640" cy="335280"/>
+          </a:xfrm>
+          <a:prstGeom prst="rect">
+            <a:avLst/>
+          </a:prstGeom>
+          <a:noFill/>
+          <a:ln/>
+        </p:spPr>
+        <p:txBody>
+          <a:bodyPr wrap="square" lIns="0" tIns="0" rIns="0" bIns="0" rtlCol="0" anchor="ctr"/>
+          <a:lstStyle/>
+          <a:p>
+            <a:pPr algn="r" indent="0" marL="0">
+              <a:buNone/>
+            </a:pPr>
+            <a:r>
+              <a:rPr lang="en-US" sz="1300" b="1" dirty="0">
+                <a:solidFill>
+                  <a:srgbClr val="1A1A1A"/>
+                </a:solidFill>
+                <a:latin typeface="Inter" pitchFamily="34" charset="0"/>
+                <a:ea typeface="Inter" pitchFamily="34" charset="-122"/>
+                <a:cs typeface="Inter" pitchFamily="34" charset="-120"/>
+              </a:rPr>
+              <a:t>8</a:t>
+            </a:r>
+            <a:endParaRPr lang="en-US" sz="1300" dirty="0"/>
+          </a:p>
+        </p:txBody>
+      </p:sp>
+      <p:sp>
+        <p:nvSpPr>
+          <p:cNvPr id="50" name="Text 48"/>
+          <p:cNvSpPr txBox="1"/>
+          <p:nvPr/>
+        </p:nvSpPr>
+        <p:spPr>
+          <a:xfrm>
+            <a:off x="658368" y="2706624"/>
+            <a:ext cx="1938528" cy="335280"/>
+          </a:xfrm>
+          <a:prstGeom prst="rect">
+            <a:avLst/>
+          </a:prstGeom>
+          <a:noFill/>
+          <a:ln/>
+        </p:spPr>
+        <p:txBody>
+          <a:bodyPr wrap="square" lIns="0" tIns="0" rIns="0" bIns="0" rtlCol="0" anchor="ctr"/>
+          <a:lstStyle/>
+          <a:p>
+            <a:pPr indent="0" marL="0">
+              <a:buNone/>
+            </a:pPr>
+            <a:r>
+              <a:rPr lang="en-US" sz="1300" dirty="0">
+                <a:solidFill>
+                  <a:srgbClr val="1A1A1A"/>
+                </a:solidFill>
+                <a:latin typeface="Inter" pitchFamily="34" charset="0"/>
+                <a:ea typeface="Inter" pitchFamily="34" charset="-122"/>
+                <a:cs typeface="Inter" pitchFamily="34" charset="-120"/>
+              </a:rPr>
+              <a:t>HONDA HENDERSON</a:t>
+            </a:r>
+            <a:endParaRPr lang="en-US" sz="1300" dirty="0"/>
+          </a:p>
+        </p:txBody>
+      </p:sp>
+      <p:sp>
+        <p:nvSpPr>
+          <p:cNvPr id="51" name="Shape 49"/>
+          <p:cNvSpPr/>
+          <p:nvPr/>
+        </p:nvSpPr>
+        <p:spPr>
+          <a:xfrm>
+            <a:off x="2670048" y="2782062"/>
+            <a:ext cx="405384" cy="184404"/>
+          </a:xfrm>
+          <a:prstGeom prst="rect">
+            <a:avLst/>
+          </a:prstGeom>
+          <a:solidFill>
+            <a:srgbClr val="0B7A4A"/>
+          </a:solidFill>
+          <a:ln w="9525">
+            <a:solidFill>
+              <a:srgbClr val="FFFFFF"/>
+            </a:solidFill>
+            <a:prstDash val="solid"/>
+          </a:ln>
+        </p:spPr>
+      </p:sp>
+      <p:sp>
+        <p:nvSpPr>
+          <p:cNvPr id="52" name="Shape 50"/>
+          <p:cNvSpPr/>
+          <p:nvPr/>
+        </p:nvSpPr>
+        <p:spPr>
+          <a:xfrm>
+            <a:off x="3075432" y="2782062"/>
+            <a:ext cx="135128" cy="184404"/>
+          </a:xfrm>
+          <a:prstGeom prst="rect">
+            <a:avLst/>
+          </a:prstGeom>
+          <a:solidFill>
+            <a:srgbClr val="12A566"/>
+          </a:solidFill>
+          <a:ln w="9525">
+            <a:solidFill>
+              <a:srgbClr val="FFFFFF"/>
+            </a:solidFill>
+            <a:prstDash val="solid"/>
+          </a:ln>
+        </p:spPr>
+      </p:sp>
+      <p:sp>
+        <p:nvSpPr>
+          <p:cNvPr id="53" name="Shape 51"/>
+          <p:cNvSpPr/>
+          <p:nvPr/>
+        </p:nvSpPr>
+        <p:spPr>
+          <a:xfrm>
+            <a:off x="3210560" y="2782062"/>
+            <a:ext cx="405384" cy="184404"/>
+          </a:xfrm>
+          <a:prstGeom prst="rect">
+            <a:avLst/>
+          </a:prstGeom>
+          <a:solidFill>
+            <a:srgbClr val="8ED3B0"/>
+          </a:solidFill>
+          <a:ln w="9525">
+            <a:solidFill>
+              <a:srgbClr val="FFFFFF"/>
+            </a:solidFill>
+            <a:prstDash val="solid"/>
+          </a:ln>
+        </p:spPr>
+      </p:sp>
+      <p:sp>
+        <p:nvSpPr>
+          <p:cNvPr id="54" name="Text 52"/>
+          <p:cNvSpPr txBox="1"/>
+          <p:nvPr/>
+        </p:nvSpPr>
+        <p:spPr>
+          <a:xfrm>
+            <a:off x="3959352" y="2706624"/>
+            <a:ext cx="502920" cy="335280"/>
+          </a:xfrm>
+          <a:prstGeom prst="rect">
+            <a:avLst/>
+          </a:prstGeom>
+          <a:noFill/>
+          <a:ln/>
+        </p:spPr>
+        <p:txBody>
+          <a:bodyPr wrap="square" lIns="0" tIns="0" rIns="0" bIns="0" rtlCol="0" anchor="ctr"/>
+          <a:lstStyle/>
+          <a:p>
+            <a:pPr algn="r" indent="0" marL="0">
+              <a:buNone/>
+            </a:pPr>
+            <a:r>
+              <a:rPr lang="en-US" sz="1300" dirty="0">
+                <a:solidFill>
+                  <a:srgbClr val="1A1A1A"/>
+                </a:solidFill>
+                <a:latin typeface="Inter" pitchFamily="34" charset="0"/>
+                <a:ea typeface="Inter" pitchFamily="34" charset="-122"/>
+                <a:cs typeface="Inter" pitchFamily="34" charset="-120"/>
+              </a:rPr>
+              <a:t>3</a:t>
+            </a:r>
+            <a:endParaRPr lang="en-US" sz="1300" dirty="0"/>
+          </a:p>
+        </p:txBody>
+      </p:sp>
+      <p:sp>
+        <p:nvSpPr>
+          <p:cNvPr id="55" name="Text 53"/>
+          <p:cNvSpPr txBox="1"/>
+          <p:nvPr/>
+        </p:nvSpPr>
+        <p:spPr>
+          <a:xfrm>
+            <a:off x="4462272" y="2706624"/>
+            <a:ext cx="502920" cy="335280"/>
+          </a:xfrm>
+          <a:prstGeom prst="rect">
+            <a:avLst/>
+          </a:prstGeom>
+          <a:noFill/>
+          <a:ln/>
+        </p:spPr>
+        <p:txBody>
+          <a:bodyPr wrap="square" lIns="0" tIns="0" rIns="0" bIns="0" rtlCol="0" anchor="ctr"/>
+          <a:lstStyle/>
+          <a:p>
+            <a:pPr algn="r" indent="0" marL="0">
+              <a:buNone/>
+            </a:pPr>
+            <a:r>
+              <a:rPr lang="en-US" sz="1300" dirty="0">
+                <a:solidFill>
+                  <a:srgbClr val="1A1A1A"/>
+                </a:solidFill>
+                <a:latin typeface="Inter" pitchFamily="34" charset="0"/>
+                <a:ea typeface="Inter" pitchFamily="34" charset="-122"/>
+                <a:cs typeface="Inter" pitchFamily="34" charset="-120"/>
+              </a:rPr>
+              <a:t>1</a:t>
+            </a:r>
+            <a:endParaRPr lang="en-US" sz="1300" dirty="0"/>
+          </a:p>
+        </p:txBody>
+      </p:sp>
+      <p:sp>
+        <p:nvSpPr>
+          <p:cNvPr id="56" name="Text 54"/>
+          <p:cNvSpPr txBox="1"/>
+          <p:nvPr/>
+        </p:nvSpPr>
+        <p:spPr>
+          <a:xfrm>
+            <a:off x="4965192" y="2706624"/>
+            <a:ext cx="502920" cy="335280"/>
+          </a:xfrm>
+          <a:prstGeom prst="rect">
+            <a:avLst/>
+          </a:prstGeom>
+          <a:noFill/>
+          <a:ln/>
+        </p:spPr>
+        <p:txBody>
+          <a:bodyPr wrap="square" lIns="0" tIns="0" rIns="0" bIns="0" rtlCol="0" anchor="ctr"/>
+          <a:lstStyle/>
+          <a:p>
+            <a:pPr algn="r" indent="0" marL="0">
+              <a:buNone/>
+            </a:pPr>
+            <a:r>
+              <a:rPr lang="en-US" sz="1300" dirty="0">
+                <a:solidFill>
+                  <a:srgbClr val="1A1A1A"/>
+                </a:solidFill>
+                <a:latin typeface="Inter" pitchFamily="34" charset="0"/>
+                <a:ea typeface="Inter" pitchFamily="34" charset="-122"/>
+                <a:cs typeface="Inter" pitchFamily="34" charset="-120"/>
+              </a:rPr>
+              <a:t>3</a:t>
+            </a:r>
+            <a:endParaRPr lang="en-US" sz="1300" dirty="0"/>
+          </a:p>
+        </p:txBody>
+      </p:sp>
+      <p:sp>
+        <p:nvSpPr>
+          <p:cNvPr id="57" name="Text 55"/>
+          <p:cNvSpPr txBox="1"/>
+          <p:nvPr/>
+        </p:nvSpPr>
+        <p:spPr>
+          <a:xfrm>
+            <a:off x="5468112" y="2706624"/>
+            <a:ext cx="548640" cy="335280"/>
+          </a:xfrm>
+          <a:prstGeom prst="rect">
+            <a:avLst/>
+          </a:prstGeom>
+          <a:noFill/>
+          <a:ln/>
+        </p:spPr>
+        <p:txBody>
+          <a:bodyPr wrap="square" lIns="0" tIns="0" rIns="0" bIns="0" rtlCol="0" anchor="ctr"/>
+          <a:lstStyle/>
+          <a:p>
+            <a:pPr algn="r" indent="0" marL="0">
+              <a:buNone/>
+            </a:pPr>
+            <a:r>
+              <a:rPr lang="en-US" sz="1300" b="1" dirty="0">
+                <a:solidFill>
+                  <a:srgbClr val="1A1A1A"/>
+                </a:solidFill>
+                <a:latin typeface="Inter" pitchFamily="34" charset="0"/>
+                <a:ea typeface="Inter" pitchFamily="34" charset="-122"/>
+                <a:cs typeface="Inter" pitchFamily="34" charset="-120"/>
+              </a:rPr>
+              <a:t>7</a:t>
+            </a:r>
+            <a:endParaRPr lang="en-US" sz="1300" dirty="0"/>
+          </a:p>
+        </p:txBody>
+      </p:sp>
+      <p:sp>
+        <p:nvSpPr>
+          <p:cNvPr id="58" name="Text 56"/>
+          <p:cNvSpPr txBox="1"/>
+          <p:nvPr/>
+        </p:nvSpPr>
+        <p:spPr>
+          <a:xfrm>
+            <a:off x="658368" y="3041904"/>
+            <a:ext cx="1938528" cy="335280"/>
+          </a:xfrm>
+          <a:prstGeom prst="rect">
+            <a:avLst/>
+          </a:prstGeom>
+          <a:noFill/>
+          <a:ln/>
+        </p:spPr>
+        <p:txBody>
+          <a:bodyPr wrap="square" lIns="0" tIns="0" rIns="0" bIns="0" rtlCol="0" anchor="ctr"/>
+          <a:lstStyle/>
+          <a:p>
+            <a:pPr indent="0" marL="0">
+              <a:buNone/>
+            </a:pPr>
+            <a:r>
+              <a:rPr lang="en-US" sz="1300" dirty="0">
+                <a:solidFill>
+                  <a:srgbClr val="1A1A1A"/>
+                </a:solidFill>
+                <a:latin typeface="Inter" pitchFamily="34" charset="0"/>
+                <a:ea typeface="Inter" pitchFamily="34" charset="-122"/>
+                <a:cs typeface="Inter" pitchFamily="34" charset="-120"/>
+              </a:rPr>
+              <a:t>SUBARU ST GEORGE</a:t>
+            </a:r>
+            <a:endParaRPr lang="en-US" sz="1300" dirty="0"/>
+          </a:p>
+        </p:txBody>
+      </p:sp>
+      <p:sp>
+        <p:nvSpPr>
+          <p:cNvPr id="59" name="Shape 57"/>
+          <p:cNvSpPr/>
+          <p:nvPr/>
+        </p:nvSpPr>
+        <p:spPr>
+          <a:xfrm>
+            <a:off x="2670048" y="3117342"/>
+            <a:ext cx="270256" cy="184404"/>
+          </a:xfrm>
+          <a:prstGeom prst="rect">
+            <a:avLst/>
+          </a:prstGeom>
+          <a:solidFill>
+            <a:srgbClr val="0B7A4A"/>
+          </a:solidFill>
+          <a:ln w="9525">
+            <a:solidFill>
+              <a:srgbClr val="FFFFFF"/>
+            </a:solidFill>
+            <a:prstDash val="solid"/>
+          </a:ln>
+        </p:spPr>
+      </p:sp>
+      <p:sp>
+        <p:nvSpPr>
+          <p:cNvPr id="60" name="Shape 58"/>
+          <p:cNvSpPr/>
+          <p:nvPr/>
+        </p:nvSpPr>
+        <p:spPr>
+          <a:xfrm>
+            <a:off x="2940304" y="3117342"/>
+            <a:ext cx="405384" cy="184404"/>
+          </a:xfrm>
+          <a:prstGeom prst="rect">
+            <a:avLst/>
+          </a:prstGeom>
+          <a:solidFill>
+            <a:srgbClr val="12A566"/>
+          </a:solidFill>
+          <a:ln w="9525">
+            <a:solidFill>
+              <a:srgbClr val="FFFFFF"/>
+            </a:solidFill>
+            <a:prstDash val="solid"/>
+          </a:ln>
+        </p:spPr>
+      </p:sp>
+      <p:sp>
+        <p:nvSpPr>
+          <p:cNvPr id="61" name="Shape 59"/>
+          <p:cNvSpPr/>
+          <p:nvPr/>
+        </p:nvSpPr>
+        <p:spPr>
+          <a:xfrm>
+            <a:off x="3345688" y="3117342"/>
+            <a:ext cx="270256" cy="184404"/>
+          </a:xfrm>
+          <a:prstGeom prst="rect">
+            <a:avLst/>
+          </a:prstGeom>
+          <a:solidFill>
+            <a:srgbClr val="8ED3B0"/>
+          </a:solidFill>
+          <a:ln w="9525">
+            <a:solidFill>
+              <a:srgbClr val="FFFFFF"/>
+            </a:solidFill>
+            <a:prstDash val="solid"/>
+          </a:ln>
+        </p:spPr>
+      </p:sp>
+      <p:sp>
+        <p:nvSpPr>
+          <p:cNvPr id="62" name="Text 60"/>
+          <p:cNvSpPr txBox="1"/>
+          <p:nvPr/>
+        </p:nvSpPr>
+        <p:spPr>
+          <a:xfrm>
+            <a:off x="3959352" y="3041904"/>
+            <a:ext cx="502920" cy="335280"/>
+          </a:xfrm>
+          <a:prstGeom prst="rect">
+            <a:avLst/>
+          </a:prstGeom>
+          <a:noFill/>
+          <a:ln/>
+        </p:spPr>
+        <p:txBody>
+          <a:bodyPr wrap="square" lIns="0" tIns="0" rIns="0" bIns="0" rtlCol="0" anchor="ctr"/>
+          <a:lstStyle/>
+          <a:p>
+            <a:pPr algn="r" indent="0" marL="0">
+              <a:buNone/>
+            </a:pPr>
+            <a:r>
+              <a:rPr lang="en-US" sz="1300" dirty="0">
+                <a:solidFill>
+                  <a:srgbClr val="1A1A1A"/>
+                </a:solidFill>
+                <a:latin typeface="Inter" pitchFamily="34" charset="0"/>
+                <a:ea typeface="Inter" pitchFamily="34" charset="-122"/>
+                <a:cs typeface="Inter" pitchFamily="34" charset="-120"/>
+              </a:rPr>
+              <a:t>2</a:t>
+            </a:r>
+            <a:endParaRPr lang="en-US" sz="1300" dirty="0"/>
+          </a:p>
+        </p:txBody>
+      </p:sp>
+      <p:sp>
+        <p:nvSpPr>
+          <p:cNvPr id="63" name="Text 61"/>
+          <p:cNvSpPr txBox="1"/>
+          <p:nvPr/>
+        </p:nvSpPr>
+        <p:spPr>
+          <a:xfrm>
+            <a:off x="4462272" y="3041904"/>
+            <a:ext cx="502920" cy="335280"/>
+          </a:xfrm>
+          <a:prstGeom prst="rect">
+            <a:avLst/>
+          </a:prstGeom>
+          <a:noFill/>
+          <a:ln/>
+        </p:spPr>
+        <p:txBody>
+          <a:bodyPr wrap="square" lIns="0" tIns="0" rIns="0" bIns="0" rtlCol="0" anchor="ctr"/>
+          <a:lstStyle/>
+          <a:p>
+            <a:pPr algn="r" indent="0" marL="0">
+              <a:buNone/>
+            </a:pPr>
+            <a:r>
+              <a:rPr lang="en-US" sz="1300" dirty="0">
+                <a:solidFill>
+                  <a:srgbClr val="1A1A1A"/>
+                </a:solidFill>
+                <a:latin typeface="Inter" pitchFamily="34" charset="0"/>
+                <a:ea typeface="Inter" pitchFamily="34" charset="-122"/>
+                <a:cs typeface="Inter" pitchFamily="34" charset="-120"/>
+              </a:rPr>
+              <a:t>3</a:t>
+            </a:r>
+            <a:endParaRPr lang="en-US" sz="1300" dirty="0"/>
+          </a:p>
+        </p:txBody>
+      </p:sp>
+      <p:sp>
+        <p:nvSpPr>
+          <p:cNvPr id="64" name="Text 62"/>
+          <p:cNvSpPr txBox="1"/>
+          <p:nvPr/>
+        </p:nvSpPr>
+        <p:spPr>
+          <a:xfrm>
+            <a:off x="4965192" y="3041904"/>
+            <a:ext cx="502920" cy="335280"/>
+          </a:xfrm>
+          <a:prstGeom prst="rect">
+            <a:avLst/>
+          </a:prstGeom>
+          <a:noFill/>
+          <a:ln/>
+        </p:spPr>
+        <p:txBody>
+          <a:bodyPr wrap="square" lIns="0" tIns="0" rIns="0" bIns="0" rtlCol="0" anchor="ctr"/>
+          <a:lstStyle/>
+          <a:p>
+            <a:pPr algn="r" indent="0" marL="0">
+              <a:buNone/>
+            </a:pPr>
+            <a:r>
+              <a:rPr lang="en-US" sz="1300" dirty="0">
+                <a:solidFill>
+                  <a:srgbClr val="1A1A1A"/>
+                </a:solidFill>
+                <a:latin typeface="Inter" pitchFamily="34" charset="0"/>
+                <a:ea typeface="Inter" pitchFamily="34" charset="-122"/>
+                <a:cs typeface="Inter" pitchFamily="34" charset="-120"/>
+              </a:rPr>
+              <a:t>2</a:t>
+            </a:r>
+            <a:endParaRPr lang="en-US" sz="1300" dirty="0"/>
+          </a:p>
+        </p:txBody>
+      </p:sp>
+      <p:sp>
+        <p:nvSpPr>
+          <p:cNvPr id="65" name="Text 63"/>
+          <p:cNvSpPr txBox="1"/>
+          <p:nvPr/>
+        </p:nvSpPr>
+        <p:spPr>
+          <a:xfrm>
+            <a:off x="5468112" y="3041904"/>
+            <a:ext cx="548640" cy="335280"/>
+          </a:xfrm>
+          <a:prstGeom prst="rect">
+            <a:avLst/>
+          </a:prstGeom>
+          <a:noFill/>
+          <a:ln/>
+        </p:spPr>
+        <p:txBody>
+          <a:bodyPr wrap="square" lIns="0" tIns="0" rIns="0" bIns="0" rtlCol="0" anchor="ctr"/>
+          <a:lstStyle/>
+          <a:p>
+            <a:pPr algn="r" indent="0" marL="0">
+              <a:buNone/>
+            </a:pPr>
+            <a:r>
+              <a:rPr lang="en-US" sz="1300" b="1" dirty="0">
+                <a:solidFill>
+                  <a:srgbClr val="1A1A1A"/>
+                </a:solidFill>
+                <a:latin typeface="Inter" pitchFamily="34" charset="0"/>
+                <a:ea typeface="Inter" pitchFamily="34" charset="-122"/>
+                <a:cs typeface="Inter" pitchFamily="34" charset="-120"/>
+              </a:rPr>
+              <a:t>7</a:t>
+            </a:r>
+            <a:endParaRPr lang="en-US" sz="1300" dirty="0"/>
+          </a:p>
+        </p:txBody>
+      </p:sp>
+      <p:sp>
+        <p:nvSpPr>
+          <p:cNvPr id="66" name="Text 64"/>
+          <p:cNvSpPr txBox="1"/>
+          <p:nvPr/>
+        </p:nvSpPr>
+        <p:spPr>
+          <a:xfrm>
+            <a:off x="658368" y="3377184"/>
+            <a:ext cx="1938528" cy="335280"/>
+          </a:xfrm>
+          <a:prstGeom prst="rect">
+            <a:avLst/>
+          </a:prstGeom>
+          <a:noFill/>
+          <a:ln/>
+        </p:spPr>
+        <p:txBody>
+          <a:bodyPr wrap="square" lIns="0" tIns="0" rIns="0" bIns="0" rtlCol="0" anchor="ctr"/>
+          <a:lstStyle/>
+          <a:p>
+            <a:pPr indent="0" marL="0">
+              <a:buNone/>
+            </a:pPr>
+            <a:r>
+              <a:rPr lang="en-US" sz="1300" dirty="0">
+                <a:solidFill>
+                  <a:srgbClr val="1A1A1A"/>
+                </a:solidFill>
+                <a:latin typeface="Inter" pitchFamily="34" charset="0"/>
+                <a:ea typeface="Inter" pitchFamily="34" charset="-122"/>
+                <a:cs typeface="Inter" pitchFamily="34" charset="-120"/>
+              </a:rPr>
+              <a:t>HYUNDAI PRESCOTT</a:t>
+            </a:r>
+            <a:endParaRPr lang="en-US" sz="1300" dirty="0"/>
+          </a:p>
+        </p:txBody>
+      </p:sp>
+      <p:sp>
+        <p:nvSpPr>
+          <p:cNvPr id="67" name="Shape 65"/>
+          <p:cNvSpPr/>
+          <p:nvPr/>
+        </p:nvSpPr>
+        <p:spPr>
+          <a:xfrm>
+            <a:off x="2670048" y="3452622"/>
+            <a:ext cx="270256" cy="184404"/>
+          </a:xfrm>
+          <a:prstGeom prst="rect">
+            <a:avLst/>
+          </a:prstGeom>
+          <a:solidFill>
+            <a:srgbClr val="0B7A4A"/>
+          </a:solidFill>
+          <a:ln w="9525">
+            <a:solidFill>
+              <a:srgbClr val="FFFFFF"/>
+            </a:solidFill>
+            <a:prstDash val="solid"/>
+          </a:ln>
+        </p:spPr>
+      </p:sp>
+      <p:sp>
+        <p:nvSpPr>
+          <p:cNvPr id="68" name="Shape 66"/>
+          <p:cNvSpPr/>
+          <p:nvPr/>
+        </p:nvSpPr>
+        <p:spPr>
+          <a:xfrm>
+            <a:off x="2940304" y="3452622"/>
+            <a:ext cx="135128" cy="184404"/>
+          </a:xfrm>
+          <a:prstGeom prst="rect">
+            <a:avLst/>
+          </a:prstGeom>
+          <a:solidFill>
+            <a:srgbClr val="12A566"/>
+          </a:solidFill>
+          <a:ln w="9525">
+            <a:solidFill>
+              <a:srgbClr val="FFFFFF"/>
+            </a:solidFill>
+            <a:prstDash val="solid"/>
+          </a:ln>
+        </p:spPr>
+      </p:sp>
+      <p:sp>
+        <p:nvSpPr>
+          <p:cNvPr id="69" name="Shape 67"/>
+          <p:cNvSpPr/>
+          <p:nvPr/>
+        </p:nvSpPr>
+        <p:spPr>
+          <a:xfrm>
+            <a:off x="3075432" y="3452622"/>
+            <a:ext cx="405384" cy="184404"/>
+          </a:xfrm>
+          <a:prstGeom prst="rect">
+            <a:avLst/>
+          </a:prstGeom>
+          <a:solidFill>
+            <a:srgbClr val="8ED3B0"/>
+          </a:solidFill>
+          <a:ln w="9525">
+            <a:solidFill>
+              <a:srgbClr val="FFFFFF"/>
+            </a:solidFill>
+            <a:prstDash val="solid"/>
+          </a:ln>
+        </p:spPr>
+      </p:sp>
+      <p:sp>
+        <p:nvSpPr>
+          <p:cNvPr id="70" name="Text 68"/>
+          <p:cNvSpPr txBox="1"/>
+          <p:nvPr/>
+        </p:nvSpPr>
+        <p:spPr>
+          <a:xfrm>
+            <a:off x="3959352" y="3377184"/>
+            <a:ext cx="502920" cy="335280"/>
+          </a:xfrm>
+          <a:prstGeom prst="rect">
+            <a:avLst/>
+          </a:prstGeom>
+          <a:noFill/>
+          <a:ln/>
+        </p:spPr>
+        <p:txBody>
+          <a:bodyPr wrap="square" lIns="0" tIns="0" rIns="0" bIns="0" rtlCol="0" anchor="ctr"/>
+          <a:lstStyle/>
+          <a:p>
+            <a:pPr algn="r" indent="0" marL="0">
+              <a:buNone/>
+            </a:pPr>
+            <a:r>
+              <a:rPr lang="en-US" sz="1300" dirty="0">
+                <a:solidFill>
+                  <a:srgbClr val="1A1A1A"/>
+                </a:solidFill>
+                <a:latin typeface="Inter" pitchFamily="34" charset="0"/>
+                <a:ea typeface="Inter" pitchFamily="34" charset="-122"/>
+                <a:cs typeface="Inter" pitchFamily="34" charset="-120"/>
+              </a:rPr>
+              <a:t>2</a:t>
+            </a:r>
+            <a:endParaRPr lang="en-US" sz="1300" dirty="0"/>
+          </a:p>
+        </p:txBody>
+      </p:sp>
+      <p:sp>
+        <p:nvSpPr>
+          <p:cNvPr id="71" name="Text 69"/>
+          <p:cNvSpPr txBox="1"/>
+          <p:nvPr/>
+        </p:nvSpPr>
+        <p:spPr>
+          <a:xfrm>
+            <a:off x="4462272" y="3377184"/>
+            <a:ext cx="502920" cy="335280"/>
+          </a:xfrm>
+          <a:prstGeom prst="rect">
+            <a:avLst/>
+          </a:prstGeom>
+          <a:noFill/>
+          <a:ln/>
+        </p:spPr>
+        <p:txBody>
+          <a:bodyPr wrap="square" lIns="0" tIns="0" rIns="0" bIns="0" rtlCol="0" anchor="ctr"/>
+          <a:lstStyle/>
+          <a:p>
+            <a:pPr algn="r" indent="0" marL="0">
+              <a:buNone/>
+            </a:pPr>
+            <a:r>
+              <a:rPr lang="en-US" sz="1300" dirty="0">
+                <a:solidFill>
+                  <a:srgbClr val="1A1A1A"/>
+                </a:solidFill>
+                <a:latin typeface="Inter" pitchFamily="34" charset="0"/>
+                <a:ea typeface="Inter" pitchFamily="34" charset="-122"/>
+                <a:cs typeface="Inter" pitchFamily="34" charset="-120"/>
+              </a:rPr>
+              <a:t>1</a:t>
+            </a:r>
+            <a:endParaRPr lang="en-US" sz="1300" dirty="0"/>
+          </a:p>
+        </p:txBody>
+      </p:sp>
+      <p:sp>
+        <p:nvSpPr>
+          <p:cNvPr id="72" name="Text 70"/>
+          <p:cNvSpPr txBox="1"/>
+          <p:nvPr/>
+        </p:nvSpPr>
+        <p:spPr>
+          <a:xfrm>
+            <a:off x="4965192" y="3377184"/>
+            <a:ext cx="502920" cy="335280"/>
+          </a:xfrm>
+          <a:prstGeom prst="rect">
+            <a:avLst/>
+          </a:prstGeom>
+          <a:noFill/>
+          <a:ln/>
+        </p:spPr>
+        <p:txBody>
+          <a:bodyPr wrap="square" lIns="0" tIns="0" rIns="0" bIns="0" rtlCol="0" anchor="ctr"/>
+          <a:lstStyle/>
+          <a:p>
+            <a:pPr algn="r" indent="0" marL="0">
+              <a:buNone/>
+            </a:pPr>
+            <a:r>
+              <a:rPr lang="en-US" sz="1300" dirty="0">
+                <a:solidFill>
+                  <a:srgbClr val="1A1A1A"/>
+                </a:solidFill>
+                <a:latin typeface="Inter" pitchFamily="34" charset="0"/>
+                <a:ea typeface="Inter" pitchFamily="34" charset="-122"/>
+                <a:cs typeface="Inter" pitchFamily="34" charset="-120"/>
+              </a:rPr>
+              <a:t>3</a:t>
+            </a:r>
+            <a:endParaRPr lang="en-US" sz="1300" dirty="0"/>
+          </a:p>
+        </p:txBody>
+      </p:sp>
+      <p:sp>
+        <p:nvSpPr>
+          <p:cNvPr id="73" name="Text 71"/>
+          <p:cNvSpPr txBox="1"/>
+          <p:nvPr/>
+        </p:nvSpPr>
+        <p:spPr>
+          <a:xfrm>
+            <a:off x="5468112" y="3377184"/>
+            <a:ext cx="548640" cy="335280"/>
+          </a:xfrm>
+          <a:prstGeom prst="rect">
+            <a:avLst/>
+          </a:prstGeom>
+          <a:noFill/>
+          <a:ln/>
+        </p:spPr>
+        <p:txBody>
+          <a:bodyPr wrap="square" lIns="0" tIns="0" rIns="0" bIns="0" rtlCol="0" anchor="ctr"/>
+          <a:lstStyle/>
+          <a:p>
+            <a:pPr algn="r" indent="0" marL="0">
+              <a:buNone/>
+            </a:pPr>
+            <a:r>
+              <a:rPr lang="en-US" sz="1300" b="1" dirty="0">
+                <a:solidFill>
+                  <a:srgbClr val="1A1A1A"/>
+                </a:solidFill>
+                <a:latin typeface="Inter" pitchFamily="34" charset="0"/>
+                <a:ea typeface="Inter" pitchFamily="34" charset="-122"/>
+                <a:cs typeface="Inter" pitchFamily="34" charset="-120"/>
+              </a:rPr>
+              <a:t>6</a:t>
+            </a:r>
+            <a:endParaRPr lang="en-US" sz="1300" dirty="0"/>
+          </a:p>
+        </p:txBody>
+      </p:sp>
+      <p:sp>
+        <p:nvSpPr>
+          <p:cNvPr id="74" name="Text 72"/>
+          <p:cNvSpPr txBox="1"/>
+          <p:nvPr/>
+        </p:nvSpPr>
+        <p:spPr>
+          <a:xfrm>
+            <a:off x="658368" y="3712464"/>
+            <a:ext cx="1938528" cy="335280"/>
+          </a:xfrm>
+          <a:prstGeom prst="rect">
+            <a:avLst/>
+          </a:prstGeom>
+          <a:noFill/>
+          <a:ln/>
+        </p:spPr>
+        <p:txBody>
+          <a:bodyPr wrap="square" lIns="0" tIns="0" rIns="0" bIns="0" rtlCol="0" anchor="ctr"/>
+          <a:lstStyle/>
+          <a:p>
+            <a:pPr indent="0" marL="0">
+              <a:buNone/>
+            </a:pPr>
+            <a:r>
+              <a:rPr lang="en-US" sz="1300" dirty="0">
+                <a:solidFill>
+                  <a:srgbClr val="1A1A1A"/>
+                </a:solidFill>
+                <a:latin typeface="Inter" pitchFamily="34" charset="0"/>
+                <a:ea typeface="Inter" pitchFamily="34" charset="-122"/>
+                <a:cs typeface="Inter" pitchFamily="34" charset="-120"/>
+              </a:rPr>
+              <a:t>LINCOLN</a:t>
+            </a:r>
+            <a:endParaRPr lang="en-US" sz="1300" dirty="0"/>
+          </a:p>
+        </p:txBody>
+      </p:sp>
+      <p:sp>
+        <p:nvSpPr>
+          <p:cNvPr id="75" name="Shape 73"/>
+          <p:cNvSpPr/>
+          <p:nvPr/>
+        </p:nvSpPr>
+        <p:spPr>
+          <a:xfrm>
+            <a:off x="2670048" y="3787902"/>
+            <a:ext cx="270256" cy="184404"/>
+          </a:xfrm>
+          <a:prstGeom prst="rect">
+            <a:avLst/>
+          </a:prstGeom>
+          <a:solidFill>
+            <a:srgbClr val="0B7A4A"/>
+          </a:solidFill>
+          <a:ln w="9525">
+            <a:solidFill>
+              <a:srgbClr val="FFFFFF"/>
+            </a:solidFill>
+            <a:prstDash val="solid"/>
+          </a:ln>
+        </p:spPr>
+      </p:sp>
+      <p:sp>
+        <p:nvSpPr>
+          <p:cNvPr id="76" name="Shape 74"/>
+          <p:cNvSpPr/>
+          <p:nvPr/>
+        </p:nvSpPr>
+        <p:spPr>
+          <a:xfrm>
+            <a:off x="2940304" y="3787902"/>
+            <a:ext cx="135128" cy="184404"/>
+          </a:xfrm>
+          <a:prstGeom prst="rect">
+            <a:avLst/>
+          </a:prstGeom>
+          <a:solidFill>
+            <a:srgbClr val="12A566"/>
+          </a:solidFill>
+          <a:ln w="9525">
+            <a:solidFill>
+              <a:srgbClr val="FFFFFF"/>
+            </a:solidFill>
+            <a:prstDash val="solid"/>
+          </a:ln>
+        </p:spPr>
+      </p:sp>
+      <p:sp>
+        <p:nvSpPr>
+          <p:cNvPr id="77" name="Shape 75"/>
+          <p:cNvSpPr/>
+          <p:nvPr/>
+        </p:nvSpPr>
+        <p:spPr>
+          <a:xfrm>
+            <a:off x="3075432" y="3787902"/>
+            <a:ext cx="405384" cy="184404"/>
+          </a:xfrm>
+          <a:prstGeom prst="rect">
+            <a:avLst/>
+          </a:prstGeom>
+          <a:solidFill>
+            <a:srgbClr val="8ED3B0"/>
+          </a:solidFill>
+          <a:ln w="9525">
+            <a:solidFill>
+              <a:srgbClr val="FFFFFF"/>
+            </a:solidFill>
+            <a:prstDash val="solid"/>
+          </a:ln>
+        </p:spPr>
+      </p:sp>
+      <p:sp>
+        <p:nvSpPr>
+          <p:cNvPr id="78" name="Text 76"/>
+          <p:cNvSpPr txBox="1"/>
+          <p:nvPr/>
+        </p:nvSpPr>
+        <p:spPr>
+          <a:xfrm>
+            <a:off x="3959352" y="3712464"/>
+            <a:ext cx="502920" cy="335280"/>
+          </a:xfrm>
+          <a:prstGeom prst="rect">
+            <a:avLst/>
+          </a:prstGeom>
+          <a:noFill/>
+          <a:ln/>
+        </p:spPr>
+        <p:txBody>
+          <a:bodyPr wrap="square" lIns="0" tIns="0" rIns="0" bIns="0" rtlCol="0" anchor="ctr"/>
+          <a:lstStyle/>
+          <a:p>
+            <a:pPr algn="r" indent="0" marL="0">
+              <a:buNone/>
+            </a:pPr>
+            <a:r>
+              <a:rPr lang="en-US" sz="1300" dirty="0">
+                <a:solidFill>
+                  <a:srgbClr val="1A1A1A"/>
+                </a:solidFill>
+                <a:latin typeface="Inter" pitchFamily="34" charset="0"/>
+                <a:ea typeface="Inter" pitchFamily="34" charset="-122"/>
+                <a:cs typeface="Inter" pitchFamily="34" charset="-120"/>
+              </a:rPr>
+              <a:t>2</a:t>
+            </a:r>
+            <a:endParaRPr lang="en-US" sz="1300" dirty="0"/>
+          </a:p>
+        </p:txBody>
+      </p:sp>
+      <p:sp>
+        <p:nvSpPr>
+          <p:cNvPr id="79" name="Text 77"/>
+          <p:cNvSpPr txBox="1"/>
+          <p:nvPr/>
+        </p:nvSpPr>
+        <p:spPr>
+          <a:xfrm>
+            <a:off x="4462272" y="3712464"/>
+            <a:ext cx="502920" cy="335280"/>
+          </a:xfrm>
+          <a:prstGeom prst="rect">
+            <a:avLst/>
+          </a:prstGeom>
+          <a:noFill/>
+          <a:ln/>
+        </p:spPr>
+        <p:txBody>
+          <a:bodyPr wrap="square" lIns="0" tIns="0" rIns="0" bIns="0" rtlCol="0" anchor="ctr"/>
+          <a:lstStyle/>
+          <a:p>
+            <a:pPr algn="r" indent="0" marL="0">
+              <a:buNone/>
+            </a:pPr>
+            <a:r>
+              <a:rPr lang="en-US" sz="1300" dirty="0">
+                <a:solidFill>
+                  <a:srgbClr val="1A1A1A"/>
+                </a:solidFill>
+                <a:latin typeface="Inter" pitchFamily="34" charset="0"/>
+                <a:ea typeface="Inter" pitchFamily="34" charset="-122"/>
+                <a:cs typeface="Inter" pitchFamily="34" charset="-120"/>
+              </a:rPr>
+              <a:t>1</a:t>
+            </a:r>
+            <a:endParaRPr lang="en-US" sz="1300" dirty="0"/>
+          </a:p>
+        </p:txBody>
+      </p:sp>
+      <p:sp>
+        <p:nvSpPr>
+          <p:cNvPr id="80" name="Text 78"/>
+          <p:cNvSpPr txBox="1"/>
+          <p:nvPr/>
+        </p:nvSpPr>
+        <p:spPr>
+          <a:xfrm>
+            <a:off x="4965192" y="3712464"/>
+            <a:ext cx="502920" cy="335280"/>
+          </a:xfrm>
+          <a:prstGeom prst="rect">
+            <a:avLst/>
+          </a:prstGeom>
+          <a:noFill/>
+          <a:ln/>
+        </p:spPr>
+        <p:txBody>
+          <a:bodyPr wrap="square" lIns="0" tIns="0" rIns="0" bIns="0" rtlCol="0" anchor="ctr"/>
+          <a:lstStyle/>
+          <a:p>
+            <a:pPr algn="r" indent="0" marL="0">
+              <a:buNone/>
+            </a:pPr>
+            <a:r>
+              <a:rPr lang="en-US" sz="1300" dirty="0">
+                <a:solidFill>
+                  <a:srgbClr val="1A1A1A"/>
+                </a:solidFill>
+                <a:latin typeface="Inter" pitchFamily="34" charset="0"/>
+                <a:ea typeface="Inter" pitchFamily="34" charset="-122"/>
+                <a:cs typeface="Inter" pitchFamily="34" charset="-120"/>
+              </a:rPr>
+              <a:t>3</a:t>
+            </a:r>
+            <a:endParaRPr lang="en-US" sz="1300" dirty="0"/>
+          </a:p>
+        </p:txBody>
+      </p:sp>
+      <p:sp>
+        <p:nvSpPr>
+          <p:cNvPr id="81" name="Text 79"/>
+          <p:cNvSpPr txBox="1"/>
+          <p:nvPr/>
+        </p:nvSpPr>
+        <p:spPr>
+          <a:xfrm>
+            <a:off x="5468112" y="3712464"/>
+            <a:ext cx="548640" cy="335280"/>
+          </a:xfrm>
+          <a:prstGeom prst="rect">
+            <a:avLst/>
+          </a:prstGeom>
+          <a:noFill/>
+          <a:ln/>
+        </p:spPr>
+        <p:txBody>
+          <a:bodyPr wrap="square" lIns="0" tIns="0" rIns="0" bIns="0" rtlCol="0" anchor="ctr"/>
+          <a:lstStyle/>
+          <a:p>
+            <a:pPr algn="r" indent="0" marL="0">
+              <a:buNone/>
+            </a:pPr>
+            <a:r>
+              <a:rPr lang="en-US" sz="1300" b="1" dirty="0">
+                <a:solidFill>
+                  <a:srgbClr val="1A1A1A"/>
+                </a:solidFill>
+                <a:latin typeface="Inter" pitchFamily="34" charset="0"/>
+                <a:ea typeface="Inter" pitchFamily="34" charset="-122"/>
+                <a:cs typeface="Inter" pitchFamily="34" charset="-120"/>
+              </a:rPr>
+              <a:t>6</a:t>
+            </a:r>
+            <a:endParaRPr lang="en-US" sz="1300" dirty="0"/>
+          </a:p>
+        </p:txBody>
+      </p:sp>
+      <p:sp>
+        <p:nvSpPr>
+          <p:cNvPr id="82" name="Text 80"/>
+          <p:cNvSpPr txBox="1"/>
+          <p:nvPr/>
+        </p:nvSpPr>
+        <p:spPr>
+          <a:xfrm>
+            <a:off x="658368" y="4047744"/>
+            <a:ext cx="1938528" cy="335280"/>
+          </a:xfrm>
+          <a:prstGeom prst="rect">
+            <a:avLst/>
+          </a:prstGeom>
+          <a:noFill/>
+          <a:ln/>
+        </p:spPr>
+        <p:txBody>
+          <a:bodyPr wrap="square" lIns="0" tIns="0" rIns="0" bIns="0" rtlCol="0" anchor="ctr"/>
+          <a:lstStyle/>
+          <a:p>
+            <a:pPr indent="0" marL="0">
+              <a:buNone/>
+            </a:pPr>
+            <a:r>
+              <a:rPr lang="en-US" sz="1300" dirty="0">
+                <a:solidFill>
+                  <a:srgbClr val="1A1A1A"/>
+                </a:solidFill>
+                <a:latin typeface="Inter" pitchFamily="34" charset="0"/>
+                <a:ea typeface="Inter" pitchFamily="34" charset="-122"/>
+                <a:cs typeface="Inter" pitchFamily="34" charset="-120"/>
+              </a:rPr>
+              <a:t>MAZDA</a:t>
+            </a:r>
+            <a:endParaRPr lang="en-US" sz="1300" dirty="0"/>
+          </a:p>
+        </p:txBody>
+      </p:sp>
+      <p:sp>
+        <p:nvSpPr>
+          <p:cNvPr id="83" name="Shape 81"/>
+          <p:cNvSpPr/>
+          <p:nvPr/>
+        </p:nvSpPr>
+        <p:spPr>
+          <a:xfrm>
+            <a:off x="2670048" y="4123182"/>
+            <a:ext cx="270256" cy="184404"/>
+          </a:xfrm>
+          <a:prstGeom prst="rect">
+            <a:avLst/>
+          </a:prstGeom>
+          <a:solidFill>
+            <a:srgbClr val="0B7A4A"/>
+          </a:solidFill>
+          <a:ln w="9525">
+            <a:solidFill>
+              <a:srgbClr val="FFFFFF"/>
+            </a:solidFill>
+            <a:prstDash val="solid"/>
+          </a:ln>
+        </p:spPr>
+      </p:sp>
+      <p:sp>
+        <p:nvSpPr>
+          <p:cNvPr id="84" name="Shape 82"/>
+          <p:cNvSpPr/>
+          <p:nvPr/>
+        </p:nvSpPr>
+        <p:spPr>
+          <a:xfrm>
+            <a:off x="2940304" y="4123182"/>
+            <a:ext cx="135128" cy="184404"/>
+          </a:xfrm>
+          <a:prstGeom prst="rect">
+            <a:avLst/>
+          </a:prstGeom>
+          <a:solidFill>
+            <a:srgbClr val="12A566"/>
+          </a:solidFill>
+          <a:ln w="9525">
+            <a:solidFill>
+              <a:srgbClr val="FFFFFF"/>
+            </a:solidFill>
+            <a:prstDash val="solid"/>
+          </a:ln>
+        </p:spPr>
+      </p:sp>
+      <p:sp>
+        <p:nvSpPr>
+          <p:cNvPr id="85" name="Shape 83"/>
+          <p:cNvSpPr/>
+          <p:nvPr/>
+        </p:nvSpPr>
+        <p:spPr>
+          <a:xfrm>
+            <a:off x="3075432" y="4123182"/>
+            <a:ext cx="270256" cy="184404"/>
+          </a:xfrm>
+          <a:prstGeom prst="rect">
+            <a:avLst/>
+          </a:prstGeom>
+          <a:solidFill>
+            <a:srgbClr val="8ED3B0"/>
+          </a:solidFill>
+          <a:ln w="9525">
+            <a:solidFill>
+              <a:srgbClr val="FFFFFF"/>
+            </a:solidFill>
+            <a:prstDash val="solid"/>
+          </a:ln>
+        </p:spPr>
+      </p:sp>
+      <p:sp>
+        <p:nvSpPr>
+          <p:cNvPr id="86" name="Text 84"/>
+          <p:cNvSpPr txBox="1"/>
+          <p:nvPr/>
+        </p:nvSpPr>
+        <p:spPr>
+          <a:xfrm>
+            <a:off x="3959352" y="4047744"/>
+            <a:ext cx="502920" cy="335280"/>
+          </a:xfrm>
+          <a:prstGeom prst="rect">
+            <a:avLst/>
+          </a:prstGeom>
+          <a:noFill/>
+          <a:ln/>
+        </p:spPr>
+        <p:txBody>
+          <a:bodyPr wrap="square" lIns="0" tIns="0" rIns="0" bIns="0" rtlCol="0" anchor="ctr"/>
+          <a:lstStyle/>
+          <a:p>
+            <a:pPr algn="r" indent="0" marL="0">
+              <a:buNone/>
+            </a:pPr>
+            <a:r>
+              <a:rPr lang="en-US" sz="1300" dirty="0">
+                <a:solidFill>
+                  <a:srgbClr val="1A1A1A"/>
+                </a:solidFill>
+                <a:latin typeface="Inter" pitchFamily="34" charset="0"/>
+                <a:ea typeface="Inter" pitchFamily="34" charset="-122"/>
+                <a:cs typeface="Inter" pitchFamily="34" charset="-120"/>
+              </a:rPr>
+              <a:t>2</a:t>
+            </a:r>
+            <a:endParaRPr lang="en-US" sz="1300" dirty="0"/>
+          </a:p>
+        </p:txBody>
+      </p:sp>
+      <p:sp>
+        <p:nvSpPr>
+          <p:cNvPr id="87" name="Text 85"/>
+          <p:cNvSpPr txBox="1"/>
+          <p:nvPr/>
+        </p:nvSpPr>
+        <p:spPr>
+          <a:xfrm>
+            <a:off x="4462272" y="4047744"/>
+            <a:ext cx="502920" cy="335280"/>
+          </a:xfrm>
+          <a:prstGeom prst="rect">
+            <a:avLst/>
+          </a:prstGeom>
+          <a:noFill/>
+          <a:ln/>
+        </p:spPr>
+        <p:txBody>
+          <a:bodyPr wrap="square" lIns="0" tIns="0" rIns="0" bIns="0" rtlCol="0" anchor="ctr"/>
+          <a:lstStyle/>
+          <a:p>
+            <a:pPr algn="r" indent="0" marL="0">
+              <a:buNone/>
+            </a:pPr>
+            <a:r>
+              <a:rPr lang="en-US" sz="1300" dirty="0">
+                <a:solidFill>
+                  <a:srgbClr val="1A1A1A"/>
+                </a:solidFill>
+                <a:latin typeface="Inter" pitchFamily="34" charset="0"/>
+                <a:ea typeface="Inter" pitchFamily="34" charset="-122"/>
+                <a:cs typeface="Inter" pitchFamily="34" charset="-120"/>
+              </a:rPr>
+              <a:t>1</a:t>
+            </a:r>
+            <a:endParaRPr lang="en-US" sz="1300" dirty="0"/>
+          </a:p>
+        </p:txBody>
+      </p:sp>
+      <p:sp>
+        <p:nvSpPr>
+          <p:cNvPr id="88" name="Text 86"/>
+          <p:cNvSpPr txBox="1"/>
+          <p:nvPr/>
+        </p:nvSpPr>
+        <p:spPr>
+          <a:xfrm>
+            <a:off x="4965192" y="4047744"/>
+            <a:ext cx="502920" cy="335280"/>
+          </a:xfrm>
+          <a:prstGeom prst="rect">
+            <a:avLst/>
+          </a:prstGeom>
+          <a:noFill/>
+          <a:ln/>
+        </p:spPr>
+        <p:txBody>
+          <a:bodyPr wrap="square" lIns="0" tIns="0" rIns="0" bIns="0" rtlCol="0" anchor="ctr"/>
+          <a:lstStyle/>
+          <a:p>
+            <a:pPr algn="r" indent="0" marL="0">
+              <a:buNone/>
+            </a:pPr>
+            <a:r>
+              <a:rPr lang="en-US" sz="1300" dirty="0">
+                <a:solidFill>
+                  <a:srgbClr val="1A1A1A"/>
+                </a:solidFill>
+                <a:latin typeface="Inter" pitchFamily="34" charset="0"/>
+                <a:ea typeface="Inter" pitchFamily="34" charset="-122"/>
+                <a:cs typeface="Inter" pitchFamily="34" charset="-120"/>
+              </a:rPr>
+              <a:t>2</a:t>
+            </a:r>
+            <a:endParaRPr lang="en-US" sz="1300" dirty="0"/>
+          </a:p>
+        </p:txBody>
+      </p:sp>
+      <p:sp>
+        <p:nvSpPr>
+          <p:cNvPr id="89" name="Text 87"/>
+          <p:cNvSpPr txBox="1"/>
+          <p:nvPr/>
+        </p:nvSpPr>
+        <p:spPr>
+          <a:xfrm>
+            <a:off x="5468112" y="4047744"/>
+            <a:ext cx="548640" cy="335280"/>
+          </a:xfrm>
+          <a:prstGeom prst="rect">
+            <a:avLst/>
+          </a:prstGeom>
+          <a:noFill/>
+          <a:ln/>
+        </p:spPr>
+        <p:txBody>
+          <a:bodyPr wrap="square" lIns="0" tIns="0" rIns="0" bIns="0" rtlCol="0" anchor="ctr"/>
+          <a:lstStyle/>
+          <a:p>
+            <a:pPr algn="r" indent="0" marL="0">
+              <a:buNone/>
+            </a:pPr>
+            <a:r>
+              <a:rPr lang="en-US" sz="1300" b="1" dirty="0">
+                <a:solidFill>
+                  <a:srgbClr val="1A1A1A"/>
+                </a:solidFill>
+                <a:latin typeface="Inter" pitchFamily="34" charset="0"/>
+                <a:ea typeface="Inter" pitchFamily="34" charset="-122"/>
+                <a:cs typeface="Inter" pitchFamily="34" charset="-120"/>
+              </a:rPr>
+              <a:t>5</a:t>
+            </a:r>
+            <a:endParaRPr lang="en-US" sz="1300" dirty="0"/>
+          </a:p>
+        </p:txBody>
+      </p:sp>
+      <p:sp>
+        <p:nvSpPr>
+          <p:cNvPr id="90" name="Text 88"/>
+          <p:cNvSpPr txBox="1"/>
+          <p:nvPr/>
+        </p:nvSpPr>
+        <p:spPr>
+          <a:xfrm>
+            <a:off x="658368" y="4383024"/>
+            <a:ext cx="1938528" cy="335280"/>
+          </a:xfrm>
+          <a:prstGeom prst="rect">
+            <a:avLst/>
+          </a:prstGeom>
+          <a:noFill/>
+          <a:ln/>
+        </p:spPr>
+        <p:txBody>
+          <a:bodyPr wrap="square" lIns="0" tIns="0" rIns="0" bIns="0" rtlCol="0" anchor="ctr"/>
+          <a:lstStyle/>
+          <a:p>
+            <a:pPr indent="0" marL="0">
+              <a:buNone/>
+            </a:pPr>
+            <a:r>
+              <a:rPr lang="en-US" sz="1300" dirty="0">
+                <a:solidFill>
+                  <a:srgbClr val="1A1A1A"/>
+                </a:solidFill>
+                <a:latin typeface="Inter" pitchFamily="34" charset="0"/>
+                <a:ea typeface="Inter" pitchFamily="34" charset="-122"/>
+                <a:cs typeface="Inter" pitchFamily="34" charset="-120"/>
+              </a:rPr>
+              <a:t>KIA ST GEORGE</a:t>
+            </a:r>
+            <a:endParaRPr lang="en-US" sz="1300" dirty="0"/>
+          </a:p>
+        </p:txBody>
+      </p:sp>
+      <p:sp>
+        <p:nvSpPr>
+          <p:cNvPr id="91" name="Shape 89"/>
+          <p:cNvSpPr/>
+          <p:nvPr/>
+        </p:nvSpPr>
+        <p:spPr>
+          <a:xfrm>
+            <a:off x="2670048" y="4458462"/>
+            <a:ext cx="270256" cy="184404"/>
+          </a:xfrm>
+          <a:prstGeom prst="rect">
+            <a:avLst/>
+          </a:prstGeom>
+          <a:solidFill>
+            <a:srgbClr val="0B7A4A"/>
+          </a:solidFill>
+          <a:ln w="9525">
+            <a:solidFill>
+              <a:srgbClr val="FFFFFF"/>
+            </a:solidFill>
+            <a:prstDash val="solid"/>
+          </a:ln>
+        </p:spPr>
+      </p:sp>
+      <p:sp>
+        <p:nvSpPr>
+          <p:cNvPr id="92" name="Shape 90"/>
+          <p:cNvSpPr/>
+          <p:nvPr/>
+        </p:nvSpPr>
+        <p:spPr>
+          <a:xfrm>
+            <a:off x="2940304" y="4458462"/>
+            <a:ext cx="135128" cy="184404"/>
+          </a:xfrm>
+          <a:prstGeom prst="rect">
+            <a:avLst/>
+          </a:prstGeom>
+          <a:solidFill>
+            <a:srgbClr val="12A566"/>
+          </a:solidFill>
+          <a:ln w="9525">
+            <a:solidFill>
+              <a:srgbClr val="FFFFFF"/>
+            </a:solidFill>
+            <a:prstDash val="solid"/>
+          </a:ln>
+        </p:spPr>
+      </p:sp>
+      <p:sp>
+        <p:nvSpPr>
+          <p:cNvPr id="93" name="Shape 91"/>
+          <p:cNvSpPr/>
+          <p:nvPr/>
+        </p:nvSpPr>
+        <p:spPr>
+          <a:xfrm>
+            <a:off x="3075432" y="4458462"/>
+            <a:ext cx="135128" cy="184404"/>
+          </a:xfrm>
+          <a:prstGeom prst="rect">
+            <a:avLst/>
+          </a:prstGeom>
+          <a:solidFill>
+            <a:srgbClr val="8ED3B0"/>
+          </a:solidFill>
+          <a:ln w="9525">
+            <a:solidFill>
+              <a:srgbClr val="FFFFFF"/>
+            </a:solidFill>
+            <a:prstDash val="solid"/>
+          </a:ln>
+        </p:spPr>
+      </p:sp>
+      <p:sp>
+        <p:nvSpPr>
+          <p:cNvPr id="94" name="Text 92"/>
+          <p:cNvSpPr txBox="1"/>
+          <p:nvPr/>
+        </p:nvSpPr>
+        <p:spPr>
+          <a:xfrm>
+            <a:off x="3959352" y="4383024"/>
+            <a:ext cx="502920" cy="335280"/>
+          </a:xfrm>
+          <a:prstGeom prst="rect">
+            <a:avLst/>
+          </a:prstGeom>
+          <a:noFill/>
+          <a:ln/>
+        </p:spPr>
+        <p:txBody>
+          <a:bodyPr wrap="square" lIns="0" tIns="0" rIns="0" bIns="0" rtlCol="0" anchor="ctr"/>
+          <a:lstStyle/>
+          <a:p>
+            <a:pPr algn="r" indent="0" marL="0">
+              <a:buNone/>
+            </a:pPr>
+            <a:r>
+              <a:rPr lang="en-US" sz="1300" dirty="0">
+                <a:solidFill>
+                  <a:srgbClr val="1A1A1A"/>
+                </a:solidFill>
+                <a:latin typeface="Inter" pitchFamily="34" charset="0"/>
+                <a:ea typeface="Inter" pitchFamily="34" charset="-122"/>
+                <a:cs typeface="Inter" pitchFamily="34" charset="-120"/>
+              </a:rPr>
+              <a:t>2</a:t>
+            </a:r>
+            <a:endParaRPr lang="en-US" sz="1300" dirty="0"/>
+          </a:p>
+        </p:txBody>
+      </p:sp>
+      <p:sp>
+        <p:nvSpPr>
+          <p:cNvPr id="95" name="Text 93"/>
+          <p:cNvSpPr txBox="1"/>
+          <p:nvPr/>
+        </p:nvSpPr>
+        <p:spPr>
+          <a:xfrm>
+            <a:off x="4462272" y="4383024"/>
+            <a:ext cx="502920" cy="335280"/>
+          </a:xfrm>
+          <a:prstGeom prst="rect">
+            <a:avLst/>
+          </a:prstGeom>
+          <a:noFill/>
+          <a:ln/>
+        </p:spPr>
+        <p:txBody>
+          <a:bodyPr wrap="square" lIns="0" tIns="0" rIns="0" bIns="0" rtlCol="0" anchor="ctr"/>
+          <a:lstStyle/>
+          <a:p>
+            <a:pPr algn="r" indent="0" marL="0">
+              <a:buNone/>
+            </a:pPr>
+            <a:r>
+              <a:rPr lang="en-US" sz="1300" dirty="0">
+                <a:solidFill>
+                  <a:srgbClr val="1A1A1A"/>
+                </a:solidFill>
+                <a:latin typeface="Inter" pitchFamily="34" charset="0"/>
+                <a:ea typeface="Inter" pitchFamily="34" charset="-122"/>
+                <a:cs typeface="Inter" pitchFamily="34" charset="-120"/>
+              </a:rPr>
+              <a:t>1</a:t>
+            </a:r>
+            <a:endParaRPr lang="en-US" sz="1300" dirty="0"/>
+          </a:p>
+        </p:txBody>
+      </p:sp>
+      <p:sp>
+        <p:nvSpPr>
+          <p:cNvPr id="96" name="Text 94"/>
+          <p:cNvSpPr txBox="1"/>
+          <p:nvPr/>
+        </p:nvSpPr>
+        <p:spPr>
+          <a:xfrm>
+            <a:off x="4965192" y="4383024"/>
+            <a:ext cx="502920" cy="335280"/>
+          </a:xfrm>
+          <a:prstGeom prst="rect">
+            <a:avLst/>
+          </a:prstGeom>
+          <a:noFill/>
+          <a:ln/>
+        </p:spPr>
+        <p:txBody>
+          <a:bodyPr wrap="square" lIns="0" tIns="0" rIns="0" bIns="0" rtlCol="0" anchor="ctr"/>
+          <a:lstStyle/>
+          <a:p>
+            <a:pPr algn="r" indent="0" marL="0">
+              <a:buNone/>
+            </a:pPr>
+            <a:r>
+              <a:rPr lang="en-US" sz="1300" dirty="0">
+                <a:solidFill>
+                  <a:srgbClr val="1A1A1A"/>
+                </a:solidFill>
+                <a:latin typeface="Inter" pitchFamily="34" charset="0"/>
+                <a:ea typeface="Inter" pitchFamily="34" charset="-122"/>
+                <a:cs typeface="Inter" pitchFamily="34" charset="-120"/>
+              </a:rPr>
+              <a:t>1</a:t>
+            </a:r>
+            <a:endParaRPr lang="en-US" sz="1300" dirty="0"/>
+          </a:p>
+        </p:txBody>
+      </p:sp>
+      <p:sp>
+        <p:nvSpPr>
+          <p:cNvPr id="97" name="Text 95"/>
+          <p:cNvSpPr txBox="1"/>
+          <p:nvPr/>
+        </p:nvSpPr>
+        <p:spPr>
+          <a:xfrm>
+            <a:off x="5468112" y="4383024"/>
+            <a:ext cx="548640" cy="335280"/>
+          </a:xfrm>
+          <a:prstGeom prst="rect">
+            <a:avLst/>
+          </a:prstGeom>
+          <a:noFill/>
+          <a:ln/>
+        </p:spPr>
+        <p:txBody>
+          <a:bodyPr wrap="square" lIns="0" tIns="0" rIns="0" bIns="0" rtlCol="0" anchor="ctr"/>
+          <a:lstStyle/>
+          <a:p>
+            <a:pPr algn="r" indent="0" marL="0">
+              <a:buNone/>
+            </a:pPr>
+            <a:r>
+              <a:rPr lang="en-US" sz="1300" b="1" dirty="0">
+                <a:solidFill>
+                  <a:srgbClr val="1A1A1A"/>
+                </a:solidFill>
+                <a:latin typeface="Inter" pitchFamily="34" charset="0"/>
+                <a:ea typeface="Inter" pitchFamily="34" charset="-122"/>
+                <a:cs typeface="Inter" pitchFamily="34" charset="-120"/>
+              </a:rPr>
+              <a:t>4</a:t>
+            </a:r>
+            <a:endParaRPr lang="en-US" sz="1300" dirty="0"/>
+          </a:p>
+        </p:txBody>
+      </p:sp>
+      <p:sp>
+        <p:nvSpPr>
+          <p:cNvPr id="98" name="Text 96"/>
+          <p:cNvSpPr txBox="1"/>
+          <p:nvPr/>
+        </p:nvSpPr>
+        <p:spPr>
+          <a:xfrm>
+            <a:off x="658368" y="4718304"/>
+            <a:ext cx="1938528" cy="335280"/>
+          </a:xfrm>
+          <a:prstGeom prst="rect">
+            <a:avLst/>
+          </a:prstGeom>
+          <a:noFill/>
+          <a:ln/>
+        </p:spPr>
+        <p:txBody>
+          <a:bodyPr wrap="square" lIns="0" tIns="0" rIns="0" bIns="0" rtlCol="0" anchor="ctr"/>
+          <a:lstStyle/>
+          <a:p>
+            <a:pPr indent="0" marL="0">
+              <a:buNone/>
+            </a:pPr>
+            <a:r>
+              <a:rPr lang="en-US" sz="1300" dirty="0">
+                <a:solidFill>
+                  <a:srgbClr val="1A1A1A"/>
+                </a:solidFill>
+                <a:latin typeface="Inter" pitchFamily="34" charset="0"/>
+                <a:ea typeface="Inter" pitchFamily="34" charset="-122"/>
+                <a:cs typeface="Inter" pitchFamily="34" charset="-120"/>
+              </a:rPr>
+              <a:t>LEXUS</a:t>
+            </a:r>
+            <a:endParaRPr lang="en-US" sz="1300" dirty="0"/>
+          </a:p>
+        </p:txBody>
+      </p:sp>
+      <p:sp>
+        <p:nvSpPr>
+          <p:cNvPr id="99" name="Shape 97"/>
+          <p:cNvSpPr/>
+          <p:nvPr/>
+        </p:nvSpPr>
+        <p:spPr>
+          <a:xfrm>
+            <a:off x="2670048" y="4793742"/>
+            <a:ext cx="270256" cy="184404"/>
+          </a:xfrm>
+          <a:prstGeom prst="rect">
+            <a:avLst/>
+          </a:prstGeom>
+          <a:solidFill>
+            <a:srgbClr val="0B7A4A"/>
+          </a:solidFill>
+          <a:ln w="9525">
+            <a:solidFill>
+              <a:srgbClr val="FFFFFF"/>
+            </a:solidFill>
+            <a:prstDash val="solid"/>
+          </a:ln>
+        </p:spPr>
+      </p:sp>
+      <p:sp>
+        <p:nvSpPr>
+          <p:cNvPr id="100" name="Shape 98"/>
+          <p:cNvSpPr/>
+          <p:nvPr/>
+        </p:nvSpPr>
+        <p:spPr>
+          <a:xfrm>
+            <a:off x="2940304" y="4793742"/>
+            <a:ext cx="135128" cy="184404"/>
+          </a:xfrm>
+          <a:prstGeom prst="rect">
+            <a:avLst/>
+          </a:prstGeom>
+          <a:solidFill>
+            <a:srgbClr val="12A566"/>
+          </a:solidFill>
+          <a:ln w="9525">
+            <a:solidFill>
+              <a:srgbClr val="FFFFFF"/>
+            </a:solidFill>
+            <a:prstDash val="solid"/>
+          </a:ln>
+        </p:spPr>
+      </p:sp>
+      <p:sp>
+        <p:nvSpPr>
+          <p:cNvPr id="101" name="Shape 99"/>
+          <p:cNvSpPr/>
+          <p:nvPr/>
+        </p:nvSpPr>
+        <p:spPr>
+          <a:xfrm>
+            <a:off x="3075432" y="4793742"/>
+            <a:ext cx="135128" cy="184404"/>
+          </a:xfrm>
+          <a:prstGeom prst="rect">
+            <a:avLst/>
+          </a:prstGeom>
+          <a:solidFill>
+            <a:srgbClr val="8ED3B0"/>
+          </a:solidFill>
+          <a:ln w="9525">
+            <a:solidFill>
+              <a:srgbClr val="FFFFFF"/>
+            </a:solidFill>
+            <a:prstDash val="solid"/>
+          </a:ln>
+        </p:spPr>
+      </p:sp>
+      <p:sp>
+        <p:nvSpPr>
+          <p:cNvPr id="102" name="Text 100"/>
+          <p:cNvSpPr txBox="1"/>
+          <p:nvPr/>
+        </p:nvSpPr>
+        <p:spPr>
+          <a:xfrm>
+            <a:off x="3959352" y="4718304"/>
+            <a:ext cx="502920" cy="335280"/>
+          </a:xfrm>
+          <a:prstGeom prst="rect">
+            <a:avLst/>
+          </a:prstGeom>
+          <a:noFill/>
+          <a:ln/>
+        </p:spPr>
+        <p:txBody>
+          <a:bodyPr wrap="square" lIns="0" tIns="0" rIns="0" bIns="0" rtlCol="0" anchor="ctr"/>
+          <a:lstStyle/>
+          <a:p>
+            <a:pPr algn="r" indent="0" marL="0">
+              <a:buNone/>
+            </a:pPr>
+            <a:r>
+              <a:rPr lang="en-US" sz="1300" dirty="0">
+                <a:solidFill>
+                  <a:srgbClr val="1A1A1A"/>
+                </a:solidFill>
+                <a:latin typeface="Inter" pitchFamily="34" charset="0"/>
+                <a:ea typeface="Inter" pitchFamily="34" charset="-122"/>
+                <a:cs typeface="Inter" pitchFamily="34" charset="-120"/>
+              </a:rPr>
+              <a:t>2</a:t>
+            </a:r>
+            <a:endParaRPr lang="en-US" sz="1300" dirty="0"/>
+          </a:p>
+        </p:txBody>
+      </p:sp>
+      <p:sp>
+        <p:nvSpPr>
+          <p:cNvPr id="103" name="Text 101"/>
+          <p:cNvSpPr txBox="1"/>
+          <p:nvPr/>
+        </p:nvSpPr>
+        <p:spPr>
+          <a:xfrm>
+            <a:off x="4462272" y="4718304"/>
+            <a:ext cx="502920" cy="335280"/>
+          </a:xfrm>
+          <a:prstGeom prst="rect">
+            <a:avLst/>
+          </a:prstGeom>
+          <a:noFill/>
+          <a:ln/>
+        </p:spPr>
+        <p:txBody>
+          <a:bodyPr wrap="square" lIns="0" tIns="0" rIns="0" bIns="0" rtlCol="0" anchor="ctr"/>
+          <a:lstStyle/>
+          <a:p>
+            <a:pPr algn="r" indent="0" marL="0">
+              <a:buNone/>
+            </a:pPr>
+            <a:r>
+              <a:rPr lang="en-US" sz="1300" dirty="0">
+                <a:solidFill>
+                  <a:srgbClr val="1A1A1A"/>
+                </a:solidFill>
+                <a:latin typeface="Inter" pitchFamily="34" charset="0"/>
+                <a:ea typeface="Inter" pitchFamily="34" charset="-122"/>
+                <a:cs typeface="Inter" pitchFamily="34" charset="-120"/>
+              </a:rPr>
+              <a:t>1</a:t>
+            </a:r>
+            <a:endParaRPr lang="en-US" sz="1300" dirty="0"/>
+          </a:p>
+        </p:txBody>
+      </p:sp>
+      <p:sp>
+        <p:nvSpPr>
+          <p:cNvPr id="104" name="Text 102"/>
+          <p:cNvSpPr txBox="1"/>
+          <p:nvPr/>
+        </p:nvSpPr>
+        <p:spPr>
+          <a:xfrm>
+            <a:off x="4965192" y="4718304"/>
+            <a:ext cx="502920" cy="335280"/>
+          </a:xfrm>
+          <a:prstGeom prst="rect">
+            <a:avLst/>
+          </a:prstGeom>
+          <a:noFill/>
+          <a:ln/>
+        </p:spPr>
+        <p:txBody>
+          <a:bodyPr wrap="square" lIns="0" tIns="0" rIns="0" bIns="0" rtlCol="0" anchor="ctr"/>
+          <a:lstStyle/>
+          <a:p>
+            <a:pPr algn="r" indent="0" marL="0">
+              <a:buNone/>
+            </a:pPr>
+            <a:r>
+              <a:rPr lang="en-US" sz="1300" dirty="0">
+                <a:solidFill>
+                  <a:srgbClr val="1A1A1A"/>
+                </a:solidFill>
+                <a:latin typeface="Inter" pitchFamily="34" charset="0"/>
+                <a:ea typeface="Inter" pitchFamily="34" charset="-122"/>
+                <a:cs typeface="Inter" pitchFamily="34" charset="-120"/>
+              </a:rPr>
+              <a:t>1</a:t>
+            </a:r>
+            <a:endParaRPr lang="en-US" sz="1300" dirty="0"/>
+          </a:p>
+        </p:txBody>
+      </p:sp>
+      <p:sp>
+        <p:nvSpPr>
+          <p:cNvPr id="105" name="Text 103"/>
+          <p:cNvSpPr txBox="1"/>
+          <p:nvPr/>
+        </p:nvSpPr>
+        <p:spPr>
+          <a:xfrm>
+            <a:off x="5468112" y="4718304"/>
+            <a:ext cx="548640" cy="335280"/>
+          </a:xfrm>
+          <a:prstGeom prst="rect">
+            <a:avLst/>
+          </a:prstGeom>
+          <a:noFill/>
+          <a:ln/>
+        </p:spPr>
+        <p:txBody>
+          <a:bodyPr wrap="square" lIns="0" tIns="0" rIns="0" bIns="0" rtlCol="0" anchor="ctr"/>
+          <a:lstStyle/>
+          <a:p>
+            <a:pPr algn="r" indent="0" marL="0">
+              <a:buNone/>
+            </a:pPr>
+            <a:r>
+              <a:rPr lang="en-US" sz="1300" b="1" dirty="0">
+                <a:solidFill>
+                  <a:srgbClr val="1A1A1A"/>
+                </a:solidFill>
+                <a:latin typeface="Inter" pitchFamily="34" charset="0"/>
+                <a:ea typeface="Inter" pitchFamily="34" charset="-122"/>
+                <a:cs typeface="Inter" pitchFamily="34" charset="-120"/>
+              </a:rPr>
+              <a:t>4</a:t>
+            </a:r>
+            <a:endParaRPr lang="en-US" sz="1300" dirty="0"/>
+          </a:p>
+        </p:txBody>
+      </p:sp>
+      <p:sp>
+        <p:nvSpPr>
+          <p:cNvPr id="106" name="Text 104"/>
+          <p:cNvSpPr txBox="1"/>
+          <p:nvPr/>
+        </p:nvSpPr>
+        <p:spPr>
+          <a:xfrm>
+            <a:off x="658368" y="5053584"/>
+            <a:ext cx="1938528" cy="335280"/>
+          </a:xfrm>
+          <a:prstGeom prst="rect">
+            <a:avLst/>
+          </a:prstGeom>
+          <a:noFill/>
+          <a:ln/>
+        </p:spPr>
+        <p:txBody>
+          <a:bodyPr wrap="square" lIns="0" tIns="0" rIns="0" bIns="0" rtlCol="0" anchor="ctr"/>
+          <a:lstStyle/>
+          <a:p>
+            <a:pPr indent="0" marL="0">
+              <a:buNone/>
+            </a:pPr>
+            <a:r>
+              <a:rPr lang="en-US" sz="1300" dirty="0">
+                <a:solidFill>
+                  <a:srgbClr val="1A1A1A"/>
+                </a:solidFill>
+                <a:latin typeface="Inter" pitchFamily="34" charset="0"/>
+                <a:ea typeface="Inter" pitchFamily="34" charset="-122"/>
+                <a:cs typeface="Inter" pitchFamily="34" charset="-120"/>
+              </a:rPr>
+              <a:t>LR HENDERSON</a:t>
+            </a:r>
+            <a:endParaRPr lang="en-US" sz="1300" dirty="0"/>
+          </a:p>
+        </p:txBody>
+      </p:sp>
+      <p:sp>
+        <p:nvSpPr>
+          <p:cNvPr id="107" name="Shape 105"/>
+          <p:cNvSpPr/>
+          <p:nvPr/>
+        </p:nvSpPr>
+        <p:spPr>
+          <a:xfrm>
+            <a:off x="2670048" y="5129022"/>
+            <a:ext cx="270256" cy="184404"/>
+          </a:xfrm>
+          <a:prstGeom prst="rect">
+            <a:avLst/>
+          </a:prstGeom>
+          <a:solidFill>
+            <a:srgbClr val="0B7A4A"/>
+          </a:solidFill>
+          <a:ln w="9525">
+            <a:solidFill>
+              <a:srgbClr val="FFFFFF"/>
+            </a:solidFill>
+            <a:prstDash val="solid"/>
+          </a:ln>
+        </p:spPr>
+      </p:sp>
+      <p:sp>
+        <p:nvSpPr>
+          <p:cNvPr id="108" name="Shape 106"/>
+          <p:cNvSpPr/>
+          <p:nvPr/>
+        </p:nvSpPr>
+        <p:spPr>
+          <a:xfrm>
+            <a:off x="2940304" y="5129022"/>
+            <a:ext cx="135128" cy="184404"/>
+          </a:xfrm>
+          <a:prstGeom prst="rect">
+            <a:avLst/>
+          </a:prstGeom>
+          <a:solidFill>
+            <a:srgbClr val="12A566"/>
+          </a:solidFill>
+          <a:ln w="9525">
+            <a:solidFill>
+              <a:srgbClr val="FFFFFF"/>
+            </a:solidFill>
+            <a:prstDash val="solid"/>
+          </a:ln>
+        </p:spPr>
+      </p:sp>
+      <p:sp>
+        <p:nvSpPr>
+          <p:cNvPr id="109" name="Shape 107"/>
+          <p:cNvSpPr/>
+          <p:nvPr/>
+        </p:nvSpPr>
+        <p:spPr>
+          <a:xfrm>
+            <a:off x="3075432" y="5129022"/>
+            <a:ext cx="135128" cy="184404"/>
+          </a:xfrm>
+          <a:prstGeom prst="rect">
+            <a:avLst/>
+          </a:prstGeom>
+          <a:solidFill>
+            <a:srgbClr val="8ED3B0"/>
+          </a:solidFill>
+          <a:ln w="9525">
+            <a:solidFill>
+              <a:srgbClr val="FFFFFF"/>
+            </a:solidFill>
+            <a:prstDash val="solid"/>
+          </a:ln>
+        </p:spPr>
+      </p:sp>
+      <p:sp>
+        <p:nvSpPr>
+          <p:cNvPr id="110" name="Text 108"/>
+          <p:cNvSpPr txBox="1"/>
+          <p:nvPr/>
+        </p:nvSpPr>
+        <p:spPr>
+          <a:xfrm>
+            <a:off x="3959352" y="5053584"/>
+            <a:ext cx="502920" cy="335280"/>
+          </a:xfrm>
+          <a:prstGeom prst="rect">
+            <a:avLst/>
+          </a:prstGeom>
+          <a:noFill/>
+          <a:ln/>
+        </p:spPr>
+        <p:txBody>
+          <a:bodyPr wrap="square" lIns="0" tIns="0" rIns="0" bIns="0" rtlCol="0" anchor="ctr"/>
+          <a:lstStyle/>
+          <a:p>
+            <a:pPr algn="r" indent="0" marL="0">
+              <a:buNone/>
+            </a:pPr>
+            <a:r>
+              <a:rPr lang="en-US" sz="1300" dirty="0">
+                <a:solidFill>
+                  <a:srgbClr val="1A1A1A"/>
+                </a:solidFill>
+                <a:latin typeface="Inter" pitchFamily="34" charset="0"/>
+                <a:ea typeface="Inter" pitchFamily="34" charset="-122"/>
+                <a:cs typeface="Inter" pitchFamily="34" charset="-120"/>
+              </a:rPr>
+              <a:t>2</a:t>
+            </a:r>
+            <a:endParaRPr lang="en-US" sz="1300" dirty="0"/>
+          </a:p>
+        </p:txBody>
+      </p:sp>
+      <p:sp>
+        <p:nvSpPr>
+          <p:cNvPr id="111" name="Text 109"/>
+          <p:cNvSpPr txBox="1"/>
+          <p:nvPr/>
+        </p:nvSpPr>
+        <p:spPr>
+          <a:xfrm>
+            <a:off x="4462272" y="5053584"/>
+            <a:ext cx="502920" cy="335280"/>
+          </a:xfrm>
+          <a:prstGeom prst="rect">
+            <a:avLst/>
+          </a:prstGeom>
+          <a:noFill/>
+          <a:ln/>
+        </p:spPr>
+        <p:txBody>
+          <a:bodyPr wrap="square" lIns="0" tIns="0" rIns="0" bIns="0" rtlCol="0" anchor="ctr"/>
+          <a:lstStyle/>
+          <a:p>
+            <a:pPr algn="r" indent="0" marL="0">
+              <a:buNone/>
+            </a:pPr>
+            <a:r>
+              <a:rPr lang="en-US" sz="1300" dirty="0">
+                <a:solidFill>
+                  <a:srgbClr val="1A1A1A"/>
+                </a:solidFill>
+                <a:latin typeface="Inter" pitchFamily="34" charset="0"/>
+                <a:ea typeface="Inter" pitchFamily="34" charset="-122"/>
+                <a:cs typeface="Inter" pitchFamily="34" charset="-120"/>
+              </a:rPr>
+              <a:t>1</a:t>
+            </a:r>
+            <a:endParaRPr lang="en-US" sz="1300" dirty="0"/>
+          </a:p>
+        </p:txBody>
+      </p:sp>
+      <p:sp>
+        <p:nvSpPr>
+          <p:cNvPr id="112" name="Text 110"/>
+          <p:cNvSpPr txBox="1"/>
+          <p:nvPr/>
+        </p:nvSpPr>
+        <p:spPr>
+          <a:xfrm>
+            <a:off x="4965192" y="5053584"/>
+            <a:ext cx="502920" cy="335280"/>
+          </a:xfrm>
+          <a:prstGeom prst="rect">
+            <a:avLst/>
+          </a:prstGeom>
+          <a:noFill/>
+          <a:ln/>
+        </p:spPr>
+        <p:txBody>
+          <a:bodyPr wrap="square" lIns="0" tIns="0" rIns="0" bIns="0" rtlCol="0" anchor="ctr"/>
+          <a:lstStyle/>
+          <a:p>
+            <a:pPr algn="r" indent="0" marL="0">
+              <a:buNone/>
+            </a:pPr>
+            <a:r>
+              <a:rPr lang="en-US" sz="1300" dirty="0">
+                <a:solidFill>
+                  <a:srgbClr val="1A1A1A"/>
+                </a:solidFill>
+                <a:latin typeface="Inter" pitchFamily="34" charset="0"/>
+                <a:ea typeface="Inter" pitchFamily="34" charset="-122"/>
+                <a:cs typeface="Inter" pitchFamily="34" charset="-120"/>
+              </a:rPr>
+              <a:t>1</a:t>
+            </a:r>
+            <a:endParaRPr lang="en-US" sz="1300" dirty="0"/>
+          </a:p>
+        </p:txBody>
+      </p:sp>
+      <p:sp>
+        <p:nvSpPr>
+          <p:cNvPr id="113" name="Text 111"/>
+          <p:cNvSpPr txBox="1"/>
+          <p:nvPr/>
+        </p:nvSpPr>
+        <p:spPr>
+          <a:xfrm>
+            <a:off x="5468112" y="5053584"/>
+            <a:ext cx="548640" cy="335280"/>
+          </a:xfrm>
+          <a:prstGeom prst="rect">
+            <a:avLst/>
+          </a:prstGeom>
+          <a:noFill/>
+          <a:ln/>
+        </p:spPr>
+        <p:txBody>
+          <a:bodyPr wrap="square" lIns="0" tIns="0" rIns="0" bIns="0" rtlCol="0" anchor="ctr"/>
+          <a:lstStyle/>
+          <a:p>
+            <a:pPr algn="r" indent="0" marL="0">
+              <a:buNone/>
+            </a:pPr>
+            <a:r>
+              <a:rPr lang="en-US" sz="1300" b="1" dirty="0">
+                <a:solidFill>
+                  <a:srgbClr val="1A1A1A"/>
+                </a:solidFill>
+                <a:latin typeface="Inter" pitchFamily="34" charset="0"/>
+                <a:ea typeface="Inter" pitchFamily="34" charset="-122"/>
+                <a:cs typeface="Inter" pitchFamily="34" charset="-120"/>
+              </a:rPr>
+              <a:t>4</a:t>
+            </a:r>
+            <a:endParaRPr lang="en-US" sz="1300" dirty="0"/>
+          </a:p>
+        </p:txBody>
+      </p:sp>
+      <p:sp>
+        <p:nvSpPr>
+          <p:cNvPr id="114" name="Text 112"/>
+          <p:cNvSpPr txBox="1"/>
+          <p:nvPr/>
+        </p:nvSpPr>
+        <p:spPr>
+          <a:xfrm>
+            <a:off x="658368" y="5388864"/>
+            <a:ext cx="1938528" cy="335280"/>
+          </a:xfrm>
+          <a:prstGeom prst="rect">
+            <a:avLst/>
+          </a:prstGeom>
+          <a:noFill/>
+          <a:ln/>
+        </p:spPr>
+        <p:txBody>
+          <a:bodyPr wrap="square" lIns="0" tIns="0" rIns="0" bIns="0" rtlCol="0" anchor="ctr"/>
+          <a:lstStyle/>
+          <a:p>
+            <a:pPr indent="0" marL="0">
+              <a:buNone/>
+            </a:pPr>
+            <a:r>
+              <a:rPr lang="en-US" sz="1300" dirty="0">
+                <a:solidFill>
+                  <a:srgbClr val="1A1A1A"/>
+                </a:solidFill>
+                <a:latin typeface="Inter" pitchFamily="34" charset="0"/>
+                <a:ea typeface="Inter" pitchFamily="34" charset="-122"/>
+                <a:cs typeface="Inter" pitchFamily="34" charset="-120"/>
+              </a:rPr>
+              <a:t>TOYOTA FLAGSTAFF</a:t>
+            </a:r>
+            <a:endParaRPr lang="en-US" sz="1300" dirty="0"/>
+          </a:p>
+        </p:txBody>
+      </p:sp>
+      <p:sp>
+        <p:nvSpPr>
+          <p:cNvPr id="115" name="Shape 113"/>
+          <p:cNvSpPr/>
+          <p:nvPr/>
+        </p:nvSpPr>
+        <p:spPr>
+          <a:xfrm>
+            <a:off x="2670048" y="5464302"/>
+            <a:ext cx="405384" cy="184404"/>
+          </a:xfrm>
+          <a:prstGeom prst="rect">
+            <a:avLst/>
+          </a:prstGeom>
+          <a:solidFill>
+            <a:srgbClr val="0B7A4A"/>
+          </a:solidFill>
+          <a:ln w="9525">
+            <a:solidFill>
+              <a:srgbClr val="FFFFFF"/>
+            </a:solidFill>
+            <a:prstDash val="solid"/>
+          </a:ln>
+        </p:spPr>
+      </p:sp>
+      <p:sp>
+        <p:nvSpPr>
+          <p:cNvPr id="116" name="Shape 114"/>
+          <p:cNvSpPr/>
+          <p:nvPr/>
+        </p:nvSpPr>
+        <p:spPr>
+          <a:xfrm>
+            <a:off x="3075432" y="5464302"/>
+            <a:ext cx="135128" cy="184404"/>
+          </a:xfrm>
+          <a:prstGeom prst="rect">
+            <a:avLst/>
+          </a:prstGeom>
+          <a:solidFill>
+            <a:srgbClr val="8ED3B0"/>
+          </a:solidFill>
+          <a:ln w="9525">
+            <a:solidFill>
+              <a:srgbClr val="FFFFFF"/>
+            </a:solidFill>
+            <a:prstDash val="solid"/>
+          </a:ln>
+        </p:spPr>
+      </p:sp>
+      <p:sp>
+        <p:nvSpPr>
+          <p:cNvPr id="117" name="Text 115"/>
+          <p:cNvSpPr txBox="1"/>
+          <p:nvPr/>
+        </p:nvSpPr>
+        <p:spPr>
+          <a:xfrm>
+            <a:off x="3959352" y="5388864"/>
+            <a:ext cx="502920" cy="335280"/>
+          </a:xfrm>
+          <a:prstGeom prst="rect">
+            <a:avLst/>
+          </a:prstGeom>
+          <a:noFill/>
+          <a:ln/>
+        </p:spPr>
+        <p:txBody>
+          <a:bodyPr wrap="square" lIns="0" tIns="0" rIns="0" bIns="0" rtlCol="0" anchor="ctr"/>
+          <a:lstStyle/>
+          <a:p>
+            <a:pPr algn="r" indent="0" marL="0">
+              <a:buNone/>
+            </a:pPr>
+            <a:r>
+              <a:rPr lang="en-US" sz="1300" dirty="0">
+                <a:solidFill>
+                  <a:srgbClr val="1A1A1A"/>
+                </a:solidFill>
+                <a:latin typeface="Inter" pitchFamily="34" charset="0"/>
+                <a:ea typeface="Inter" pitchFamily="34" charset="-122"/>
+                <a:cs typeface="Inter" pitchFamily="34" charset="-120"/>
+              </a:rPr>
+              <a:t>3</a:t>
+            </a:r>
+            <a:endParaRPr lang="en-US" sz="1300" dirty="0"/>
+          </a:p>
+        </p:txBody>
+      </p:sp>
+      <p:sp>
+        <p:nvSpPr>
+          <p:cNvPr id="118" name="Text 116"/>
+          <p:cNvSpPr txBox="1"/>
+          <p:nvPr/>
+        </p:nvSpPr>
+        <p:spPr>
+          <a:xfrm>
+            <a:off x="4462272" y="5388864"/>
+            <a:ext cx="502920" cy="335280"/>
+          </a:xfrm>
+          <a:prstGeom prst="rect">
+            <a:avLst/>
+          </a:prstGeom>
+          <a:noFill/>
+          <a:ln/>
+        </p:spPr>
+        <p:txBody>
+          <a:bodyPr wrap="square" lIns="0" tIns="0" rIns="0" bIns="0" rtlCol="0" anchor="ctr"/>
+          <a:lstStyle/>
+          <a:p>
+            <a:pPr algn="r" indent="0" marL="0">
+              <a:buNone/>
+            </a:pPr>
+            <a:r>
+              <a:rPr lang="en-US" sz="1300" dirty="0">
+                <a:solidFill>
+                  <a:srgbClr val="9AA3AD"/>
+                </a:solidFill>
+                <a:latin typeface="Inter" pitchFamily="34" charset="0"/>
+                <a:ea typeface="Inter" pitchFamily="34" charset="-122"/>
+                <a:cs typeface="Inter" pitchFamily="34" charset="-120"/>
+              </a:rPr>
+              <a:t>–</a:t>
+            </a:r>
+            <a:endParaRPr lang="en-US" sz="1300" dirty="0"/>
+          </a:p>
+        </p:txBody>
+      </p:sp>
+      <p:sp>
+        <p:nvSpPr>
+          <p:cNvPr id="119" name="Text 117"/>
+          <p:cNvSpPr txBox="1"/>
+          <p:nvPr/>
+        </p:nvSpPr>
+        <p:spPr>
+          <a:xfrm>
+            <a:off x="4965192" y="5388864"/>
+            <a:ext cx="502920" cy="335280"/>
+          </a:xfrm>
+          <a:prstGeom prst="rect">
+            <a:avLst/>
+          </a:prstGeom>
+          <a:noFill/>
+          <a:ln/>
+        </p:spPr>
+        <p:txBody>
+          <a:bodyPr wrap="square" lIns="0" tIns="0" rIns="0" bIns="0" rtlCol="0" anchor="ctr"/>
+          <a:lstStyle/>
+          <a:p>
+            <a:pPr algn="r" indent="0" marL="0">
+              <a:buNone/>
+            </a:pPr>
+            <a:r>
+              <a:rPr lang="en-US" sz="1300" dirty="0">
+                <a:solidFill>
+                  <a:srgbClr val="1A1A1A"/>
+                </a:solidFill>
+                <a:latin typeface="Inter" pitchFamily="34" charset="0"/>
+                <a:ea typeface="Inter" pitchFamily="34" charset="-122"/>
+                <a:cs typeface="Inter" pitchFamily="34" charset="-120"/>
+              </a:rPr>
+              <a:t>1</a:t>
+            </a:r>
+            <a:endParaRPr lang="en-US" sz="1300" dirty="0"/>
+          </a:p>
+        </p:txBody>
+      </p:sp>
+      <p:sp>
+        <p:nvSpPr>
+          <p:cNvPr id="120" name="Text 118"/>
+          <p:cNvSpPr txBox="1"/>
+          <p:nvPr/>
+        </p:nvSpPr>
+        <p:spPr>
+          <a:xfrm>
+            <a:off x="5468112" y="5388864"/>
+            <a:ext cx="548640" cy="335280"/>
+          </a:xfrm>
+          <a:prstGeom prst="rect">
+            <a:avLst/>
+          </a:prstGeom>
+          <a:noFill/>
+          <a:ln/>
+        </p:spPr>
+        <p:txBody>
+          <a:bodyPr wrap="square" lIns="0" tIns="0" rIns="0" bIns="0" rtlCol="0" anchor="ctr"/>
+          <a:lstStyle/>
+          <a:p>
+            <a:pPr algn="r" indent="0" marL="0">
+              <a:buNone/>
+            </a:pPr>
+            <a:r>
+              <a:rPr lang="en-US" sz="1300" b="1" dirty="0">
+                <a:solidFill>
+                  <a:srgbClr val="1A1A1A"/>
+                </a:solidFill>
+                <a:latin typeface="Inter" pitchFamily="34" charset="0"/>
+                <a:ea typeface="Inter" pitchFamily="34" charset="-122"/>
+                <a:cs typeface="Inter" pitchFamily="34" charset="-120"/>
+              </a:rPr>
+              <a:t>4</a:t>
+            </a:r>
+            <a:endParaRPr lang="en-US" sz="1300" dirty="0"/>
+          </a:p>
+        </p:txBody>
+      </p:sp>
+      <p:sp>
+        <p:nvSpPr>
+          <p:cNvPr id="121" name="Text 119"/>
+          <p:cNvSpPr txBox="1"/>
+          <p:nvPr/>
+        </p:nvSpPr>
+        <p:spPr>
+          <a:xfrm>
+            <a:off x="6208776" y="1700784"/>
+            <a:ext cx="1938528" cy="335280"/>
+          </a:xfrm>
+          <a:prstGeom prst="rect">
+            <a:avLst/>
+          </a:prstGeom>
+          <a:noFill/>
+          <a:ln/>
+        </p:spPr>
+        <p:txBody>
+          <a:bodyPr wrap="square" lIns="0" tIns="0" rIns="0" bIns="0" rtlCol="0" anchor="ctr"/>
+          <a:lstStyle/>
+          <a:p>
+            <a:pPr indent="0" marL="0">
+              <a:buNone/>
+            </a:pPr>
+            <a:r>
+              <a:rPr lang="en-US" sz="1300" dirty="0">
+                <a:solidFill>
+                  <a:srgbClr val="1A1A1A"/>
+                </a:solidFill>
+                <a:latin typeface="Inter" pitchFamily="34" charset="0"/>
+                <a:ea typeface="Inter" pitchFamily="34" charset="-122"/>
+                <a:cs typeface="Inter" pitchFamily="34" charset="-120"/>
+              </a:rPr>
+              <a:t>TOYOTA PRESCOTT</a:t>
+            </a:r>
+            <a:endParaRPr lang="en-US" sz="1300" dirty="0"/>
+          </a:p>
+        </p:txBody>
+      </p:sp>
+      <p:sp>
+        <p:nvSpPr>
+          <p:cNvPr id="122" name="Shape 120"/>
+          <p:cNvSpPr/>
+          <p:nvPr/>
+        </p:nvSpPr>
+        <p:spPr>
+          <a:xfrm>
+            <a:off x="8220456" y="1776222"/>
+            <a:ext cx="270256" cy="184404"/>
+          </a:xfrm>
+          <a:prstGeom prst="rect">
+            <a:avLst/>
+          </a:prstGeom>
+          <a:solidFill>
+            <a:srgbClr val="0B7A4A"/>
+          </a:solidFill>
+          <a:ln w="9525">
+            <a:solidFill>
+              <a:srgbClr val="FFFFFF"/>
+            </a:solidFill>
+            <a:prstDash val="solid"/>
+          </a:ln>
+        </p:spPr>
+      </p:sp>
+      <p:sp>
+        <p:nvSpPr>
+          <p:cNvPr id="123" name="Shape 121"/>
+          <p:cNvSpPr/>
+          <p:nvPr/>
+        </p:nvSpPr>
+        <p:spPr>
+          <a:xfrm>
+            <a:off x="8490712" y="1776222"/>
+            <a:ext cx="135128" cy="184404"/>
+          </a:xfrm>
+          <a:prstGeom prst="rect">
+            <a:avLst/>
+          </a:prstGeom>
+          <a:solidFill>
+            <a:srgbClr val="12A566"/>
+          </a:solidFill>
+          <a:ln w="9525">
+            <a:solidFill>
+              <a:srgbClr val="FFFFFF"/>
+            </a:solidFill>
+            <a:prstDash val="solid"/>
+          </a:ln>
+        </p:spPr>
+      </p:sp>
+      <p:sp>
+        <p:nvSpPr>
+          <p:cNvPr id="124" name="Shape 122"/>
+          <p:cNvSpPr/>
+          <p:nvPr/>
+        </p:nvSpPr>
+        <p:spPr>
+          <a:xfrm>
+            <a:off x="8625840" y="1776222"/>
+            <a:ext cx="135128" cy="184404"/>
+          </a:xfrm>
+          <a:prstGeom prst="rect">
+            <a:avLst/>
+          </a:prstGeom>
+          <a:solidFill>
+            <a:srgbClr val="8ED3B0"/>
+          </a:solidFill>
+          <a:ln w="9525">
+            <a:solidFill>
+              <a:srgbClr val="FFFFFF"/>
+            </a:solidFill>
+            <a:prstDash val="solid"/>
+          </a:ln>
+        </p:spPr>
+      </p:sp>
+      <p:sp>
+        <p:nvSpPr>
+          <p:cNvPr id="125" name="Text 123"/>
+          <p:cNvSpPr txBox="1"/>
+          <p:nvPr/>
+        </p:nvSpPr>
+        <p:spPr>
+          <a:xfrm>
+            <a:off x="9509760" y="1700784"/>
+            <a:ext cx="502920" cy="335280"/>
+          </a:xfrm>
+          <a:prstGeom prst="rect">
+            <a:avLst/>
+          </a:prstGeom>
+          <a:noFill/>
+          <a:ln/>
+        </p:spPr>
+        <p:txBody>
+          <a:bodyPr wrap="square" lIns="0" tIns="0" rIns="0" bIns="0" rtlCol="0" anchor="ctr"/>
+          <a:lstStyle/>
+          <a:p>
+            <a:pPr algn="r" indent="0" marL="0">
+              <a:buNone/>
+            </a:pPr>
+            <a:r>
+              <a:rPr lang="en-US" sz="1300" dirty="0">
+                <a:solidFill>
+                  <a:srgbClr val="1A1A1A"/>
+                </a:solidFill>
+                <a:latin typeface="Inter" pitchFamily="34" charset="0"/>
+                <a:ea typeface="Inter" pitchFamily="34" charset="-122"/>
+                <a:cs typeface="Inter" pitchFamily="34" charset="-120"/>
+              </a:rPr>
+              <a:t>2</a:t>
+            </a:r>
+            <a:endParaRPr lang="en-US" sz="1300" dirty="0"/>
+          </a:p>
+        </p:txBody>
+      </p:sp>
+      <p:sp>
+        <p:nvSpPr>
+          <p:cNvPr id="126" name="Text 124"/>
+          <p:cNvSpPr txBox="1"/>
+          <p:nvPr/>
+        </p:nvSpPr>
+        <p:spPr>
+          <a:xfrm>
+            <a:off x="10012680" y="1700784"/>
+            <a:ext cx="502920" cy="335280"/>
+          </a:xfrm>
+          <a:prstGeom prst="rect">
+            <a:avLst/>
+          </a:prstGeom>
+          <a:noFill/>
+          <a:ln/>
+        </p:spPr>
+        <p:txBody>
+          <a:bodyPr wrap="square" lIns="0" tIns="0" rIns="0" bIns="0" rtlCol="0" anchor="ctr"/>
+          <a:lstStyle/>
+          <a:p>
+            <a:pPr algn="r" indent="0" marL="0">
+              <a:buNone/>
+            </a:pPr>
+            <a:r>
+              <a:rPr lang="en-US" sz="1300" dirty="0">
+                <a:solidFill>
+                  <a:srgbClr val="1A1A1A"/>
+                </a:solidFill>
+                <a:latin typeface="Inter" pitchFamily="34" charset="0"/>
+                <a:ea typeface="Inter" pitchFamily="34" charset="-122"/>
+                <a:cs typeface="Inter" pitchFamily="34" charset="-120"/>
+              </a:rPr>
+              <a:t>1</a:t>
+            </a:r>
+            <a:endParaRPr lang="en-US" sz="1300" dirty="0"/>
+          </a:p>
+        </p:txBody>
+      </p:sp>
+      <p:sp>
+        <p:nvSpPr>
+          <p:cNvPr id="127" name="Text 125"/>
+          <p:cNvSpPr txBox="1"/>
+          <p:nvPr/>
+        </p:nvSpPr>
+        <p:spPr>
+          <a:xfrm>
+            <a:off x="10515600" y="1700784"/>
+            <a:ext cx="502920" cy="335280"/>
+          </a:xfrm>
+          <a:prstGeom prst="rect">
+            <a:avLst/>
+          </a:prstGeom>
+          <a:noFill/>
+          <a:ln/>
+        </p:spPr>
+        <p:txBody>
+          <a:bodyPr wrap="square" lIns="0" tIns="0" rIns="0" bIns="0" rtlCol="0" anchor="ctr"/>
+          <a:lstStyle/>
+          <a:p>
+            <a:pPr algn="r" indent="0" marL="0">
+              <a:buNone/>
+            </a:pPr>
+            <a:r>
+              <a:rPr lang="en-US" sz="1300" dirty="0">
+                <a:solidFill>
+                  <a:srgbClr val="1A1A1A"/>
+                </a:solidFill>
+                <a:latin typeface="Inter" pitchFamily="34" charset="0"/>
+                <a:ea typeface="Inter" pitchFamily="34" charset="-122"/>
+                <a:cs typeface="Inter" pitchFamily="34" charset="-120"/>
+              </a:rPr>
+              <a:t>1</a:t>
+            </a:r>
+            <a:endParaRPr lang="en-US" sz="1300" dirty="0"/>
+          </a:p>
+        </p:txBody>
+      </p:sp>
+      <p:sp>
+        <p:nvSpPr>
+          <p:cNvPr id="128" name="Text 126"/>
+          <p:cNvSpPr txBox="1"/>
+          <p:nvPr/>
+        </p:nvSpPr>
+        <p:spPr>
+          <a:xfrm>
+            <a:off x="11018520" y="1700784"/>
+            <a:ext cx="548640" cy="335280"/>
+          </a:xfrm>
+          <a:prstGeom prst="rect">
+            <a:avLst/>
+          </a:prstGeom>
+          <a:noFill/>
+          <a:ln/>
+        </p:spPr>
+        <p:txBody>
+          <a:bodyPr wrap="square" lIns="0" tIns="0" rIns="0" bIns="0" rtlCol="0" anchor="ctr"/>
+          <a:lstStyle/>
+          <a:p>
+            <a:pPr algn="r" indent="0" marL="0">
+              <a:buNone/>
+            </a:pPr>
+            <a:r>
+              <a:rPr lang="en-US" sz="1300" b="1" dirty="0">
+                <a:solidFill>
+                  <a:srgbClr val="1A1A1A"/>
+                </a:solidFill>
+                <a:latin typeface="Inter" pitchFamily="34" charset="0"/>
+                <a:ea typeface="Inter" pitchFamily="34" charset="-122"/>
+                <a:cs typeface="Inter" pitchFamily="34" charset="-120"/>
+              </a:rPr>
+              <a:t>4</a:t>
+            </a:r>
+            <a:endParaRPr lang="en-US" sz="1300" dirty="0"/>
+          </a:p>
+        </p:txBody>
+      </p:sp>
+      <p:sp>
+        <p:nvSpPr>
+          <p:cNvPr id="129" name="Text 127"/>
+          <p:cNvSpPr txBox="1"/>
+          <p:nvPr/>
+        </p:nvSpPr>
+        <p:spPr>
+          <a:xfrm>
+            <a:off x="6208776" y="2036064"/>
+            <a:ext cx="1938528" cy="335280"/>
+          </a:xfrm>
+          <a:prstGeom prst="rect">
+            <a:avLst/>
+          </a:prstGeom>
+          <a:noFill/>
+          <a:ln/>
+        </p:spPr>
+        <p:txBody>
+          <a:bodyPr wrap="square" lIns="0" tIns="0" rIns="0" bIns="0" rtlCol="0" anchor="ctr"/>
+          <a:lstStyle/>
+          <a:p>
+            <a:pPr indent="0" marL="0">
+              <a:buNone/>
+            </a:pPr>
+            <a:r>
+              <a:rPr lang="en-US" sz="1300" dirty="0">
+                <a:solidFill>
+                  <a:srgbClr val="1A1A1A"/>
+                </a:solidFill>
+                <a:latin typeface="Inter" pitchFamily="34" charset="0"/>
+                <a:ea typeface="Inter" pitchFamily="34" charset="-122"/>
+                <a:cs typeface="Inter" pitchFamily="34" charset="-120"/>
+              </a:rPr>
+              <a:t>HYUNDAI ST GEORGE</a:t>
+            </a:r>
+            <a:endParaRPr lang="en-US" sz="1300" dirty="0"/>
+          </a:p>
+        </p:txBody>
+      </p:sp>
+      <p:sp>
+        <p:nvSpPr>
+          <p:cNvPr id="130" name="Shape 128"/>
+          <p:cNvSpPr/>
+          <p:nvPr/>
+        </p:nvSpPr>
+        <p:spPr>
+          <a:xfrm>
+            <a:off x="8220456" y="2111502"/>
+            <a:ext cx="540512" cy="184404"/>
+          </a:xfrm>
+          <a:prstGeom prst="rect">
+            <a:avLst/>
+          </a:prstGeom>
+          <a:solidFill>
+            <a:srgbClr val="0B7A4A"/>
+          </a:solidFill>
+          <a:ln w="9525">
+            <a:solidFill>
+              <a:srgbClr val="FFFFFF"/>
+            </a:solidFill>
+            <a:prstDash val="solid"/>
+          </a:ln>
+        </p:spPr>
+      </p:sp>
+      <p:sp>
+        <p:nvSpPr>
+          <p:cNvPr id="131" name="Text 129"/>
+          <p:cNvSpPr txBox="1"/>
+          <p:nvPr/>
+        </p:nvSpPr>
+        <p:spPr>
+          <a:xfrm>
+            <a:off x="9509760" y="2036064"/>
+            <a:ext cx="502920" cy="335280"/>
+          </a:xfrm>
+          <a:prstGeom prst="rect">
+            <a:avLst/>
+          </a:prstGeom>
+          <a:noFill/>
+          <a:ln/>
+        </p:spPr>
+        <p:txBody>
+          <a:bodyPr wrap="square" lIns="0" tIns="0" rIns="0" bIns="0" rtlCol="0" anchor="ctr"/>
+          <a:lstStyle/>
+          <a:p>
+            <a:pPr algn="r" indent="0" marL="0">
+              <a:buNone/>
+            </a:pPr>
+            <a:r>
+              <a:rPr lang="en-US" sz="1300" dirty="0">
+                <a:solidFill>
+                  <a:srgbClr val="1A1A1A"/>
+                </a:solidFill>
+                <a:latin typeface="Inter" pitchFamily="34" charset="0"/>
+                <a:ea typeface="Inter" pitchFamily="34" charset="-122"/>
+                <a:cs typeface="Inter" pitchFamily="34" charset="-120"/>
+              </a:rPr>
+              <a:t>4</a:t>
+            </a:r>
+            <a:endParaRPr lang="en-US" sz="1300" dirty="0"/>
+          </a:p>
+        </p:txBody>
+      </p:sp>
+      <p:sp>
+        <p:nvSpPr>
+          <p:cNvPr id="132" name="Text 130"/>
+          <p:cNvSpPr txBox="1"/>
+          <p:nvPr/>
+        </p:nvSpPr>
+        <p:spPr>
+          <a:xfrm>
+            <a:off x="10012680" y="2036064"/>
+            <a:ext cx="502920" cy="335280"/>
+          </a:xfrm>
+          <a:prstGeom prst="rect">
+            <a:avLst/>
+          </a:prstGeom>
+          <a:noFill/>
+          <a:ln/>
+        </p:spPr>
+        <p:txBody>
+          <a:bodyPr wrap="square" lIns="0" tIns="0" rIns="0" bIns="0" rtlCol="0" anchor="ctr"/>
+          <a:lstStyle/>
+          <a:p>
+            <a:pPr algn="r" indent="0" marL="0">
+              <a:buNone/>
+            </a:pPr>
+            <a:r>
+              <a:rPr lang="en-US" sz="1300" dirty="0">
+                <a:solidFill>
+                  <a:srgbClr val="9AA3AD"/>
+                </a:solidFill>
+                <a:latin typeface="Inter" pitchFamily="34" charset="0"/>
+                <a:ea typeface="Inter" pitchFamily="34" charset="-122"/>
+                <a:cs typeface="Inter" pitchFamily="34" charset="-120"/>
+              </a:rPr>
+              <a:t>–</a:t>
+            </a:r>
+            <a:endParaRPr lang="en-US" sz="1300" dirty="0"/>
+          </a:p>
+        </p:txBody>
+      </p:sp>
+      <p:sp>
+        <p:nvSpPr>
+          <p:cNvPr id="133" name="Text 131"/>
+          <p:cNvSpPr txBox="1"/>
+          <p:nvPr/>
+        </p:nvSpPr>
+        <p:spPr>
+          <a:xfrm>
+            <a:off x="10515600" y="2036064"/>
+            <a:ext cx="502920" cy="335280"/>
+          </a:xfrm>
+          <a:prstGeom prst="rect">
+            <a:avLst/>
+          </a:prstGeom>
+          <a:noFill/>
+          <a:ln/>
+        </p:spPr>
+        <p:txBody>
+          <a:bodyPr wrap="square" lIns="0" tIns="0" rIns="0" bIns="0" rtlCol="0" anchor="ctr"/>
+          <a:lstStyle/>
+          <a:p>
+            <a:pPr algn="r" indent="0" marL="0">
+              <a:buNone/>
+            </a:pPr>
+            <a:r>
+              <a:rPr lang="en-US" sz="1300" dirty="0">
+                <a:solidFill>
+                  <a:srgbClr val="9AA3AD"/>
+                </a:solidFill>
+                <a:latin typeface="Inter" pitchFamily="34" charset="0"/>
+                <a:ea typeface="Inter" pitchFamily="34" charset="-122"/>
+                <a:cs typeface="Inter" pitchFamily="34" charset="-120"/>
+              </a:rPr>
+              <a:t>–</a:t>
+            </a:r>
+            <a:endParaRPr lang="en-US" sz="1300" dirty="0"/>
+          </a:p>
+        </p:txBody>
+      </p:sp>
+      <p:sp>
+        <p:nvSpPr>
+          <p:cNvPr id="134" name="Text 132"/>
+          <p:cNvSpPr txBox="1"/>
+          <p:nvPr/>
+        </p:nvSpPr>
+        <p:spPr>
+          <a:xfrm>
+            <a:off x="11018520" y="2036064"/>
+            <a:ext cx="548640" cy="335280"/>
+          </a:xfrm>
+          <a:prstGeom prst="rect">
+            <a:avLst/>
+          </a:prstGeom>
+          <a:noFill/>
+          <a:ln/>
+        </p:spPr>
+        <p:txBody>
+          <a:bodyPr wrap="square" lIns="0" tIns="0" rIns="0" bIns="0" rtlCol="0" anchor="ctr"/>
+          <a:lstStyle/>
+          <a:p>
+            <a:pPr algn="r" indent="0" marL="0">
+              <a:buNone/>
+            </a:pPr>
+            <a:r>
+              <a:rPr lang="en-US" sz="1300" b="1" dirty="0">
+                <a:solidFill>
+                  <a:srgbClr val="1A1A1A"/>
+                </a:solidFill>
+                <a:latin typeface="Inter" pitchFamily="34" charset="0"/>
+                <a:ea typeface="Inter" pitchFamily="34" charset="-122"/>
+                <a:cs typeface="Inter" pitchFamily="34" charset="-120"/>
+              </a:rPr>
+              <a:t>4</a:t>
+            </a:r>
+            <a:endParaRPr lang="en-US" sz="1300" dirty="0"/>
+          </a:p>
+        </p:txBody>
+      </p:sp>
+      <p:sp>
+        <p:nvSpPr>
+          <p:cNvPr id="135" name="Text 133"/>
+          <p:cNvSpPr txBox="1"/>
+          <p:nvPr/>
+        </p:nvSpPr>
+        <p:spPr>
+          <a:xfrm>
+            <a:off x="6208776" y="2371344"/>
+            <a:ext cx="1938528" cy="335280"/>
+          </a:xfrm>
+          <a:prstGeom prst="rect">
+            <a:avLst/>
+          </a:prstGeom>
+          <a:noFill/>
+          <a:ln/>
+        </p:spPr>
+        <p:txBody>
+          <a:bodyPr wrap="square" lIns="0" tIns="0" rIns="0" bIns="0" rtlCol="0" anchor="ctr"/>
+          <a:lstStyle/>
+          <a:p>
+            <a:pPr indent="0" marL="0">
+              <a:buNone/>
+            </a:pPr>
+            <a:r>
+              <a:rPr lang="en-US" sz="1300" dirty="0">
+                <a:solidFill>
+                  <a:srgbClr val="1A1A1A"/>
+                </a:solidFill>
+                <a:latin typeface="Inter" pitchFamily="34" charset="0"/>
+                <a:ea typeface="Inter" pitchFamily="34" charset="-122"/>
+                <a:cs typeface="Inter" pitchFamily="34" charset="-120"/>
+              </a:rPr>
+              <a:t>AUDI HENDERSON</a:t>
+            </a:r>
+            <a:endParaRPr lang="en-US" sz="1300" dirty="0"/>
+          </a:p>
+        </p:txBody>
+      </p:sp>
+      <p:sp>
+        <p:nvSpPr>
+          <p:cNvPr id="136" name="Shape 134"/>
+          <p:cNvSpPr/>
+          <p:nvPr/>
+        </p:nvSpPr>
+        <p:spPr>
+          <a:xfrm>
+            <a:off x="8220456" y="2446782"/>
+            <a:ext cx="135128" cy="184404"/>
+          </a:xfrm>
+          <a:prstGeom prst="rect">
+            <a:avLst/>
+          </a:prstGeom>
+          <a:solidFill>
+            <a:srgbClr val="12A566"/>
+          </a:solidFill>
+          <a:ln w="9525">
+            <a:solidFill>
+              <a:srgbClr val="FFFFFF"/>
+            </a:solidFill>
+            <a:prstDash val="solid"/>
+          </a:ln>
+        </p:spPr>
+      </p:sp>
+      <p:sp>
+        <p:nvSpPr>
+          <p:cNvPr id="137" name="Shape 135"/>
+          <p:cNvSpPr/>
+          <p:nvPr/>
+        </p:nvSpPr>
+        <p:spPr>
+          <a:xfrm>
+            <a:off x="8355584" y="2446782"/>
+            <a:ext cx="270256" cy="184404"/>
+          </a:xfrm>
+          <a:prstGeom prst="rect">
+            <a:avLst/>
+          </a:prstGeom>
+          <a:solidFill>
+            <a:srgbClr val="8ED3B0"/>
+          </a:solidFill>
+          <a:ln w="9525">
+            <a:solidFill>
+              <a:srgbClr val="FFFFFF"/>
+            </a:solidFill>
+            <a:prstDash val="solid"/>
+          </a:ln>
+        </p:spPr>
+      </p:sp>
+      <p:sp>
+        <p:nvSpPr>
+          <p:cNvPr id="138" name="Text 136"/>
+          <p:cNvSpPr txBox="1"/>
+          <p:nvPr/>
+        </p:nvSpPr>
+        <p:spPr>
+          <a:xfrm>
+            <a:off x="9509760" y="2371344"/>
+            <a:ext cx="502920" cy="335280"/>
+          </a:xfrm>
+          <a:prstGeom prst="rect">
+            <a:avLst/>
+          </a:prstGeom>
+          <a:noFill/>
+          <a:ln/>
+        </p:spPr>
+        <p:txBody>
+          <a:bodyPr wrap="square" lIns="0" tIns="0" rIns="0" bIns="0" rtlCol="0" anchor="ctr"/>
+          <a:lstStyle/>
+          <a:p>
+            <a:pPr algn="r" indent="0" marL="0">
+              <a:buNone/>
+            </a:pPr>
+            <a:r>
+              <a:rPr lang="en-US" sz="1300" dirty="0">
+                <a:solidFill>
+                  <a:srgbClr val="9AA3AD"/>
+                </a:solidFill>
+                <a:latin typeface="Inter" pitchFamily="34" charset="0"/>
+                <a:ea typeface="Inter" pitchFamily="34" charset="-122"/>
+                <a:cs typeface="Inter" pitchFamily="34" charset="-120"/>
+              </a:rPr>
+              <a:t>–</a:t>
+            </a:r>
+            <a:endParaRPr lang="en-US" sz="1300" dirty="0"/>
+          </a:p>
+        </p:txBody>
+      </p:sp>
+      <p:sp>
+        <p:nvSpPr>
+          <p:cNvPr id="139" name="Text 137"/>
+          <p:cNvSpPr txBox="1"/>
+          <p:nvPr/>
+        </p:nvSpPr>
+        <p:spPr>
+          <a:xfrm>
+            <a:off x="10012680" y="2371344"/>
+            <a:ext cx="502920" cy="335280"/>
+          </a:xfrm>
+          <a:prstGeom prst="rect">
+            <a:avLst/>
+          </a:prstGeom>
+          <a:noFill/>
+          <a:ln/>
+        </p:spPr>
+        <p:txBody>
+          <a:bodyPr wrap="square" lIns="0" tIns="0" rIns="0" bIns="0" rtlCol="0" anchor="ctr"/>
+          <a:lstStyle/>
+          <a:p>
+            <a:pPr algn="r" indent="0" marL="0">
+              <a:buNone/>
+            </a:pPr>
+            <a:r>
+              <a:rPr lang="en-US" sz="1300" dirty="0">
+                <a:solidFill>
+                  <a:srgbClr val="1A1A1A"/>
+                </a:solidFill>
+                <a:latin typeface="Inter" pitchFamily="34" charset="0"/>
+                <a:ea typeface="Inter" pitchFamily="34" charset="-122"/>
+                <a:cs typeface="Inter" pitchFamily="34" charset="-120"/>
+              </a:rPr>
+              <a:t>1</a:t>
+            </a:r>
+            <a:endParaRPr lang="en-US" sz="1300" dirty="0"/>
+          </a:p>
+        </p:txBody>
+      </p:sp>
+      <p:sp>
+        <p:nvSpPr>
+          <p:cNvPr id="140" name="Text 138"/>
+          <p:cNvSpPr txBox="1"/>
+          <p:nvPr/>
+        </p:nvSpPr>
+        <p:spPr>
+          <a:xfrm>
+            <a:off x="10515600" y="2371344"/>
+            <a:ext cx="502920" cy="335280"/>
+          </a:xfrm>
+          <a:prstGeom prst="rect">
+            <a:avLst/>
+          </a:prstGeom>
+          <a:noFill/>
+          <a:ln/>
+        </p:spPr>
+        <p:txBody>
+          <a:bodyPr wrap="square" lIns="0" tIns="0" rIns="0" bIns="0" rtlCol="0" anchor="ctr"/>
+          <a:lstStyle/>
+          <a:p>
+            <a:pPr algn="r" indent="0" marL="0">
+              <a:buNone/>
+            </a:pPr>
+            <a:r>
+              <a:rPr lang="en-US" sz="1300" dirty="0">
+                <a:solidFill>
+                  <a:srgbClr val="1A1A1A"/>
+                </a:solidFill>
+                <a:latin typeface="Inter" pitchFamily="34" charset="0"/>
+                <a:ea typeface="Inter" pitchFamily="34" charset="-122"/>
+                <a:cs typeface="Inter" pitchFamily="34" charset="-120"/>
+              </a:rPr>
+              <a:t>2</a:t>
+            </a:r>
+            <a:endParaRPr lang="en-US" sz="1300" dirty="0"/>
+          </a:p>
+        </p:txBody>
+      </p:sp>
+      <p:sp>
+        <p:nvSpPr>
+          <p:cNvPr id="141" name="Text 139"/>
+          <p:cNvSpPr txBox="1"/>
+          <p:nvPr/>
+        </p:nvSpPr>
+        <p:spPr>
+          <a:xfrm>
+            <a:off x="11018520" y="2371344"/>
+            <a:ext cx="548640" cy="335280"/>
+          </a:xfrm>
+          <a:prstGeom prst="rect">
+            <a:avLst/>
+          </a:prstGeom>
+          <a:noFill/>
+          <a:ln/>
+        </p:spPr>
+        <p:txBody>
+          <a:bodyPr wrap="square" lIns="0" tIns="0" rIns="0" bIns="0" rtlCol="0" anchor="ctr"/>
+          <a:lstStyle/>
+          <a:p>
+            <a:pPr algn="r" indent="0" marL="0">
+              <a:buNone/>
+            </a:pPr>
+            <a:r>
+              <a:rPr lang="en-US" sz="1300" b="1" dirty="0">
+                <a:solidFill>
+                  <a:srgbClr val="1A1A1A"/>
+                </a:solidFill>
+                <a:latin typeface="Inter" pitchFamily="34" charset="0"/>
+                <a:ea typeface="Inter" pitchFamily="34" charset="-122"/>
+                <a:cs typeface="Inter" pitchFamily="34" charset="-120"/>
+              </a:rPr>
+              <a:t>3</a:t>
+            </a:r>
+            <a:endParaRPr lang="en-US" sz="1300" dirty="0"/>
+          </a:p>
+        </p:txBody>
+      </p:sp>
+      <p:sp>
+        <p:nvSpPr>
+          <p:cNvPr id="142" name="Text 140"/>
+          <p:cNvSpPr txBox="1"/>
+          <p:nvPr/>
+        </p:nvSpPr>
+        <p:spPr>
+          <a:xfrm>
+            <a:off x="6208776" y="2706624"/>
+            <a:ext cx="1938528" cy="335280"/>
+          </a:xfrm>
+          <a:prstGeom prst="rect">
+            <a:avLst/>
+          </a:prstGeom>
+          <a:noFill/>
+          <a:ln/>
+        </p:spPr>
+        <p:txBody>
+          <a:bodyPr wrap="square" lIns="0" tIns="0" rIns="0" bIns="0" rtlCol="0" anchor="ctr"/>
+          <a:lstStyle/>
+          <a:p>
+            <a:pPr indent="0" marL="0">
+              <a:buNone/>
+            </a:pPr>
+            <a:r>
+              <a:rPr lang="en-US" sz="1300" dirty="0">
+                <a:solidFill>
+                  <a:srgbClr val="1A1A1A"/>
+                </a:solidFill>
+                <a:latin typeface="Inter" pitchFamily="34" charset="0"/>
+                <a:ea typeface="Inter" pitchFamily="34" charset="-122"/>
+                <a:cs typeface="Inter" pitchFamily="34" charset="-120"/>
+              </a:rPr>
+              <a:t>GMC PRESCOTT</a:t>
+            </a:r>
+            <a:endParaRPr lang="en-US" sz="1300" dirty="0"/>
+          </a:p>
+        </p:txBody>
+      </p:sp>
+      <p:sp>
+        <p:nvSpPr>
+          <p:cNvPr id="143" name="Shape 141"/>
+          <p:cNvSpPr/>
+          <p:nvPr/>
+        </p:nvSpPr>
+        <p:spPr>
+          <a:xfrm>
+            <a:off x="8220456" y="2782062"/>
+            <a:ext cx="135128" cy="184404"/>
+          </a:xfrm>
+          <a:prstGeom prst="rect">
+            <a:avLst/>
+          </a:prstGeom>
+          <a:solidFill>
+            <a:srgbClr val="12A566"/>
+          </a:solidFill>
+          <a:ln w="9525">
+            <a:solidFill>
+              <a:srgbClr val="FFFFFF"/>
+            </a:solidFill>
+            <a:prstDash val="solid"/>
+          </a:ln>
+        </p:spPr>
+      </p:sp>
+      <p:sp>
+        <p:nvSpPr>
+          <p:cNvPr id="144" name="Shape 142"/>
+          <p:cNvSpPr/>
+          <p:nvPr/>
+        </p:nvSpPr>
+        <p:spPr>
+          <a:xfrm>
+            <a:off x="8355584" y="2782062"/>
+            <a:ext cx="135128" cy="184404"/>
+          </a:xfrm>
+          <a:prstGeom prst="rect">
+            <a:avLst/>
+          </a:prstGeom>
+          <a:solidFill>
+            <a:srgbClr val="8ED3B0"/>
+          </a:solidFill>
+          <a:ln w="9525">
+            <a:solidFill>
+              <a:srgbClr val="FFFFFF"/>
+            </a:solidFill>
+            <a:prstDash val="solid"/>
+          </a:ln>
+        </p:spPr>
+      </p:sp>
+      <p:sp>
+        <p:nvSpPr>
+          <p:cNvPr id="145" name="Text 143"/>
+          <p:cNvSpPr txBox="1"/>
+          <p:nvPr/>
+        </p:nvSpPr>
+        <p:spPr>
+          <a:xfrm>
+            <a:off x="9509760" y="2706624"/>
+            <a:ext cx="502920" cy="335280"/>
+          </a:xfrm>
+          <a:prstGeom prst="rect">
+            <a:avLst/>
+          </a:prstGeom>
+          <a:noFill/>
+          <a:ln/>
+        </p:spPr>
+        <p:txBody>
+          <a:bodyPr wrap="square" lIns="0" tIns="0" rIns="0" bIns="0" rtlCol="0" anchor="ctr"/>
+          <a:lstStyle/>
+          <a:p>
+            <a:pPr algn="r" indent="0" marL="0">
+              <a:buNone/>
+            </a:pPr>
+            <a:r>
+              <a:rPr lang="en-US" sz="1300" dirty="0">
+                <a:solidFill>
+                  <a:srgbClr val="9AA3AD"/>
+                </a:solidFill>
+                <a:latin typeface="Inter" pitchFamily="34" charset="0"/>
+                <a:ea typeface="Inter" pitchFamily="34" charset="-122"/>
+                <a:cs typeface="Inter" pitchFamily="34" charset="-120"/>
+              </a:rPr>
+              <a:t>–</a:t>
+            </a:r>
+            <a:endParaRPr lang="en-US" sz="1300" dirty="0"/>
+          </a:p>
+        </p:txBody>
+      </p:sp>
+      <p:sp>
+        <p:nvSpPr>
+          <p:cNvPr id="146" name="Text 144"/>
+          <p:cNvSpPr txBox="1"/>
+          <p:nvPr/>
+        </p:nvSpPr>
+        <p:spPr>
+          <a:xfrm>
+            <a:off x="10012680" y="2706624"/>
+            <a:ext cx="502920" cy="335280"/>
+          </a:xfrm>
+          <a:prstGeom prst="rect">
+            <a:avLst/>
+          </a:prstGeom>
+          <a:noFill/>
+          <a:ln/>
+        </p:spPr>
+        <p:txBody>
+          <a:bodyPr wrap="square" lIns="0" tIns="0" rIns="0" bIns="0" rtlCol="0" anchor="ctr"/>
+          <a:lstStyle/>
+          <a:p>
+            <a:pPr algn="r" indent="0" marL="0">
+              <a:buNone/>
+            </a:pPr>
+            <a:r>
+              <a:rPr lang="en-US" sz="1300" dirty="0">
+                <a:solidFill>
+                  <a:srgbClr val="1A1A1A"/>
+                </a:solidFill>
+                <a:latin typeface="Inter" pitchFamily="34" charset="0"/>
+                <a:ea typeface="Inter" pitchFamily="34" charset="-122"/>
+                <a:cs typeface="Inter" pitchFamily="34" charset="-120"/>
+              </a:rPr>
+              <a:t>1</a:t>
+            </a:r>
+            <a:endParaRPr lang="en-US" sz="1300" dirty="0"/>
+          </a:p>
+        </p:txBody>
+      </p:sp>
+      <p:sp>
+        <p:nvSpPr>
+          <p:cNvPr id="147" name="Text 145"/>
+          <p:cNvSpPr txBox="1"/>
+          <p:nvPr/>
+        </p:nvSpPr>
+        <p:spPr>
+          <a:xfrm>
+            <a:off x="10515600" y="2706624"/>
+            <a:ext cx="502920" cy="335280"/>
+          </a:xfrm>
+          <a:prstGeom prst="rect">
+            <a:avLst/>
+          </a:prstGeom>
+          <a:noFill/>
+          <a:ln/>
+        </p:spPr>
+        <p:txBody>
+          <a:bodyPr wrap="square" lIns="0" tIns="0" rIns="0" bIns="0" rtlCol="0" anchor="ctr"/>
+          <a:lstStyle/>
+          <a:p>
+            <a:pPr algn="r" indent="0" marL="0">
+              <a:buNone/>
+            </a:pPr>
+            <a:r>
+              <a:rPr lang="en-US" sz="1300" dirty="0">
+                <a:solidFill>
+                  <a:srgbClr val="1A1A1A"/>
+                </a:solidFill>
+                <a:latin typeface="Inter" pitchFamily="34" charset="0"/>
+                <a:ea typeface="Inter" pitchFamily="34" charset="-122"/>
+                <a:cs typeface="Inter" pitchFamily="34" charset="-120"/>
+              </a:rPr>
+              <a:t>1</a:t>
+            </a:r>
+            <a:endParaRPr lang="en-US" sz="1300" dirty="0"/>
+          </a:p>
+        </p:txBody>
+      </p:sp>
+      <p:sp>
+        <p:nvSpPr>
+          <p:cNvPr id="148" name="Text 146"/>
+          <p:cNvSpPr txBox="1"/>
+          <p:nvPr/>
+        </p:nvSpPr>
+        <p:spPr>
+          <a:xfrm>
+            <a:off x="11018520" y="2706624"/>
+            <a:ext cx="548640" cy="335280"/>
+          </a:xfrm>
+          <a:prstGeom prst="rect">
+            <a:avLst/>
+          </a:prstGeom>
+          <a:noFill/>
+          <a:ln/>
+        </p:spPr>
+        <p:txBody>
+          <a:bodyPr wrap="square" lIns="0" tIns="0" rIns="0" bIns="0" rtlCol="0" anchor="ctr"/>
+          <a:lstStyle/>
+          <a:p>
+            <a:pPr algn="r" indent="0" marL="0">
+              <a:buNone/>
+            </a:pPr>
+            <a:r>
+              <a:rPr lang="en-US" sz="1300" b="1" dirty="0">
+                <a:solidFill>
+                  <a:srgbClr val="1A1A1A"/>
+                </a:solidFill>
+                <a:latin typeface="Inter" pitchFamily="34" charset="0"/>
+                <a:ea typeface="Inter" pitchFamily="34" charset="-122"/>
+                <a:cs typeface="Inter" pitchFamily="34" charset="-120"/>
+              </a:rPr>
+              <a:t>2</a:t>
+            </a:r>
+            <a:endParaRPr lang="en-US" sz="1300" dirty="0"/>
+          </a:p>
+        </p:txBody>
+      </p:sp>
+      <p:sp>
+        <p:nvSpPr>
+          <p:cNvPr id="149" name="Text 147"/>
+          <p:cNvSpPr txBox="1"/>
+          <p:nvPr/>
+        </p:nvSpPr>
+        <p:spPr>
+          <a:xfrm>
+            <a:off x="6208776" y="3041904"/>
+            <a:ext cx="1938528" cy="335280"/>
+          </a:xfrm>
+          <a:prstGeom prst="rect">
+            <a:avLst/>
+          </a:prstGeom>
+          <a:noFill/>
+          <a:ln/>
+        </p:spPr>
+        <p:txBody>
+          <a:bodyPr wrap="square" lIns="0" tIns="0" rIns="0" bIns="0" rtlCol="0" anchor="ctr"/>
+          <a:lstStyle/>
+          <a:p>
+            <a:pPr indent="0" marL="0">
+              <a:buNone/>
+            </a:pPr>
+            <a:r>
+              <a:rPr lang="en-US" sz="1300" dirty="0">
+                <a:solidFill>
+                  <a:srgbClr val="1A1A1A"/>
+                </a:solidFill>
+                <a:latin typeface="Inter" pitchFamily="34" charset="0"/>
+                <a:ea typeface="Inter" pitchFamily="34" charset="-122"/>
+                <a:cs typeface="Inter" pitchFamily="34" charset="-120"/>
+              </a:rPr>
+              <a:t>CDJR POST FALLS</a:t>
+            </a:r>
+            <a:endParaRPr lang="en-US" sz="1300" dirty="0"/>
+          </a:p>
+        </p:txBody>
+      </p:sp>
+      <p:sp>
+        <p:nvSpPr>
+          <p:cNvPr id="150" name="Shape 148"/>
+          <p:cNvSpPr/>
+          <p:nvPr/>
+        </p:nvSpPr>
+        <p:spPr>
+          <a:xfrm>
+            <a:off x="8220456" y="3117342"/>
+            <a:ext cx="135128" cy="184404"/>
+          </a:xfrm>
+          <a:prstGeom prst="rect">
+            <a:avLst/>
+          </a:prstGeom>
+          <a:solidFill>
+            <a:srgbClr val="0B7A4A"/>
+          </a:solidFill>
+          <a:ln w="9525">
+            <a:solidFill>
+              <a:srgbClr val="FFFFFF"/>
+            </a:solidFill>
+            <a:prstDash val="solid"/>
+          </a:ln>
+        </p:spPr>
+      </p:sp>
+      <p:sp>
+        <p:nvSpPr>
+          <p:cNvPr id="151" name="Shape 149"/>
+          <p:cNvSpPr/>
+          <p:nvPr/>
+        </p:nvSpPr>
+        <p:spPr>
+          <a:xfrm>
+            <a:off x="8355584" y="3117342"/>
+            <a:ext cx="135128" cy="184404"/>
+          </a:xfrm>
+          <a:prstGeom prst="rect">
+            <a:avLst/>
+          </a:prstGeom>
+          <a:solidFill>
+            <a:srgbClr val="8ED3B0"/>
+          </a:solidFill>
+          <a:ln w="9525">
+            <a:solidFill>
+              <a:srgbClr val="FFFFFF"/>
+            </a:solidFill>
+            <a:prstDash val="solid"/>
+          </a:ln>
+        </p:spPr>
+      </p:sp>
+      <p:sp>
+        <p:nvSpPr>
+          <p:cNvPr id="152" name="Text 150"/>
+          <p:cNvSpPr txBox="1"/>
+          <p:nvPr/>
+        </p:nvSpPr>
+        <p:spPr>
+          <a:xfrm>
+            <a:off x="9509760" y="3041904"/>
+            <a:ext cx="502920" cy="335280"/>
+          </a:xfrm>
+          <a:prstGeom prst="rect">
+            <a:avLst/>
+          </a:prstGeom>
+          <a:noFill/>
+          <a:ln/>
+        </p:spPr>
+        <p:txBody>
+          <a:bodyPr wrap="square" lIns="0" tIns="0" rIns="0" bIns="0" rtlCol="0" anchor="ctr"/>
+          <a:lstStyle/>
+          <a:p>
+            <a:pPr algn="r" indent="0" marL="0">
+              <a:buNone/>
+            </a:pPr>
+            <a:r>
+              <a:rPr lang="en-US" sz="1300" dirty="0">
+                <a:solidFill>
+                  <a:srgbClr val="1A1A1A"/>
+                </a:solidFill>
+                <a:latin typeface="Inter" pitchFamily="34" charset="0"/>
+                <a:ea typeface="Inter" pitchFamily="34" charset="-122"/>
+                <a:cs typeface="Inter" pitchFamily="34" charset="-120"/>
+              </a:rPr>
+              <a:t>1</a:t>
+            </a:r>
+            <a:endParaRPr lang="en-US" sz="1300" dirty="0"/>
+          </a:p>
+        </p:txBody>
+      </p:sp>
+      <p:sp>
+        <p:nvSpPr>
+          <p:cNvPr id="153" name="Text 151"/>
+          <p:cNvSpPr txBox="1"/>
+          <p:nvPr/>
+        </p:nvSpPr>
+        <p:spPr>
+          <a:xfrm>
+            <a:off x="10012680" y="3041904"/>
+            <a:ext cx="502920" cy="335280"/>
+          </a:xfrm>
+          <a:prstGeom prst="rect">
+            <a:avLst/>
+          </a:prstGeom>
+          <a:noFill/>
+          <a:ln/>
+        </p:spPr>
+        <p:txBody>
+          <a:bodyPr wrap="square" lIns="0" tIns="0" rIns="0" bIns="0" rtlCol="0" anchor="ctr"/>
+          <a:lstStyle/>
+          <a:p>
+            <a:pPr algn="r" indent="0" marL="0">
+              <a:buNone/>
+            </a:pPr>
+            <a:r>
+              <a:rPr lang="en-US" sz="1300" dirty="0">
+                <a:solidFill>
+                  <a:srgbClr val="9AA3AD"/>
+                </a:solidFill>
+                <a:latin typeface="Inter" pitchFamily="34" charset="0"/>
+                <a:ea typeface="Inter" pitchFamily="34" charset="-122"/>
+                <a:cs typeface="Inter" pitchFamily="34" charset="-120"/>
+              </a:rPr>
+              <a:t>–</a:t>
+            </a:r>
+            <a:endParaRPr lang="en-US" sz="1300" dirty="0"/>
+          </a:p>
+        </p:txBody>
+      </p:sp>
+      <p:sp>
+        <p:nvSpPr>
+          <p:cNvPr id="154" name="Text 152"/>
+          <p:cNvSpPr txBox="1"/>
+          <p:nvPr/>
+        </p:nvSpPr>
+        <p:spPr>
+          <a:xfrm>
+            <a:off x="10515600" y="3041904"/>
+            <a:ext cx="502920" cy="335280"/>
+          </a:xfrm>
+          <a:prstGeom prst="rect">
+            <a:avLst/>
+          </a:prstGeom>
+          <a:noFill/>
+          <a:ln/>
+        </p:spPr>
+        <p:txBody>
+          <a:bodyPr wrap="square" lIns="0" tIns="0" rIns="0" bIns="0" rtlCol="0" anchor="ctr"/>
+          <a:lstStyle/>
+          <a:p>
+            <a:pPr algn="r" indent="0" marL="0">
+              <a:buNone/>
+            </a:pPr>
+            <a:r>
+              <a:rPr lang="en-US" sz="1300" dirty="0">
+                <a:solidFill>
+                  <a:srgbClr val="1A1A1A"/>
+                </a:solidFill>
+                <a:latin typeface="Inter" pitchFamily="34" charset="0"/>
+                <a:ea typeface="Inter" pitchFamily="34" charset="-122"/>
+                <a:cs typeface="Inter" pitchFamily="34" charset="-120"/>
+              </a:rPr>
+              <a:t>1</a:t>
+            </a:r>
+            <a:endParaRPr lang="en-US" sz="1300" dirty="0"/>
+          </a:p>
+        </p:txBody>
+      </p:sp>
+      <p:sp>
+        <p:nvSpPr>
+          <p:cNvPr id="155" name="Text 153"/>
+          <p:cNvSpPr txBox="1"/>
+          <p:nvPr/>
+        </p:nvSpPr>
+        <p:spPr>
+          <a:xfrm>
+            <a:off x="11018520" y="3041904"/>
+            <a:ext cx="548640" cy="335280"/>
+          </a:xfrm>
+          <a:prstGeom prst="rect">
+            <a:avLst/>
+          </a:prstGeom>
+          <a:noFill/>
+          <a:ln/>
+        </p:spPr>
+        <p:txBody>
+          <a:bodyPr wrap="square" lIns="0" tIns="0" rIns="0" bIns="0" rtlCol="0" anchor="ctr"/>
+          <a:lstStyle/>
+          <a:p>
+            <a:pPr algn="r" indent="0" marL="0">
+              <a:buNone/>
+            </a:pPr>
+            <a:r>
+              <a:rPr lang="en-US" sz="1300" b="1" dirty="0">
+                <a:solidFill>
+                  <a:srgbClr val="1A1A1A"/>
+                </a:solidFill>
+                <a:latin typeface="Inter" pitchFamily="34" charset="0"/>
+                <a:ea typeface="Inter" pitchFamily="34" charset="-122"/>
+                <a:cs typeface="Inter" pitchFamily="34" charset="-120"/>
+              </a:rPr>
+              <a:t>2</a:t>
+            </a:r>
+            <a:endParaRPr lang="en-US" sz="1300" dirty="0"/>
+          </a:p>
+        </p:txBody>
+      </p:sp>
+      <p:sp>
+        <p:nvSpPr>
+          <p:cNvPr id="156" name="Text 154"/>
+          <p:cNvSpPr txBox="1"/>
+          <p:nvPr/>
+        </p:nvSpPr>
+        <p:spPr>
+          <a:xfrm>
+            <a:off x="6208776" y="3377184"/>
+            <a:ext cx="1938528" cy="335280"/>
+          </a:xfrm>
+          <a:prstGeom prst="rect">
+            <a:avLst/>
+          </a:prstGeom>
+          <a:noFill/>
+          <a:ln/>
+        </p:spPr>
+        <p:txBody>
+          <a:bodyPr wrap="square" lIns="0" tIns="0" rIns="0" bIns="0" rtlCol="0" anchor="ctr"/>
+          <a:lstStyle/>
+          <a:p>
+            <a:pPr indent="0" marL="0">
+              <a:buNone/>
+            </a:pPr>
+            <a:r>
+              <a:rPr lang="en-US" sz="1300" dirty="0">
+                <a:solidFill>
+                  <a:srgbClr val="1A1A1A"/>
+                </a:solidFill>
+                <a:latin typeface="Inter" pitchFamily="34" charset="0"/>
+                <a:ea typeface="Inter" pitchFamily="34" charset="-122"/>
+                <a:cs typeface="Inter" pitchFamily="34" charset="-120"/>
+              </a:rPr>
+              <a:t>LR LV</a:t>
+            </a:r>
+            <a:endParaRPr lang="en-US" sz="1300" dirty="0"/>
+          </a:p>
+        </p:txBody>
+      </p:sp>
+      <p:sp>
+        <p:nvSpPr>
+          <p:cNvPr id="157" name="Shape 155"/>
+          <p:cNvSpPr/>
+          <p:nvPr/>
+        </p:nvSpPr>
+        <p:spPr>
+          <a:xfrm>
+            <a:off x="8220456" y="3452622"/>
+            <a:ext cx="135128" cy="184404"/>
+          </a:xfrm>
+          <a:prstGeom prst="rect">
+            <a:avLst/>
+          </a:prstGeom>
+          <a:solidFill>
+            <a:srgbClr val="0B7A4A"/>
+          </a:solidFill>
+          <a:ln w="9525">
+            <a:solidFill>
+              <a:srgbClr val="FFFFFF"/>
+            </a:solidFill>
+            <a:prstDash val="solid"/>
+          </a:ln>
+        </p:spPr>
+      </p:sp>
+      <p:sp>
+        <p:nvSpPr>
+          <p:cNvPr id="158" name="Shape 156"/>
+          <p:cNvSpPr/>
+          <p:nvPr/>
+        </p:nvSpPr>
+        <p:spPr>
+          <a:xfrm>
+            <a:off x="8355584" y="3452622"/>
+            <a:ext cx="135128" cy="184404"/>
+          </a:xfrm>
+          <a:prstGeom prst="rect">
+            <a:avLst/>
+          </a:prstGeom>
+          <a:solidFill>
+            <a:srgbClr val="8ED3B0"/>
+          </a:solidFill>
+          <a:ln w="9525">
+            <a:solidFill>
+              <a:srgbClr val="FFFFFF"/>
+            </a:solidFill>
+            <a:prstDash val="solid"/>
+          </a:ln>
+        </p:spPr>
+      </p:sp>
+      <p:sp>
+        <p:nvSpPr>
+          <p:cNvPr id="159" name="Text 157"/>
+          <p:cNvSpPr txBox="1"/>
+          <p:nvPr/>
+        </p:nvSpPr>
+        <p:spPr>
+          <a:xfrm>
+            <a:off x="9509760" y="3377184"/>
+            <a:ext cx="502920" cy="335280"/>
+          </a:xfrm>
+          <a:prstGeom prst="rect">
+            <a:avLst/>
+          </a:prstGeom>
+          <a:noFill/>
+          <a:ln/>
+        </p:spPr>
+        <p:txBody>
+          <a:bodyPr wrap="square" lIns="0" tIns="0" rIns="0" bIns="0" rtlCol="0" anchor="ctr"/>
+          <a:lstStyle/>
+          <a:p>
+            <a:pPr algn="r" indent="0" marL="0">
+              <a:buNone/>
+            </a:pPr>
+            <a:r>
+              <a:rPr lang="en-US" sz="1300" dirty="0">
+                <a:solidFill>
+                  <a:srgbClr val="1A1A1A"/>
+                </a:solidFill>
+                <a:latin typeface="Inter" pitchFamily="34" charset="0"/>
+                <a:ea typeface="Inter" pitchFamily="34" charset="-122"/>
+                <a:cs typeface="Inter" pitchFamily="34" charset="-120"/>
+              </a:rPr>
+              <a:t>1</a:t>
+            </a:r>
+            <a:endParaRPr lang="en-US" sz="1300" dirty="0"/>
+          </a:p>
+        </p:txBody>
+      </p:sp>
+      <p:sp>
+        <p:nvSpPr>
+          <p:cNvPr id="160" name="Text 158"/>
+          <p:cNvSpPr txBox="1"/>
+          <p:nvPr/>
+        </p:nvSpPr>
+        <p:spPr>
+          <a:xfrm>
+            <a:off x="10012680" y="3377184"/>
+            <a:ext cx="502920" cy="335280"/>
+          </a:xfrm>
+          <a:prstGeom prst="rect">
+            <a:avLst/>
+          </a:prstGeom>
+          <a:noFill/>
+          <a:ln/>
+        </p:spPr>
+        <p:txBody>
+          <a:bodyPr wrap="square" lIns="0" tIns="0" rIns="0" bIns="0" rtlCol="0" anchor="ctr"/>
+          <a:lstStyle/>
+          <a:p>
+            <a:pPr algn="r" indent="0" marL="0">
+              <a:buNone/>
+            </a:pPr>
+            <a:r>
+              <a:rPr lang="en-US" sz="1300" dirty="0">
+                <a:solidFill>
+                  <a:srgbClr val="9AA3AD"/>
+                </a:solidFill>
+                <a:latin typeface="Inter" pitchFamily="34" charset="0"/>
+                <a:ea typeface="Inter" pitchFamily="34" charset="-122"/>
+                <a:cs typeface="Inter" pitchFamily="34" charset="-120"/>
+              </a:rPr>
+              <a:t>–</a:t>
+            </a:r>
+            <a:endParaRPr lang="en-US" sz="1300" dirty="0"/>
+          </a:p>
+        </p:txBody>
+      </p:sp>
+      <p:sp>
+        <p:nvSpPr>
+          <p:cNvPr id="161" name="Text 159"/>
+          <p:cNvSpPr txBox="1"/>
+          <p:nvPr/>
+        </p:nvSpPr>
+        <p:spPr>
+          <a:xfrm>
+            <a:off x="10515600" y="3377184"/>
+            <a:ext cx="502920" cy="335280"/>
+          </a:xfrm>
+          <a:prstGeom prst="rect">
+            <a:avLst/>
+          </a:prstGeom>
+          <a:noFill/>
+          <a:ln/>
+        </p:spPr>
+        <p:txBody>
+          <a:bodyPr wrap="square" lIns="0" tIns="0" rIns="0" bIns="0" rtlCol="0" anchor="ctr"/>
+          <a:lstStyle/>
+          <a:p>
+            <a:pPr algn="r" indent="0" marL="0">
+              <a:buNone/>
+            </a:pPr>
+            <a:r>
+              <a:rPr lang="en-US" sz="1300" dirty="0">
+                <a:solidFill>
+                  <a:srgbClr val="1A1A1A"/>
+                </a:solidFill>
+                <a:latin typeface="Inter" pitchFamily="34" charset="0"/>
+                <a:ea typeface="Inter" pitchFamily="34" charset="-122"/>
+                <a:cs typeface="Inter" pitchFamily="34" charset="-120"/>
+              </a:rPr>
+              <a:t>1</a:t>
+            </a:r>
+            <a:endParaRPr lang="en-US" sz="1300" dirty="0"/>
+          </a:p>
+        </p:txBody>
+      </p:sp>
+      <p:sp>
+        <p:nvSpPr>
+          <p:cNvPr id="162" name="Text 160"/>
+          <p:cNvSpPr txBox="1"/>
+          <p:nvPr/>
+        </p:nvSpPr>
+        <p:spPr>
+          <a:xfrm>
+            <a:off x="11018520" y="3377184"/>
+            <a:ext cx="548640" cy="335280"/>
+          </a:xfrm>
+          <a:prstGeom prst="rect">
+            <a:avLst/>
+          </a:prstGeom>
+          <a:noFill/>
+          <a:ln/>
+        </p:spPr>
+        <p:txBody>
+          <a:bodyPr wrap="square" lIns="0" tIns="0" rIns="0" bIns="0" rtlCol="0" anchor="ctr"/>
+          <a:lstStyle/>
+          <a:p>
+            <a:pPr algn="r" indent="0" marL="0">
+              <a:buNone/>
+            </a:pPr>
+            <a:r>
+              <a:rPr lang="en-US" sz="1300" b="1" dirty="0">
+                <a:solidFill>
+                  <a:srgbClr val="1A1A1A"/>
+                </a:solidFill>
+                <a:latin typeface="Inter" pitchFamily="34" charset="0"/>
+                <a:ea typeface="Inter" pitchFamily="34" charset="-122"/>
+                <a:cs typeface="Inter" pitchFamily="34" charset="-120"/>
+              </a:rPr>
+              <a:t>2</a:t>
+            </a:r>
+            <a:endParaRPr lang="en-US" sz="1300" dirty="0"/>
+          </a:p>
+        </p:txBody>
+      </p:sp>
+      <p:sp>
+        <p:nvSpPr>
+          <p:cNvPr id="163" name="Text 161"/>
+          <p:cNvSpPr txBox="1"/>
+          <p:nvPr/>
+        </p:nvSpPr>
+        <p:spPr>
+          <a:xfrm>
+            <a:off x="6208776" y="3712464"/>
+            <a:ext cx="1938528" cy="335280"/>
+          </a:xfrm>
+          <a:prstGeom prst="rect">
+            <a:avLst/>
+          </a:prstGeom>
+          <a:noFill/>
+          <a:ln/>
+        </p:spPr>
+        <p:txBody>
+          <a:bodyPr wrap="square" lIns="0" tIns="0" rIns="0" bIns="0" rtlCol="0" anchor="ctr"/>
+          <a:lstStyle/>
+          <a:p>
+            <a:pPr indent="0" marL="0">
+              <a:buNone/>
+            </a:pPr>
+            <a:r>
+              <a:rPr lang="en-US" sz="1300" dirty="0">
+                <a:solidFill>
+                  <a:srgbClr val="1A1A1A"/>
+                </a:solidFill>
+                <a:latin typeface="Inter" pitchFamily="34" charset="0"/>
+                <a:ea typeface="Inter" pitchFamily="34" charset="-122"/>
+                <a:cs typeface="Inter" pitchFamily="34" charset="-120"/>
+              </a:rPr>
+              <a:t>LR RENO</a:t>
+            </a:r>
+            <a:endParaRPr lang="en-US" sz="1300" dirty="0"/>
+          </a:p>
+        </p:txBody>
+      </p:sp>
+      <p:sp>
+        <p:nvSpPr>
+          <p:cNvPr id="164" name="Shape 162"/>
+          <p:cNvSpPr/>
+          <p:nvPr/>
+        </p:nvSpPr>
+        <p:spPr>
+          <a:xfrm>
+            <a:off x="8220456" y="3787902"/>
+            <a:ext cx="135128" cy="184404"/>
+          </a:xfrm>
+          <a:prstGeom prst="rect">
+            <a:avLst/>
+          </a:prstGeom>
+          <a:solidFill>
+            <a:srgbClr val="0B7A4A"/>
+          </a:solidFill>
+          <a:ln w="9525">
+            <a:solidFill>
+              <a:srgbClr val="FFFFFF"/>
+            </a:solidFill>
+            <a:prstDash val="solid"/>
+          </a:ln>
+        </p:spPr>
+      </p:sp>
+      <p:sp>
+        <p:nvSpPr>
+          <p:cNvPr id="165" name="Shape 163"/>
+          <p:cNvSpPr/>
+          <p:nvPr/>
+        </p:nvSpPr>
+        <p:spPr>
+          <a:xfrm>
+            <a:off x="8355584" y="3787902"/>
+            <a:ext cx="135128" cy="184404"/>
+          </a:xfrm>
+          <a:prstGeom prst="rect">
+            <a:avLst/>
+          </a:prstGeom>
+          <a:solidFill>
+            <a:srgbClr val="8ED3B0"/>
+          </a:solidFill>
+          <a:ln w="9525">
+            <a:solidFill>
+              <a:srgbClr val="FFFFFF"/>
+            </a:solidFill>
+            <a:prstDash val="solid"/>
+          </a:ln>
+        </p:spPr>
+      </p:sp>
+      <p:sp>
+        <p:nvSpPr>
+          <p:cNvPr id="166" name="Text 164"/>
+          <p:cNvSpPr txBox="1"/>
+          <p:nvPr/>
+        </p:nvSpPr>
+        <p:spPr>
+          <a:xfrm>
+            <a:off x="9509760" y="3712464"/>
+            <a:ext cx="502920" cy="335280"/>
+          </a:xfrm>
+          <a:prstGeom prst="rect">
+            <a:avLst/>
+          </a:prstGeom>
+          <a:noFill/>
+          <a:ln/>
+        </p:spPr>
+        <p:txBody>
+          <a:bodyPr wrap="square" lIns="0" tIns="0" rIns="0" bIns="0" rtlCol="0" anchor="ctr"/>
+          <a:lstStyle/>
+          <a:p>
+            <a:pPr algn="r" indent="0" marL="0">
+              <a:buNone/>
+            </a:pPr>
+            <a:r>
+              <a:rPr lang="en-US" sz="1300" dirty="0">
+                <a:solidFill>
+                  <a:srgbClr val="1A1A1A"/>
+                </a:solidFill>
+                <a:latin typeface="Inter" pitchFamily="34" charset="0"/>
+                <a:ea typeface="Inter" pitchFamily="34" charset="-122"/>
+                <a:cs typeface="Inter" pitchFamily="34" charset="-120"/>
+              </a:rPr>
+              <a:t>1</a:t>
+            </a:r>
+            <a:endParaRPr lang="en-US" sz="1300" dirty="0"/>
+          </a:p>
+        </p:txBody>
+      </p:sp>
+      <p:sp>
+        <p:nvSpPr>
+          <p:cNvPr id="167" name="Text 165"/>
+          <p:cNvSpPr txBox="1"/>
+          <p:nvPr/>
+        </p:nvSpPr>
+        <p:spPr>
+          <a:xfrm>
+            <a:off x="10012680" y="3712464"/>
+            <a:ext cx="502920" cy="335280"/>
+          </a:xfrm>
+          <a:prstGeom prst="rect">
+            <a:avLst/>
+          </a:prstGeom>
+          <a:noFill/>
+          <a:ln/>
+        </p:spPr>
+        <p:txBody>
+          <a:bodyPr wrap="square" lIns="0" tIns="0" rIns="0" bIns="0" rtlCol="0" anchor="ctr"/>
+          <a:lstStyle/>
+          <a:p>
+            <a:pPr algn="r" indent="0" marL="0">
+              <a:buNone/>
+            </a:pPr>
+            <a:r>
+              <a:rPr lang="en-US" sz="1300" dirty="0">
+                <a:solidFill>
+                  <a:srgbClr val="9AA3AD"/>
+                </a:solidFill>
+                <a:latin typeface="Inter" pitchFamily="34" charset="0"/>
+                <a:ea typeface="Inter" pitchFamily="34" charset="-122"/>
+                <a:cs typeface="Inter" pitchFamily="34" charset="-120"/>
+              </a:rPr>
+              <a:t>–</a:t>
+            </a:r>
+            <a:endParaRPr lang="en-US" sz="1300" dirty="0"/>
+          </a:p>
+        </p:txBody>
+      </p:sp>
+      <p:sp>
+        <p:nvSpPr>
+          <p:cNvPr id="168" name="Text 166"/>
+          <p:cNvSpPr txBox="1"/>
+          <p:nvPr/>
+        </p:nvSpPr>
+        <p:spPr>
+          <a:xfrm>
+            <a:off x="10515600" y="3712464"/>
+            <a:ext cx="502920" cy="335280"/>
+          </a:xfrm>
+          <a:prstGeom prst="rect">
+            <a:avLst/>
+          </a:prstGeom>
+          <a:noFill/>
+          <a:ln/>
+        </p:spPr>
+        <p:txBody>
+          <a:bodyPr wrap="square" lIns="0" tIns="0" rIns="0" bIns="0" rtlCol="0" anchor="ctr"/>
+          <a:lstStyle/>
+          <a:p>
+            <a:pPr algn="r" indent="0" marL="0">
+              <a:buNone/>
+            </a:pPr>
+            <a:r>
+              <a:rPr lang="en-US" sz="1300" dirty="0">
+                <a:solidFill>
+                  <a:srgbClr val="1A1A1A"/>
+                </a:solidFill>
+                <a:latin typeface="Inter" pitchFamily="34" charset="0"/>
+                <a:ea typeface="Inter" pitchFamily="34" charset="-122"/>
+                <a:cs typeface="Inter" pitchFamily="34" charset="-120"/>
+              </a:rPr>
+              <a:t>1</a:t>
+            </a:r>
+            <a:endParaRPr lang="en-US" sz="1300" dirty="0"/>
+          </a:p>
+        </p:txBody>
+      </p:sp>
+      <p:sp>
+        <p:nvSpPr>
+          <p:cNvPr id="169" name="Text 167"/>
+          <p:cNvSpPr txBox="1"/>
+          <p:nvPr/>
+        </p:nvSpPr>
+        <p:spPr>
+          <a:xfrm>
+            <a:off x="11018520" y="3712464"/>
+            <a:ext cx="548640" cy="335280"/>
+          </a:xfrm>
+          <a:prstGeom prst="rect">
+            <a:avLst/>
+          </a:prstGeom>
+          <a:noFill/>
+          <a:ln/>
+        </p:spPr>
+        <p:txBody>
+          <a:bodyPr wrap="square" lIns="0" tIns="0" rIns="0" bIns="0" rtlCol="0" anchor="ctr"/>
+          <a:lstStyle/>
+          <a:p>
+            <a:pPr algn="r" indent="0" marL="0">
+              <a:buNone/>
+            </a:pPr>
+            <a:r>
+              <a:rPr lang="en-US" sz="1300" b="1" dirty="0">
+                <a:solidFill>
+                  <a:srgbClr val="1A1A1A"/>
+                </a:solidFill>
+                <a:latin typeface="Inter" pitchFamily="34" charset="0"/>
+                <a:ea typeface="Inter" pitchFamily="34" charset="-122"/>
+                <a:cs typeface="Inter" pitchFamily="34" charset="-120"/>
+              </a:rPr>
+              <a:t>2</a:t>
+            </a:r>
+            <a:endParaRPr lang="en-US" sz="1300" dirty="0"/>
+          </a:p>
+        </p:txBody>
+      </p:sp>
+      <p:sp>
+        <p:nvSpPr>
+          <p:cNvPr id="170" name="Text 168"/>
+          <p:cNvSpPr txBox="1"/>
+          <p:nvPr/>
+        </p:nvSpPr>
+        <p:spPr>
+          <a:xfrm>
+            <a:off x="6208776" y="4047744"/>
+            <a:ext cx="1938528" cy="335280"/>
+          </a:xfrm>
+          <a:prstGeom prst="rect">
+            <a:avLst/>
+          </a:prstGeom>
+          <a:noFill/>
+          <a:ln/>
+        </p:spPr>
+        <p:txBody>
+          <a:bodyPr wrap="square" lIns="0" tIns="0" rIns="0" bIns="0" rtlCol="0" anchor="ctr"/>
+          <a:lstStyle/>
+          <a:p>
+            <a:pPr indent="0" marL="0">
+              <a:buNone/>
+            </a:pPr>
+            <a:r>
+              <a:rPr lang="en-US" sz="1300" dirty="0">
+                <a:solidFill>
+                  <a:srgbClr val="1A1A1A"/>
+                </a:solidFill>
+                <a:latin typeface="Inter" pitchFamily="34" charset="0"/>
+                <a:ea typeface="Inter" pitchFamily="34" charset="-122"/>
+                <a:cs typeface="Inter" pitchFamily="34" charset="-120"/>
+              </a:rPr>
+              <a:t>TOYOTA SPOKANE</a:t>
+            </a:r>
+            <a:endParaRPr lang="en-US" sz="1300" dirty="0"/>
+          </a:p>
+        </p:txBody>
+      </p:sp>
+      <p:sp>
+        <p:nvSpPr>
+          <p:cNvPr id="171" name="Shape 169"/>
+          <p:cNvSpPr/>
+          <p:nvPr/>
+        </p:nvSpPr>
+        <p:spPr>
+          <a:xfrm>
+            <a:off x="8220456" y="4123182"/>
+            <a:ext cx="135128" cy="184404"/>
+          </a:xfrm>
+          <a:prstGeom prst="rect">
+            <a:avLst/>
+          </a:prstGeom>
+          <a:solidFill>
+            <a:srgbClr val="0B7A4A"/>
+          </a:solidFill>
+          <a:ln w="9525">
+            <a:solidFill>
+              <a:srgbClr val="FFFFFF"/>
+            </a:solidFill>
+            <a:prstDash val="solid"/>
+          </a:ln>
+        </p:spPr>
+      </p:sp>
+      <p:sp>
+        <p:nvSpPr>
+          <p:cNvPr id="172" name="Shape 170"/>
+          <p:cNvSpPr/>
+          <p:nvPr/>
+        </p:nvSpPr>
+        <p:spPr>
+          <a:xfrm>
+            <a:off x="8355584" y="4123182"/>
+            <a:ext cx="135128" cy="184404"/>
+          </a:xfrm>
+          <a:prstGeom prst="rect">
+            <a:avLst/>
+          </a:prstGeom>
+          <a:solidFill>
+            <a:srgbClr val="8ED3B0"/>
+          </a:solidFill>
+          <a:ln w="9525">
+            <a:solidFill>
+              <a:srgbClr val="FFFFFF"/>
+            </a:solidFill>
+            <a:prstDash val="solid"/>
+          </a:ln>
+        </p:spPr>
+      </p:sp>
+      <p:sp>
+        <p:nvSpPr>
+          <p:cNvPr id="173" name="Text 171"/>
+          <p:cNvSpPr txBox="1"/>
+          <p:nvPr/>
+        </p:nvSpPr>
+        <p:spPr>
+          <a:xfrm>
+            <a:off x="9509760" y="4047744"/>
+            <a:ext cx="502920" cy="335280"/>
+          </a:xfrm>
+          <a:prstGeom prst="rect">
+            <a:avLst/>
+          </a:prstGeom>
+          <a:noFill/>
+          <a:ln/>
+        </p:spPr>
+        <p:txBody>
+          <a:bodyPr wrap="square" lIns="0" tIns="0" rIns="0" bIns="0" rtlCol="0" anchor="ctr"/>
+          <a:lstStyle/>
+          <a:p>
+            <a:pPr algn="r" indent="0" marL="0">
+              <a:buNone/>
+            </a:pPr>
+            <a:r>
+              <a:rPr lang="en-US" sz="1300" dirty="0">
+                <a:solidFill>
+                  <a:srgbClr val="1A1A1A"/>
+                </a:solidFill>
+                <a:latin typeface="Inter" pitchFamily="34" charset="0"/>
+                <a:ea typeface="Inter" pitchFamily="34" charset="-122"/>
+                <a:cs typeface="Inter" pitchFamily="34" charset="-120"/>
+              </a:rPr>
+              <a:t>1</a:t>
+            </a:r>
+            <a:endParaRPr lang="en-US" sz="1300" dirty="0"/>
+          </a:p>
+        </p:txBody>
+      </p:sp>
+      <p:sp>
+        <p:nvSpPr>
+          <p:cNvPr id="174" name="Text 172"/>
+          <p:cNvSpPr txBox="1"/>
+          <p:nvPr/>
+        </p:nvSpPr>
+        <p:spPr>
+          <a:xfrm>
+            <a:off x="10012680" y="4047744"/>
+            <a:ext cx="502920" cy="335280"/>
+          </a:xfrm>
+          <a:prstGeom prst="rect">
+            <a:avLst/>
+          </a:prstGeom>
+          <a:noFill/>
+          <a:ln/>
+        </p:spPr>
+        <p:txBody>
+          <a:bodyPr wrap="square" lIns="0" tIns="0" rIns="0" bIns="0" rtlCol="0" anchor="ctr"/>
+          <a:lstStyle/>
+          <a:p>
+            <a:pPr algn="r" indent="0" marL="0">
+              <a:buNone/>
+            </a:pPr>
+            <a:r>
+              <a:rPr lang="en-US" sz="1300" dirty="0">
+                <a:solidFill>
+                  <a:srgbClr val="9AA3AD"/>
+                </a:solidFill>
+                <a:latin typeface="Inter" pitchFamily="34" charset="0"/>
+                <a:ea typeface="Inter" pitchFamily="34" charset="-122"/>
+                <a:cs typeface="Inter" pitchFamily="34" charset="-120"/>
+              </a:rPr>
+              <a:t>–</a:t>
+            </a:r>
+            <a:endParaRPr lang="en-US" sz="1300" dirty="0"/>
+          </a:p>
+        </p:txBody>
+      </p:sp>
+      <p:sp>
+        <p:nvSpPr>
+          <p:cNvPr id="175" name="Text 173"/>
+          <p:cNvSpPr txBox="1"/>
+          <p:nvPr/>
+        </p:nvSpPr>
+        <p:spPr>
+          <a:xfrm>
+            <a:off x="10515600" y="4047744"/>
+            <a:ext cx="502920" cy="335280"/>
+          </a:xfrm>
+          <a:prstGeom prst="rect">
+            <a:avLst/>
+          </a:prstGeom>
+          <a:noFill/>
+          <a:ln/>
+        </p:spPr>
+        <p:txBody>
+          <a:bodyPr wrap="square" lIns="0" tIns="0" rIns="0" bIns="0" rtlCol="0" anchor="ctr"/>
+          <a:lstStyle/>
+          <a:p>
+            <a:pPr algn="r" indent="0" marL="0">
+              <a:buNone/>
+            </a:pPr>
+            <a:r>
+              <a:rPr lang="en-US" sz="1300" dirty="0">
+                <a:solidFill>
+                  <a:srgbClr val="1A1A1A"/>
+                </a:solidFill>
+                <a:latin typeface="Inter" pitchFamily="34" charset="0"/>
+                <a:ea typeface="Inter" pitchFamily="34" charset="-122"/>
+                <a:cs typeface="Inter" pitchFamily="34" charset="-120"/>
+              </a:rPr>
+              <a:t>1</a:t>
+            </a:r>
+            <a:endParaRPr lang="en-US" sz="1300" dirty="0"/>
+          </a:p>
+        </p:txBody>
+      </p:sp>
+      <p:sp>
+        <p:nvSpPr>
+          <p:cNvPr id="176" name="Text 174"/>
+          <p:cNvSpPr txBox="1"/>
+          <p:nvPr/>
+        </p:nvSpPr>
+        <p:spPr>
+          <a:xfrm>
+            <a:off x="11018520" y="4047744"/>
+            <a:ext cx="548640" cy="335280"/>
+          </a:xfrm>
+          <a:prstGeom prst="rect">
+            <a:avLst/>
+          </a:prstGeom>
+          <a:noFill/>
+          <a:ln/>
+        </p:spPr>
+        <p:txBody>
+          <a:bodyPr wrap="square" lIns="0" tIns="0" rIns="0" bIns="0" rtlCol="0" anchor="ctr"/>
+          <a:lstStyle/>
+          <a:p>
+            <a:pPr algn="r" indent="0" marL="0">
+              <a:buNone/>
+            </a:pPr>
+            <a:r>
+              <a:rPr lang="en-US" sz="1300" b="1" dirty="0">
+                <a:solidFill>
+                  <a:srgbClr val="1A1A1A"/>
+                </a:solidFill>
+                <a:latin typeface="Inter" pitchFamily="34" charset="0"/>
+                <a:ea typeface="Inter" pitchFamily="34" charset="-122"/>
+                <a:cs typeface="Inter" pitchFamily="34" charset="-120"/>
+              </a:rPr>
+              <a:t>2</a:t>
+            </a:r>
+            <a:endParaRPr lang="en-US" sz="1300" dirty="0"/>
+          </a:p>
+        </p:txBody>
+      </p:sp>
+      <p:sp>
+        <p:nvSpPr>
+          <p:cNvPr id="177" name="Text 175"/>
+          <p:cNvSpPr txBox="1"/>
+          <p:nvPr/>
+        </p:nvSpPr>
+        <p:spPr>
+          <a:xfrm>
+            <a:off x="6208776" y="4383024"/>
+            <a:ext cx="1938528" cy="335280"/>
+          </a:xfrm>
+          <a:prstGeom prst="rect">
+            <a:avLst/>
+          </a:prstGeom>
+          <a:noFill/>
+          <a:ln/>
+        </p:spPr>
+        <p:txBody>
+          <a:bodyPr wrap="square" lIns="0" tIns="0" rIns="0" bIns="0" rtlCol="0" anchor="ctr"/>
+          <a:lstStyle/>
+          <a:p>
+            <a:pPr indent="0" marL="0">
+              <a:buNone/>
+            </a:pPr>
+            <a:r>
+              <a:rPr lang="en-US" sz="1300" dirty="0">
+                <a:solidFill>
+                  <a:srgbClr val="1A1A1A"/>
+                </a:solidFill>
+                <a:latin typeface="Inter" pitchFamily="34" charset="0"/>
+                <a:ea typeface="Inter" pitchFamily="34" charset="-122"/>
+                <a:cs typeface="Inter" pitchFamily="34" charset="-120"/>
+              </a:rPr>
+              <a:t>VOLVO</a:t>
+            </a:r>
+            <a:endParaRPr lang="en-US" sz="1300" dirty="0"/>
+          </a:p>
+        </p:txBody>
+      </p:sp>
+      <p:sp>
+        <p:nvSpPr>
+          <p:cNvPr id="178" name="Shape 176"/>
+          <p:cNvSpPr/>
+          <p:nvPr/>
+        </p:nvSpPr>
+        <p:spPr>
+          <a:xfrm>
+            <a:off x="8220456" y="4458462"/>
+            <a:ext cx="270256" cy="184404"/>
+          </a:xfrm>
+          <a:prstGeom prst="rect">
+            <a:avLst/>
+          </a:prstGeom>
+          <a:solidFill>
+            <a:srgbClr val="0B7A4A"/>
+          </a:solidFill>
+          <a:ln w="9525">
+            <a:solidFill>
+              <a:srgbClr val="FFFFFF"/>
+            </a:solidFill>
+            <a:prstDash val="solid"/>
+          </a:ln>
+        </p:spPr>
+      </p:sp>
+      <p:sp>
+        <p:nvSpPr>
+          <p:cNvPr id="179" name="Text 177"/>
+          <p:cNvSpPr txBox="1"/>
+          <p:nvPr/>
+        </p:nvSpPr>
+        <p:spPr>
+          <a:xfrm>
+            <a:off x="9509760" y="4383024"/>
+            <a:ext cx="502920" cy="335280"/>
+          </a:xfrm>
+          <a:prstGeom prst="rect">
+            <a:avLst/>
+          </a:prstGeom>
+          <a:noFill/>
+          <a:ln/>
+        </p:spPr>
+        <p:txBody>
+          <a:bodyPr wrap="square" lIns="0" tIns="0" rIns="0" bIns="0" rtlCol="0" anchor="ctr"/>
+          <a:lstStyle/>
+          <a:p>
+            <a:pPr algn="r" indent="0" marL="0">
+              <a:buNone/>
+            </a:pPr>
+            <a:r>
+              <a:rPr lang="en-US" sz="1300" dirty="0">
+                <a:solidFill>
+                  <a:srgbClr val="1A1A1A"/>
+                </a:solidFill>
+                <a:latin typeface="Inter" pitchFamily="34" charset="0"/>
+                <a:ea typeface="Inter" pitchFamily="34" charset="-122"/>
+                <a:cs typeface="Inter" pitchFamily="34" charset="-120"/>
+              </a:rPr>
+              <a:t>2</a:t>
+            </a:r>
+            <a:endParaRPr lang="en-US" sz="1300" dirty="0"/>
+          </a:p>
+        </p:txBody>
+      </p:sp>
+      <p:sp>
+        <p:nvSpPr>
+          <p:cNvPr id="180" name="Text 178"/>
+          <p:cNvSpPr txBox="1"/>
+          <p:nvPr/>
+        </p:nvSpPr>
+        <p:spPr>
+          <a:xfrm>
+            <a:off x="10012680" y="4383024"/>
+            <a:ext cx="502920" cy="335280"/>
+          </a:xfrm>
+          <a:prstGeom prst="rect">
+            <a:avLst/>
+          </a:prstGeom>
+          <a:noFill/>
+          <a:ln/>
+        </p:spPr>
+        <p:txBody>
+          <a:bodyPr wrap="square" lIns="0" tIns="0" rIns="0" bIns="0" rtlCol="0" anchor="ctr"/>
+          <a:lstStyle/>
+          <a:p>
+            <a:pPr algn="r" indent="0" marL="0">
+              <a:buNone/>
+            </a:pPr>
+            <a:r>
+              <a:rPr lang="en-US" sz="1300" dirty="0">
+                <a:solidFill>
+                  <a:srgbClr val="9AA3AD"/>
+                </a:solidFill>
+                <a:latin typeface="Inter" pitchFamily="34" charset="0"/>
+                <a:ea typeface="Inter" pitchFamily="34" charset="-122"/>
+                <a:cs typeface="Inter" pitchFamily="34" charset="-120"/>
+              </a:rPr>
+              <a:t>–</a:t>
+            </a:r>
+            <a:endParaRPr lang="en-US" sz="1300" dirty="0"/>
+          </a:p>
+        </p:txBody>
+      </p:sp>
+      <p:sp>
+        <p:nvSpPr>
+          <p:cNvPr id="181" name="Text 179"/>
+          <p:cNvSpPr txBox="1"/>
+          <p:nvPr/>
+        </p:nvSpPr>
+        <p:spPr>
+          <a:xfrm>
+            <a:off x="10515600" y="4383024"/>
+            <a:ext cx="502920" cy="335280"/>
+          </a:xfrm>
+          <a:prstGeom prst="rect">
+            <a:avLst/>
+          </a:prstGeom>
+          <a:noFill/>
+          <a:ln/>
+        </p:spPr>
+        <p:txBody>
+          <a:bodyPr wrap="square" lIns="0" tIns="0" rIns="0" bIns="0" rtlCol="0" anchor="ctr"/>
+          <a:lstStyle/>
+          <a:p>
+            <a:pPr algn="r" indent="0" marL="0">
+              <a:buNone/>
+            </a:pPr>
+            <a:r>
+              <a:rPr lang="en-US" sz="1300" dirty="0">
+                <a:solidFill>
+                  <a:srgbClr val="9AA3AD"/>
+                </a:solidFill>
+                <a:latin typeface="Inter" pitchFamily="34" charset="0"/>
+                <a:ea typeface="Inter" pitchFamily="34" charset="-122"/>
+                <a:cs typeface="Inter" pitchFamily="34" charset="-120"/>
+              </a:rPr>
+              <a:t>–</a:t>
+            </a:r>
+            <a:endParaRPr lang="en-US" sz="1300" dirty="0"/>
+          </a:p>
+        </p:txBody>
+      </p:sp>
+      <p:sp>
+        <p:nvSpPr>
+          <p:cNvPr id="182" name="Text 180"/>
+          <p:cNvSpPr txBox="1"/>
+          <p:nvPr/>
+        </p:nvSpPr>
+        <p:spPr>
+          <a:xfrm>
+            <a:off x="11018520" y="4383024"/>
+            <a:ext cx="548640" cy="335280"/>
+          </a:xfrm>
+          <a:prstGeom prst="rect">
+            <a:avLst/>
+          </a:prstGeom>
+          <a:noFill/>
+          <a:ln/>
+        </p:spPr>
+        <p:txBody>
+          <a:bodyPr wrap="square" lIns="0" tIns="0" rIns="0" bIns="0" rtlCol="0" anchor="ctr"/>
+          <a:lstStyle/>
+          <a:p>
+            <a:pPr algn="r" indent="0" marL="0">
+              <a:buNone/>
+            </a:pPr>
+            <a:r>
+              <a:rPr lang="en-US" sz="1300" b="1" dirty="0">
+                <a:solidFill>
+                  <a:srgbClr val="1A1A1A"/>
+                </a:solidFill>
+                <a:latin typeface="Inter" pitchFamily="34" charset="0"/>
+                <a:ea typeface="Inter" pitchFamily="34" charset="-122"/>
+                <a:cs typeface="Inter" pitchFamily="34" charset="-120"/>
+              </a:rPr>
+              <a:t>2</a:t>
+            </a:r>
+            <a:endParaRPr lang="en-US" sz="1300" dirty="0"/>
+          </a:p>
+        </p:txBody>
+      </p:sp>
+      <p:sp>
+        <p:nvSpPr>
+          <p:cNvPr id="183" name="Text 181"/>
+          <p:cNvSpPr txBox="1"/>
+          <p:nvPr/>
+        </p:nvSpPr>
+        <p:spPr>
+          <a:xfrm>
+            <a:off x="6208776" y="4718304"/>
+            <a:ext cx="1938528" cy="335280"/>
+          </a:xfrm>
+          <a:prstGeom prst="rect">
+            <a:avLst/>
+          </a:prstGeom>
+          <a:noFill/>
+          <a:ln/>
+        </p:spPr>
+        <p:txBody>
+          <a:bodyPr wrap="square" lIns="0" tIns="0" rIns="0" bIns="0" rtlCol="0" anchor="ctr"/>
+          <a:lstStyle/>
+          <a:p>
+            <a:pPr indent="0" marL="0">
+              <a:buNone/>
+            </a:pPr>
+            <a:r>
+              <a:rPr lang="en-US" sz="1300" dirty="0">
+                <a:solidFill>
+                  <a:srgbClr val="1A1A1A"/>
+                </a:solidFill>
+                <a:latin typeface="Inter" pitchFamily="34" charset="0"/>
+                <a:ea typeface="Inter" pitchFamily="34" charset="-122"/>
+                <a:cs typeface="Inter" pitchFamily="34" charset="-120"/>
+              </a:rPr>
+              <a:t>SUBARU PRESCOTT</a:t>
+            </a:r>
+            <a:endParaRPr lang="en-US" sz="1300" dirty="0"/>
+          </a:p>
+        </p:txBody>
+      </p:sp>
+      <p:sp>
+        <p:nvSpPr>
+          <p:cNvPr id="184" name="Shape 182"/>
+          <p:cNvSpPr/>
+          <p:nvPr/>
+        </p:nvSpPr>
+        <p:spPr>
+          <a:xfrm>
+            <a:off x="8220456" y="4793742"/>
+            <a:ext cx="135128" cy="184404"/>
+          </a:xfrm>
+          <a:prstGeom prst="rect">
+            <a:avLst/>
+          </a:prstGeom>
+          <a:solidFill>
+            <a:srgbClr val="8ED3B0"/>
+          </a:solidFill>
+          <a:ln w="9525">
+            <a:solidFill>
+              <a:srgbClr val="FFFFFF"/>
+            </a:solidFill>
+            <a:prstDash val="solid"/>
+          </a:ln>
+        </p:spPr>
+      </p:sp>
+      <p:sp>
+        <p:nvSpPr>
+          <p:cNvPr id="185" name="Text 183"/>
+          <p:cNvSpPr txBox="1"/>
+          <p:nvPr/>
+        </p:nvSpPr>
+        <p:spPr>
+          <a:xfrm>
+            <a:off x="9509760" y="4718304"/>
+            <a:ext cx="502920" cy="335280"/>
+          </a:xfrm>
+          <a:prstGeom prst="rect">
+            <a:avLst/>
+          </a:prstGeom>
+          <a:noFill/>
+          <a:ln/>
+        </p:spPr>
+        <p:txBody>
+          <a:bodyPr wrap="square" lIns="0" tIns="0" rIns="0" bIns="0" rtlCol="0" anchor="ctr"/>
+          <a:lstStyle/>
+          <a:p>
+            <a:pPr algn="r" indent="0" marL="0">
+              <a:buNone/>
+            </a:pPr>
+            <a:r>
+              <a:rPr lang="en-US" sz="1300" dirty="0">
+                <a:solidFill>
+                  <a:srgbClr val="9AA3AD"/>
+                </a:solidFill>
+                <a:latin typeface="Inter" pitchFamily="34" charset="0"/>
+                <a:ea typeface="Inter" pitchFamily="34" charset="-122"/>
+                <a:cs typeface="Inter" pitchFamily="34" charset="-120"/>
+              </a:rPr>
+              <a:t>–</a:t>
+            </a:r>
+            <a:endParaRPr lang="en-US" sz="1300" dirty="0"/>
+          </a:p>
+        </p:txBody>
+      </p:sp>
+      <p:sp>
+        <p:nvSpPr>
+          <p:cNvPr id="186" name="Text 184"/>
+          <p:cNvSpPr txBox="1"/>
+          <p:nvPr/>
+        </p:nvSpPr>
+        <p:spPr>
+          <a:xfrm>
+            <a:off x="10012680" y="4718304"/>
+            <a:ext cx="502920" cy="335280"/>
+          </a:xfrm>
+          <a:prstGeom prst="rect">
+            <a:avLst/>
+          </a:prstGeom>
+          <a:noFill/>
+          <a:ln/>
+        </p:spPr>
+        <p:txBody>
+          <a:bodyPr wrap="square" lIns="0" tIns="0" rIns="0" bIns="0" rtlCol="0" anchor="ctr"/>
+          <a:lstStyle/>
+          <a:p>
+            <a:pPr algn="r" indent="0" marL="0">
+              <a:buNone/>
+            </a:pPr>
+            <a:r>
+              <a:rPr lang="en-US" sz="1300" dirty="0">
+                <a:solidFill>
+                  <a:srgbClr val="9AA3AD"/>
+                </a:solidFill>
+                <a:latin typeface="Inter" pitchFamily="34" charset="0"/>
+                <a:ea typeface="Inter" pitchFamily="34" charset="-122"/>
+                <a:cs typeface="Inter" pitchFamily="34" charset="-120"/>
+              </a:rPr>
+              <a:t>–</a:t>
+            </a:r>
+            <a:endParaRPr lang="en-US" sz="1300" dirty="0"/>
+          </a:p>
+        </p:txBody>
+      </p:sp>
+      <p:sp>
+        <p:nvSpPr>
+          <p:cNvPr id="187" name="Text 185"/>
+          <p:cNvSpPr txBox="1"/>
+          <p:nvPr/>
+        </p:nvSpPr>
+        <p:spPr>
+          <a:xfrm>
+            <a:off x="10515600" y="4718304"/>
+            <a:ext cx="502920" cy="335280"/>
+          </a:xfrm>
+          <a:prstGeom prst="rect">
+            <a:avLst/>
+          </a:prstGeom>
+          <a:noFill/>
+          <a:ln/>
+        </p:spPr>
+        <p:txBody>
+          <a:bodyPr wrap="square" lIns="0" tIns="0" rIns="0" bIns="0" rtlCol="0" anchor="ctr"/>
+          <a:lstStyle/>
+          <a:p>
+            <a:pPr algn="r" indent="0" marL="0">
+              <a:buNone/>
+            </a:pPr>
+            <a:r>
+              <a:rPr lang="en-US" sz="1300" dirty="0">
+                <a:solidFill>
+                  <a:srgbClr val="1A1A1A"/>
+                </a:solidFill>
+                <a:latin typeface="Inter" pitchFamily="34" charset="0"/>
+                <a:ea typeface="Inter" pitchFamily="34" charset="-122"/>
+                <a:cs typeface="Inter" pitchFamily="34" charset="-120"/>
+              </a:rPr>
+              <a:t>1</a:t>
+            </a:r>
+            <a:endParaRPr lang="en-US" sz="1300" dirty="0"/>
+          </a:p>
+        </p:txBody>
+      </p:sp>
+      <p:sp>
+        <p:nvSpPr>
+          <p:cNvPr id="188" name="Text 186"/>
+          <p:cNvSpPr txBox="1"/>
+          <p:nvPr/>
+        </p:nvSpPr>
+        <p:spPr>
+          <a:xfrm>
+            <a:off x="11018520" y="4718304"/>
+            <a:ext cx="548640" cy="335280"/>
+          </a:xfrm>
+          <a:prstGeom prst="rect">
+            <a:avLst/>
+          </a:prstGeom>
+          <a:noFill/>
+          <a:ln/>
+        </p:spPr>
+        <p:txBody>
+          <a:bodyPr wrap="square" lIns="0" tIns="0" rIns="0" bIns="0" rtlCol="0" anchor="ctr"/>
+          <a:lstStyle/>
+          <a:p>
+            <a:pPr algn="r" indent="0" marL="0">
+              <a:buNone/>
+            </a:pPr>
+            <a:r>
+              <a:rPr lang="en-US" sz="1300" b="1" dirty="0">
+                <a:solidFill>
+                  <a:srgbClr val="1A1A1A"/>
+                </a:solidFill>
+                <a:latin typeface="Inter" pitchFamily="34" charset="0"/>
+                <a:ea typeface="Inter" pitchFamily="34" charset="-122"/>
+                <a:cs typeface="Inter" pitchFamily="34" charset="-120"/>
+              </a:rPr>
+              <a:t>1</a:t>
+            </a:r>
+            <a:endParaRPr lang="en-US" sz="1300" dirty="0"/>
+          </a:p>
+        </p:txBody>
+      </p:sp>
+      <p:sp>
+        <p:nvSpPr>
+          <p:cNvPr id="189" name="Text 187"/>
+          <p:cNvSpPr txBox="1"/>
+          <p:nvPr/>
+        </p:nvSpPr>
+        <p:spPr>
+          <a:xfrm>
+            <a:off x="6208776" y="5053584"/>
+            <a:ext cx="1938528" cy="335280"/>
+          </a:xfrm>
+          <a:prstGeom prst="rect">
+            <a:avLst/>
+          </a:prstGeom>
+          <a:noFill/>
+          <a:ln/>
+        </p:spPr>
+        <p:txBody>
+          <a:bodyPr wrap="square" lIns="0" tIns="0" rIns="0" bIns="0" rtlCol="0" anchor="ctr"/>
+          <a:lstStyle/>
+          <a:p>
+            <a:pPr indent="0" marL="0">
+              <a:buNone/>
+            </a:pPr>
+            <a:r>
+              <a:rPr lang="en-US" sz="1300" dirty="0">
+                <a:solidFill>
+                  <a:srgbClr val="1A1A1A"/>
+                </a:solidFill>
+                <a:latin typeface="Inter" pitchFamily="34" charset="0"/>
+                <a:ea typeface="Inter" pitchFamily="34" charset="-122"/>
+                <a:cs typeface="Inter" pitchFamily="34" charset="-120"/>
+              </a:rPr>
+              <a:t>KIA LV</a:t>
+            </a:r>
+            <a:endParaRPr lang="en-US" sz="1300" dirty="0"/>
+          </a:p>
+        </p:txBody>
+      </p:sp>
+      <p:sp>
+        <p:nvSpPr>
+          <p:cNvPr id="190" name="Shape 188"/>
+          <p:cNvSpPr/>
+          <p:nvPr/>
+        </p:nvSpPr>
+        <p:spPr>
+          <a:xfrm>
+            <a:off x="8220456" y="5129022"/>
+            <a:ext cx="135128" cy="184404"/>
+          </a:xfrm>
+          <a:prstGeom prst="rect">
+            <a:avLst/>
+          </a:prstGeom>
+          <a:solidFill>
+            <a:srgbClr val="0B7A4A"/>
+          </a:solidFill>
+          <a:ln w="9525">
+            <a:solidFill>
+              <a:srgbClr val="FFFFFF"/>
+            </a:solidFill>
+            <a:prstDash val="solid"/>
+          </a:ln>
+        </p:spPr>
+      </p:sp>
+      <p:sp>
+        <p:nvSpPr>
+          <p:cNvPr id="191" name="Text 189"/>
+          <p:cNvSpPr txBox="1"/>
+          <p:nvPr/>
+        </p:nvSpPr>
+        <p:spPr>
+          <a:xfrm>
+            <a:off x="9509760" y="5053584"/>
+            <a:ext cx="502920" cy="335280"/>
+          </a:xfrm>
+          <a:prstGeom prst="rect">
+            <a:avLst/>
+          </a:prstGeom>
+          <a:noFill/>
+          <a:ln/>
+        </p:spPr>
+        <p:txBody>
+          <a:bodyPr wrap="square" lIns="0" tIns="0" rIns="0" bIns="0" rtlCol="0" anchor="ctr"/>
+          <a:lstStyle/>
+          <a:p>
+            <a:pPr algn="r" indent="0" marL="0">
+              <a:buNone/>
+            </a:pPr>
+            <a:r>
+              <a:rPr lang="en-US" sz="1300" dirty="0">
+                <a:solidFill>
+                  <a:srgbClr val="1A1A1A"/>
+                </a:solidFill>
+                <a:latin typeface="Inter" pitchFamily="34" charset="0"/>
+                <a:ea typeface="Inter" pitchFamily="34" charset="-122"/>
+                <a:cs typeface="Inter" pitchFamily="34" charset="-120"/>
+              </a:rPr>
+              <a:t>1</a:t>
+            </a:r>
+            <a:endParaRPr lang="en-US" sz="1300" dirty="0"/>
+          </a:p>
+        </p:txBody>
+      </p:sp>
+      <p:sp>
+        <p:nvSpPr>
+          <p:cNvPr id="192" name="Text 190"/>
+          <p:cNvSpPr txBox="1"/>
+          <p:nvPr/>
+        </p:nvSpPr>
+        <p:spPr>
+          <a:xfrm>
+            <a:off x="10012680" y="5053584"/>
+            <a:ext cx="502920" cy="335280"/>
+          </a:xfrm>
+          <a:prstGeom prst="rect">
+            <a:avLst/>
+          </a:prstGeom>
+          <a:noFill/>
+          <a:ln/>
+        </p:spPr>
+        <p:txBody>
+          <a:bodyPr wrap="square" lIns="0" tIns="0" rIns="0" bIns="0" rtlCol="0" anchor="ctr"/>
+          <a:lstStyle/>
+          <a:p>
+            <a:pPr algn="r" indent="0" marL="0">
+              <a:buNone/>
+            </a:pPr>
+            <a:r>
+              <a:rPr lang="en-US" sz="1300" dirty="0">
+                <a:solidFill>
+                  <a:srgbClr val="9AA3AD"/>
+                </a:solidFill>
+                <a:latin typeface="Inter" pitchFamily="34" charset="0"/>
+                <a:ea typeface="Inter" pitchFamily="34" charset="-122"/>
+                <a:cs typeface="Inter" pitchFamily="34" charset="-120"/>
+              </a:rPr>
+              <a:t>–</a:t>
+            </a:r>
+            <a:endParaRPr lang="en-US" sz="1300" dirty="0"/>
+          </a:p>
+        </p:txBody>
+      </p:sp>
+      <p:sp>
+        <p:nvSpPr>
+          <p:cNvPr id="193" name="Text 191"/>
+          <p:cNvSpPr txBox="1"/>
+          <p:nvPr/>
+        </p:nvSpPr>
+        <p:spPr>
+          <a:xfrm>
+            <a:off x="10515600" y="5053584"/>
+            <a:ext cx="502920" cy="335280"/>
+          </a:xfrm>
+          <a:prstGeom prst="rect">
+            <a:avLst/>
+          </a:prstGeom>
+          <a:noFill/>
+          <a:ln/>
+        </p:spPr>
+        <p:txBody>
+          <a:bodyPr wrap="square" lIns="0" tIns="0" rIns="0" bIns="0" rtlCol="0" anchor="ctr"/>
+          <a:lstStyle/>
+          <a:p>
+            <a:pPr algn="r" indent="0" marL="0">
+              <a:buNone/>
+            </a:pPr>
+            <a:r>
+              <a:rPr lang="en-US" sz="1300" dirty="0">
+                <a:solidFill>
+                  <a:srgbClr val="9AA3AD"/>
+                </a:solidFill>
+                <a:latin typeface="Inter" pitchFamily="34" charset="0"/>
+                <a:ea typeface="Inter" pitchFamily="34" charset="-122"/>
+                <a:cs typeface="Inter" pitchFamily="34" charset="-120"/>
+              </a:rPr>
+              <a:t>–</a:t>
+            </a:r>
+            <a:endParaRPr lang="en-US" sz="1300" dirty="0"/>
+          </a:p>
+        </p:txBody>
+      </p:sp>
+      <p:sp>
+        <p:nvSpPr>
+          <p:cNvPr id="194" name="Text 192"/>
+          <p:cNvSpPr txBox="1"/>
+          <p:nvPr/>
+        </p:nvSpPr>
+        <p:spPr>
+          <a:xfrm>
+            <a:off x="11018520" y="5053584"/>
+            <a:ext cx="548640" cy="335280"/>
+          </a:xfrm>
+          <a:prstGeom prst="rect">
+            <a:avLst/>
+          </a:prstGeom>
+          <a:noFill/>
+          <a:ln/>
+        </p:spPr>
+        <p:txBody>
+          <a:bodyPr wrap="square" lIns="0" tIns="0" rIns="0" bIns="0" rtlCol="0" anchor="ctr"/>
+          <a:lstStyle/>
+          <a:p>
+            <a:pPr algn="r" indent="0" marL="0">
+              <a:buNone/>
+            </a:pPr>
+            <a:r>
+              <a:rPr lang="en-US" sz="1300" b="1" dirty="0">
+                <a:solidFill>
+                  <a:srgbClr val="1A1A1A"/>
+                </a:solidFill>
+                <a:latin typeface="Inter" pitchFamily="34" charset="0"/>
+                <a:ea typeface="Inter" pitchFamily="34" charset="-122"/>
+                <a:cs typeface="Inter" pitchFamily="34" charset="-120"/>
+              </a:rPr>
+              <a:t>1</a:t>
+            </a:r>
+            <a:endParaRPr lang="en-US" sz="1300" dirty="0"/>
+          </a:p>
+        </p:txBody>
+      </p:sp>
+      <p:sp>
+        <p:nvSpPr>
+          <p:cNvPr id="195" name="Shape 193"/>
+          <p:cNvSpPr/>
+          <p:nvPr/>
+        </p:nvSpPr>
+        <p:spPr>
+          <a:xfrm>
+            <a:off x="457200" y="5961888"/>
+            <a:ext cx="11274552" cy="548640"/>
+          </a:xfrm>
+          <a:prstGeom prst="rect">
+            <a:avLst/>
+          </a:prstGeom>
+          <a:solidFill>
+            <a:srgbClr val="E6F6EE"/>
+          </a:solidFill>
+          <a:ln/>
+        </p:spPr>
+      </p:sp>
+      <p:sp>
+        <p:nvSpPr>
+          <p:cNvPr id="196" name="Text 194"/>
+          <p:cNvSpPr txBox="1"/>
+          <p:nvPr/>
+        </p:nvSpPr>
+        <p:spPr>
+          <a:xfrm>
+            <a:off x="658368" y="5980176"/>
+            <a:ext cx="10927080" cy="512064"/>
+          </a:xfrm>
+          <a:prstGeom prst="rect">
+            <a:avLst/>
+          </a:prstGeom>
+          <a:noFill/>
+          <a:ln/>
+        </p:spPr>
+        <p:txBody>
+          <a:bodyPr wrap="square" lIns="0" tIns="0" rIns="0" bIns="0" rtlCol="0" anchor="ctr"/>
+          <a:lstStyle/>
+          <a:p>
+            <a:pPr indent="0" marL="0">
+              <a:buNone/>
+            </a:pPr>
+            <a:r>
+              <a:rPr lang="en-US" sz="1600" b="1" dirty="0">
+                <a:solidFill>
+                  <a:srgbClr val="0B7A4A"/>
+                </a:solidFill>
+                <a:latin typeface="Inter" pitchFamily="34" charset="0"/>
+                <a:ea typeface="Inter" pitchFamily="34" charset="-122"/>
+                <a:cs typeface="Inter" pitchFamily="34" charset="-120"/>
+              </a:rPr>
+              <a:t>23 of 33 stores set 98 new monthly records in 2026: 42 in service, 19 in parts and 37 in combined gross.</a:t>
             </a:r>
             <a:endParaRPr lang="en-US" sz="1600" dirty="0"/>
           </a:p>

--- a/day2-deck/decks/Store Records - Review.pptx
+++ b/day2-deck/decks/Store Records - Review.pptx
@@ -1803,7 +1803,7 @@
         <p:spPr>
           <a:xfrm>
             <a:off x="457200" y="1207008"/>
-            <a:ext cx="7589520" cy="4617720"/>
+            <a:ext cx="7589520" cy="4782312"/>
           </a:xfrm>
           <a:prstGeom prst="rect">
             <a:avLst/>
@@ -1881,7 +1881,7 @@
         </p:nvGraphicFramePr>
         <p:xfrm>
           <a:off x="621792" y="1810512"/>
-          <a:ext cx="7269480" cy="3886200"/>
+          <a:ext cx="7269480" cy="4050792"/>
         </p:xfrm>
         <a:graphic xmlns:a="http://schemas.openxmlformats.org/drawingml/2006/main">
           <a:graphicData uri="http://schemas.openxmlformats.org/drawingml/2006/chart">
@@ -1898,7 +1898,7 @@
         <p:spPr>
           <a:xfrm>
             <a:off x="8229600" y="1207008"/>
-            <a:ext cx="3502152" cy="4617720"/>
+            <a:ext cx="3502152" cy="4782312"/>
           </a:xfrm>
           <a:prstGeom prst="rect">
             <a:avLst/>
@@ -2153,8 +2153,8 @@
         </p:nvSpPr>
         <p:spPr>
           <a:xfrm>
-            <a:off x="457200" y="5961888"/>
-            <a:ext cx="11274552" cy="548640"/>
+            <a:off x="457200" y="6126480"/>
+            <a:ext cx="11274552" cy="371856"/>
           </a:xfrm>
           <a:prstGeom prst="rect">
             <a:avLst/>
@@ -2173,8 +2173,8 @@
         </p:nvSpPr>
         <p:spPr>
           <a:xfrm>
-            <a:off x="658368" y="5980176"/>
-            <a:ext cx="10927080" cy="512064"/>
+            <a:off x="658368" y="6144768"/>
+            <a:ext cx="10927080" cy="335280"/>
           </a:xfrm>
           <a:prstGeom prst="rect">
             <a:avLst/>
@@ -2343,7 +2343,7 @@
         <p:spPr>
           <a:xfrm>
             <a:off x="457200" y="1207008"/>
-            <a:ext cx="11274552" cy="4645152"/>
+            <a:ext cx="11274552" cy="4782312"/>
           </a:xfrm>
           <a:prstGeom prst="rect">
             <a:avLst/>
@@ -2753,7 +2753,7 @@
         <p:spPr>
           <a:xfrm>
             <a:off x="658368" y="1700784"/>
-            <a:ext cx="1984248" cy="309489"/>
+            <a:ext cx="1984248" cy="324964"/>
           </a:xfrm>
           <a:prstGeom prst="rect">
             <a:avLst/>
@@ -2791,7 +2791,7 @@
         </p:nvSpPr>
         <p:spPr>
           <a:xfrm>
-            <a:off x="2857500" y="1777805"/>
+            <a:off x="2857500" y="1785542"/>
             <a:ext cx="155448" cy="155448"/>
           </a:xfrm>
           <a:prstGeom prst="ellipse">
@@ -2816,7 +2816,7 @@
         </p:nvSpPr>
         <p:spPr>
           <a:xfrm>
-            <a:off x="3442716" y="1777805"/>
+            <a:off x="3442716" y="1785542"/>
             <a:ext cx="155448" cy="155448"/>
           </a:xfrm>
           <a:prstGeom prst="ellipse">
@@ -2841,7 +2841,7 @@
         </p:nvSpPr>
         <p:spPr>
           <a:xfrm>
-            <a:off x="4027932" y="1777805"/>
+            <a:off x="4027932" y="1785542"/>
             <a:ext cx="155448" cy="155448"/>
           </a:xfrm>
           <a:prstGeom prst="ellipse">
@@ -2867,7 +2867,7 @@
         <p:spPr>
           <a:xfrm>
             <a:off x="4398264" y="1700784"/>
-            <a:ext cx="841248" cy="309489"/>
+            <a:ext cx="841248" cy="324964"/>
           </a:xfrm>
           <a:prstGeom prst="rect">
             <a:avLst/>
@@ -2906,7 +2906,7 @@
         <p:spPr>
           <a:xfrm>
             <a:off x="5239512" y="1700784"/>
-            <a:ext cx="786384" cy="309489"/>
+            <a:ext cx="786384" cy="324964"/>
           </a:xfrm>
           <a:prstGeom prst="rect">
             <a:avLst/>
@@ -2944,8 +2944,8 @@
         </p:nvSpPr>
         <p:spPr>
           <a:xfrm>
-            <a:off x="585216" y="2010273"/>
-            <a:ext cx="5486400" cy="309489"/>
+            <a:off x="585216" y="2025748"/>
+            <a:ext cx="5486400" cy="324964"/>
           </a:xfrm>
           <a:prstGeom prst="rect">
             <a:avLst/>
@@ -2964,8 +2964,8 @@
         </p:nvSpPr>
         <p:spPr>
           <a:xfrm>
-            <a:off x="658368" y="2010273"/>
-            <a:ext cx="1984248" cy="309489"/>
+            <a:off x="658368" y="2025748"/>
+            <a:ext cx="1984248" cy="324964"/>
           </a:xfrm>
           <a:prstGeom prst="rect">
             <a:avLst/>
@@ -3003,7 +3003,7 @@
         </p:nvSpPr>
         <p:spPr>
           <a:xfrm>
-            <a:off x="2857500" y="2087294"/>
+            <a:off x="2857500" y="2110506"/>
             <a:ext cx="155448" cy="155448"/>
           </a:xfrm>
           <a:prstGeom prst="ellipse">
@@ -3028,7 +3028,7 @@
         </p:nvSpPr>
         <p:spPr>
           <a:xfrm>
-            <a:off x="3442716" y="2087294"/>
+            <a:off x="3442716" y="2110506"/>
             <a:ext cx="155448" cy="155448"/>
           </a:xfrm>
           <a:prstGeom prst="ellipse">
@@ -3053,7 +3053,7 @@
         </p:nvSpPr>
         <p:spPr>
           <a:xfrm>
-            <a:off x="4027932" y="2087294"/>
+            <a:off x="4027932" y="2110506"/>
             <a:ext cx="155448" cy="155448"/>
           </a:xfrm>
           <a:prstGeom prst="ellipse">
@@ -3078,8 +3078,8 @@
         </p:nvSpPr>
         <p:spPr>
           <a:xfrm>
-            <a:off x="4398264" y="2010273"/>
-            <a:ext cx="841248" cy="309489"/>
+            <a:off x="4398264" y="2025748"/>
+            <a:ext cx="841248" cy="324964"/>
           </a:xfrm>
           <a:prstGeom prst="rect">
             <a:avLst/>
@@ -3117,8 +3117,8 @@
         </p:nvSpPr>
         <p:spPr>
           <a:xfrm>
-            <a:off x="5239512" y="2010273"/>
-            <a:ext cx="786384" cy="309489"/>
+            <a:off x="5239512" y="2025748"/>
+            <a:ext cx="786384" cy="324964"/>
           </a:xfrm>
           <a:prstGeom prst="rect">
             <a:avLst/>
@@ -3156,8 +3156,8 @@
         </p:nvSpPr>
         <p:spPr>
           <a:xfrm>
-            <a:off x="658368" y="2319762"/>
-            <a:ext cx="1984248" cy="309489"/>
+            <a:off x="658368" y="2350711"/>
+            <a:ext cx="1984248" cy="324964"/>
           </a:xfrm>
           <a:prstGeom prst="rect">
             <a:avLst/>
@@ -3195,7 +3195,7 @@
         </p:nvSpPr>
         <p:spPr>
           <a:xfrm>
-            <a:off x="2857500" y="2396783"/>
+            <a:off x="2857500" y="2435469"/>
             <a:ext cx="155448" cy="155448"/>
           </a:xfrm>
           <a:prstGeom prst="ellipse">
@@ -3220,7 +3220,7 @@
         </p:nvSpPr>
         <p:spPr>
           <a:xfrm>
-            <a:off x="3442716" y="2396783"/>
+            <a:off x="3442716" y="2435469"/>
             <a:ext cx="155448" cy="155448"/>
           </a:xfrm>
           <a:prstGeom prst="ellipse">
@@ -3245,7 +3245,7 @@
         </p:nvSpPr>
         <p:spPr>
           <a:xfrm>
-            <a:off x="4027932" y="2396783"/>
+            <a:off x="4027932" y="2435469"/>
             <a:ext cx="155448" cy="155448"/>
           </a:xfrm>
           <a:prstGeom prst="ellipse">
@@ -3270,8 +3270,8 @@
         </p:nvSpPr>
         <p:spPr>
           <a:xfrm>
-            <a:off x="4398264" y="2319762"/>
-            <a:ext cx="841248" cy="309489"/>
+            <a:off x="4398264" y="2350711"/>
+            <a:ext cx="841248" cy="324964"/>
           </a:xfrm>
           <a:prstGeom prst="rect">
             <a:avLst/>
@@ -3309,8 +3309,8 @@
         </p:nvSpPr>
         <p:spPr>
           <a:xfrm>
-            <a:off x="5239512" y="2319762"/>
-            <a:ext cx="786384" cy="309489"/>
+            <a:off x="5239512" y="2350711"/>
+            <a:ext cx="786384" cy="324964"/>
           </a:xfrm>
           <a:prstGeom prst="rect">
             <a:avLst/>
@@ -3348,8 +3348,8 @@
         </p:nvSpPr>
         <p:spPr>
           <a:xfrm>
-            <a:off x="585216" y="2629252"/>
-            <a:ext cx="5486400" cy="309489"/>
+            <a:off x="585216" y="2675675"/>
+            <a:ext cx="5486400" cy="324964"/>
           </a:xfrm>
           <a:prstGeom prst="rect">
             <a:avLst/>
@@ -3368,8 +3368,8 @@
         </p:nvSpPr>
         <p:spPr>
           <a:xfrm>
-            <a:off x="658368" y="2629252"/>
-            <a:ext cx="1984248" cy="309489"/>
+            <a:off x="658368" y="2675675"/>
+            <a:ext cx="1984248" cy="324964"/>
           </a:xfrm>
           <a:prstGeom prst="rect">
             <a:avLst/>
@@ -3407,7 +3407,7 @@
         </p:nvSpPr>
         <p:spPr>
           <a:xfrm>
-            <a:off x="2857500" y="2706272"/>
+            <a:off x="2857500" y="2760433"/>
             <a:ext cx="155448" cy="155448"/>
           </a:xfrm>
           <a:prstGeom prst="ellipse">
@@ -3432,7 +3432,7 @@
         </p:nvSpPr>
         <p:spPr>
           <a:xfrm>
-            <a:off x="3442716" y="2706272"/>
+            <a:off x="3442716" y="2760433"/>
             <a:ext cx="155448" cy="155448"/>
           </a:xfrm>
           <a:prstGeom prst="ellipse">
@@ -3457,7 +3457,7 @@
         </p:nvSpPr>
         <p:spPr>
           <a:xfrm>
-            <a:off x="4027932" y="2706272"/>
+            <a:off x="4027932" y="2760433"/>
             <a:ext cx="155448" cy="155448"/>
           </a:xfrm>
           <a:prstGeom prst="ellipse">
@@ -3482,8 +3482,8 @@
         </p:nvSpPr>
         <p:spPr>
           <a:xfrm>
-            <a:off x="4398264" y="2629252"/>
-            <a:ext cx="841248" cy="309489"/>
+            <a:off x="4398264" y="2675675"/>
+            <a:ext cx="841248" cy="324964"/>
           </a:xfrm>
           <a:prstGeom prst="rect">
             <a:avLst/>
@@ -3521,8 +3521,8 @@
         </p:nvSpPr>
         <p:spPr>
           <a:xfrm>
-            <a:off x="5239512" y="2629252"/>
-            <a:ext cx="786384" cy="309489"/>
+            <a:off x="5239512" y="2675675"/>
+            <a:ext cx="786384" cy="324964"/>
           </a:xfrm>
           <a:prstGeom prst="rect">
             <a:avLst/>
@@ -3560,8 +3560,8 @@
         </p:nvSpPr>
         <p:spPr>
           <a:xfrm>
-            <a:off x="658368" y="2938741"/>
-            <a:ext cx="1984248" cy="309489"/>
+            <a:off x="658368" y="3000639"/>
+            <a:ext cx="1984248" cy="324964"/>
           </a:xfrm>
           <a:prstGeom prst="rect">
             <a:avLst/>
@@ -3599,7 +3599,7 @@
         </p:nvSpPr>
         <p:spPr>
           <a:xfrm>
-            <a:off x="2857500" y="3015762"/>
+            <a:off x="2857500" y="3085397"/>
             <a:ext cx="155448" cy="155448"/>
           </a:xfrm>
           <a:prstGeom prst="ellipse">
@@ -3624,7 +3624,7 @@
         </p:nvSpPr>
         <p:spPr>
           <a:xfrm>
-            <a:off x="3442716" y="3015762"/>
+            <a:off x="3442716" y="3085397"/>
             <a:ext cx="155448" cy="155448"/>
           </a:xfrm>
           <a:prstGeom prst="ellipse">
@@ -3649,7 +3649,7 @@
         </p:nvSpPr>
         <p:spPr>
           <a:xfrm>
-            <a:off x="4027932" y="3015762"/>
+            <a:off x="4027932" y="3085397"/>
             <a:ext cx="155448" cy="155448"/>
           </a:xfrm>
           <a:prstGeom prst="ellipse">
@@ -3674,8 +3674,8 @@
         </p:nvSpPr>
         <p:spPr>
           <a:xfrm>
-            <a:off x="4398264" y="2938741"/>
-            <a:ext cx="841248" cy="309489"/>
+            <a:off x="4398264" y="3000639"/>
+            <a:ext cx="841248" cy="324964"/>
           </a:xfrm>
           <a:prstGeom prst="rect">
             <a:avLst/>
@@ -3713,8 +3713,8 @@
         </p:nvSpPr>
         <p:spPr>
           <a:xfrm>
-            <a:off x="5239512" y="2938741"/>
-            <a:ext cx="786384" cy="309489"/>
+            <a:off x="5239512" y="3000639"/>
+            <a:ext cx="786384" cy="324964"/>
           </a:xfrm>
           <a:prstGeom prst="rect">
             <a:avLst/>
@@ -3752,8 +3752,8 @@
         </p:nvSpPr>
         <p:spPr>
           <a:xfrm>
-            <a:off x="585216" y="3248230"/>
-            <a:ext cx="5486400" cy="309489"/>
+            <a:off x="585216" y="3325602"/>
+            <a:ext cx="5486400" cy="324964"/>
           </a:xfrm>
           <a:prstGeom prst="rect">
             <a:avLst/>
@@ -3772,8 +3772,8 @@
         </p:nvSpPr>
         <p:spPr>
           <a:xfrm>
-            <a:off x="658368" y="3248230"/>
-            <a:ext cx="1984248" cy="309489"/>
+            <a:off x="658368" y="3325602"/>
+            <a:ext cx="1984248" cy="324964"/>
           </a:xfrm>
           <a:prstGeom prst="rect">
             <a:avLst/>
@@ -3811,7 +3811,7 @@
         </p:nvSpPr>
         <p:spPr>
           <a:xfrm>
-            <a:off x="2857500" y="3325251"/>
+            <a:off x="2857500" y="3410360"/>
             <a:ext cx="155448" cy="155448"/>
           </a:xfrm>
           <a:prstGeom prst="ellipse">
@@ -3836,7 +3836,7 @@
         </p:nvSpPr>
         <p:spPr>
           <a:xfrm>
-            <a:off x="3442716" y="3325251"/>
+            <a:off x="3442716" y="3410360"/>
             <a:ext cx="155448" cy="155448"/>
           </a:xfrm>
           <a:prstGeom prst="ellipse">
@@ -3861,7 +3861,7 @@
         </p:nvSpPr>
         <p:spPr>
           <a:xfrm>
-            <a:off x="4027932" y="3325251"/>
+            <a:off x="4027932" y="3410360"/>
             <a:ext cx="155448" cy="155448"/>
           </a:xfrm>
           <a:prstGeom prst="ellipse">
@@ -3886,8 +3886,8 @@
         </p:nvSpPr>
         <p:spPr>
           <a:xfrm>
-            <a:off x="4398264" y="3248230"/>
-            <a:ext cx="841248" cy="309489"/>
+            <a:off x="4398264" y="3325602"/>
+            <a:ext cx="841248" cy="324964"/>
           </a:xfrm>
           <a:prstGeom prst="rect">
             <a:avLst/>
@@ -3925,8 +3925,8 @@
         </p:nvSpPr>
         <p:spPr>
           <a:xfrm>
-            <a:off x="5239512" y="3248230"/>
-            <a:ext cx="786384" cy="309489"/>
+            <a:off x="5239512" y="3325602"/>
+            <a:ext cx="786384" cy="324964"/>
           </a:xfrm>
           <a:prstGeom prst="rect">
             <a:avLst/>
@@ -3964,8 +3964,8 @@
         </p:nvSpPr>
         <p:spPr>
           <a:xfrm>
-            <a:off x="658368" y="3557719"/>
-            <a:ext cx="1984248" cy="309489"/>
+            <a:off x="658368" y="3650566"/>
+            <a:ext cx="1984248" cy="324964"/>
           </a:xfrm>
           <a:prstGeom prst="rect">
             <a:avLst/>
@@ -4003,7 +4003,7 @@
         </p:nvSpPr>
         <p:spPr>
           <a:xfrm>
-            <a:off x="2857500" y="3634740"/>
+            <a:off x="2857500" y="3735324"/>
             <a:ext cx="155448" cy="155448"/>
           </a:xfrm>
           <a:prstGeom prst="ellipse">
@@ -4028,7 +4028,7 @@
         </p:nvSpPr>
         <p:spPr>
           <a:xfrm>
-            <a:off x="3442716" y="3634740"/>
+            <a:off x="3442716" y="3735324"/>
             <a:ext cx="155448" cy="155448"/>
           </a:xfrm>
           <a:prstGeom prst="ellipse">
@@ -4053,7 +4053,7 @@
         </p:nvSpPr>
         <p:spPr>
           <a:xfrm>
-            <a:off x="4027932" y="3634740"/>
+            <a:off x="4027932" y="3735324"/>
             <a:ext cx="155448" cy="155448"/>
           </a:xfrm>
           <a:prstGeom prst="ellipse">
@@ -4078,8 +4078,8 @@
         </p:nvSpPr>
         <p:spPr>
           <a:xfrm>
-            <a:off x="4398264" y="3557719"/>
-            <a:ext cx="841248" cy="309489"/>
+            <a:off x="4398264" y="3650566"/>
+            <a:ext cx="841248" cy="324964"/>
           </a:xfrm>
           <a:prstGeom prst="rect">
             <a:avLst/>
@@ -4117,8 +4117,8 @@
         </p:nvSpPr>
         <p:spPr>
           <a:xfrm>
-            <a:off x="5239512" y="3557719"/>
-            <a:ext cx="786384" cy="309489"/>
+            <a:off x="5239512" y="3650566"/>
+            <a:ext cx="786384" cy="324964"/>
           </a:xfrm>
           <a:prstGeom prst="rect">
             <a:avLst/>
@@ -4156,8 +4156,8 @@
         </p:nvSpPr>
         <p:spPr>
           <a:xfrm>
-            <a:off x="585216" y="3867209"/>
-            <a:ext cx="5486400" cy="309489"/>
+            <a:off x="585216" y="3975530"/>
+            <a:ext cx="5486400" cy="324964"/>
           </a:xfrm>
           <a:prstGeom prst="rect">
             <a:avLst/>
@@ -4176,8 +4176,8 @@
         </p:nvSpPr>
         <p:spPr>
           <a:xfrm>
-            <a:off x="658368" y="3867209"/>
-            <a:ext cx="1984248" cy="309489"/>
+            <a:off x="658368" y="3975530"/>
+            <a:ext cx="1984248" cy="324964"/>
           </a:xfrm>
           <a:prstGeom prst="rect">
             <a:avLst/>
@@ -4215,7 +4215,7 @@
         </p:nvSpPr>
         <p:spPr>
           <a:xfrm>
-            <a:off x="2857500" y="3944229"/>
+            <a:off x="2857500" y="4060288"/>
             <a:ext cx="155448" cy="155448"/>
           </a:xfrm>
           <a:prstGeom prst="ellipse">
@@ -4240,7 +4240,7 @@
         </p:nvSpPr>
         <p:spPr>
           <a:xfrm>
-            <a:off x="3442716" y="3944229"/>
+            <a:off x="3442716" y="4060288"/>
             <a:ext cx="155448" cy="155448"/>
           </a:xfrm>
           <a:prstGeom prst="ellipse">
@@ -4265,7 +4265,7 @@
         </p:nvSpPr>
         <p:spPr>
           <a:xfrm>
-            <a:off x="4027932" y="3944229"/>
+            <a:off x="4027932" y="4060288"/>
             <a:ext cx="155448" cy="155448"/>
           </a:xfrm>
           <a:prstGeom prst="ellipse">
@@ -4290,8 +4290,8 @@
         </p:nvSpPr>
         <p:spPr>
           <a:xfrm>
-            <a:off x="4398264" y="3867209"/>
-            <a:ext cx="841248" cy="309489"/>
+            <a:off x="4398264" y="3975530"/>
+            <a:ext cx="841248" cy="324964"/>
           </a:xfrm>
           <a:prstGeom prst="rect">
             <a:avLst/>
@@ -4329,8 +4329,8 @@
         </p:nvSpPr>
         <p:spPr>
           <a:xfrm>
-            <a:off x="5239512" y="3867209"/>
-            <a:ext cx="786384" cy="309489"/>
+            <a:off x="5239512" y="3975530"/>
+            <a:ext cx="786384" cy="324964"/>
           </a:xfrm>
           <a:prstGeom prst="rect">
             <a:avLst/>
@@ -4368,8 +4368,8 @@
         </p:nvSpPr>
         <p:spPr>
           <a:xfrm>
-            <a:off x="658368" y="4176698"/>
-            <a:ext cx="1984248" cy="309489"/>
+            <a:off x="658368" y="4300494"/>
+            <a:ext cx="1984248" cy="324964"/>
           </a:xfrm>
           <a:prstGeom prst="rect">
             <a:avLst/>
@@ -4407,7 +4407,7 @@
         </p:nvSpPr>
         <p:spPr>
           <a:xfrm>
-            <a:off x="2857500" y="4253718"/>
+            <a:off x="2857500" y="4385251"/>
             <a:ext cx="155448" cy="155448"/>
           </a:xfrm>
           <a:prstGeom prst="ellipse">
@@ -4432,7 +4432,7 @@
         </p:nvSpPr>
         <p:spPr>
           <a:xfrm>
-            <a:off x="3442716" y="4253718"/>
+            <a:off x="3442716" y="4385251"/>
             <a:ext cx="155448" cy="155448"/>
           </a:xfrm>
           <a:prstGeom prst="ellipse">
@@ -4457,7 +4457,7 @@
         </p:nvSpPr>
         <p:spPr>
           <a:xfrm>
-            <a:off x="4027932" y="4253718"/>
+            <a:off x="4027932" y="4385251"/>
             <a:ext cx="155448" cy="155448"/>
           </a:xfrm>
           <a:prstGeom prst="ellipse">
@@ -4482,8 +4482,8 @@
         </p:nvSpPr>
         <p:spPr>
           <a:xfrm>
-            <a:off x="4398264" y="4176698"/>
-            <a:ext cx="841248" cy="309489"/>
+            <a:off x="4398264" y="4300494"/>
+            <a:ext cx="841248" cy="324964"/>
           </a:xfrm>
           <a:prstGeom prst="rect">
             <a:avLst/>
@@ -4521,8 +4521,8 @@
         </p:nvSpPr>
         <p:spPr>
           <a:xfrm>
-            <a:off x="5239512" y="4176698"/>
-            <a:ext cx="786384" cy="309489"/>
+            <a:off x="5239512" y="4300494"/>
+            <a:ext cx="786384" cy="324964"/>
           </a:xfrm>
           <a:prstGeom prst="rect">
             <a:avLst/>
@@ -4560,8 +4560,8 @@
         </p:nvSpPr>
         <p:spPr>
           <a:xfrm>
-            <a:off x="585216" y="4486187"/>
-            <a:ext cx="5486400" cy="309489"/>
+            <a:off x="585216" y="4625457"/>
+            <a:ext cx="5486400" cy="324964"/>
           </a:xfrm>
           <a:prstGeom prst="rect">
             <a:avLst/>
@@ -4580,8 +4580,8 @@
         </p:nvSpPr>
         <p:spPr>
           <a:xfrm>
-            <a:off x="658368" y="4486187"/>
-            <a:ext cx="1984248" cy="309489"/>
+            <a:off x="658368" y="4625457"/>
+            <a:ext cx="1984248" cy="324964"/>
           </a:xfrm>
           <a:prstGeom prst="rect">
             <a:avLst/>
@@ -4619,7 +4619,7 @@
         </p:nvSpPr>
         <p:spPr>
           <a:xfrm>
-            <a:off x="2857500" y="4563208"/>
+            <a:off x="2857500" y="4710215"/>
             <a:ext cx="155448" cy="155448"/>
           </a:xfrm>
           <a:prstGeom prst="ellipse">
@@ -4644,7 +4644,7 @@
         </p:nvSpPr>
         <p:spPr>
           <a:xfrm>
-            <a:off x="3442716" y="4563208"/>
+            <a:off x="3442716" y="4710215"/>
             <a:ext cx="155448" cy="155448"/>
           </a:xfrm>
           <a:prstGeom prst="ellipse">
@@ -4669,7 +4669,7 @@
         </p:nvSpPr>
         <p:spPr>
           <a:xfrm>
-            <a:off x="4027932" y="4563208"/>
+            <a:off x="4027932" y="4710215"/>
             <a:ext cx="155448" cy="155448"/>
           </a:xfrm>
           <a:prstGeom prst="ellipse">
@@ -4694,8 +4694,8 @@
         </p:nvSpPr>
         <p:spPr>
           <a:xfrm>
-            <a:off x="4398264" y="4486187"/>
-            <a:ext cx="841248" cy="309489"/>
+            <a:off x="4398264" y="4625457"/>
+            <a:ext cx="841248" cy="324964"/>
           </a:xfrm>
           <a:prstGeom prst="rect">
             <a:avLst/>
@@ -4733,8 +4733,8 @@
         </p:nvSpPr>
         <p:spPr>
           <a:xfrm>
-            <a:off x="5239512" y="4486187"/>
-            <a:ext cx="786384" cy="309489"/>
+            <a:off x="5239512" y="4625457"/>
+            <a:ext cx="786384" cy="324964"/>
           </a:xfrm>
           <a:prstGeom prst="rect">
             <a:avLst/>
@@ -4772,8 +4772,8 @@
         </p:nvSpPr>
         <p:spPr>
           <a:xfrm>
-            <a:off x="658368" y="4795676"/>
-            <a:ext cx="1984248" cy="309489"/>
+            <a:off x="658368" y="4950421"/>
+            <a:ext cx="1984248" cy="324964"/>
           </a:xfrm>
           <a:prstGeom prst="rect">
             <a:avLst/>
@@ -4811,7 +4811,7 @@
         </p:nvSpPr>
         <p:spPr>
           <a:xfrm>
-            <a:off x="2857500" y="4872697"/>
+            <a:off x="2857500" y="5035179"/>
             <a:ext cx="155448" cy="155448"/>
           </a:xfrm>
           <a:prstGeom prst="ellipse">
@@ -4836,7 +4836,7 @@
         </p:nvSpPr>
         <p:spPr>
           <a:xfrm>
-            <a:off x="3442716" y="4872697"/>
+            <a:off x="3442716" y="5035179"/>
             <a:ext cx="155448" cy="155448"/>
           </a:xfrm>
           <a:prstGeom prst="ellipse">
@@ -4861,7 +4861,7 @@
         </p:nvSpPr>
         <p:spPr>
           <a:xfrm>
-            <a:off x="4027932" y="4872697"/>
+            <a:off x="4027932" y="5035179"/>
             <a:ext cx="155448" cy="155448"/>
           </a:xfrm>
           <a:prstGeom prst="ellipse">
@@ -4886,8 +4886,8 @@
         </p:nvSpPr>
         <p:spPr>
           <a:xfrm>
-            <a:off x="4398264" y="4795676"/>
-            <a:ext cx="841248" cy="309489"/>
+            <a:off x="4398264" y="4950421"/>
+            <a:ext cx="841248" cy="324964"/>
           </a:xfrm>
           <a:prstGeom prst="rect">
             <a:avLst/>
@@ -4925,8 +4925,8 @@
         </p:nvSpPr>
         <p:spPr>
           <a:xfrm>
-            <a:off x="5239512" y="4795676"/>
-            <a:ext cx="786384" cy="309489"/>
+            <a:off x="5239512" y="4950421"/>
+            <a:ext cx="786384" cy="324964"/>
           </a:xfrm>
           <a:prstGeom prst="rect">
             <a:avLst/>
@@ -4964,8 +4964,8 @@
         </p:nvSpPr>
         <p:spPr>
           <a:xfrm>
-            <a:off x="585216" y="5105166"/>
-            <a:ext cx="5486400" cy="309489"/>
+            <a:off x="585216" y="5275385"/>
+            <a:ext cx="5486400" cy="324964"/>
           </a:xfrm>
           <a:prstGeom prst="rect">
             <a:avLst/>
@@ -4984,8 +4984,8 @@
         </p:nvSpPr>
         <p:spPr>
           <a:xfrm>
-            <a:off x="658368" y="5105166"/>
-            <a:ext cx="1984248" cy="309489"/>
+            <a:off x="658368" y="5275385"/>
+            <a:ext cx="1984248" cy="324964"/>
           </a:xfrm>
           <a:prstGeom prst="rect">
             <a:avLst/>
@@ -5023,7 +5023,7 @@
         </p:nvSpPr>
         <p:spPr>
           <a:xfrm>
-            <a:off x="2857500" y="5182186"/>
+            <a:off x="2857500" y="5360142"/>
             <a:ext cx="155448" cy="155448"/>
           </a:xfrm>
           <a:prstGeom prst="ellipse">
@@ -5048,7 +5048,7 @@
         </p:nvSpPr>
         <p:spPr>
           <a:xfrm>
-            <a:off x="3442716" y="5182186"/>
+            <a:off x="3442716" y="5360142"/>
             <a:ext cx="155448" cy="155448"/>
           </a:xfrm>
           <a:prstGeom prst="ellipse">
@@ -5073,7 +5073,7 @@
         </p:nvSpPr>
         <p:spPr>
           <a:xfrm>
-            <a:off x="4027932" y="5182186"/>
+            <a:off x="4027932" y="5360142"/>
             <a:ext cx="155448" cy="155448"/>
           </a:xfrm>
           <a:prstGeom prst="ellipse">
@@ -5098,8 +5098,8 @@
         </p:nvSpPr>
         <p:spPr>
           <a:xfrm>
-            <a:off x="4398264" y="5105166"/>
-            <a:ext cx="841248" cy="309489"/>
+            <a:off x="4398264" y="5275385"/>
+            <a:ext cx="841248" cy="324964"/>
           </a:xfrm>
           <a:prstGeom prst="rect">
             <a:avLst/>
@@ -5137,8 +5137,8 @@
         </p:nvSpPr>
         <p:spPr>
           <a:xfrm>
-            <a:off x="5239512" y="5105166"/>
-            <a:ext cx="786384" cy="309489"/>
+            <a:off x="5239512" y="5275385"/>
+            <a:ext cx="786384" cy="324964"/>
           </a:xfrm>
           <a:prstGeom prst="rect">
             <a:avLst/>
@@ -5176,8 +5176,8 @@
         </p:nvSpPr>
         <p:spPr>
           <a:xfrm>
-            <a:off x="658368" y="5414655"/>
-            <a:ext cx="1984248" cy="309489"/>
+            <a:off x="658368" y="5600348"/>
+            <a:ext cx="1984248" cy="324964"/>
           </a:xfrm>
           <a:prstGeom prst="rect">
             <a:avLst/>
@@ -5215,7 +5215,7 @@
         </p:nvSpPr>
         <p:spPr>
           <a:xfrm>
-            <a:off x="2857500" y="5491675"/>
+            <a:off x="2857500" y="5685106"/>
             <a:ext cx="155448" cy="155448"/>
           </a:xfrm>
           <a:prstGeom prst="ellipse">
@@ -5240,7 +5240,7 @@
         </p:nvSpPr>
         <p:spPr>
           <a:xfrm>
-            <a:off x="3442716" y="5491675"/>
+            <a:off x="3442716" y="5685106"/>
             <a:ext cx="155448" cy="155448"/>
           </a:xfrm>
           <a:prstGeom prst="ellipse">
@@ -5265,7 +5265,7 @@
         </p:nvSpPr>
         <p:spPr>
           <a:xfrm>
-            <a:off x="4027932" y="5491675"/>
+            <a:off x="4027932" y="5685106"/>
             <a:ext cx="155448" cy="155448"/>
           </a:xfrm>
           <a:prstGeom prst="ellipse">
@@ -5290,8 +5290,8 @@
         </p:nvSpPr>
         <p:spPr>
           <a:xfrm>
-            <a:off x="4398264" y="5414655"/>
-            <a:ext cx="841248" cy="309489"/>
+            <a:off x="4398264" y="5600348"/>
+            <a:ext cx="841248" cy="324964"/>
           </a:xfrm>
           <a:prstGeom prst="rect">
             <a:avLst/>
@@ -5329,8 +5329,8 @@
         </p:nvSpPr>
         <p:spPr>
           <a:xfrm>
-            <a:off x="5239512" y="5414655"/>
-            <a:ext cx="786384" cy="309489"/>
+            <a:off x="5239512" y="5600348"/>
+            <a:ext cx="786384" cy="324964"/>
           </a:xfrm>
           <a:prstGeom prst="rect">
             <a:avLst/>
@@ -5369,7 +5369,7 @@
         <p:spPr>
           <a:xfrm>
             <a:off x="6208776" y="1700784"/>
-            <a:ext cx="1984248" cy="309489"/>
+            <a:ext cx="1984248" cy="324964"/>
           </a:xfrm>
           <a:prstGeom prst="rect">
             <a:avLst/>
@@ -5407,7 +5407,7 @@
         </p:nvSpPr>
         <p:spPr>
           <a:xfrm>
-            <a:off x="8407908" y="1777805"/>
+            <a:off x="8407908" y="1785542"/>
             <a:ext cx="155448" cy="155448"/>
           </a:xfrm>
           <a:prstGeom prst="ellipse">
@@ -5432,7 +5432,7 @@
         </p:nvSpPr>
         <p:spPr>
           <a:xfrm>
-            <a:off x="8993124" y="1777805"/>
+            <a:off x="8993124" y="1785542"/>
             <a:ext cx="155448" cy="155448"/>
           </a:xfrm>
           <a:prstGeom prst="ellipse">
@@ -5457,7 +5457,7 @@
         </p:nvSpPr>
         <p:spPr>
           <a:xfrm>
-            <a:off x="9578340" y="1777805"/>
+            <a:off x="9578340" y="1785542"/>
             <a:ext cx="155448" cy="155448"/>
           </a:xfrm>
           <a:prstGeom prst="ellipse">
@@ -5483,7 +5483,7 @@
         <p:spPr>
           <a:xfrm>
             <a:off x="9948672" y="1700784"/>
-            <a:ext cx="841248" cy="309489"/>
+            <a:ext cx="841248" cy="324964"/>
           </a:xfrm>
           <a:prstGeom prst="rect">
             <a:avLst/>
@@ -5522,7 +5522,7 @@
         <p:spPr>
           <a:xfrm>
             <a:off x="10789920" y="1700784"/>
-            <a:ext cx="786384" cy="309489"/>
+            <a:ext cx="786384" cy="324964"/>
           </a:xfrm>
           <a:prstGeom prst="rect">
             <a:avLst/>
@@ -5560,8 +5560,8 @@
         </p:nvSpPr>
         <p:spPr>
           <a:xfrm>
-            <a:off x="6135624" y="2010273"/>
-            <a:ext cx="5486400" cy="309489"/>
+            <a:off x="6135624" y="2025748"/>
+            <a:ext cx="5486400" cy="324964"/>
           </a:xfrm>
           <a:prstGeom prst="rect">
             <a:avLst/>
@@ -5580,8 +5580,8 @@
         </p:nvSpPr>
         <p:spPr>
           <a:xfrm>
-            <a:off x="6208776" y="2010273"/>
-            <a:ext cx="1984248" cy="309489"/>
+            <a:off x="6208776" y="2025748"/>
+            <a:ext cx="1984248" cy="324964"/>
           </a:xfrm>
           <a:prstGeom prst="rect">
             <a:avLst/>
@@ -5619,7 +5619,7 @@
         </p:nvSpPr>
         <p:spPr>
           <a:xfrm>
-            <a:off x="8407908" y="2087294"/>
+            <a:off x="8407908" y="2110506"/>
             <a:ext cx="155448" cy="155448"/>
           </a:xfrm>
           <a:prstGeom prst="ellipse">
@@ -5644,7 +5644,7 @@
         </p:nvSpPr>
         <p:spPr>
           <a:xfrm>
-            <a:off x="8993124" y="2087294"/>
+            <a:off x="8993124" y="2110506"/>
             <a:ext cx="155448" cy="155448"/>
           </a:xfrm>
           <a:prstGeom prst="ellipse">
@@ -5669,7 +5669,7 @@
         </p:nvSpPr>
         <p:spPr>
           <a:xfrm>
-            <a:off x="9578340" y="2087294"/>
+            <a:off x="9578340" y="2110506"/>
             <a:ext cx="155448" cy="155448"/>
           </a:xfrm>
           <a:prstGeom prst="ellipse">
@@ -5694,8 +5694,8 @@
         </p:nvSpPr>
         <p:spPr>
           <a:xfrm>
-            <a:off x="9948672" y="2010273"/>
-            <a:ext cx="841248" cy="309489"/>
+            <a:off x="9948672" y="2025748"/>
+            <a:ext cx="841248" cy="324964"/>
           </a:xfrm>
           <a:prstGeom prst="rect">
             <a:avLst/>
@@ -5733,8 +5733,8 @@
         </p:nvSpPr>
         <p:spPr>
           <a:xfrm>
-            <a:off x="10789920" y="2010273"/>
-            <a:ext cx="786384" cy="309489"/>
+            <a:off x="10789920" y="2025748"/>
+            <a:ext cx="786384" cy="324964"/>
           </a:xfrm>
           <a:prstGeom prst="rect">
             <a:avLst/>
@@ -5772,8 +5772,8 @@
         </p:nvSpPr>
         <p:spPr>
           <a:xfrm>
-            <a:off x="6208776" y="2319762"/>
-            <a:ext cx="1984248" cy="309489"/>
+            <a:off x="6208776" y="2350711"/>
+            <a:ext cx="1984248" cy="324964"/>
           </a:xfrm>
           <a:prstGeom prst="rect">
             <a:avLst/>
@@ -5811,7 +5811,7 @@
         </p:nvSpPr>
         <p:spPr>
           <a:xfrm>
-            <a:off x="8407908" y="2396783"/>
+            <a:off x="8407908" y="2435469"/>
             <a:ext cx="155448" cy="155448"/>
           </a:xfrm>
           <a:prstGeom prst="ellipse">
@@ -5836,7 +5836,7 @@
         </p:nvSpPr>
         <p:spPr>
           <a:xfrm>
-            <a:off x="8993124" y="2396783"/>
+            <a:off x="8993124" y="2435469"/>
             <a:ext cx="155448" cy="155448"/>
           </a:xfrm>
           <a:prstGeom prst="ellipse">
@@ -5861,7 +5861,7 @@
         </p:nvSpPr>
         <p:spPr>
           <a:xfrm>
-            <a:off x="9578340" y="2396783"/>
+            <a:off x="9578340" y="2435469"/>
             <a:ext cx="155448" cy="155448"/>
           </a:xfrm>
           <a:prstGeom prst="ellipse">
@@ -5886,8 +5886,8 @@
         </p:nvSpPr>
         <p:spPr>
           <a:xfrm>
-            <a:off x="9948672" y="2319762"/>
-            <a:ext cx="841248" cy="309489"/>
+            <a:off x="9948672" y="2350711"/>
+            <a:ext cx="841248" cy="324964"/>
           </a:xfrm>
           <a:prstGeom prst="rect">
             <a:avLst/>
@@ -5925,8 +5925,8 @@
         </p:nvSpPr>
         <p:spPr>
           <a:xfrm>
-            <a:off x="10789920" y="2319762"/>
-            <a:ext cx="786384" cy="309489"/>
+            <a:off x="10789920" y="2350711"/>
+            <a:ext cx="786384" cy="324964"/>
           </a:xfrm>
           <a:prstGeom prst="rect">
             <a:avLst/>
@@ -5964,8 +5964,8 @@
         </p:nvSpPr>
         <p:spPr>
           <a:xfrm>
-            <a:off x="6135624" y="2629252"/>
-            <a:ext cx="5486400" cy="309489"/>
+            <a:off x="6135624" y="2675675"/>
+            <a:ext cx="5486400" cy="324964"/>
           </a:xfrm>
           <a:prstGeom prst="rect">
             <a:avLst/>
@@ -5984,8 +5984,8 @@
         </p:nvSpPr>
         <p:spPr>
           <a:xfrm>
-            <a:off x="6208776" y="2629252"/>
-            <a:ext cx="1984248" cy="309489"/>
+            <a:off x="6208776" y="2675675"/>
+            <a:ext cx="1984248" cy="324964"/>
           </a:xfrm>
           <a:prstGeom prst="rect">
             <a:avLst/>
@@ -6023,7 +6023,7 @@
         </p:nvSpPr>
         <p:spPr>
           <a:xfrm>
-            <a:off x="8407908" y="2706272"/>
+            <a:off x="8407908" y="2760433"/>
             <a:ext cx="155448" cy="155448"/>
           </a:xfrm>
           <a:prstGeom prst="ellipse">
@@ -6048,7 +6048,7 @@
         </p:nvSpPr>
         <p:spPr>
           <a:xfrm>
-            <a:off x="8993124" y="2706272"/>
+            <a:off x="8993124" y="2760433"/>
             <a:ext cx="155448" cy="155448"/>
           </a:xfrm>
           <a:prstGeom prst="ellipse">
@@ -6073,7 +6073,7 @@
         </p:nvSpPr>
         <p:spPr>
           <a:xfrm>
-            <a:off x="9578340" y="2706272"/>
+            <a:off x="9578340" y="2760433"/>
             <a:ext cx="155448" cy="155448"/>
           </a:xfrm>
           <a:prstGeom prst="ellipse">
@@ -6098,8 +6098,8 @@
         </p:nvSpPr>
         <p:spPr>
           <a:xfrm>
-            <a:off x="9948672" y="2629252"/>
-            <a:ext cx="841248" cy="309489"/>
+            <a:off x="9948672" y="2675675"/>
+            <a:ext cx="841248" cy="324964"/>
           </a:xfrm>
           <a:prstGeom prst="rect">
             <a:avLst/>
@@ -6137,8 +6137,8 @@
         </p:nvSpPr>
         <p:spPr>
           <a:xfrm>
-            <a:off x="10789920" y="2629252"/>
-            <a:ext cx="786384" cy="309489"/>
+            <a:off x="10789920" y="2675675"/>
+            <a:ext cx="786384" cy="324964"/>
           </a:xfrm>
           <a:prstGeom prst="rect">
             <a:avLst/>
@@ -6176,8 +6176,8 @@
         </p:nvSpPr>
         <p:spPr>
           <a:xfrm>
-            <a:off x="6208776" y="2938741"/>
-            <a:ext cx="1984248" cy="309489"/>
+            <a:off x="6208776" y="3000639"/>
+            <a:ext cx="1984248" cy="324964"/>
           </a:xfrm>
           <a:prstGeom prst="rect">
             <a:avLst/>
@@ -6215,7 +6215,7 @@
         </p:nvSpPr>
         <p:spPr>
           <a:xfrm>
-            <a:off x="8407908" y="3015762"/>
+            <a:off x="8407908" y="3085397"/>
             <a:ext cx="155448" cy="155448"/>
           </a:xfrm>
           <a:prstGeom prst="ellipse">
@@ -6240,7 +6240,7 @@
         </p:nvSpPr>
         <p:spPr>
           <a:xfrm>
-            <a:off x="8993124" y="3015762"/>
+            <a:off x="8993124" y="3085397"/>
             <a:ext cx="155448" cy="155448"/>
           </a:xfrm>
           <a:prstGeom prst="ellipse">
@@ -6265,7 +6265,7 @@
         </p:nvSpPr>
         <p:spPr>
           <a:xfrm>
-            <a:off x="9578340" y="3015762"/>
+            <a:off x="9578340" y="3085397"/>
             <a:ext cx="155448" cy="155448"/>
           </a:xfrm>
           <a:prstGeom prst="ellipse">
@@ -6290,8 +6290,8 @@
         </p:nvSpPr>
         <p:spPr>
           <a:xfrm>
-            <a:off x="9948672" y="2938741"/>
-            <a:ext cx="841248" cy="309489"/>
+            <a:off x="9948672" y="3000639"/>
+            <a:ext cx="841248" cy="324964"/>
           </a:xfrm>
           <a:prstGeom prst="rect">
             <a:avLst/>
@@ -6329,8 +6329,8 @@
         </p:nvSpPr>
         <p:spPr>
           <a:xfrm>
-            <a:off x="10789920" y="2938741"/>
-            <a:ext cx="786384" cy="309489"/>
+            <a:off x="10789920" y="3000639"/>
+            <a:ext cx="786384" cy="324964"/>
           </a:xfrm>
           <a:prstGeom prst="rect">
             <a:avLst/>
@@ -6368,8 +6368,8 @@
         </p:nvSpPr>
         <p:spPr>
           <a:xfrm>
-            <a:off x="6135624" y="3248230"/>
-            <a:ext cx="5486400" cy="309489"/>
+            <a:off x="6135624" y="3325602"/>
+            <a:ext cx="5486400" cy="324964"/>
           </a:xfrm>
           <a:prstGeom prst="rect">
             <a:avLst/>
@@ -6388,8 +6388,8 @@
         </p:nvSpPr>
         <p:spPr>
           <a:xfrm>
-            <a:off x="6208776" y="3248230"/>
-            <a:ext cx="1984248" cy="309489"/>
+            <a:off x="6208776" y="3325602"/>
+            <a:ext cx="1984248" cy="324964"/>
           </a:xfrm>
           <a:prstGeom prst="rect">
             <a:avLst/>
@@ -6427,7 +6427,7 @@
         </p:nvSpPr>
         <p:spPr>
           <a:xfrm>
-            <a:off x="8407908" y="3325251"/>
+            <a:off x="8407908" y="3410360"/>
             <a:ext cx="155448" cy="155448"/>
           </a:xfrm>
           <a:prstGeom prst="ellipse">
@@ -6452,7 +6452,7 @@
         </p:nvSpPr>
         <p:spPr>
           <a:xfrm>
-            <a:off x="8993124" y="3325251"/>
+            <a:off x="8993124" y="3410360"/>
             <a:ext cx="155448" cy="155448"/>
           </a:xfrm>
           <a:prstGeom prst="ellipse">
@@ -6477,7 +6477,7 @@
         </p:nvSpPr>
         <p:spPr>
           <a:xfrm>
-            <a:off x="9578340" y="3325251"/>
+            <a:off x="9578340" y="3410360"/>
             <a:ext cx="155448" cy="155448"/>
           </a:xfrm>
           <a:prstGeom prst="ellipse">
@@ -6502,8 +6502,8 @@
         </p:nvSpPr>
         <p:spPr>
           <a:xfrm>
-            <a:off x="9948672" y="3248230"/>
-            <a:ext cx="841248" cy="309489"/>
+            <a:off x="9948672" y="3325602"/>
+            <a:ext cx="841248" cy="324964"/>
           </a:xfrm>
           <a:prstGeom prst="rect">
             <a:avLst/>
@@ -6541,8 +6541,8 @@
         </p:nvSpPr>
         <p:spPr>
           <a:xfrm>
-            <a:off x="10789920" y="3248230"/>
-            <a:ext cx="786384" cy="309489"/>
+            <a:off x="10789920" y="3325602"/>
+            <a:ext cx="786384" cy="324964"/>
           </a:xfrm>
           <a:prstGeom prst="rect">
             <a:avLst/>
@@ -6580,8 +6580,8 @@
         </p:nvSpPr>
         <p:spPr>
           <a:xfrm>
-            <a:off x="6208776" y="3557719"/>
-            <a:ext cx="1984248" cy="309489"/>
+            <a:off x="6208776" y="3650566"/>
+            <a:ext cx="1984248" cy="324964"/>
           </a:xfrm>
           <a:prstGeom prst="rect">
             <a:avLst/>
@@ -6619,7 +6619,7 @@
         </p:nvSpPr>
         <p:spPr>
           <a:xfrm>
-            <a:off x="8407908" y="3634740"/>
+            <a:off x="8407908" y="3735324"/>
             <a:ext cx="155448" cy="155448"/>
           </a:xfrm>
           <a:prstGeom prst="ellipse">
@@ -6644,7 +6644,7 @@
         </p:nvSpPr>
         <p:spPr>
           <a:xfrm>
-            <a:off x="8993124" y="3634740"/>
+            <a:off x="8993124" y="3735324"/>
             <a:ext cx="155448" cy="155448"/>
           </a:xfrm>
           <a:prstGeom prst="ellipse">
@@ -6669,7 +6669,7 @@
         </p:nvSpPr>
         <p:spPr>
           <a:xfrm>
-            <a:off x="9578340" y="3634740"/>
+            <a:off x="9578340" y="3735324"/>
             <a:ext cx="155448" cy="155448"/>
           </a:xfrm>
           <a:prstGeom prst="ellipse">
@@ -6694,8 +6694,8 @@
         </p:nvSpPr>
         <p:spPr>
           <a:xfrm>
-            <a:off x="9948672" y="3557719"/>
-            <a:ext cx="841248" cy="309489"/>
+            <a:off x="9948672" y="3650566"/>
+            <a:ext cx="841248" cy="324964"/>
           </a:xfrm>
           <a:prstGeom prst="rect">
             <a:avLst/>
@@ -6733,8 +6733,8 @@
         </p:nvSpPr>
         <p:spPr>
           <a:xfrm>
-            <a:off x="10789920" y="3557719"/>
-            <a:ext cx="786384" cy="309489"/>
+            <a:off x="10789920" y="3650566"/>
+            <a:ext cx="786384" cy="324964"/>
           </a:xfrm>
           <a:prstGeom prst="rect">
             <a:avLst/>
@@ -6772,8 +6772,8 @@
         </p:nvSpPr>
         <p:spPr>
           <a:xfrm>
-            <a:off x="6135624" y="3867209"/>
-            <a:ext cx="5486400" cy="309489"/>
+            <a:off x="6135624" y="3975530"/>
+            <a:ext cx="5486400" cy="324964"/>
           </a:xfrm>
           <a:prstGeom prst="rect">
             <a:avLst/>
@@ -6792,8 +6792,8 @@
         </p:nvSpPr>
         <p:spPr>
           <a:xfrm>
-            <a:off x="6208776" y="3867209"/>
-            <a:ext cx="1984248" cy="309489"/>
+            <a:off x="6208776" y="3975530"/>
+            <a:ext cx="1984248" cy="324964"/>
           </a:xfrm>
           <a:prstGeom prst="rect">
             <a:avLst/>
@@ -6831,7 +6831,7 @@
         </p:nvSpPr>
         <p:spPr>
           <a:xfrm>
-            <a:off x="8407908" y="3944229"/>
+            <a:off x="8407908" y="4060288"/>
             <a:ext cx="155448" cy="155448"/>
           </a:xfrm>
           <a:prstGeom prst="ellipse">
@@ -6856,7 +6856,7 @@
         </p:nvSpPr>
         <p:spPr>
           <a:xfrm>
-            <a:off x="8993124" y="3944229"/>
+            <a:off x="8993124" y="4060288"/>
             <a:ext cx="155448" cy="155448"/>
           </a:xfrm>
           <a:prstGeom prst="ellipse">
@@ -6881,7 +6881,7 @@
         </p:nvSpPr>
         <p:spPr>
           <a:xfrm>
-            <a:off x="9578340" y="3944229"/>
+            <a:off x="9578340" y="4060288"/>
             <a:ext cx="155448" cy="155448"/>
           </a:xfrm>
           <a:prstGeom prst="ellipse">
@@ -6906,8 +6906,8 @@
         </p:nvSpPr>
         <p:spPr>
           <a:xfrm>
-            <a:off x="9948672" y="3867209"/>
-            <a:ext cx="841248" cy="309489"/>
+            <a:off x="9948672" y="3975530"/>
+            <a:ext cx="841248" cy="324964"/>
           </a:xfrm>
           <a:prstGeom prst="rect">
             <a:avLst/>
@@ -6945,8 +6945,8 @@
         </p:nvSpPr>
         <p:spPr>
           <a:xfrm>
-            <a:off x="10789920" y="3867209"/>
-            <a:ext cx="786384" cy="309489"/>
+            <a:off x="10789920" y="3975530"/>
+            <a:ext cx="786384" cy="324964"/>
           </a:xfrm>
           <a:prstGeom prst="rect">
             <a:avLst/>
@@ -6984,8 +6984,8 @@
         </p:nvSpPr>
         <p:spPr>
           <a:xfrm>
-            <a:off x="6208776" y="4176698"/>
-            <a:ext cx="1984248" cy="309489"/>
+            <a:off x="6208776" y="4300494"/>
+            <a:ext cx="1984248" cy="324964"/>
           </a:xfrm>
           <a:prstGeom prst="rect">
             <a:avLst/>
@@ -7023,7 +7023,7 @@
         </p:nvSpPr>
         <p:spPr>
           <a:xfrm>
-            <a:off x="8407908" y="4253718"/>
+            <a:off x="8407908" y="4385251"/>
             <a:ext cx="155448" cy="155448"/>
           </a:xfrm>
           <a:prstGeom prst="ellipse">
@@ -7048,7 +7048,7 @@
         </p:nvSpPr>
         <p:spPr>
           <a:xfrm>
-            <a:off x="8993124" y="4253718"/>
+            <a:off x="8993124" y="4385251"/>
             <a:ext cx="155448" cy="155448"/>
           </a:xfrm>
           <a:prstGeom prst="ellipse">
@@ -7073,7 +7073,7 @@
         </p:nvSpPr>
         <p:spPr>
           <a:xfrm>
-            <a:off x="9578340" y="4253718"/>
+            <a:off x="9578340" y="4385251"/>
             <a:ext cx="155448" cy="155448"/>
           </a:xfrm>
           <a:prstGeom prst="ellipse">
@@ -7098,8 +7098,8 @@
         </p:nvSpPr>
         <p:spPr>
           <a:xfrm>
-            <a:off x="9948672" y="4176698"/>
-            <a:ext cx="841248" cy="309489"/>
+            <a:off x="9948672" y="4300494"/>
+            <a:ext cx="841248" cy="324964"/>
           </a:xfrm>
           <a:prstGeom prst="rect">
             <a:avLst/>
@@ -7137,8 +7137,8 @@
         </p:nvSpPr>
         <p:spPr>
           <a:xfrm>
-            <a:off x="10789920" y="4176698"/>
-            <a:ext cx="786384" cy="309489"/>
+            <a:off x="10789920" y="4300494"/>
+            <a:ext cx="786384" cy="324964"/>
           </a:xfrm>
           <a:prstGeom prst="rect">
             <a:avLst/>
@@ -7176,8 +7176,8 @@
         </p:nvSpPr>
         <p:spPr>
           <a:xfrm>
-            <a:off x="6135624" y="4486187"/>
-            <a:ext cx="5486400" cy="309489"/>
+            <a:off x="6135624" y="4625457"/>
+            <a:ext cx="5486400" cy="324964"/>
           </a:xfrm>
           <a:prstGeom prst="rect">
             <a:avLst/>
@@ -7196,8 +7196,8 @@
         </p:nvSpPr>
         <p:spPr>
           <a:xfrm>
-            <a:off x="6208776" y="4486187"/>
-            <a:ext cx="1984248" cy="309489"/>
+            <a:off x="6208776" y="4625457"/>
+            <a:ext cx="1984248" cy="324964"/>
           </a:xfrm>
           <a:prstGeom prst="rect">
             <a:avLst/>
@@ -7235,7 +7235,7 @@
         </p:nvSpPr>
         <p:spPr>
           <a:xfrm>
-            <a:off x="8407908" y="4563208"/>
+            <a:off x="8407908" y="4710215"/>
             <a:ext cx="155448" cy="155448"/>
           </a:xfrm>
           <a:prstGeom prst="ellipse">
@@ -7260,7 +7260,7 @@
         </p:nvSpPr>
         <p:spPr>
           <a:xfrm>
-            <a:off x="8993124" y="4563208"/>
+            <a:off x="8993124" y="4710215"/>
             <a:ext cx="155448" cy="155448"/>
           </a:xfrm>
           <a:prstGeom prst="ellipse">
@@ -7285,7 +7285,7 @@
         </p:nvSpPr>
         <p:spPr>
           <a:xfrm>
-            <a:off x="9578340" y="4563208"/>
+            <a:off x="9578340" y="4710215"/>
             <a:ext cx="155448" cy="155448"/>
           </a:xfrm>
           <a:prstGeom prst="ellipse">
@@ -7310,8 +7310,8 @@
         </p:nvSpPr>
         <p:spPr>
           <a:xfrm>
-            <a:off x="9948672" y="4486187"/>
-            <a:ext cx="841248" cy="309489"/>
+            <a:off x="9948672" y="4625457"/>
+            <a:ext cx="841248" cy="324964"/>
           </a:xfrm>
           <a:prstGeom prst="rect">
             <a:avLst/>
@@ -7349,8 +7349,8 @@
         </p:nvSpPr>
         <p:spPr>
           <a:xfrm>
-            <a:off x="10789920" y="4486187"/>
-            <a:ext cx="786384" cy="309489"/>
+            <a:off x="10789920" y="4625457"/>
+            <a:ext cx="786384" cy="324964"/>
           </a:xfrm>
           <a:prstGeom prst="rect">
             <a:avLst/>
@@ -7388,8 +7388,8 @@
         </p:nvSpPr>
         <p:spPr>
           <a:xfrm>
-            <a:off x="6208776" y="4795676"/>
-            <a:ext cx="1984248" cy="309489"/>
+            <a:off x="6208776" y="4950421"/>
+            <a:ext cx="1984248" cy="324964"/>
           </a:xfrm>
           <a:prstGeom prst="rect">
             <a:avLst/>
@@ -7427,7 +7427,7 @@
         </p:nvSpPr>
         <p:spPr>
           <a:xfrm>
-            <a:off x="8407908" y="4872697"/>
+            <a:off x="8407908" y="5035179"/>
             <a:ext cx="155448" cy="155448"/>
           </a:xfrm>
           <a:prstGeom prst="ellipse">
@@ -7452,7 +7452,7 @@
         </p:nvSpPr>
         <p:spPr>
           <a:xfrm>
-            <a:off x="8993124" y="4872697"/>
+            <a:off x="8993124" y="5035179"/>
             <a:ext cx="155448" cy="155448"/>
           </a:xfrm>
           <a:prstGeom prst="ellipse">
@@ -7477,7 +7477,7 @@
         </p:nvSpPr>
         <p:spPr>
           <a:xfrm>
-            <a:off x="9578340" y="4872697"/>
+            <a:off x="9578340" y="5035179"/>
             <a:ext cx="155448" cy="155448"/>
           </a:xfrm>
           <a:prstGeom prst="ellipse">
@@ -7502,8 +7502,8 @@
         </p:nvSpPr>
         <p:spPr>
           <a:xfrm>
-            <a:off x="9948672" y="4795676"/>
-            <a:ext cx="841248" cy="309489"/>
+            <a:off x="9948672" y="4950421"/>
+            <a:ext cx="841248" cy="324964"/>
           </a:xfrm>
           <a:prstGeom prst="rect">
             <a:avLst/>
@@ -7541,8 +7541,8 @@
         </p:nvSpPr>
         <p:spPr>
           <a:xfrm>
-            <a:off x="10789920" y="4795676"/>
-            <a:ext cx="786384" cy="309489"/>
+            <a:off x="10789920" y="4950421"/>
+            <a:ext cx="786384" cy="324964"/>
           </a:xfrm>
           <a:prstGeom prst="rect">
             <a:avLst/>
@@ -7580,8 +7580,8 @@
         </p:nvSpPr>
         <p:spPr>
           <a:xfrm>
-            <a:off x="6135624" y="5105166"/>
-            <a:ext cx="5486400" cy="309489"/>
+            <a:off x="6135624" y="5275385"/>
+            <a:ext cx="5486400" cy="324964"/>
           </a:xfrm>
           <a:prstGeom prst="rect">
             <a:avLst/>
@@ -7600,8 +7600,8 @@
         </p:nvSpPr>
         <p:spPr>
           <a:xfrm>
-            <a:off x="6208776" y="5105166"/>
-            <a:ext cx="1984248" cy="309489"/>
+            <a:off x="6208776" y="5275385"/>
+            <a:ext cx="1984248" cy="324964"/>
           </a:xfrm>
           <a:prstGeom prst="rect">
             <a:avLst/>
@@ -7639,7 +7639,7 @@
         </p:nvSpPr>
         <p:spPr>
           <a:xfrm>
-            <a:off x="8407908" y="5182186"/>
+            <a:off x="8407908" y="5360142"/>
             <a:ext cx="155448" cy="155448"/>
           </a:xfrm>
           <a:prstGeom prst="ellipse">
@@ -7664,7 +7664,7 @@
         </p:nvSpPr>
         <p:spPr>
           <a:xfrm>
-            <a:off x="8993124" y="5182186"/>
+            <a:off x="8993124" y="5360142"/>
             <a:ext cx="155448" cy="155448"/>
           </a:xfrm>
           <a:prstGeom prst="ellipse">
@@ -7689,7 +7689,7 @@
         </p:nvSpPr>
         <p:spPr>
           <a:xfrm>
-            <a:off x="9578340" y="5182186"/>
+            <a:off x="9578340" y="5360142"/>
             <a:ext cx="155448" cy="155448"/>
           </a:xfrm>
           <a:prstGeom prst="ellipse">
@@ -7714,8 +7714,8 @@
         </p:nvSpPr>
         <p:spPr>
           <a:xfrm>
-            <a:off x="9948672" y="5105166"/>
-            <a:ext cx="841248" cy="309489"/>
+            <a:off x="9948672" y="5275385"/>
+            <a:ext cx="841248" cy="324964"/>
           </a:xfrm>
           <a:prstGeom prst="rect">
             <a:avLst/>
@@ -7753,8 +7753,8 @@
         </p:nvSpPr>
         <p:spPr>
           <a:xfrm>
-            <a:off x="10789920" y="5105166"/>
-            <a:ext cx="786384" cy="309489"/>
+            <a:off x="10789920" y="5275385"/>
+            <a:ext cx="786384" cy="324964"/>
           </a:xfrm>
           <a:prstGeom prst="rect">
             <a:avLst/>
@@ -7792,8 +7792,8 @@
         </p:nvSpPr>
         <p:spPr>
           <a:xfrm>
-            <a:off x="457200" y="5961888"/>
-            <a:ext cx="11274552" cy="548640"/>
+            <a:off x="457200" y="6126480"/>
+            <a:ext cx="11274552" cy="371856"/>
           </a:xfrm>
           <a:prstGeom prst="rect">
             <a:avLst/>
@@ -7812,8 +7812,8 @@
         </p:nvSpPr>
         <p:spPr>
           <a:xfrm>
-            <a:off x="658368" y="5980176"/>
-            <a:ext cx="10927080" cy="512064"/>
+            <a:off x="658368" y="6144768"/>
+            <a:ext cx="10927080" cy="335280"/>
           </a:xfrm>
           <a:prstGeom prst="rect">
             <a:avLst/>
@@ -7982,7 +7982,7 @@
         <p:spPr>
           <a:xfrm>
             <a:off x="457200" y="1207008"/>
-            <a:ext cx="11274552" cy="4645152"/>
+            <a:ext cx="11274552" cy="4782312"/>
           </a:xfrm>
           <a:prstGeom prst="rect">
             <a:avLst/>
@@ -8676,8 +8676,8 @@
         </p:nvSpPr>
         <p:spPr>
           <a:xfrm>
-            <a:off x="457200" y="5961888"/>
-            <a:ext cx="11274552" cy="548640"/>
+            <a:off x="457200" y="6126480"/>
+            <a:ext cx="11274552" cy="348996"/>
           </a:xfrm>
           <a:prstGeom prst="rect">
             <a:avLst/>
@@ -8696,8 +8696,8 @@
         </p:nvSpPr>
         <p:spPr>
           <a:xfrm>
-            <a:off x="658368" y="5980176"/>
-            <a:ext cx="10927080" cy="512064"/>
+            <a:off x="658368" y="6144768"/>
+            <a:ext cx="10927080" cy="312420"/>
           </a:xfrm>
           <a:prstGeom prst="rect">
             <a:avLst/>
@@ -8713,7 +8713,7 @@
               <a:buNone/>
             </a:pPr>
             <a:r>
-              <a:rPr lang="en-US" sz="1600" b="1" dirty="0">
+              <a:rPr lang="en-US" sz="1450" b="1" dirty="0">
                 <a:solidFill>
                   <a:srgbClr val="0B7A4A"/>
                 </a:solidFill>
@@ -8721,9 +8721,9 @@
                 <a:ea typeface="Inter" pitchFamily="34" charset="-122"/>
                 <a:cs typeface="Inter" pitchFamily="34" charset="-120"/>
               </a:rPr>
-              <a:t>HYUNDAI PRESCOTT, LINCOLN, LEXUS and AUDI HENDERSON beat their previous best by the most in percentage terms.</a:t>
-            </a:r>
-            <a:endParaRPr lang="en-US" sz="1600" dirty="0"/>
+              <a:t>Hyundai Prescott, Lincoln, Lexus and Audi Henderson beat their previous best by the most in percentage terms.</a:t>
+            </a:r>
+            <a:endParaRPr lang="en-US" sz="1450" dirty="0"/>
           </a:p>
         </p:txBody>
       </p:sp>
@@ -8866,7 +8866,7 @@
         <p:spPr>
           <a:xfrm>
             <a:off x="457200" y="1207008"/>
-            <a:ext cx="11274552" cy="4645152"/>
+            <a:ext cx="11274552" cy="4782312"/>
           </a:xfrm>
           <a:prstGeom prst="rect">
             <a:avLst/>
@@ -9560,8 +9560,8 @@
         </p:nvSpPr>
         <p:spPr>
           <a:xfrm>
-            <a:off x="457200" y="5961888"/>
-            <a:ext cx="11274552" cy="548640"/>
+            <a:off x="457200" y="6126480"/>
+            <a:ext cx="11274552" cy="364236"/>
           </a:xfrm>
           <a:prstGeom prst="rect">
             <a:avLst/>
@@ -9580,8 +9580,8 @@
         </p:nvSpPr>
         <p:spPr>
           <a:xfrm>
-            <a:off x="658368" y="5980176"/>
-            <a:ext cx="10927080" cy="512064"/>
+            <a:off x="658368" y="6144768"/>
+            <a:ext cx="10927080" cy="327660"/>
           </a:xfrm>
           <a:prstGeom prst="rect">
             <a:avLst/>
@@ -9597,7 +9597,7 @@
               <a:buNone/>
             </a:pPr>
             <a:r>
-              <a:rPr lang="en-US" sz="1600" b="1" dirty="0">
+              <a:rPr lang="en-US" sz="1550" b="1" dirty="0">
                 <a:solidFill>
                   <a:srgbClr val="0B7A4A"/>
                 </a:solidFill>
@@ -9605,9 +9605,9 @@
                 <a:ea typeface="Inter" pitchFamily="34" charset="-122"/>
                 <a:cs typeface="Inter" pitchFamily="34" charset="-120"/>
               </a:rPr>
-              <a:t>TOYOTA HENDERSON, AUDI HENDERSON, LEXUS and LINCOLN beat their previous best by the most in dollars.</a:t>
-            </a:r>
-            <a:endParaRPr lang="en-US" sz="1600" dirty="0"/>
+              <a:t>Toyota Henderson, Audi Henderson, Lexus and Lincoln beat their previous best by the most in dollars.</a:t>
+            </a:r>
+            <a:endParaRPr lang="en-US" sz="1550" dirty="0"/>
           </a:p>
         </p:txBody>
       </p:sp>
@@ -9750,7 +9750,7 @@
         <p:spPr>
           <a:xfrm>
             <a:off x="457200" y="1207008"/>
-            <a:ext cx="11274552" cy="4645152"/>
+            <a:ext cx="11274552" cy="4782312"/>
           </a:xfrm>
           <a:prstGeom prst="rect">
             <a:avLst/>
@@ -9848,7 +9848,7 @@
         <p:spPr>
           <a:xfrm>
             <a:off x="658368" y="1700784"/>
-            <a:ext cx="1938528" cy="335280"/>
+            <a:ext cx="1938528" cy="352044"/>
           </a:xfrm>
           <a:prstGeom prst="rect">
             <a:avLst/>
@@ -9886,8 +9886,8 @@
         </p:nvSpPr>
         <p:spPr>
           <a:xfrm>
-            <a:off x="2670048" y="1776222"/>
-            <a:ext cx="2093976" cy="184404"/>
+            <a:off x="2670048" y="1779994"/>
+            <a:ext cx="2093976" cy="193624"/>
           </a:xfrm>
           <a:prstGeom prst="rect">
             <a:avLst/>
@@ -9907,7 +9907,7 @@
         <p:spPr>
           <a:xfrm>
             <a:off x="4818888" y="1700784"/>
-            <a:ext cx="1051560" cy="335280"/>
+            <a:ext cx="1051560" cy="352044"/>
           </a:xfrm>
           <a:prstGeom prst="rect">
             <a:avLst/>
@@ -9945,8 +9945,8 @@
         </p:nvSpPr>
         <p:spPr>
           <a:xfrm>
-            <a:off x="658368" y="2036064"/>
-            <a:ext cx="1938528" cy="335280"/>
+            <a:off x="658368" y="2052828"/>
+            <a:ext cx="1938528" cy="352044"/>
           </a:xfrm>
           <a:prstGeom prst="rect">
             <a:avLst/>
@@ -9984,8 +9984,8 @@
         </p:nvSpPr>
         <p:spPr>
           <a:xfrm>
-            <a:off x="2670048" y="2111502"/>
-            <a:ext cx="2093976" cy="184404"/>
+            <a:off x="2670048" y="2132038"/>
+            <a:ext cx="2093976" cy="193624"/>
           </a:xfrm>
           <a:prstGeom prst="rect">
             <a:avLst/>
@@ -10004,8 +10004,8 @@
         </p:nvSpPr>
         <p:spPr>
           <a:xfrm>
-            <a:off x="4818888" y="2036064"/>
-            <a:ext cx="1051560" cy="335280"/>
+            <a:off x="4818888" y="2052828"/>
+            <a:ext cx="1051560" cy="352044"/>
           </a:xfrm>
           <a:prstGeom prst="rect">
             <a:avLst/>
@@ -10043,8 +10043,8 @@
         </p:nvSpPr>
         <p:spPr>
           <a:xfrm>
-            <a:off x="658368" y="2371344"/>
-            <a:ext cx="1938528" cy="335280"/>
+            <a:off x="658368" y="2404872"/>
+            <a:ext cx="1938528" cy="352044"/>
           </a:xfrm>
           <a:prstGeom prst="rect">
             <a:avLst/>
@@ -10082,8 +10082,8 @@
         </p:nvSpPr>
         <p:spPr>
           <a:xfrm>
-            <a:off x="2670048" y="2446782"/>
-            <a:ext cx="1861312" cy="184404"/>
+            <a:off x="2670048" y="2484082"/>
+            <a:ext cx="1861312" cy="193624"/>
           </a:xfrm>
           <a:prstGeom prst="rect">
             <a:avLst/>
@@ -10102,8 +10102,8 @@
         </p:nvSpPr>
         <p:spPr>
           <a:xfrm>
-            <a:off x="4818888" y="2371344"/>
-            <a:ext cx="1051560" cy="335280"/>
+            <a:off x="4818888" y="2404872"/>
+            <a:ext cx="1051560" cy="352044"/>
           </a:xfrm>
           <a:prstGeom prst="rect">
             <a:avLst/>
@@ -10141,8 +10141,8 @@
         </p:nvSpPr>
         <p:spPr>
           <a:xfrm>
-            <a:off x="658368" y="2706624"/>
-            <a:ext cx="1938528" cy="335280"/>
+            <a:off x="658368" y="2756916"/>
+            <a:ext cx="1938528" cy="352044"/>
           </a:xfrm>
           <a:prstGeom prst="rect">
             <a:avLst/>
@@ -10180,8 +10180,8 @@
         </p:nvSpPr>
         <p:spPr>
           <a:xfrm>
-            <a:off x="2670048" y="2782062"/>
-            <a:ext cx="1628648" cy="184404"/>
+            <a:off x="2670048" y="2836126"/>
+            <a:ext cx="1628648" cy="193624"/>
           </a:xfrm>
           <a:prstGeom prst="rect">
             <a:avLst/>
@@ -10200,8 +10200,8 @@
         </p:nvSpPr>
         <p:spPr>
           <a:xfrm>
-            <a:off x="4818888" y="2706624"/>
-            <a:ext cx="1051560" cy="335280"/>
+            <a:off x="4818888" y="2756916"/>
+            <a:ext cx="1051560" cy="352044"/>
           </a:xfrm>
           <a:prstGeom prst="rect">
             <a:avLst/>
@@ -10239,8 +10239,8 @@
         </p:nvSpPr>
         <p:spPr>
           <a:xfrm>
-            <a:off x="658368" y="3041904"/>
-            <a:ext cx="1938528" cy="335280"/>
+            <a:off x="658368" y="3108960"/>
+            <a:ext cx="1938528" cy="352044"/>
           </a:xfrm>
           <a:prstGeom prst="rect">
             <a:avLst/>
@@ -10278,8 +10278,8 @@
         </p:nvSpPr>
         <p:spPr>
           <a:xfrm>
-            <a:off x="2670048" y="3117342"/>
-            <a:ext cx="1628648" cy="184404"/>
+            <a:off x="2670048" y="3188170"/>
+            <a:ext cx="1628648" cy="193624"/>
           </a:xfrm>
           <a:prstGeom prst="rect">
             <a:avLst/>
@@ -10298,8 +10298,8 @@
         </p:nvSpPr>
         <p:spPr>
           <a:xfrm>
-            <a:off x="4818888" y="3041904"/>
-            <a:ext cx="1051560" cy="335280"/>
+            <a:off x="4818888" y="3108960"/>
+            <a:ext cx="1051560" cy="352044"/>
           </a:xfrm>
           <a:prstGeom prst="rect">
             <a:avLst/>
@@ -10337,8 +10337,8 @@
         </p:nvSpPr>
         <p:spPr>
           <a:xfrm>
-            <a:off x="658368" y="3377184"/>
-            <a:ext cx="1938528" cy="335280"/>
+            <a:off x="658368" y="3461004"/>
+            <a:ext cx="1938528" cy="352044"/>
           </a:xfrm>
           <a:prstGeom prst="rect">
             <a:avLst/>
@@ -10376,8 +10376,8 @@
         </p:nvSpPr>
         <p:spPr>
           <a:xfrm>
-            <a:off x="2670048" y="3452622"/>
-            <a:ext cx="1395984" cy="184404"/>
+            <a:off x="2670048" y="3540214"/>
+            <a:ext cx="1395984" cy="193624"/>
           </a:xfrm>
           <a:prstGeom prst="rect">
             <a:avLst/>
@@ -10396,8 +10396,8 @@
         </p:nvSpPr>
         <p:spPr>
           <a:xfrm>
-            <a:off x="4818888" y="3377184"/>
-            <a:ext cx="1051560" cy="335280"/>
+            <a:off x="4818888" y="3461004"/>
+            <a:ext cx="1051560" cy="352044"/>
           </a:xfrm>
           <a:prstGeom prst="rect">
             <a:avLst/>
@@ -10435,8 +10435,8 @@
         </p:nvSpPr>
         <p:spPr>
           <a:xfrm>
-            <a:off x="658368" y="3712464"/>
-            <a:ext cx="1938528" cy="335280"/>
+            <a:off x="658368" y="3813048"/>
+            <a:ext cx="1938528" cy="352044"/>
           </a:xfrm>
           <a:prstGeom prst="rect">
             <a:avLst/>
@@ -10474,8 +10474,8 @@
         </p:nvSpPr>
         <p:spPr>
           <a:xfrm>
-            <a:off x="2670048" y="3787902"/>
-            <a:ext cx="1395984" cy="184404"/>
+            <a:off x="2670048" y="3892258"/>
+            <a:ext cx="1395984" cy="193624"/>
           </a:xfrm>
           <a:prstGeom prst="rect">
             <a:avLst/>
@@ -10494,8 +10494,8 @@
         </p:nvSpPr>
         <p:spPr>
           <a:xfrm>
-            <a:off x="4818888" y="3712464"/>
-            <a:ext cx="1051560" cy="335280"/>
+            <a:off x="4818888" y="3813048"/>
+            <a:ext cx="1051560" cy="352044"/>
           </a:xfrm>
           <a:prstGeom prst="rect">
             <a:avLst/>
@@ -10533,8 +10533,8 @@
         </p:nvSpPr>
         <p:spPr>
           <a:xfrm>
-            <a:off x="658368" y="4047744"/>
-            <a:ext cx="1938528" cy="335280"/>
+            <a:off x="658368" y="4165092"/>
+            <a:ext cx="1938528" cy="352044"/>
           </a:xfrm>
           <a:prstGeom prst="rect">
             <a:avLst/>
@@ -10572,8 +10572,8 @@
         </p:nvSpPr>
         <p:spPr>
           <a:xfrm>
-            <a:off x="2670048" y="4123182"/>
-            <a:ext cx="1163320" cy="184404"/>
+            <a:off x="2670048" y="4244302"/>
+            <a:ext cx="1163320" cy="193624"/>
           </a:xfrm>
           <a:prstGeom prst="rect">
             <a:avLst/>
@@ -10592,8 +10592,8 @@
         </p:nvSpPr>
         <p:spPr>
           <a:xfrm>
-            <a:off x="4818888" y="4047744"/>
-            <a:ext cx="1051560" cy="335280"/>
+            <a:off x="4818888" y="4165092"/>
+            <a:ext cx="1051560" cy="352044"/>
           </a:xfrm>
           <a:prstGeom prst="rect">
             <a:avLst/>
@@ -10631,8 +10631,8 @@
         </p:nvSpPr>
         <p:spPr>
           <a:xfrm>
-            <a:off x="658368" y="4383024"/>
-            <a:ext cx="1938528" cy="335280"/>
+            <a:off x="658368" y="4517136"/>
+            <a:ext cx="1938528" cy="352044"/>
           </a:xfrm>
           <a:prstGeom prst="rect">
             <a:avLst/>
@@ -10670,8 +10670,8 @@
         </p:nvSpPr>
         <p:spPr>
           <a:xfrm>
-            <a:off x="2670048" y="4458462"/>
-            <a:ext cx="930656" cy="184404"/>
+            <a:off x="2670048" y="4596346"/>
+            <a:ext cx="930656" cy="193624"/>
           </a:xfrm>
           <a:prstGeom prst="rect">
             <a:avLst/>
@@ -10690,8 +10690,8 @@
         </p:nvSpPr>
         <p:spPr>
           <a:xfrm>
-            <a:off x="4818888" y="4383024"/>
-            <a:ext cx="1051560" cy="335280"/>
+            <a:off x="4818888" y="4517136"/>
+            <a:ext cx="1051560" cy="352044"/>
           </a:xfrm>
           <a:prstGeom prst="rect">
             <a:avLst/>
@@ -10729,8 +10729,8 @@
         </p:nvSpPr>
         <p:spPr>
           <a:xfrm>
-            <a:off x="658368" y="4718304"/>
-            <a:ext cx="1938528" cy="335280"/>
+            <a:off x="658368" y="4869180"/>
+            <a:ext cx="1938528" cy="352044"/>
           </a:xfrm>
           <a:prstGeom prst="rect">
             <a:avLst/>
@@ -10768,8 +10768,8 @@
         </p:nvSpPr>
         <p:spPr>
           <a:xfrm>
-            <a:off x="2670048" y="4793742"/>
-            <a:ext cx="930656" cy="184404"/>
+            <a:off x="2670048" y="4948390"/>
+            <a:ext cx="930656" cy="193624"/>
           </a:xfrm>
           <a:prstGeom prst="rect">
             <a:avLst/>
@@ -10788,8 +10788,8 @@
         </p:nvSpPr>
         <p:spPr>
           <a:xfrm>
-            <a:off x="4818888" y="4718304"/>
-            <a:ext cx="1051560" cy="335280"/>
+            <a:off x="4818888" y="4869180"/>
+            <a:ext cx="1051560" cy="352044"/>
           </a:xfrm>
           <a:prstGeom prst="rect">
             <a:avLst/>
@@ -10827,8 +10827,8 @@
         </p:nvSpPr>
         <p:spPr>
           <a:xfrm>
-            <a:off x="658368" y="5053584"/>
-            <a:ext cx="1938528" cy="335280"/>
+            <a:off x="658368" y="5221224"/>
+            <a:ext cx="1938528" cy="352044"/>
           </a:xfrm>
           <a:prstGeom prst="rect">
             <a:avLst/>
@@ -10866,8 +10866,8 @@
         </p:nvSpPr>
         <p:spPr>
           <a:xfrm>
-            <a:off x="2670048" y="5129022"/>
-            <a:ext cx="930656" cy="184404"/>
+            <a:off x="2670048" y="5300434"/>
+            <a:ext cx="930656" cy="193624"/>
           </a:xfrm>
           <a:prstGeom prst="rect">
             <a:avLst/>
@@ -10886,8 +10886,8 @@
         </p:nvSpPr>
         <p:spPr>
           <a:xfrm>
-            <a:off x="4818888" y="5053584"/>
-            <a:ext cx="1051560" cy="335280"/>
+            <a:off x="4818888" y="5221224"/>
+            <a:ext cx="1051560" cy="352044"/>
           </a:xfrm>
           <a:prstGeom prst="rect">
             <a:avLst/>
@@ -10925,8 +10925,8 @@
         </p:nvSpPr>
         <p:spPr>
           <a:xfrm>
-            <a:off x="658368" y="5388864"/>
-            <a:ext cx="1938528" cy="335280"/>
+            <a:off x="658368" y="5573268"/>
+            <a:ext cx="1938528" cy="352044"/>
           </a:xfrm>
           <a:prstGeom prst="rect">
             <a:avLst/>
@@ -10964,8 +10964,8 @@
         </p:nvSpPr>
         <p:spPr>
           <a:xfrm>
-            <a:off x="2670048" y="5464302"/>
-            <a:ext cx="930656" cy="184404"/>
+            <a:off x="2670048" y="5652478"/>
+            <a:ext cx="930656" cy="193624"/>
           </a:xfrm>
           <a:prstGeom prst="rect">
             <a:avLst/>
@@ -10984,8 +10984,8 @@
         </p:nvSpPr>
         <p:spPr>
           <a:xfrm>
-            <a:off x="4818888" y="5388864"/>
-            <a:ext cx="1051560" cy="335280"/>
+            <a:off x="4818888" y="5573268"/>
+            <a:ext cx="1051560" cy="352044"/>
           </a:xfrm>
           <a:prstGeom prst="rect">
             <a:avLst/>
@@ -11024,7 +11024,7 @@
         <p:spPr>
           <a:xfrm>
             <a:off x="6208776" y="1700784"/>
-            <a:ext cx="1938528" cy="335280"/>
+            <a:ext cx="1938528" cy="352044"/>
           </a:xfrm>
           <a:prstGeom prst="rect">
             <a:avLst/>
@@ -11062,8 +11062,8 @@
         </p:nvSpPr>
         <p:spPr>
           <a:xfrm>
-            <a:off x="8220456" y="1776222"/>
-            <a:ext cx="930656" cy="184404"/>
+            <a:off x="8220456" y="1779994"/>
+            <a:ext cx="930656" cy="193624"/>
           </a:xfrm>
           <a:prstGeom prst="rect">
             <a:avLst/>
@@ -11083,7 +11083,7 @@
         <p:spPr>
           <a:xfrm>
             <a:off x="10369296" y="1700784"/>
-            <a:ext cx="1051560" cy="335280"/>
+            <a:ext cx="1051560" cy="352044"/>
           </a:xfrm>
           <a:prstGeom prst="rect">
             <a:avLst/>
@@ -11121,8 +11121,8 @@
         </p:nvSpPr>
         <p:spPr>
           <a:xfrm>
-            <a:off x="6208776" y="2036064"/>
-            <a:ext cx="1938528" cy="335280"/>
+            <a:off x="6208776" y="2052828"/>
+            <a:ext cx="1938528" cy="352044"/>
           </a:xfrm>
           <a:prstGeom prst="rect">
             <a:avLst/>
@@ -11160,8 +11160,8 @@
         </p:nvSpPr>
         <p:spPr>
           <a:xfrm>
-            <a:off x="8220456" y="2111502"/>
-            <a:ext cx="930656" cy="184404"/>
+            <a:off x="8220456" y="2132038"/>
+            <a:ext cx="930656" cy="193624"/>
           </a:xfrm>
           <a:prstGeom prst="rect">
             <a:avLst/>
@@ -11180,8 +11180,8 @@
         </p:nvSpPr>
         <p:spPr>
           <a:xfrm>
-            <a:off x="10369296" y="2036064"/>
-            <a:ext cx="1051560" cy="335280"/>
+            <a:off x="10369296" y="2052828"/>
+            <a:ext cx="1051560" cy="352044"/>
           </a:xfrm>
           <a:prstGeom prst="rect">
             <a:avLst/>
@@ -11219,8 +11219,8 @@
         </p:nvSpPr>
         <p:spPr>
           <a:xfrm>
-            <a:off x="6208776" y="2371344"/>
-            <a:ext cx="1938528" cy="335280"/>
+            <a:off x="6208776" y="2404872"/>
+            <a:ext cx="1938528" cy="352044"/>
           </a:xfrm>
           <a:prstGeom prst="rect">
             <a:avLst/>
@@ -11258,8 +11258,8 @@
         </p:nvSpPr>
         <p:spPr>
           <a:xfrm>
-            <a:off x="8220456" y="2446782"/>
-            <a:ext cx="697992" cy="184404"/>
+            <a:off x="8220456" y="2484082"/>
+            <a:ext cx="697992" cy="193624"/>
           </a:xfrm>
           <a:prstGeom prst="rect">
             <a:avLst/>
@@ -11278,8 +11278,8 @@
         </p:nvSpPr>
         <p:spPr>
           <a:xfrm>
-            <a:off x="10369296" y="2371344"/>
-            <a:ext cx="1051560" cy="335280"/>
+            <a:off x="10369296" y="2404872"/>
+            <a:ext cx="1051560" cy="352044"/>
           </a:xfrm>
           <a:prstGeom prst="rect">
             <a:avLst/>
@@ -11317,8 +11317,8 @@
         </p:nvSpPr>
         <p:spPr>
           <a:xfrm>
-            <a:off x="6208776" y="2706624"/>
-            <a:ext cx="1938528" cy="335280"/>
+            <a:off x="6208776" y="2756916"/>
+            <a:ext cx="1938528" cy="352044"/>
           </a:xfrm>
           <a:prstGeom prst="rect">
             <a:avLst/>
@@ -11356,8 +11356,8 @@
         </p:nvSpPr>
         <p:spPr>
           <a:xfrm>
-            <a:off x="8220456" y="2782062"/>
-            <a:ext cx="465328" cy="184404"/>
+            <a:off x="8220456" y="2836126"/>
+            <a:ext cx="465328" cy="193624"/>
           </a:xfrm>
           <a:prstGeom prst="rect">
             <a:avLst/>
@@ -11376,8 +11376,8 @@
         </p:nvSpPr>
         <p:spPr>
           <a:xfrm>
-            <a:off x="10369296" y="2706624"/>
-            <a:ext cx="1051560" cy="335280"/>
+            <a:off x="10369296" y="2756916"/>
+            <a:ext cx="1051560" cy="352044"/>
           </a:xfrm>
           <a:prstGeom prst="rect">
             <a:avLst/>
@@ -11415,8 +11415,8 @@
         </p:nvSpPr>
         <p:spPr>
           <a:xfrm>
-            <a:off x="6208776" y="3041904"/>
-            <a:ext cx="1938528" cy="335280"/>
+            <a:off x="6208776" y="3108960"/>
+            <a:ext cx="1938528" cy="352044"/>
           </a:xfrm>
           <a:prstGeom prst="rect">
             <a:avLst/>
@@ -11454,8 +11454,8 @@
         </p:nvSpPr>
         <p:spPr>
           <a:xfrm>
-            <a:off x="8220456" y="3117342"/>
-            <a:ext cx="465328" cy="184404"/>
+            <a:off x="8220456" y="3188170"/>
+            <a:ext cx="465328" cy="193624"/>
           </a:xfrm>
           <a:prstGeom prst="rect">
             <a:avLst/>
@@ -11474,8 +11474,8 @@
         </p:nvSpPr>
         <p:spPr>
           <a:xfrm>
-            <a:off x="10369296" y="3041904"/>
-            <a:ext cx="1051560" cy="335280"/>
+            <a:off x="10369296" y="3108960"/>
+            <a:ext cx="1051560" cy="352044"/>
           </a:xfrm>
           <a:prstGeom prst="rect">
             <a:avLst/>
@@ -11513,8 +11513,8 @@
         </p:nvSpPr>
         <p:spPr>
           <a:xfrm>
-            <a:off x="6208776" y="3377184"/>
-            <a:ext cx="1938528" cy="335280"/>
+            <a:off x="6208776" y="3461004"/>
+            <a:ext cx="1938528" cy="352044"/>
           </a:xfrm>
           <a:prstGeom prst="rect">
             <a:avLst/>
@@ -11552,8 +11552,8 @@
         </p:nvSpPr>
         <p:spPr>
           <a:xfrm>
-            <a:off x="8220456" y="3452622"/>
-            <a:ext cx="465328" cy="184404"/>
+            <a:off x="8220456" y="3540214"/>
+            <a:ext cx="465328" cy="193624"/>
           </a:xfrm>
           <a:prstGeom prst="rect">
             <a:avLst/>
@@ -11572,8 +11572,8 @@
         </p:nvSpPr>
         <p:spPr>
           <a:xfrm>
-            <a:off x="10369296" y="3377184"/>
-            <a:ext cx="1051560" cy="335280"/>
+            <a:off x="10369296" y="3461004"/>
+            <a:ext cx="1051560" cy="352044"/>
           </a:xfrm>
           <a:prstGeom prst="rect">
             <a:avLst/>
@@ -11611,8 +11611,8 @@
         </p:nvSpPr>
         <p:spPr>
           <a:xfrm>
-            <a:off x="6208776" y="3712464"/>
-            <a:ext cx="1938528" cy="335280"/>
+            <a:off x="6208776" y="3813048"/>
+            <a:ext cx="1938528" cy="352044"/>
           </a:xfrm>
           <a:prstGeom prst="rect">
             <a:avLst/>
@@ -11650,8 +11650,8 @@
         </p:nvSpPr>
         <p:spPr>
           <a:xfrm>
-            <a:off x="8220456" y="3787902"/>
-            <a:ext cx="465328" cy="184404"/>
+            <a:off x="8220456" y="3892258"/>
+            <a:ext cx="465328" cy="193624"/>
           </a:xfrm>
           <a:prstGeom prst="rect">
             <a:avLst/>
@@ -11670,8 +11670,8 @@
         </p:nvSpPr>
         <p:spPr>
           <a:xfrm>
-            <a:off x="10369296" y="3712464"/>
-            <a:ext cx="1051560" cy="335280"/>
+            <a:off x="10369296" y="3813048"/>
+            <a:ext cx="1051560" cy="352044"/>
           </a:xfrm>
           <a:prstGeom prst="rect">
             <a:avLst/>
@@ -11709,8 +11709,8 @@
         </p:nvSpPr>
         <p:spPr>
           <a:xfrm>
-            <a:off x="6208776" y="4047744"/>
-            <a:ext cx="1938528" cy="335280"/>
+            <a:off x="6208776" y="4165092"/>
+            <a:ext cx="1938528" cy="352044"/>
           </a:xfrm>
           <a:prstGeom prst="rect">
             <a:avLst/>
@@ -11748,8 +11748,8 @@
         </p:nvSpPr>
         <p:spPr>
           <a:xfrm>
-            <a:off x="8220456" y="4123182"/>
-            <a:ext cx="465328" cy="184404"/>
+            <a:off x="8220456" y="4244302"/>
+            <a:ext cx="465328" cy="193624"/>
           </a:xfrm>
           <a:prstGeom prst="rect">
             <a:avLst/>
@@ -11768,8 +11768,8 @@
         </p:nvSpPr>
         <p:spPr>
           <a:xfrm>
-            <a:off x="10369296" y="4047744"/>
-            <a:ext cx="1051560" cy="335280"/>
+            <a:off x="10369296" y="4165092"/>
+            <a:ext cx="1051560" cy="352044"/>
           </a:xfrm>
           <a:prstGeom prst="rect">
             <a:avLst/>
@@ -11807,8 +11807,8 @@
         </p:nvSpPr>
         <p:spPr>
           <a:xfrm>
-            <a:off x="6208776" y="4383024"/>
-            <a:ext cx="1938528" cy="335280"/>
+            <a:off x="6208776" y="4517136"/>
+            <a:ext cx="1938528" cy="352044"/>
           </a:xfrm>
           <a:prstGeom prst="rect">
             <a:avLst/>
@@ -11846,8 +11846,8 @@
         </p:nvSpPr>
         <p:spPr>
           <a:xfrm>
-            <a:off x="8220456" y="4458462"/>
-            <a:ext cx="465328" cy="184404"/>
+            <a:off x="8220456" y="4596346"/>
+            <a:ext cx="465328" cy="193624"/>
           </a:xfrm>
           <a:prstGeom prst="rect">
             <a:avLst/>
@@ -11866,8 +11866,8 @@
         </p:nvSpPr>
         <p:spPr>
           <a:xfrm>
-            <a:off x="10369296" y="4383024"/>
-            <a:ext cx="1051560" cy="335280"/>
+            <a:off x="10369296" y="4517136"/>
+            <a:ext cx="1051560" cy="352044"/>
           </a:xfrm>
           <a:prstGeom prst="rect">
             <a:avLst/>
@@ -11905,8 +11905,8 @@
         </p:nvSpPr>
         <p:spPr>
           <a:xfrm>
-            <a:off x="6208776" y="4718304"/>
-            <a:ext cx="1938528" cy="335280"/>
+            <a:off x="6208776" y="4869180"/>
+            <a:ext cx="1938528" cy="352044"/>
           </a:xfrm>
           <a:prstGeom prst="rect">
             <a:avLst/>
@@ -11944,8 +11944,8 @@
         </p:nvSpPr>
         <p:spPr>
           <a:xfrm>
-            <a:off x="8220456" y="4793742"/>
-            <a:ext cx="232664" cy="184404"/>
+            <a:off x="8220456" y="4948390"/>
+            <a:ext cx="232664" cy="193624"/>
           </a:xfrm>
           <a:prstGeom prst="rect">
             <a:avLst/>
@@ -11964,8 +11964,8 @@
         </p:nvSpPr>
         <p:spPr>
           <a:xfrm>
-            <a:off x="10369296" y="4718304"/>
-            <a:ext cx="1051560" cy="335280"/>
+            <a:off x="10369296" y="4869180"/>
+            <a:ext cx="1051560" cy="352044"/>
           </a:xfrm>
           <a:prstGeom prst="rect">
             <a:avLst/>
@@ -12003,8 +12003,8 @@
         </p:nvSpPr>
         <p:spPr>
           <a:xfrm>
-            <a:off x="6208776" y="5053584"/>
-            <a:ext cx="1938528" cy="335280"/>
+            <a:off x="6208776" y="5221224"/>
+            <a:ext cx="1938528" cy="352044"/>
           </a:xfrm>
           <a:prstGeom prst="rect">
             <a:avLst/>
@@ -12042,8 +12042,8 @@
         </p:nvSpPr>
         <p:spPr>
           <a:xfrm>
-            <a:off x="8220456" y="5129022"/>
-            <a:ext cx="232664" cy="184404"/>
+            <a:off x="8220456" y="5300434"/>
+            <a:ext cx="232664" cy="193624"/>
           </a:xfrm>
           <a:prstGeom prst="rect">
             <a:avLst/>
@@ -12062,8 +12062,8 @@
         </p:nvSpPr>
         <p:spPr>
           <a:xfrm>
-            <a:off x="10369296" y="5053584"/>
-            <a:ext cx="1051560" cy="335280"/>
+            <a:off x="10369296" y="5221224"/>
+            <a:ext cx="1051560" cy="352044"/>
           </a:xfrm>
           <a:prstGeom prst="rect">
             <a:avLst/>
@@ -12101,8 +12101,8 @@
         </p:nvSpPr>
         <p:spPr>
           <a:xfrm>
-            <a:off x="457200" y="5961888"/>
-            <a:ext cx="11274552" cy="548640"/>
+            <a:off x="457200" y="6126480"/>
+            <a:ext cx="11274552" cy="371856"/>
           </a:xfrm>
           <a:prstGeom prst="rect">
             <a:avLst/>
@@ -12121,8 +12121,8 @@
         </p:nvSpPr>
         <p:spPr>
           <a:xfrm>
-            <a:off x="658368" y="5980176"/>
-            <a:ext cx="10927080" cy="512064"/>
+            <a:off x="658368" y="6144768"/>
+            <a:ext cx="10927080" cy="335280"/>
           </a:xfrm>
           <a:prstGeom prst="rect">
             <a:avLst/>
@@ -12146,7 +12146,7 @@
                 <a:ea typeface="Inter" pitchFamily="34" charset="-122"/>
                 <a:cs typeface="Inter" pitchFamily="34" charset="-120"/>
               </a:rPr>
-              <a:t>23 of 33 stores set a new monthly record in 2026; HONDA SPOKANE and NISSAN set the most, 9 each.</a:t>
+              <a:t>23 of 33 stores set a new monthly record in 2026; Honda Spokane and Nissan set the most, 9 each.</a:t>
             </a:r>
             <a:endParaRPr lang="en-US" sz="1600" dirty="0"/>
           </a:p>
@@ -12291,7 +12291,7 @@
         <p:spPr>
           <a:xfrm>
             <a:off x="457200" y="1207008"/>
-            <a:ext cx="11274552" cy="4645152"/>
+            <a:ext cx="11274552" cy="4782312"/>
           </a:xfrm>
           <a:prstGeom prst="rect">
             <a:avLst/>
@@ -12977,7 +12977,7 @@
         <p:spPr>
           <a:xfrm>
             <a:off x="658368" y="1700784"/>
-            <a:ext cx="1938528" cy="335280"/>
+            <a:ext cx="1938528" cy="352044"/>
           </a:xfrm>
           <a:prstGeom prst="rect">
             <a:avLst/>
@@ -13015,8 +13015,8 @@
         </p:nvSpPr>
         <p:spPr>
           <a:xfrm>
-            <a:off x="2670048" y="1776222"/>
-            <a:ext cx="540512" cy="184404"/>
+            <a:off x="2670048" y="1779994"/>
+            <a:ext cx="540512" cy="193624"/>
           </a:xfrm>
           <a:prstGeom prst="rect">
             <a:avLst/>
@@ -13040,8 +13040,8 @@
         </p:nvSpPr>
         <p:spPr>
           <a:xfrm>
-            <a:off x="3210560" y="1776222"/>
-            <a:ext cx="135128" cy="184404"/>
+            <a:off x="3210560" y="1779994"/>
+            <a:ext cx="135128" cy="193624"/>
           </a:xfrm>
           <a:prstGeom prst="rect">
             <a:avLst/>
@@ -13065,8 +13065,8 @@
         </p:nvSpPr>
         <p:spPr>
           <a:xfrm>
-            <a:off x="3345688" y="1776222"/>
-            <a:ext cx="540512" cy="184404"/>
+            <a:off x="3345688" y="1779994"/>
+            <a:ext cx="540512" cy="193624"/>
           </a:xfrm>
           <a:prstGeom prst="rect">
             <a:avLst/>
@@ -13091,7 +13091,7 @@
         <p:spPr>
           <a:xfrm>
             <a:off x="3959352" y="1700784"/>
-            <a:ext cx="502920" cy="335280"/>
+            <a:ext cx="502920" cy="352044"/>
           </a:xfrm>
           <a:prstGeom prst="rect">
             <a:avLst/>
@@ -13130,7 +13130,7 @@
         <p:spPr>
           <a:xfrm>
             <a:off x="4462272" y="1700784"/>
-            <a:ext cx="502920" cy="335280"/>
+            <a:ext cx="502920" cy="352044"/>
           </a:xfrm>
           <a:prstGeom prst="rect">
             <a:avLst/>
@@ -13169,7 +13169,7 @@
         <p:spPr>
           <a:xfrm>
             <a:off x="4965192" y="1700784"/>
-            <a:ext cx="502920" cy="335280"/>
+            <a:ext cx="502920" cy="352044"/>
           </a:xfrm>
           <a:prstGeom prst="rect">
             <a:avLst/>
@@ -13208,7 +13208,7 @@
         <p:spPr>
           <a:xfrm>
             <a:off x="5468112" y="1700784"/>
-            <a:ext cx="548640" cy="335280"/>
+            <a:ext cx="548640" cy="352044"/>
           </a:xfrm>
           <a:prstGeom prst="rect">
             <a:avLst/>
@@ -13246,8 +13246,8 @@
         </p:nvSpPr>
         <p:spPr>
           <a:xfrm>
-            <a:off x="658368" y="2036064"/>
-            <a:ext cx="1938528" cy="335280"/>
+            <a:off x="658368" y="2052828"/>
+            <a:ext cx="1938528" cy="352044"/>
           </a:xfrm>
           <a:prstGeom prst="rect">
             <a:avLst/>
@@ -13285,8 +13285,8 @@
         </p:nvSpPr>
         <p:spPr>
           <a:xfrm>
-            <a:off x="2670048" y="2111502"/>
-            <a:ext cx="405384" cy="184404"/>
+            <a:off x="2670048" y="2132038"/>
+            <a:ext cx="405384" cy="193624"/>
           </a:xfrm>
           <a:prstGeom prst="rect">
             <a:avLst/>
@@ -13310,8 +13310,8 @@
         </p:nvSpPr>
         <p:spPr>
           <a:xfrm>
-            <a:off x="3075432" y="2111502"/>
-            <a:ext cx="270256" cy="184404"/>
+            <a:off x="3075432" y="2132038"/>
+            <a:ext cx="270256" cy="193624"/>
           </a:xfrm>
           <a:prstGeom prst="rect">
             <a:avLst/>
@@ -13335,8 +13335,8 @@
         </p:nvSpPr>
         <p:spPr>
           <a:xfrm>
-            <a:off x="3345688" y="2111502"/>
-            <a:ext cx="540512" cy="184404"/>
+            <a:off x="3345688" y="2132038"/>
+            <a:ext cx="540512" cy="193624"/>
           </a:xfrm>
           <a:prstGeom prst="rect">
             <a:avLst/>
@@ -13360,8 +13360,8 @@
         </p:nvSpPr>
         <p:spPr>
           <a:xfrm>
-            <a:off x="3959352" y="2036064"/>
-            <a:ext cx="502920" cy="335280"/>
+            <a:off x="3959352" y="2052828"/>
+            <a:ext cx="502920" cy="352044"/>
           </a:xfrm>
           <a:prstGeom prst="rect">
             <a:avLst/>
@@ -13399,8 +13399,8 @@
         </p:nvSpPr>
         <p:spPr>
           <a:xfrm>
-            <a:off x="4462272" y="2036064"/>
-            <a:ext cx="502920" cy="335280"/>
+            <a:off x="4462272" y="2052828"/>
+            <a:ext cx="502920" cy="352044"/>
           </a:xfrm>
           <a:prstGeom prst="rect">
             <a:avLst/>
@@ -13438,8 +13438,8 @@
         </p:nvSpPr>
         <p:spPr>
           <a:xfrm>
-            <a:off x="4965192" y="2036064"/>
-            <a:ext cx="502920" cy="335280"/>
+            <a:off x="4965192" y="2052828"/>
+            <a:ext cx="502920" cy="352044"/>
           </a:xfrm>
           <a:prstGeom prst="rect">
             <a:avLst/>
@@ -13477,8 +13477,8 @@
         </p:nvSpPr>
         <p:spPr>
           <a:xfrm>
-            <a:off x="5468112" y="2036064"/>
-            <a:ext cx="548640" cy="335280"/>
+            <a:off x="5468112" y="2052828"/>
+            <a:ext cx="548640" cy="352044"/>
           </a:xfrm>
           <a:prstGeom prst="rect">
             <a:avLst/>
@@ -13516,8 +13516,8 @@
         </p:nvSpPr>
         <p:spPr>
           <a:xfrm>
-            <a:off x="658368" y="2371344"/>
-            <a:ext cx="1938528" cy="335280"/>
+            <a:off x="658368" y="2404872"/>
+            <a:ext cx="1938528" cy="352044"/>
           </a:xfrm>
           <a:prstGeom prst="rect">
             <a:avLst/>
@@ -13555,8 +13555,8 @@
         </p:nvSpPr>
         <p:spPr>
           <a:xfrm>
-            <a:off x="2670048" y="2446782"/>
-            <a:ext cx="270256" cy="184404"/>
+            <a:off x="2670048" y="2484082"/>
+            <a:ext cx="270256" cy="193624"/>
           </a:xfrm>
           <a:prstGeom prst="rect">
             <a:avLst/>
@@ -13580,8 +13580,8 @@
         </p:nvSpPr>
         <p:spPr>
           <a:xfrm>
-            <a:off x="2940304" y="2446782"/>
-            <a:ext cx="405384" cy="184404"/>
+            <a:off x="2940304" y="2484082"/>
+            <a:ext cx="405384" cy="193624"/>
           </a:xfrm>
           <a:prstGeom prst="rect">
             <a:avLst/>
@@ -13605,8 +13605,8 @@
         </p:nvSpPr>
         <p:spPr>
           <a:xfrm>
-            <a:off x="3345688" y="2446782"/>
-            <a:ext cx="405384" cy="184404"/>
+            <a:off x="3345688" y="2484082"/>
+            <a:ext cx="405384" cy="193624"/>
           </a:xfrm>
           <a:prstGeom prst="rect">
             <a:avLst/>
@@ -13630,8 +13630,8 @@
         </p:nvSpPr>
         <p:spPr>
           <a:xfrm>
-            <a:off x="3959352" y="2371344"/>
-            <a:ext cx="502920" cy="335280"/>
+            <a:off x="3959352" y="2404872"/>
+            <a:ext cx="502920" cy="352044"/>
           </a:xfrm>
           <a:prstGeom prst="rect">
             <a:avLst/>
@@ -13669,8 +13669,8 @@
         </p:nvSpPr>
         <p:spPr>
           <a:xfrm>
-            <a:off x="4462272" y="2371344"/>
-            <a:ext cx="502920" cy="335280"/>
+            <a:off x="4462272" y="2404872"/>
+            <a:ext cx="502920" cy="352044"/>
           </a:xfrm>
           <a:prstGeom prst="rect">
             <a:avLst/>
@@ -13708,8 +13708,8 @@
         </p:nvSpPr>
         <p:spPr>
           <a:xfrm>
-            <a:off x="4965192" y="2371344"/>
-            <a:ext cx="502920" cy="335280"/>
+            <a:off x="4965192" y="2404872"/>
+            <a:ext cx="502920" cy="352044"/>
           </a:xfrm>
           <a:prstGeom prst="rect">
             <a:avLst/>
@@ -13747,8 +13747,8 @@
         </p:nvSpPr>
         <p:spPr>
           <a:xfrm>
-            <a:off x="5468112" y="2371344"/>
-            <a:ext cx="548640" cy="335280"/>
+            <a:off x="5468112" y="2404872"/>
+            <a:ext cx="548640" cy="352044"/>
           </a:xfrm>
           <a:prstGeom prst="rect">
             <a:avLst/>
@@ -13786,8 +13786,8 @@
         </p:nvSpPr>
         <p:spPr>
           <a:xfrm>
-            <a:off x="658368" y="2706624"/>
-            <a:ext cx="1938528" cy="335280"/>
+            <a:off x="658368" y="2756916"/>
+            <a:ext cx="1938528" cy="352044"/>
           </a:xfrm>
           <a:prstGeom prst="rect">
             <a:avLst/>
@@ -13825,8 +13825,8 @@
         </p:nvSpPr>
         <p:spPr>
           <a:xfrm>
-            <a:off x="2670048" y="2782062"/>
-            <a:ext cx="405384" cy="184404"/>
+            <a:off x="2670048" y="2836126"/>
+            <a:ext cx="405384" cy="193624"/>
           </a:xfrm>
           <a:prstGeom prst="rect">
             <a:avLst/>
@@ -13850,8 +13850,8 @@
         </p:nvSpPr>
         <p:spPr>
           <a:xfrm>
-            <a:off x="3075432" y="2782062"/>
-            <a:ext cx="135128" cy="184404"/>
+            <a:off x="3075432" y="2836126"/>
+            <a:ext cx="135128" cy="193624"/>
           </a:xfrm>
           <a:prstGeom prst="rect">
             <a:avLst/>
@@ -13875,8 +13875,8 @@
         </p:nvSpPr>
         <p:spPr>
           <a:xfrm>
-            <a:off x="3210560" y="2782062"/>
-            <a:ext cx="405384" cy="184404"/>
+            <a:off x="3210560" y="2836126"/>
+            <a:ext cx="405384" cy="193624"/>
           </a:xfrm>
           <a:prstGeom prst="rect">
             <a:avLst/>
@@ -13900,8 +13900,8 @@
         </p:nvSpPr>
         <p:spPr>
           <a:xfrm>
-            <a:off x="3959352" y="2706624"/>
-            <a:ext cx="502920" cy="335280"/>
+            <a:off x="3959352" y="2756916"/>
+            <a:ext cx="502920" cy="352044"/>
           </a:xfrm>
           <a:prstGeom prst="rect">
             <a:avLst/>
@@ -13939,8 +13939,8 @@
         </p:nvSpPr>
         <p:spPr>
           <a:xfrm>
-            <a:off x="4462272" y="2706624"/>
-            <a:ext cx="502920" cy="335280"/>
+            <a:off x="4462272" y="2756916"/>
+            <a:ext cx="502920" cy="352044"/>
           </a:xfrm>
           <a:prstGeom prst="rect">
             <a:avLst/>
@@ -13978,8 +13978,8 @@
         </p:nvSpPr>
         <p:spPr>
           <a:xfrm>
-            <a:off x="4965192" y="2706624"/>
-            <a:ext cx="502920" cy="335280"/>
+            <a:off x="4965192" y="2756916"/>
+            <a:ext cx="502920" cy="352044"/>
           </a:xfrm>
           <a:prstGeom prst="rect">
             <a:avLst/>
@@ -14017,8 +14017,8 @@
         </p:nvSpPr>
         <p:spPr>
           <a:xfrm>
-            <a:off x="5468112" y="2706624"/>
-            <a:ext cx="548640" cy="335280"/>
+            <a:off x="5468112" y="2756916"/>
+            <a:ext cx="548640" cy="352044"/>
           </a:xfrm>
           <a:prstGeom prst="rect">
             <a:avLst/>
@@ -14056,8 +14056,8 @@
         </p:nvSpPr>
         <p:spPr>
           <a:xfrm>
-            <a:off x="658368" y="3041904"/>
-            <a:ext cx="1938528" cy="335280"/>
+            <a:off x="658368" y="3108960"/>
+            <a:ext cx="1938528" cy="352044"/>
           </a:xfrm>
           <a:prstGeom prst="rect">
             <a:avLst/>
@@ -14095,8 +14095,8 @@
         </p:nvSpPr>
         <p:spPr>
           <a:xfrm>
-            <a:off x="2670048" y="3117342"/>
-            <a:ext cx="270256" cy="184404"/>
+            <a:off x="2670048" y="3188170"/>
+            <a:ext cx="270256" cy="193624"/>
           </a:xfrm>
           <a:prstGeom prst="rect">
             <a:avLst/>
@@ -14120,8 +14120,8 @@
         </p:nvSpPr>
         <p:spPr>
           <a:xfrm>
-            <a:off x="2940304" y="3117342"/>
-            <a:ext cx="405384" cy="184404"/>
+            <a:off x="2940304" y="3188170"/>
+            <a:ext cx="405384" cy="193624"/>
           </a:xfrm>
           <a:prstGeom prst="rect">
             <a:avLst/>
@@ -14145,8 +14145,8 @@
         </p:nvSpPr>
         <p:spPr>
           <a:xfrm>
-            <a:off x="3345688" y="3117342"/>
-            <a:ext cx="270256" cy="184404"/>
+            <a:off x="3345688" y="3188170"/>
+            <a:ext cx="270256" cy="193624"/>
           </a:xfrm>
           <a:prstGeom prst="rect">
             <a:avLst/>
@@ -14170,8 +14170,8 @@
         </p:nvSpPr>
         <p:spPr>
           <a:xfrm>
-            <a:off x="3959352" y="3041904"/>
-            <a:ext cx="502920" cy="335280"/>
+            <a:off x="3959352" y="3108960"/>
+            <a:ext cx="502920" cy="352044"/>
           </a:xfrm>
           <a:prstGeom prst="rect">
             <a:avLst/>
@@ -14209,8 +14209,8 @@
         </p:nvSpPr>
         <p:spPr>
           <a:xfrm>
-            <a:off x="4462272" y="3041904"/>
-            <a:ext cx="502920" cy="335280"/>
+            <a:off x="4462272" y="3108960"/>
+            <a:ext cx="502920" cy="352044"/>
           </a:xfrm>
           <a:prstGeom prst="rect">
             <a:avLst/>
@@ -14248,8 +14248,8 @@
         </p:nvSpPr>
         <p:spPr>
           <a:xfrm>
-            <a:off x="4965192" y="3041904"/>
-            <a:ext cx="502920" cy="335280"/>
+            <a:off x="4965192" y="3108960"/>
+            <a:ext cx="502920" cy="352044"/>
           </a:xfrm>
           <a:prstGeom prst="rect">
             <a:avLst/>
@@ -14287,8 +14287,8 @@
         </p:nvSpPr>
         <p:spPr>
           <a:xfrm>
-            <a:off x="5468112" y="3041904"/>
-            <a:ext cx="548640" cy="335280"/>
+            <a:off x="5468112" y="3108960"/>
+            <a:ext cx="548640" cy="352044"/>
           </a:xfrm>
           <a:prstGeom prst="rect">
             <a:avLst/>
@@ -14326,8 +14326,8 @@
         </p:nvSpPr>
         <p:spPr>
           <a:xfrm>
-            <a:off x="658368" y="3377184"/>
-            <a:ext cx="1938528" cy="335280"/>
+            <a:off x="658368" y="3461004"/>
+            <a:ext cx="1938528" cy="352044"/>
           </a:xfrm>
           <a:prstGeom prst="rect">
             <a:avLst/>
@@ -14365,8 +14365,8 @@
         </p:nvSpPr>
         <p:spPr>
           <a:xfrm>
-            <a:off x="2670048" y="3452622"/>
-            <a:ext cx="270256" cy="184404"/>
+            <a:off x="2670048" y="3540214"/>
+            <a:ext cx="270256" cy="193624"/>
           </a:xfrm>
           <a:prstGeom prst="rect">
             <a:avLst/>
@@ -14390,8 +14390,8 @@
         </p:nvSpPr>
         <p:spPr>
           <a:xfrm>
-            <a:off x="2940304" y="3452622"/>
-            <a:ext cx="135128" cy="184404"/>
+            <a:off x="2940304" y="3540214"/>
+            <a:ext cx="135128" cy="193624"/>
           </a:xfrm>
           <a:prstGeom prst="rect">
             <a:avLst/>
@@ -14415,8 +14415,8 @@
         </p:nvSpPr>
         <p:spPr>
           <a:xfrm>
-            <a:off x="3075432" y="3452622"/>
-            <a:ext cx="405384" cy="184404"/>
+            <a:off x="3075432" y="3540214"/>
+            <a:ext cx="405384" cy="193624"/>
           </a:xfrm>
           <a:prstGeom prst="rect">
             <a:avLst/>
@@ -14440,8 +14440,8 @@
         </p:nvSpPr>
         <p:spPr>
           <a:xfrm>
-            <a:off x="3959352" y="3377184"/>
-            <a:ext cx="502920" cy="335280"/>
+            <a:off x="3959352" y="3461004"/>
+            <a:ext cx="502920" cy="352044"/>
           </a:xfrm>
           <a:prstGeom prst="rect">
             <a:avLst/>
@@ -14479,8 +14479,8 @@
         </p:nvSpPr>
         <p:spPr>
           <a:xfrm>
-            <a:off x="4462272" y="3377184"/>
-            <a:ext cx="502920" cy="335280"/>
+            <a:off x="4462272" y="3461004"/>
+            <a:ext cx="502920" cy="352044"/>
           </a:xfrm>
           <a:prstGeom prst="rect">
             <a:avLst/>
@@ -14518,8 +14518,8 @@
         </p:nvSpPr>
         <p:spPr>
           <a:xfrm>
-            <a:off x="4965192" y="3377184"/>
-            <a:ext cx="502920" cy="335280"/>
+            <a:off x="4965192" y="3461004"/>
+            <a:ext cx="502920" cy="352044"/>
           </a:xfrm>
           <a:prstGeom prst="rect">
             <a:avLst/>
@@ -14557,8 +14557,8 @@
         </p:nvSpPr>
         <p:spPr>
           <a:xfrm>
-            <a:off x="5468112" y="3377184"/>
-            <a:ext cx="548640" cy="335280"/>
+            <a:off x="5468112" y="3461004"/>
+            <a:ext cx="548640" cy="352044"/>
           </a:xfrm>
           <a:prstGeom prst="rect">
             <a:avLst/>
@@ -14596,8 +14596,8 @@
         </p:nvSpPr>
         <p:spPr>
           <a:xfrm>
-            <a:off x="658368" y="3712464"/>
-            <a:ext cx="1938528" cy="335280"/>
+            <a:off x="658368" y="3813048"/>
+            <a:ext cx="1938528" cy="352044"/>
           </a:xfrm>
           <a:prstGeom prst="rect">
             <a:avLst/>
@@ -14635,8 +14635,8 @@
         </p:nvSpPr>
         <p:spPr>
           <a:xfrm>
-            <a:off x="2670048" y="3787902"/>
-            <a:ext cx="270256" cy="184404"/>
+            <a:off x="2670048" y="3892258"/>
+            <a:ext cx="270256" cy="193624"/>
           </a:xfrm>
           <a:prstGeom prst="rect">
             <a:avLst/>
@@ -14660,8 +14660,8 @@
         </p:nvSpPr>
         <p:spPr>
           <a:xfrm>
-            <a:off x="2940304" y="3787902"/>
-            <a:ext cx="135128" cy="184404"/>
+            <a:off x="2940304" y="3892258"/>
+            <a:ext cx="135128" cy="193624"/>
           </a:xfrm>
           <a:prstGeom prst="rect">
             <a:avLst/>
@@ -14685,8 +14685,8 @@
         </p:nvSpPr>
         <p:spPr>
           <a:xfrm>
-            <a:off x="3075432" y="3787902"/>
-            <a:ext cx="405384" cy="184404"/>
+            <a:off x="3075432" y="3892258"/>
+            <a:ext cx="405384" cy="193624"/>
           </a:xfrm>
           <a:prstGeom prst="rect">
             <a:avLst/>
@@ -14710,8 +14710,8 @@
         </p:nvSpPr>
         <p:spPr>
           <a:xfrm>
-            <a:off x="3959352" y="3712464"/>
-            <a:ext cx="502920" cy="335280"/>
+            <a:off x="3959352" y="3813048"/>
+            <a:ext cx="502920" cy="352044"/>
           </a:xfrm>
           <a:prstGeom prst="rect">
             <a:avLst/>
@@ -14749,8 +14749,8 @@
         </p:nvSpPr>
         <p:spPr>
           <a:xfrm>
-            <a:off x="4462272" y="3712464"/>
-            <a:ext cx="502920" cy="335280"/>
+            <a:off x="4462272" y="3813048"/>
+            <a:ext cx="502920" cy="352044"/>
           </a:xfrm>
           <a:prstGeom prst="rect">
             <a:avLst/>
@@ -14788,8 +14788,8 @@
         </p:nvSpPr>
         <p:spPr>
           <a:xfrm>
-            <a:off x="4965192" y="3712464"/>
-            <a:ext cx="502920" cy="335280"/>
+            <a:off x="4965192" y="3813048"/>
+            <a:ext cx="502920" cy="352044"/>
           </a:xfrm>
           <a:prstGeom prst="rect">
             <a:avLst/>
@@ -14827,8 +14827,8 @@
         </p:nvSpPr>
         <p:spPr>
           <a:xfrm>
-            <a:off x="5468112" y="3712464"/>
-            <a:ext cx="548640" cy="335280"/>
+            <a:off x="5468112" y="3813048"/>
+            <a:ext cx="548640" cy="352044"/>
           </a:xfrm>
           <a:prstGeom prst="rect">
             <a:avLst/>
@@ -14866,8 +14866,8 @@
         </p:nvSpPr>
         <p:spPr>
           <a:xfrm>
-            <a:off x="658368" y="4047744"/>
-            <a:ext cx="1938528" cy="335280"/>
+            <a:off x="658368" y="4165092"/>
+            <a:ext cx="1938528" cy="352044"/>
           </a:xfrm>
           <a:prstGeom prst="rect">
             <a:avLst/>
@@ -14905,8 +14905,8 @@
         </p:nvSpPr>
         <p:spPr>
           <a:xfrm>
-            <a:off x="2670048" y="4123182"/>
-            <a:ext cx="270256" cy="184404"/>
+            <a:off x="2670048" y="4244302"/>
+            <a:ext cx="270256" cy="193624"/>
           </a:xfrm>
           <a:prstGeom prst="rect">
             <a:avLst/>
@@ -14930,8 +14930,8 @@
         </p:nvSpPr>
         <p:spPr>
           <a:xfrm>
-            <a:off x="2940304" y="4123182"/>
-            <a:ext cx="135128" cy="184404"/>
+            <a:off x="2940304" y="4244302"/>
+            <a:ext cx="135128" cy="193624"/>
           </a:xfrm>
           <a:prstGeom prst="rect">
             <a:avLst/>
@@ -14955,8 +14955,8 @@
         </p:nvSpPr>
         <p:spPr>
           <a:xfrm>
-            <a:off x="3075432" y="4123182"/>
-            <a:ext cx="270256" cy="184404"/>
+            <a:off x="3075432" y="4244302"/>
+            <a:ext cx="270256" cy="193624"/>
           </a:xfrm>
           <a:prstGeom prst="rect">
             <a:avLst/>
@@ -14980,8 +14980,8 @@
         </p:nvSpPr>
         <p:spPr>
           <a:xfrm>
-            <a:off x="3959352" y="4047744"/>
-            <a:ext cx="502920" cy="335280"/>
+            <a:off x="3959352" y="4165092"/>
+            <a:ext cx="502920" cy="352044"/>
           </a:xfrm>
           <a:prstGeom prst="rect">
             <a:avLst/>
@@ -15019,8 +15019,8 @@
         </p:nvSpPr>
         <p:spPr>
           <a:xfrm>
-            <a:off x="4462272" y="4047744"/>
-            <a:ext cx="502920" cy="335280"/>
+            <a:off x="4462272" y="4165092"/>
+            <a:ext cx="502920" cy="352044"/>
           </a:xfrm>
           <a:prstGeom prst="rect">
             <a:avLst/>
@@ -15058,8 +15058,8 @@
         </p:nvSpPr>
         <p:spPr>
           <a:xfrm>
-            <a:off x="4965192" y="4047744"/>
-            <a:ext cx="502920" cy="335280"/>
+            <a:off x="4965192" y="4165092"/>
+            <a:ext cx="502920" cy="352044"/>
           </a:xfrm>
           <a:prstGeom prst="rect">
             <a:avLst/>
@@ -15097,8 +15097,8 @@
         </p:nvSpPr>
         <p:spPr>
           <a:xfrm>
-            <a:off x="5468112" y="4047744"/>
-            <a:ext cx="548640" cy="335280"/>
+            <a:off x="5468112" y="4165092"/>
+            <a:ext cx="548640" cy="352044"/>
           </a:xfrm>
           <a:prstGeom prst="rect">
             <a:avLst/>
@@ -15136,8 +15136,8 @@
         </p:nvSpPr>
         <p:spPr>
           <a:xfrm>
-            <a:off x="658368" y="4383024"/>
-            <a:ext cx="1938528" cy="335280"/>
+            <a:off x="658368" y="4517136"/>
+            <a:ext cx="1938528" cy="352044"/>
           </a:xfrm>
           <a:prstGeom prst="rect">
             <a:avLst/>
@@ -15175,8 +15175,8 @@
         </p:nvSpPr>
         <p:spPr>
           <a:xfrm>
-            <a:off x="2670048" y="4458462"/>
-            <a:ext cx="270256" cy="184404"/>
+            <a:off x="2670048" y="4596346"/>
+            <a:ext cx="270256" cy="193624"/>
           </a:xfrm>
           <a:prstGeom prst="rect">
             <a:avLst/>
@@ -15200,8 +15200,8 @@
         </p:nvSpPr>
         <p:spPr>
           <a:xfrm>
-            <a:off x="2940304" y="4458462"/>
-            <a:ext cx="135128" cy="184404"/>
+            <a:off x="2940304" y="4596346"/>
+            <a:ext cx="135128" cy="193624"/>
           </a:xfrm>
           <a:prstGeom prst="rect">
             <a:avLst/>
@@ -15225,8 +15225,8 @@
         </p:nvSpPr>
         <p:spPr>
           <a:xfrm>
-            <a:off x="3075432" y="4458462"/>
-            <a:ext cx="135128" cy="184404"/>
+            <a:off x="3075432" y="4596346"/>
+            <a:ext cx="135128" cy="193624"/>
           </a:xfrm>
           <a:prstGeom prst="rect">
             <a:avLst/>
@@ -15250,8 +15250,8 @@
         </p:nvSpPr>
         <p:spPr>
           <a:xfrm>
-            <a:off x="3959352" y="4383024"/>
-            <a:ext cx="502920" cy="335280"/>
+            <a:off x="3959352" y="4517136"/>
+            <a:ext cx="502920" cy="352044"/>
           </a:xfrm>
           <a:prstGeom prst="rect">
             <a:avLst/>
@@ -15289,8 +15289,8 @@
         </p:nvSpPr>
         <p:spPr>
           <a:xfrm>
-            <a:off x="4462272" y="4383024"/>
-            <a:ext cx="502920" cy="335280"/>
+            <a:off x="4462272" y="4517136"/>
+            <a:ext cx="502920" cy="352044"/>
           </a:xfrm>
           <a:prstGeom prst="rect">
             <a:avLst/>
@@ -15328,8 +15328,8 @@
         </p:nvSpPr>
         <p:spPr>
           <a:xfrm>
-            <a:off x="4965192" y="4383024"/>
-            <a:ext cx="502920" cy="335280"/>
+            <a:off x="4965192" y="4517136"/>
+            <a:ext cx="502920" cy="352044"/>
           </a:xfrm>
           <a:prstGeom prst="rect">
             <a:avLst/>
@@ -15367,8 +15367,8 @@
         </p:nvSpPr>
         <p:spPr>
           <a:xfrm>
-            <a:off x="5468112" y="4383024"/>
-            <a:ext cx="548640" cy="335280"/>
+            <a:off x="5468112" y="4517136"/>
+            <a:ext cx="548640" cy="352044"/>
           </a:xfrm>
           <a:prstGeom prst="rect">
             <a:avLst/>
@@ -15406,8 +15406,8 @@
         </p:nvSpPr>
         <p:spPr>
           <a:xfrm>
-            <a:off x="658368" y="4718304"/>
-            <a:ext cx="1938528" cy="335280"/>
+            <a:off x="658368" y="4869180"/>
+            <a:ext cx="1938528" cy="352044"/>
           </a:xfrm>
           <a:prstGeom prst="rect">
             <a:avLst/>
@@ -15445,8 +15445,8 @@
         </p:nvSpPr>
         <p:spPr>
           <a:xfrm>
-            <a:off x="2670048" y="4793742"/>
-            <a:ext cx="270256" cy="184404"/>
+            <a:off x="2670048" y="4948390"/>
+            <a:ext cx="270256" cy="193624"/>
           </a:xfrm>
           <a:prstGeom prst="rect">
             <a:avLst/>
@@ -15470,8 +15470,8 @@
         </p:nvSpPr>
         <p:spPr>
           <a:xfrm>
-            <a:off x="2940304" y="4793742"/>
-            <a:ext cx="135128" cy="184404"/>
+            <a:off x="2940304" y="4948390"/>
+            <a:ext cx="135128" cy="193624"/>
           </a:xfrm>
           <a:prstGeom prst="rect">
             <a:avLst/>
@@ -15495,8 +15495,8 @@
         </p:nvSpPr>
         <p:spPr>
           <a:xfrm>
-            <a:off x="3075432" y="4793742"/>
-            <a:ext cx="135128" cy="184404"/>
+            <a:off x="3075432" y="4948390"/>
+            <a:ext cx="135128" cy="193624"/>
           </a:xfrm>
           <a:prstGeom prst="rect">
             <a:avLst/>
@@ -15520,8 +15520,8 @@
         </p:nvSpPr>
         <p:spPr>
           <a:xfrm>
-            <a:off x="3959352" y="4718304"/>
-            <a:ext cx="502920" cy="335280"/>
+            <a:off x="3959352" y="4869180"/>
+            <a:ext cx="502920" cy="352044"/>
           </a:xfrm>
           <a:prstGeom prst="rect">
             <a:avLst/>
@@ -15559,8 +15559,8 @@
         </p:nvSpPr>
         <p:spPr>
           <a:xfrm>
-            <a:off x="4462272" y="4718304"/>
-            <a:ext cx="502920" cy="335280"/>
+            <a:off x="4462272" y="4869180"/>
+            <a:ext cx="502920" cy="352044"/>
           </a:xfrm>
           <a:prstGeom prst="rect">
             <a:avLst/>
@@ -15598,8 +15598,8 @@
         </p:nvSpPr>
         <p:spPr>
           <a:xfrm>
-            <a:off x="4965192" y="4718304"/>
-            <a:ext cx="502920" cy="335280"/>
+            <a:off x="4965192" y="4869180"/>
+            <a:ext cx="502920" cy="352044"/>
           </a:xfrm>
           <a:prstGeom prst="rect">
             <a:avLst/>
@@ -15637,8 +15637,8 @@
         </p:nvSpPr>
         <p:spPr>
           <a:xfrm>
-            <a:off x="5468112" y="4718304"/>
-            <a:ext cx="548640" cy="335280"/>
+            <a:off x="5468112" y="4869180"/>
+            <a:ext cx="548640" cy="352044"/>
           </a:xfrm>
           <a:prstGeom prst="rect">
             <a:avLst/>
@@ -15676,8 +15676,8 @@
         </p:nvSpPr>
         <p:spPr>
           <a:xfrm>
-            <a:off x="658368" y="5053584"/>
-            <a:ext cx="1938528" cy="335280"/>
+            <a:off x="658368" y="5221224"/>
+            <a:ext cx="1938528" cy="352044"/>
           </a:xfrm>
           <a:prstGeom prst="rect">
             <a:avLst/>
@@ -15715,8 +15715,8 @@
         </p:nvSpPr>
         <p:spPr>
           <a:xfrm>
-            <a:off x="2670048" y="5129022"/>
-            <a:ext cx="270256" cy="184404"/>
+            <a:off x="2670048" y="5300434"/>
+            <a:ext cx="270256" cy="193624"/>
           </a:xfrm>
           <a:prstGeom prst="rect">
             <a:avLst/>
@@ -15740,8 +15740,8 @@
         </p:nvSpPr>
         <p:spPr>
           <a:xfrm>
-            <a:off x="2940304" y="5129022"/>
-            <a:ext cx="135128" cy="184404"/>
+            <a:off x="2940304" y="5300434"/>
+            <a:ext cx="135128" cy="193624"/>
           </a:xfrm>
           <a:prstGeom prst="rect">
             <a:avLst/>
@@ -15765,8 +15765,8 @@
         </p:nvSpPr>
         <p:spPr>
           <a:xfrm>
-            <a:off x="3075432" y="5129022"/>
-            <a:ext cx="135128" cy="184404"/>
+            <a:off x="3075432" y="5300434"/>
+            <a:ext cx="135128" cy="193624"/>
           </a:xfrm>
           <a:prstGeom prst="rect">
             <a:avLst/>
@@ -15790,8 +15790,8 @@
         </p:nvSpPr>
         <p:spPr>
           <a:xfrm>
-            <a:off x="3959352" y="5053584"/>
-            <a:ext cx="502920" cy="335280"/>
+            <a:off x="3959352" y="5221224"/>
+            <a:ext cx="502920" cy="352044"/>
           </a:xfrm>
           <a:prstGeom prst="rect">
             <a:avLst/>
@@ -15829,8 +15829,8 @@
         </p:nvSpPr>
         <p:spPr>
           <a:xfrm>
-            <a:off x="4462272" y="5053584"/>
-            <a:ext cx="502920" cy="335280"/>
+            <a:off x="4462272" y="5221224"/>
+            <a:ext cx="502920" cy="352044"/>
           </a:xfrm>
           <a:prstGeom prst="rect">
             <a:avLst/>
@@ -15868,8 +15868,8 @@
         </p:nvSpPr>
         <p:spPr>
           <a:xfrm>
-            <a:off x="4965192" y="5053584"/>
-            <a:ext cx="502920" cy="335280"/>
+            <a:off x="4965192" y="5221224"/>
+            <a:ext cx="502920" cy="352044"/>
           </a:xfrm>
           <a:prstGeom prst="rect">
             <a:avLst/>
@@ -15907,8 +15907,8 @@
         </p:nvSpPr>
         <p:spPr>
           <a:xfrm>
-            <a:off x="5468112" y="5053584"/>
-            <a:ext cx="548640" cy="335280"/>
+            <a:off x="5468112" y="5221224"/>
+            <a:ext cx="548640" cy="352044"/>
           </a:xfrm>
           <a:prstGeom prst="rect">
             <a:avLst/>
@@ -15946,8 +15946,8 @@
         </p:nvSpPr>
         <p:spPr>
           <a:xfrm>
-            <a:off x="658368" y="5388864"/>
-            <a:ext cx="1938528" cy="335280"/>
+            <a:off x="658368" y="5573268"/>
+            <a:ext cx="1938528" cy="352044"/>
           </a:xfrm>
           <a:prstGeom prst="rect">
             <a:avLst/>
@@ -15985,8 +15985,8 @@
         </p:nvSpPr>
         <p:spPr>
           <a:xfrm>
-            <a:off x="2670048" y="5464302"/>
-            <a:ext cx="405384" cy="184404"/>
+            <a:off x="2670048" y="5652478"/>
+            <a:ext cx="405384" cy="193624"/>
           </a:xfrm>
           <a:prstGeom prst="rect">
             <a:avLst/>
@@ -16010,8 +16010,8 @@
         </p:nvSpPr>
         <p:spPr>
           <a:xfrm>
-            <a:off x="3075432" y="5464302"/>
-            <a:ext cx="135128" cy="184404"/>
+            <a:off x="3075432" y="5652478"/>
+            <a:ext cx="135128" cy="193624"/>
           </a:xfrm>
           <a:prstGeom prst="rect">
             <a:avLst/>
@@ -16035,8 +16035,8 @@
         </p:nvSpPr>
         <p:spPr>
           <a:xfrm>
-            <a:off x="3959352" y="5388864"/>
-            <a:ext cx="502920" cy="335280"/>
+            <a:off x="3959352" y="5573268"/>
+            <a:ext cx="502920" cy="352044"/>
           </a:xfrm>
           <a:prstGeom prst="rect">
             <a:avLst/>
@@ -16074,8 +16074,8 @@
         </p:nvSpPr>
         <p:spPr>
           <a:xfrm>
-            <a:off x="4462272" y="5388864"/>
-            <a:ext cx="502920" cy="335280"/>
+            <a:off x="4462272" y="5573268"/>
+            <a:ext cx="502920" cy="352044"/>
           </a:xfrm>
           <a:prstGeom prst="rect">
             <a:avLst/>
@@ -16113,8 +16113,8 @@
         </p:nvSpPr>
         <p:spPr>
           <a:xfrm>
-            <a:off x="4965192" y="5388864"/>
-            <a:ext cx="502920" cy="335280"/>
+            <a:off x="4965192" y="5573268"/>
+            <a:ext cx="502920" cy="352044"/>
           </a:xfrm>
           <a:prstGeom prst="rect">
             <a:avLst/>
@@ -16152,8 +16152,8 @@
         </p:nvSpPr>
         <p:spPr>
           <a:xfrm>
-            <a:off x="5468112" y="5388864"/>
-            <a:ext cx="548640" cy="335280"/>
+            <a:off x="5468112" y="5573268"/>
+            <a:ext cx="548640" cy="352044"/>
           </a:xfrm>
           <a:prstGeom prst="rect">
             <a:avLst/>
@@ -16192,7 +16192,7 @@
         <p:spPr>
           <a:xfrm>
             <a:off x="6208776" y="1700784"/>
-            <a:ext cx="1938528" cy="335280"/>
+            <a:ext cx="1938528" cy="352044"/>
           </a:xfrm>
           <a:prstGeom prst="rect">
             <a:avLst/>
@@ -16230,8 +16230,8 @@
         </p:nvSpPr>
         <p:spPr>
           <a:xfrm>
-            <a:off x="8220456" y="1776222"/>
-            <a:ext cx="270256" cy="184404"/>
+            <a:off x="8220456" y="1779994"/>
+            <a:ext cx="270256" cy="193624"/>
           </a:xfrm>
           <a:prstGeom prst="rect">
             <a:avLst/>
@@ -16255,8 +16255,8 @@
         </p:nvSpPr>
         <p:spPr>
           <a:xfrm>
-            <a:off x="8490712" y="1776222"/>
-            <a:ext cx="135128" cy="184404"/>
+            <a:off x="8490712" y="1779994"/>
+            <a:ext cx="135128" cy="193624"/>
           </a:xfrm>
           <a:prstGeom prst="rect">
             <a:avLst/>
@@ -16280,8 +16280,8 @@
         </p:nvSpPr>
         <p:spPr>
           <a:xfrm>
-            <a:off x="8625840" y="1776222"/>
-            <a:ext cx="135128" cy="184404"/>
+            <a:off x="8625840" y="1779994"/>
+            <a:ext cx="135128" cy="193624"/>
           </a:xfrm>
           <a:prstGeom prst="rect">
             <a:avLst/>
@@ -16306,7 +16306,7 @@
         <p:spPr>
           <a:xfrm>
             <a:off x="9509760" y="1700784"/>
-            <a:ext cx="502920" cy="335280"/>
+            <a:ext cx="502920" cy="352044"/>
           </a:xfrm>
           <a:prstGeom prst="rect">
             <a:avLst/>
@@ -16345,7 +16345,7 @@
         <p:spPr>
           <a:xfrm>
             <a:off x="10012680" y="1700784"/>
-            <a:ext cx="502920" cy="335280"/>
+            <a:ext cx="502920" cy="352044"/>
           </a:xfrm>
           <a:prstGeom prst="rect">
             <a:avLst/>
@@ -16384,7 +16384,7 @@
         <p:spPr>
           <a:xfrm>
             <a:off x="10515600" y="1700784"/>
-            <a:ext cx="502920" cy="335280"/>
+            <a:ext cx="502920" cy="352044"/>
           </a:xfrm>
           <a:prstGeom prst="rect">
             <a:avLst/>
@@ -16423,7 +16423,7 @@
         <p:spPr>
           <a:xfrm>
             <a:off x="11018520" y="1700784"/>
-            <a:ext cx="548640" cy="335280"/>
+            <a:ext cx="548640" cy="352044"/>
           </a:xfrm>
           <a:prstGeom prst="rect">
             <a:avLst/>
@@ -16461,8 +16461,8 @@
         </p:nvSpPr>
         <p:spPr>
           <a:xfrm>
-            <a:off x="6208776" y="2036064"/>
-            <a:ext cx="1938528" cy="335280"/>
+            <a:off x="6208776" y="2052828"/>
+            <a:ext cx="1938528" cy="352044"/>
           </a:xfrm>
           <a:prstGeom prst="rect">
             <a:avLst/>
@@ -16500,8 +16500,8 @@
         </p:nvSpPr>
         <p:spPr>
           <a:xfrm>
-            <a:off x="8220456" y="2111502"/>
-            <a:ext cx="540512" cy="184404"/>
+            <a:off x="8220456" y="2132038"/>
+            <a:ext cx="540512" cy="193624"/>
           </a:xfrm>
           <a:prstGeom prst="rect">
             <a:avLst/>
@@ -16525,8 +16525,8 @@
         </p:nvSpPr>
         <p:spPr>
           <a:xfrm>
-            <a:off x="9509760" y="2036064"/>
-            <a:ext cx="502920" cy="335280"/>
+            <a:off x="9509760" y="2052828"/>
+            <a:ext cx="502920" cy="352044"/>
           </a:xfrm>
           <a:prstGeom prst="rect">
             <a:avLst/>
@@ -16564,8 +16564,8 @@
         </p:nvSpPr>
         <p:spPr>
           <a:xfrm>
-            <a:off x="10012680" y="2036064"/>
-            <a:ext cx="502920" cy="335280"/>
+            <a:off x="10012680" y="2052828"/>
+            <a:ext cx="502920" cy="352044"/>
           </a:xfrm>
           <a:prstGeom prst="rect">
             <a:avLst/>
@@ -16603,8 +16603,8 @@
         </p:nvSpPr>
         <p:spPr>
           <a:xfrm>
-            <a:off x="10515600" y="2036064"/>
-            <a:ext cx="502920" cy="335280"/>
+            <a:off x="10515600" y="2052828"/>
+            <a:ext cx="502920" cy="352044"/>
           </a:xfrm>
           <a:prstGeom prst="rect">
             <a:avLst/>
@@ -16642,8 +16642,8 @@
         </p:nvSpPr>
         <p:spPr>
           <a:xfrm>
-            <a:off x="11018520" y="2036064"/>
-            <a:ext cx="548640" cy="335280"/>
+            <a:off x="11018520" y="2052828"/>
+            <a:ext cx="548640" cy="352044"/>
           </a:xfrm>
           <a:prstGeom prst="rect">
             <a:avLst/>
@@ -16681,8 +16681,8 @@
         </p:nvSpPr>
         <p:spPr>
           <a:xfrm>
-            <a:off x="6208776" y="2371344"/>
-            <a:ext cx="1938528" cy="335280"/>
+            <a:off x="6208776" y="2404872"/>
+            <a:ext cx="1938528" cy="352044"/>
           </a:xfrm>
           <a:prstGeom prst="rect">
             <a:avLst/>
@@ -16720,8 +16720,8 @@
         </p:nvSpPr>
         <p:spPr>
           <a:xfrm>
-            <a:off x="8220456" y="2446782"/>
-            <a:ext cx="135128" cy="184404"/>
+            <a:off x="8220456" y="2484082"/>
+            <a:ext cx="135128" cy="193624"/>
           </a:xfrm>
           <a:prstGeom prst="rect">
             <a:avLst/>
@@ -16745,8 +16745,8 @@
         </p:nvSpPr>
         <p:spPr>
           <a:xfrm>
-            <a:off x="8355584" y="2446782"/>
-            <a:ext cx="270256" cy="184404"/>
+            <a:off x="8355584" y="2484082"/>
+            <a:ext cx="270256" cy="193624"/>
           </a:xfrm>
           <a:prstGeom prst="rect">
             <a:avLst/>
@@ -16770,8 +16770,8 @@
         </p:nvSpPr>
         <p:spPr>
           <a:xfrm>
-            <a:off x="9509760" y="2371344"/>
-            <a:ext cx="502920" cy="335280"/>
+            <a:off x="9509760" y="2404872"/>
+            <a:ext cx="502920" cy="352044"/>
           </a:xfrm>
           <a:prstGeom prst="rect">
             <a:avLst/>
@@ -16809,8 +16809,8 @@
         </p:nvSpPr>
         <p:spPr>
           <a:xfrm>
-            <a:off x="10012680" y="2371344"/>
-            <a:ext cx="502920" cy="335280"/>
+            <a:off x="10012680" y="2404872"/>
+            <a:ext cx="502920" cy="352044"/>
           </a:xfrm>
           <a:prstGeom prst="rect">
             <a:avLst/>
@@ -16848,8 +16848,8 @@
         </p:nvSpPr>
         <p:spPr>
           <a:xfrm>
-            <a:off x="10515600" y="2371344"/>
-            <a:ext cx="502920" cy="335280"/>
+            <a:off x="10515600" y="2404872"/>
+            <a:ext cx="502920" cy="352044"/>
           </a:xfrm>
           <a:prstGeom prst="rect">
             <a:avLst/>
@@ -16887,8 +16887,8 @@
         </p:nvSpPr>
         <p:spPr>
           <a:xfrm>
-            <a:off x="11018520" y="2371344"/>
-            <a:ext cx="548640" cy="335280"/>
+            <a:off x="11018520" y="2404872"/>
+            <a:ext cx="548640" cy="352044"/>
           </a:xfrm>
           <a:prstGeom prst="rect">
             <a:avLst/>
@@ -16926,8 +16926,8 @@
         </p:nvSpPr>
         <p:spPr>
           <a:xfrm>
-            <a:off x="6208776" y="2706624"/>
-            <a:ext cx="1938528" cy="335280"/>
+            <a:off x="6208776" y="2756916"/>
+            <a:ext cx="1938528" cy="352044"/>
           </a:xfrm>
           <a:prstGeom prst="rect">
             <a:avLst/>
@@ -16965,8 +16965,8 @@
         </p:nvSpPr>
         <p:spPr>
           <a:xfrm>
-            <a:off x="8220456" y="2782062"/>
-            <a:ext cx="135128" cy="184404"/>
+            <a:off x="8220456" y="2836126"/>
+            <a:ext cx="135128" cy="193624"/>
           </a:xfrm>
           <a:prstGeom prst="rect">
             <a:avLst/>
@@ -16990,8 +16990,8 @@
         </p:nvSpPr>
         <p:spPr>
           <a:xfrm>
-            <a:off x="8355584" y="2782062"/>
-            <a:ext cx="135128" cy="184404"/>
+            <a:off x="8355584" y="2836126"/>
+            <a:ext cx="135128" cy="193624"/>
           </a:xfrm>
           <a:prstGeom prst="rect">
             <a:avLst/>
@@ -17015,8 +17015,8 @@
         </p:nvSpPr>
         <p:spPr>
           <a:xfrm>
-            <a:off x="9509760" y="2706624"/>
-            <a:ext cx="502920" cy="335280"/>
+            <a:off x="9509760" y="2756916"/>
+            <a:ext cx="502920" cy="352044"/>
           </a:xfrm>
           <a:prstGeom prst="rect">
             <a:avLst/>
@@ -17054,8 +17054,8 @@
         </p:nvSpPr>
         <p:spPr>
           <a:xfrm>
-            <a:off x="10012680" y="2706624"/>
-            <a:ext cx="502920" cy="335280"/>
+            <a:off x="10012680" y="2756916"/>
+            <a:ext cx="502920" cy="352044"/>
           </a:xfrm>
           <a:prstGeom prst="rect">
             <a:avLst/>
@@ -17093,8 +17093,8 @@
         </p:nvSpPr>
         <p:spPr>
           <a:xfrm>
-            <a:off x="10515600" y="2706624"/>
-            <a:ext cx="502920" cy="335280"/>
+            <a:off x="10515600" y="2756916"/>
+            <a:ext cx="502920" cy="352044"/>
           </a:xfrm>
           <a:prstGeom prst="rect">
             <a:avLst/>
@@ -17132,8 +17132,8 @@
         </p:nvSpPr>
         <p:spPr>
           <a:xfrm>
-            <a:off x="11018520" y="2706624"/>
-            <a:ext cx="548640" cy="335280"/>
+            <a:off x="11018520" y="2756916"/>
+            <a:ext cx="548640" cy="352044"/>
           </a:xfrm>
           <a:prstGeom prst="rect">
             <a:avLst/>
@@ -17171,8 +17171,8 @@
         </p:nvSpPr>
         <p:spPr>
           <a:xfrm>
-            <a:off x="6208776" y="3041904"/>
-            <a:ext cx="1938528" cy="335280"/>
+            <a:off x="6208776" y="3108960"/>
+            <a:ext cx="1938528" cy="352044"/>
           </a:xfrm>
           <a:prstGeom prst="rect">
             <a:avLst/>
@@ -17210,8 +17210,8 @@
         </p:nvSpPr>
         <p:spPr>
           <a:xfrm>
-            <a:off x="8220456" y="3117342"/>
-            <a:ext cx="135128" cy="184404"/>
+            <a:off x="8220456" y="3188170"/>
+            <a:ext cx="135128" cy="193624"/>
           </a:xfrm>
           <a:prstGeom prst="rect">
             <a:avLst/>
@@ -17235,8 +17235,8 @@
         </p:nvSpPr>
         <p:spPr>
           <a:xfrm>
-            <a:off x="8355584" y="3117342"/>
-            <a:ext cx="135128" cy="184404"/>
+            <a:off x="8355584" y="3188170"/>
+            <a:ext cx="135128" cy="193624"/>
           </a:xfrm>
           <a:prstGeom prst="rect">
             <a:avLst/>
@@ -17260,8 +17260,8 @@
         </p:nvSpPr>
         <p:spPr>
           <a:xfrm>
-            <a:off x="9509760" y="3041904"/>
-            <a:ext cx="502920" cy="335280"/>
+            <a:off x="9509760" y="3108960"/>
+            <a:ext cx="502920" cy="352044"/>
           </a:xfrm>
           <a:prstGeom prst="rect">
             <a:avLst/>
@@ -17299,8 +17299,8 @@
         </p:nvSpPr>
         <p:spPr>
           <a:xfrm>
-            <a:off x="10012680" y="3041904"/>
-            <a:ext cx="502920" cy="335280"/>
+            <a:off x="10012680" y="3108960"/>
+            <a:ext cx="502920" cy="352044"/>
           </a:xfrm>
           <a:prstGeom prst="rect">
             <a:avLst/>
@@ -17338,8 +17338,8 @@
         </p:nvSpPr>
         <p:spPr>
           <a:xfrm>
-            <a:off x="10515600" y="3041904"/>
-            <a:ext cx="502920" cy="335280"/>
+            <a:off x="10515600" y="3108960"/>
+            <a:ext cx="502920" cy="352044"/>
           </a:xfrm>
           <a:prstGeom prst="rect">
             <a:avLst/>
@@ -17377,8 +17377,8 @@
         </p:nvSpPr>
         <p:spPr>
           <a:xfrm>
-            <a:off x="11018520" y="3041904"/>
-            <a:ext cx="548640" cy="335280"/>
+            <a:off x="11018520" y="3108960"/>
+            <a:ext cx="548640" cy="352044"/>
           </a:xfrm>
           <a:prstGeom prst="rect">
             <a:avLst/>
@@ -17416,8 +17416,8 @@
         </p:nvSpPr>
         <p:spPr>
           <a:xfrm>
-            <a:off x="6208776" y="3377184"/>
-            <a:ext cx="1938528" cy="335280"/>
+            <a:off x="6208776" y="3461004"/>
+            <a:ext cx="1938528" cy="352044"/>
           </a:xfrm>
           <a:prstGeom prst="rect">
             <a:avLst/>
@@ -17455,8 +17455,8 @@
         </p:nvSpPr>
         <p:spPr>
           <a:xfrm>
-            <a:off x="8220456" y="3452622"/>
-            <a:ext cx="135128" cy="184404"/>
+            <a:off x="8220456" y="3540214"/>
+            <a:ext cx="135128" cy="193624"/>
           </a:xfrm>
           <a:prstGeom prst="rect">
             <a:avLst/>
@@ -17480,8 +17480,8 @@
         </p:nvSpPr>
         <p:spPr>
           <a:xfrm>
-            <a:off x="8355584" y="3452622"/>
-            <a:ext cx="135128" cy="184404"/>
+            <a:off x="8355584" y="3540214"/>
+            <a:ext cx="135128" cy="193624"/>
           </a:xfrm>
           <a:prstGeom prst="rect">
             <a:avLst/>
@@ -17505,8 +17505,8 @@
         </p:nvSpPr>
         <p:spPr>
           <a:xfrm>
-            <a:off x="9509760" y="3377184"/>
-            <a:ext cx="502920" cy="335280"/>
+            <a:off x="9509760" y="3461004"/>
+            <a:ext cx="502920" cy="352044"/>
           </a:xfrm>
           <a:prstGeom prst="rect">
             <a:avLst/>
@@ -17544,8 +17544,8 @@
         </p:nvSpPr>
         <p:spPr>
           <a:xfrm>
-            <a:off x="10012680" y="3377184"/>
-            <a:ext cx="502920" cy="335280"/>
+            <a:off x="10012680" y="3461004"/>
+            <a:ext cx="502920" cy="352044"/>
           </a:xfrm>
           <a:prstGeom prst="rect">
             <a:avLst/>
@@ -17583,8 +17583,8 @@
         </p:nvSpPr>
         <p:spPr>
           <a:xfrm>
-            <a:off x="10515600" y="3377184"/>
-            <a:ext cx="502920" cy="335280"/>
+            <a:off x="10515600" y="3461004"/>
+            <a:ext cx="502920" cy="352044"/>
           </a:xfrm>
           <a:prstGeom prst="rect">
             <a:avLst/>
@@ -17622,8 +17622,8 @@
         </p:nvSpPr>
         <p:spPr>
           <a:xfrm>
-            <a:off x="11018520" y="3377184"/>
-            <a:ext cx="548640" cy="335280"/>
+            <a:off x="11018520" y="3461004"/>
+            <a:ext cx="548640" cy="352044"/>
           </a:xfrm>
           <a:prstGeom prst="rect">
             <a:avLst/>
@@ -17661,8 +17661,8 @@
         </p:nvSpPr>
         <p:spPr>
           <a:xfrm>
-            <a:off x="6208776" y="3712464"/>
-            <a:ext cx="1938528" cy="335280"/>
+            <a:off x="6208776" y="3813048"/>
+            <a:ext cx="1938528" cy="352044"/>
           </a:xfrm>
           <a:prstGeom prst="rect">
             <a:avLst/>
@@ -17700,8 +17700,8 @@
         </p:nvSpPr>
         <p:spPr>
           <a:xfrm>
-            <a:off x="8220456" y="3787902"/>
-            <a:ext cx="135128" cy="184404"/>
+            <a:off x="8220456" y="3892258"/>
+            <a:ext cx="135128" cy="193624"/>
           </a:xfrm>
           <a:prstGeom prst="rect">
             <a:avLst/>
@@ -17725,8 +17725,8 @@
         </p:nvSpPr>
         <p:spPr>
           <a:xfrm>
-            <a:off x="8355584" y="3787902"/>
-            <a:ext cx="135128" cy="184404"/>
+            <a:off x="8355584" y="3892258"/>
+            <a:ext cx="135128" cy="193624"/>
           </a:xfrm>
           <a:prstGeom prst="rect">
             <a:avLst/>
@@ -17750,8 +17750,8 @@
         </p:nvSpPr>
         <p:spPr>
           <a:xfrm>
-            <a:off x="9509760" y="3712464"/>
-            <a:ext cx="502920" cy="335280"/>
+            <a:off x="9509760" y="3813048"/>
+            <a:ext cx="502920" cy="352044"/>
           </a:xfrm>
           <a:prstGeom prst="rect">
             <a:avLst/>
@@ -17789,8 +17789,8 @@
         </p:nvSpPr>
         <p:spPr>
           <a:xfrm>
-            <a:off x="10012680" y="3712464"/>
-            <a:ext cx="502920" cy="335280"/>
+            <a:off x="10012680" y="3813048"/>
+            <a:ext cx="502920" cy="352044"/>
           </a:xfrm>
           <a:prstGeom prst="rect">
             <a:avLst/>
@@ -17828,8 +17828,8 @@
         </p:nvSpPr>
         <p:spPr>
           <a:xfrm>
-            <a:off x="10515600" y="3712464"/>
-            <a:ext cx="502920" cy="335280"/>
+            <a:off x="10515600" y="3813048"/>
+            <a:ext cx="502920" cy="352044"/>
           </a:xfrm>
           <a:prstGeom prst="rect">
             <a:avLst/>
@@ -17867,8 +17867,8 @@
         </p:nvSpPr>
         <p:spPr>
           <a:xfrm>
-            <a:off x="11018520" y="3712464"/>
-            <a:ext cx="548640" cy="335280"/>
+            <a:off x="11018520" y="3813048"/>
+            <a:ext cx="548640" cy="352044"/>
           </a:xfrm>
           <a:prstGeom prst="rect">
             <a:avLst/>
@@ -17906,8 +17906,8 @@
         </p:nvSpPr>
         <p:spPr>
           <a:xfrm>
-            <a:off x="6208776" y="4047744"/>
-            <a:ext cx="1938528" cy="335280"/>
+            <a:off x="6208776" y="4165092"/>
+            <a:ext cx="1938528" cy="352044"/>
           </a:xfrm>
           <a:prstGeom prst="rect">
             <a:avLst/>
@@ -17945,8 +17945,8 @@
         </p:nvSpPr>
         <p:spPr>
           <a:xfrm>
-            <a:off x="8220456" y="4123182"/>
-            <a:ext cx="135128" cy="184404"/>
+            <a:off x="8220456" y="4244302"/>
+            <a:ext cx="135128" cy="193624"/>
           </a:xfrm>
           <a:prstGeom prst="rect">
             <a:avLst/>
@@ -17970,8 +17970,8 @@
         </p:nvSpPr>
         <p:spPr>
           <a:xfrm>
-            <a:off x="8355584" y="4123182"/>
-            <a:ext cx="135128" cy="184404"/>
+            <a:off x="8355584" y="4244302"/>
+            <a:ext cx="135128" cy="193624"/>
           </a:xfrm>
           <a:prstGeom prst="rect">
             <a:avLst/>
@@ -17995,8 +17995,8 @@
         </p:nvSpPr>
         <p:spPr>
           <a:xfrm>
-            <a:off x="9509760" y="4047744"/>
-            <a:ext cx="502920" cy="335280"/>
+            <a:off x="9509760" y="4165092"/>
+            <a:ext cx="502920" cy="352044"/>
           </a:xfrm>
           <a:prstGeom prst="rect">
             <a:avLst/>
@@ -18034,8 +18034,8 @@
         </p:nvSpPr>
         <p:spPr>
           <a:xfrm>
-            <a:off x="10012680" y="4047744"/>
-            <a:ext cx="502920" cy="335280"/>
+            <a:off x="10012680" y="4165092"/>
+            <a:ext cx="502920" cy="352044"/>
           </a:xfrm>
           <a:prstGeom prst="rect">
             <a:avLst/>
@@ -18073,8 +18073,8 @@
         </p:nvSpPr>
         <p:spPr>
           <a:xfrm>
-            <a:off x="10515600" y="4047744"/>
-            <a:ext cx="502920" cy="335280"/>
+            <a:off x="10515600" y="4165092"/>
+            <a:ext cx="502920" cy="352044"/>
           </a:xfrm>
           <a:prstGeom prst="rect">
             <a:avLst/>
@@ -18112,8 +18112,8 @@
         </p:nvSpPr>
         <p:spPr>
           <a:xfrm>
-            <a:off x="11018520" y="4047744"/>
-            <a:ext cx="548640" cy="335280"/>
+            <a:off x="11018520" y="4165092"/>
+            <a:ext cx="548640" cy="352044"/>
           </a:xfrm>
           <a:prstGeom prst="rect">
             <a:avLst/>
@@ -18151,8 +18151,8 @@
         </p:nvSpPr>
         <p:spPr>
           <a:xfrm>
-            <a:off x="6208776" y="4383024"/>
-            <a:ext cx="1938528" cy="335280"/>
+            <a:off x="6208776" y="4517136"/>
+            <a:ext cx="1938528" cy="352044"/>
           </a:xfrm>
           <a:prstGeom prst="rect">
             <a:avLst/>
@@ -18190,8 +18190,8 @@
         </p:nvSpPr>
         <p:spPr>
           <a:xfrm>
-            <a:off x="8220456" y="4458462"/>
-            <a:ext cx="270256" cy="184404"/>
+            <a:off x="8220456" y="4596346"/>
+            <a:ext cx="270256" cy="193624"/>
           </a:xfrm>
           <a:prstGeom prst="rect">
             <a:avLst/>
@@ -18215,8 +18215,8 @@
         </p:nvSpPr>
         <p:spPr>
           <a:xfrm>
-            <a:off x="9509760" y="4383024"/>
-            <a:ext cx="502920" cy="335280"/>
+            <a:off x="9509760" y="4517136"/>
+            <a:ext cx="502920" cy="352044"/>
           </a:xfrm>
           <a:prstGeom prst="rect">
             <a:avLst/>
@@ -18254,8 +18254,8 @@
         </p:nvSpPr>
         <p:spPr>
           <a:xfrm>
-            <a:off x="10012680" y="4383024"/>
-            <a:ext cx="502920" cy="335280"/>
+            <a:off x="10012680" y="4517136"/>
+            <a:ext cx="502920" cy="352044"/>
           </a:xfrm>
           <a:prstGeom prst="rect">
             <a:avLst/>
@@ -18293,8 +18293,8 @@
         </p:nvSpPr>
         <p:spPr>
           <a:xfrm>
-            <a:off x="10515600" y="4383024"/>
-            <a:ext cx="502920" cy="335280"/>
+            <a:off x="10515600" y="4517136"/>
+            <a:ext cx="502920" cy="352044"/>
           </a:xfrm>
           <a:prstGeom prst="rect">
             <a:avLst/>
@@ -18332,8 +18332,8 @@
         </p:nvSpPr>
         <p:spPr>
           <a:xfrm>
-            <a:off x="11018520" y="4383024"/>
-            <a:ext cx="548640" cy="335280"/>
+            <a:off x="11018520" y="4517136"/>
+            <a:ext cx="548640" cy="352044"/>
           </a:xfrm>
           <a:prstGeom prst="rect">
             <a:avLst/>
@@ -18371,8 +18371,8 @@
         </p:nvSpPr>
         <p:spPr>
           <a:xfrm>
-            <a:off x="6208776" y="4718304"/>
-            <a:ext cx="1938528" cy="335280"/>
+            <a:off x="6208776" y="4869180"/>
+            <a:ext cx="1938528" cy="352044"/>
           </a:xfrm>
           <a:prstGeom prst="rect">
             <a:avLst/>
@@ -18410,8 +18410,8 @@
         </p:nvSpPr>
         <p:spPr>
           <a:xfrm>
-            <a:off x="8220456" y="4793742"/>
-            <a:ext cx="135128" cy="184404"/>
+            <a:off x="8220456" y="4948390"/>
+            <a:ext cx="135128" cy="193624"/>
           </a:xfrm>
           <a:prstGeom prst="rect">
             <a:avLst/>
@@ -18435,8 +18435,8 @@
         </p:nvSpPr>
         <p:spPr>
           <a:xfrm>
-            <a:off x="9509760" y="4718304"/>
-            <a:ext cx="502920" cy="335280"/>
+            <a:off x="9509760" y="4869180"/>
+            <a:ext cx="502920" cy="352044"/>
           </a:xfrm>
           <a:prstGeom prst="rect">
             <a:avLst/>
@@ -18474,8 +18474,8 @@
         </p:nvSpPr>
         <p:spPr>
           <a:xfrm>
-            <a:off x="10012680" y="4718304"/>
-            <a:ext cx="502920" cy="335280"/>
+            <a:off x="10012680" y="4869180"/>
+            <a:ext cx="502920" cy="352044"/>
           </a:xfrm>
           <a:prstGeom prst="rect">
             <a:avLst/>
@@ -18513,8 +18513,8 @@
         </p:nvSpPr>
         <p:spPr>
           <a:xfrm>
-            <a:off x="10515600" y="4718304"/>
-            <a:ext cx="502920" cy="335280"/>
+            <a:off x="10515600" y="4869180"/>
+            <a:ext cx="502920" cy="352044"/>
           </a:xfrm>
           <a:prstGeom prst="rect">
             <a:avLst/>
@@ -18552,8 +18552,8 @@
         </p:nvSpPr>
         <p:spPr>
           <a:xfrm>
-            <a:off x="11018520" y="4718304"/>
-            <a:ext cx="548640" cy="335280"/>
+            <a:off x="11018520" y="4869180"/>
+            <a:ext cx="548640" cy="352044"/>
           </a:xfrm>
           <a:prstGeom prst="rect">
             <a:avLst/>
@@ -18591,8 +18591,8 @@
         </p:nvSpPr>
         <p:spPr>
           <a:xfrm>
-            <a:off x="6208776" y="5053584"/>
-            <a:ext cx="1938528" cy="335280"/>
+            <a:off x="6208776" y="5221224"/>
+            <a:ext cx="1938528" cy="352044"/>
           </a:xfrm>
           <a:prstGeom prst="rect">
             <a:avLst/>
@@ -18630,8 +18630,8 @@
         </p:nvSpPr>
         <p:spPr>
           <a:xfrm>
-            <a:off x="8220456" y="5129022"/>
-            <a:ext cx="135128" cy="184404"/>
+            <a:off x="8220456" y="5300434"/>
+            <a:ext cx="135128" cy="193624"/>
           </a:xfrm>
           <a:prstGeom prst="rect">
             <a:avLst/>
@@ -18655,8 +18655,8 @@
         </p:nvSpPr>
         <p:spPr>
           <a:xfrm>
-            <a:off x="9509760" y="5053584"/>
-            <a:ext cx="502920" cy="335280"/>
+            <a:off x="9509760" y="5221224"/>
+            <a:ext cx="502920" cy="352044"/>
           </a:xfrm>
           <a:prstGeom prst="rect">
             <a:avLst/>
@@ -18694,8 +18694,8 @@
         </p:nvSpPr>
         <p:spPr>
           <a:xfrm>
-            <a:off x="10012680" y="5053584"/>
-            <a:ext cx="502920" cy="335280"/>
+            <a:off x="10012680" y="5221224"/>
+            <a:ext cx="502920" cy="352044"/>
           </a:xfrm>
           <a:prstGeom prst="rect">
             <a:avLst/>
@@ -18733,8 +18733,8 @@
         </p:nvSpPr>
         <p:spPr>
           <a:xfrm>
-            <a:off x="10515600" y="5053584"/>
-            <a:ext cx="502920" cy="335280"/>
+            <a:off x="10515600" y="5221224"/>
+            <a:ext cx="502920" cy="352044"/>
           </a:xfrm>
           <a:prstGeom prst="rect">
             <a:avLst/>
@@ -18772,8 +18772,8 @@
         </p:nvSpPr>
         <p:spPr>
           <a:xfrm>
-            <a:off x="11018520" y="5053584"/>
-            <a:ext cx="548640" cy="335280"/>
+            <a:off x="11018520" y="5221224"/>
+            <a:ext cx="548640" cy="352044"/>
           </a:xfrm>
           <a:prstGeom prst="rect">
             <a:avLst/>
@@ -18811,8 +18811,8 @@
         </p:nvSpPr>
         <p:spPr>
           <a:xfrm>
-            <a:off x="457200" y="5961888"/>
-            <a:ext cx="11274552" cy="548640"/>
+            <a:off x="457200" y="6126480"/>
+            <a:ext cx="11274552" cy="356616"/>
           </a:xfrm>
           <a:prstGeom prst="rect">
             <a:avLst/>
@@ -18831,8 +18831,8 @@
         </p:nvSpPr>
         <p:spPr>
           <a:xfrm>
-            <a:off x="658368" y="5980176"/>
-            <a:ext cx="10927080" cy="512064"/>
+            <a:off x="658368" y="6144768"/>
+            <a:ext cx="10927080" cy="320040"/>
           </a:xfrm>
           <a:prstGeom prst="rect">
             <a:avLst/>
@@ -18848,7 +18848,7 @@
               <a:buNone/>
             </a:pPr>
             <a:r>
-              <a:rPr lang="en-US" sz="1600" b="1" dirty="0">
+              <a:rPr lang="en-US" sz="1500" b="1" dirty="0">
                 <a:solidFill>
                   <a:srgbClr val="0B7A4A"/>
                 </a:solidFill>
@@ -18858,7 +18858,7 @@
               </a:rPr>
               <a:t>23 of 33 stores set 98 new monthly records in 2026: 42 in service, 19 in parts and 37 in combined gross.</a:t>
             </a:r>
-            <a:endParaRPr lang="en-US" sz="1600" dirty="0"/>
+            <a:endParaRPr lang="en-US" sz="1500" dirty="0"/>
           </a:p>
         </p:txBody>
       </p:sp>

--- a/day2-deck/decks/Store Records - Review.pptx
+++ b/day2-deck/decks/Store Records - Review.pptx
@@ -8983,7 +8983,7 @@
               <a:buNone/>
             </a:pPr>
             <a:r>
-              <a:rPr lang="en-US" sz="4000" b="1" dirty="0">
+              <a:rPr lang="en-US" sz="3200" b="1" dirty="0">
                 <a:solidFill>
                   <a:srgbClr val="0B7A4A"/>
                 </a:solidFill>
@@ -8993,7 +8993,7 @@
               </a:rPr>
               <a:t>+$1.77M</a:t>
             </a:r>
-            <a:endParaRPr lang="en-US" sz="4000" dirty="0"/>
+            <a:endParaRPr lang="en-US" sz="3200" dirty="0"/>
           </a:p>
         </p:txBody>
       </p:sp>
@@ -9142,7 +9142,7 @@
               <a:buNone/>
             </a:pPr>
             <a:r>
-              <a:rPr lang="en-US" sz="4000" b="1" dirty="0">
+              <a:rPr lang="en-US" sz="3200" b="1" dirty="0">
                 <a:solidFill>
                   <a:srgbClr val="0B7A4A"/>
                 </a:solidFill>
@@ -9152,7 +9152,7 @@
               </a:rPr>
               <a:t>+$1.70M</a:t>
             </a:r>
-            <a:endParaRPr lang="en-US" sz="4000" dirty="0"/>
+            <a:endParaRPr lang="en-US" sz="3200" dirty="0"/>
           </a:p>
         </p:txBody>
       </p:sp>
@@ -9301,7 +9301,7 @@
               <a:buNone/>
             </a:pPr>
             <a:r>
-              <a:rPr lang="en-US" sz="4000" b="1" dirty="0">
+              <a:rPr lang="en-US" sz="3200" b="1" dirty="0">
                 <a:solidFill>
                   <a:srgbClr val="0B7A4A"/>
                 </a:solidFill>
@@ -9311,7 +9311,7 @@
               </a:rPr>
               <a:t>+$0.76M</a:t>
             </a:r>
-            <a:endParaRPr lang="en-US" sz="4000" dirty="0"/>
+            <a:endParaRPr lang="en-US" sz="3200" dirty="0"/>
           </a:p>
         </p:txBody>
       </p:sp>
@@ -9460,7 +9460,7 @@
               <a:buNone/>
             </a:pPr>
             <a:r>
-              <a:rPr lang="en-US" sz="4000" b="1" dirty="0">
+              <a:rPr lang="en-US" sz="3200" b="1" dirty="0">
                 <a:solidFill>
                   <a:srgbClr val="0B7A4A"/>
                 </a:solidFill>
@@ -9470,7 +9470,7 @@
               </a:rPr>
               <a:t>+$0.72M</a:t>
             </a:r>
-            <a:endParaRPr lang="en-US" sz="4000" dirty="0"/>
+            <a:endParaRPr lang="en-US" sz="3200" dirty="0"/>
           </a:p>
         </p:txBody>
       </p:sp>

--- a/day2-deck/decks/Store Records - Review.pptx
+++ b/day2-deck/decks/Store Records - Review.pptx
@@ -9769,7 +9769,7 @@
         </p:nvSpPr>
         <p:spPr>
           <a:xfrm>
-            <a:off x="4818888" y="1316736"/>
+            <a:off x="4864608" y="1316736"/>
             <a:ext cx="1051560" cy="329184"/>
           </a:xfrm>
           <a:prstGeom prst="rect">
@@ -9808,7 +9808,7 @@
         </p:nvSpPr>
         <p:spPr>
           <a:xfrm>
-            <a:off x="10369296" y="1316736"/>
+            <a:off x="10415016" y="1316736"/>
             <a:ext cx="1051560" cy="329184"/>
           </a:xfrm>
           <a:prstGeom prst="rect">
@@ -9848,7 +9848,46 @@
         <p:spPr>
           <a:xfrm>
             <a:off x="658368" y="1700784"/>
-            <a:ext cx="1938528" cy="352044"/>
+            <a:ext cx="310896" cy="352044"/>
+          </a:xfrm>
+          <a:prstGeom prst="rect">
+            <a:avLst/>
+          </a:prstGeom>
+          <a:noFill/>
+          <a:ln/>
+        </p:spPr>
+        <p:txBody>
+          <a:bodyPr wrap="square" lIns="0" tIns="0" rIns="0" bIns="0" rtlCol="0" anchor="ctr"/>
+          <a:lstStyle/>
+          <a:p>
+            <a:pPr algn="r" indent="0" marL="0">
+              <a:buNone/>
+            </a:pPr>
+            <a:r>
+              <a:rPr lang="en-US" sz="1200" dirty="0">
+                <a:solidFill>
+                  <a:srgbClr val="9AA3AD"/>
+                </a:solidFill>
+                <a:latin typeface="Inter" pitchFamily="34" charset="0"/>
+                <a:ea typeface="Inter" pitchFamily="34" charset="-122"/>
+                <a:cs typeface="Inter" pitchFamily="34" charset="-120"/>
+              </a:rPr>
+              <a:t>1</a:t>
+            </a:r>
+            <a:endParaRPr lang="en-US" sz="1200" dirty="0"/>
+          </a:p>
+        </p:txBody>
+      </p:sp>
+      <p:sp>
+        <p:nvSpPr>
+          <p:cNvPr id="9" name="Text 7"/>
+          <p:cNvSpPr txBox="1"/>
+          <p:nvPr/>
+        </p:nvSpPr>
+        <p:spPr>
+          <a:xfrm>
+            <a:off x="1014984" y="1700784"/>
+            <a:ext cx="2011680" cy="352044"/>
           </a:xfrm>
           <a:prstGeom prst="rect">
             <a:avLst/>
@@ -9880,14 +9919,14 @@
       </p:sp>
       <p:sp>
         <p:nvSpPr>
-          <p:cNvPr id="9" name="Shape 7"/>
-          <p:cNvSpPr/>
-          <p:nvPr/>
-        </p:nvSpPr>
-        <p:spPr>
-          <a:xfrm>
-            <a:off x="2670048" y="1779994"/>
-            <a:ext cx="2093976" cy="193624"/>
+          <p:cNvPr id="10" name="Shape 8"/>
+          <p:cNvSpPr/>
+          <p:nvPr/>
+        </p:nvSpPr>
+        <p:spPr>
+          <a:xfrm>
+            <a:off x="3099816" y="1779994"/>
+            <a:ext cx="1709928" cy="193624"/>
           </a:xfrm>
           <a:prstGeom prst="rect">
             <a:avLst/>
@@ -9900,13 +9939,13 @@
       </p:sp>
       <p:sp>
         <p:nvSpPr>
-          <p:cNvPr id="10" name="Text 8"/>
-          <p:cNvSpPr txBox="1"/>
-          <p:nvPr/>
-        </p:nvSpPr>
-        <p:spPr>
-          <a:xfrm>
-            <a:off x="4818888" y="1700784"/>
+          <p:cNvPr id="11" name="Text 9"/>
+          <p:cNvSpPr txBox="1"/>
+          <p:nvPr/>
+        </p:nvSpPr>
+        <p:spPr>
+          <a:xfrm>
+            <a:off x="4864608" y="1700784"/>
             <a:ext cx="1051560" cy="352044"/>
           </a:xfrm>
           <a:prstGeom prst="rect">
@@ -9939,14 +9978,53 @@
       </p:sp>
       <p:sp>
         <p:nvSpPr>
-          <p:cNvPr id="11" name="Text 9"/>
+          <p:cNvPr id="12" name="Text 10"/>
           <p:cNvSpPr txBox="1"/>
           <p:nvPr/>
         </p:nvSpPr>
         <p:spPr>
           <a:xfrm>
             <a:off x="658368" y="2052828"/>
-            <a:ext cx="1938528" cy="352044"/>
+            <a:ext cx="310896" cy="352044"/>
+          </a:xfrm>
+          <a:prstGeom prst="rect">
+            <a:avLst/>
+          </a:prstGeom>
+          <a:noFill/>
+          <a:ln/>
+        </p:spPr>
+        <p:txBody>
+          <a:bodyPr wrap="square" lIns="0" tIns="0" rIns="0" bIns="0" rtlCol="0" anchor="ctr"/>
+          <a:lstStyle/>
+          <a:p>
+            <a:pPr algn="r" indent="0" marL="0">
+              <a:buNone/>
+            </a:pPr>
+            <a:r>
+              <a:rPr lang="en-US" sz="1200" dirty="0">
+                <a:solidFill>
+                  <a:srgbClr val="9AA3AD"/>
+                </a:solidFill>
+                <a:latin typeface="Inter" pitchFamily="34" charset="0"/>
+                <a:ea typeface="Inter" pitchFamily="34" charset="-122"/>
+                <a:cs typeface="Inter" pitchFamily="34" charset="-120"/>
+              </a:rPr>
+              <a:t>2</a:t>
+            </a:r>
+            <a:endParaRPr lang="en-US" sz="1200" dirty="0"/>
+          </a:p>
+        </p:txBody>
+      </p:sp>
+      <p:sp>
+        <p:nvSpPr>
+          <p:cNvPr id="13" name="Text 11"/>
+          <p:cNvSpPr txBox="1"/>
+          <p:nvPr/>
+        </p:nvSpPr>
+        <p:spPr>
+          <a:xfrm>
+            <a:off x="1014984" y="2052828"/>
+            <a:ext cx="2011680" cy="352044"/>
           </a:xfrm>
           <a:prstGeom prst="rect">
             <a:avLst/>
@@ -9978,14 +10056,14 @@
       </p:sp>
       <p:sp>
         <p:nvSpPr>
-          <p:cNvPr id="12" name="Shape 10"/>
-          <p:cNvSpPr/>
-          <p:nvPr/>
-        </p:nvSpPr>
-        <p:spPr>
-          <a:xfrm>
-            <a:off x="2670048" y="2132038"/>
-            <a:ext cx="2093976" cy="193624"/>
+          <p:cNvPr id="14" name="Shape 12"/>
+          <p:cNvSpPr/>
+          <p:nvPr/>
+        </p:nvSpPr>
+        <p:spPr>
+          <a:xfrm>
+            <a:off x="3099816" y="2132038"/>
+            <a:ext cx="1709928" cy="193624"/>
           </a:xfrm>
           <a:prstGeom prst="rect">
             <a:avLst/>
@@ -9998,13 +10076,13 @@
       </p:sp>
       <p:sp>
         <p:nvSpPr>
-          <p:cNvPr id="13" name="Text 11"/>
-          <p:cNvSpPr txBox="1"/>
-          <p:nvPr/>
-        </p:nvSpPr>
-        <p:spPr>
-          <a:xfrm>
-            <a:off x="4818888" y="2052828"/>
+          <p:cNvPr id="15" name="Text 13"/>
+          <p:cNvSpPr txBox="1"/>
+          <p:nvPr/>
+        </p:nvSpPr>
+        <p:spPr>
+          <a:xfrm>
+            <a:off x="4864608" y="2052828"/>
             <a:ext cx="1051560" cy="352044"/>
           </a:xfrm>
           <a:prstGeom prst="rect">
@@ -10037,14 +10115,53 @@
       </p:sp>
       <p:sp>
         <p:nvSpPr>
-          <p:cNvPr id="14" name="Text 12"/>
+          <p:cNvPr id="16" name="Text 14"/>
           <p:cNvSpPr txBox="1"/>
           <p:nvPr/>
         </p:nvSpPr>
         <p:spPr>
           <a:xfrm>
             <a:off x="658368" y="2404872"/>
-            <a:ext cx="1938528" cy="352044"/>
+            <a:ext cx="310896" cy="352044"/>
+          </a:xfrm>
+          <a:prstGeom prst="rect">
+            <a:avLst/>
+          </a:prstGeom>
+          <a:noFill/>
+          <a:ln/>
+        </p:spPr>
+        <p:txBody>
+          <a:bodyPr wrap="square" lIns="0" tIns="0" rIns="0" bIns="0" rtlCol="0" anchor="ctr"/>
+          <a:lstStyle/>
+          <a:p>
+            <a:pPr algn="r" indent="0" marL="0">
+              <a:buNone/>
+            </a:pPr>
+            <a:r>
+              <a:rPr lang="en-US" sz="1200" dirty="0">
+                <a:solidFill>
+                  <a:srgbClr val="9AA3AD"/>
+                </a:solidFill>
+                <a:latin typeface="Inter" pitchFamily="34" charset="0"/>
+                <a:ea typeface="Inter" pitchFamily="34" charset="-122"/>
+                <a:cs typeface="Inter" pitchFamily="34" charset="-120"/>
+              </a:rPr>
+              <a:t>3</a:t>
+            </a:r>
+            <a:endParaRPr lang="en-US" sz="1200" dirty="0"/>
+          </a:p>
+        </p:txBody>
+      </p:sp>
+      <p:sp>
+        <p:nvSpPr>
+          <p:cNvPr id="17" name="Text 15"/>
+          <p:cNvSpPr txBox="1"/>
+          <p:nvPr/>
+        </p:nvSpPr>
+        <p:spPr>
+          <a:xfrm>
+            <a:off x="1014984" y="2404872"/>
+            <a:ext cx="2011680" cy="352044"/>
           </a:xfrm>
           <a:prstGeom prst="rect">
             <a:avLst/>
@@ -10076,14 +10193,14 @@
       </p:sp>
       <p:sp>
         <p:nvSpPr>
-          <p:cNvPr id="15" name="Shape 13"/>
-          <p:cNvSpPr/>
-          <p:nvPr/>
-        </p:nvSpPr>
-        <p:spPr>
-          <a:xfrm>
-            <a:off x="2670048" y="2484082"/>
-            <a:ext cx="1861312" cy="193624"/>
+          <p:cNvPr id="18" name="Shape 16"/>
+          <p:cNvSpPr/>
+          <p:nvPr/>
+        </p:nvSpPr>
+        <p:spPr>
+          <a:xfrm>
+            <a:off x="3099816" y="2484082"/>
+            <a:ext cx="1519936" cy="193624"/>
           </a:xfrm>
           <a:prstGeom prst="rect">
             <a:avLst/>
@@ -10096,13 +10213,13 @@
       </p:sp>
       <p:sp>
         <p:nvSpPr>
-          <p:cNvPr id="16" name="Text 14"/>
-          <p:cNvSpPr txBox="1"/>
-          <p:nvPr/>
-        </p:nvSpPr>
-        <p:spPr>
-          <a:xfrm>
-            <a:off x="4818888" y="2404872"/>
+          <p:cNvPr id="19" name="Text 17"/>
+          <p:cNvSpPr txBox="1"/>
+          <p:nvPr/>
+        </p:nvSpPr>
+        <p:spPr>
+          <a:xfrm>
+            <a:off x="4864608" y="2404872"/>
             <a:ext cx="1051560" cy="352044"/>
           </a:xfrm>
           <a:prstGeom prst="rect">
@@ -10135,14 +10252,53 @@
       </p:sp>
       <p:sp>
         <p:nvSpPr>
-          <p:cNvPr id="17" name="Text 15"/>
+          <p:cNvPr id="20" name="Text 18"/>
           <p:cNvSpPr txBox="1"/>
           <p:nvPr/>
         </p:nvSpPr>
         <p:spPr>
           <a:xfrm>
             <a:off x="658368" y="2756916"/>
-            <a:ext cx="1938528" cy="352044"/>
+            <a:ext cx="310896" cy="352044"/>
+          </a:xfrm>
+          <a:prstGeom prst="rect">
+            <a:avLst/>
+          </a:prstGeom>
+          <a:noFill/>
+          <a:ln/>
+        </p:spPr>
+        <p:txBody>
+          <a:bodyPr wrap="square" lIns="0" tIns="0" rIns="0" bIns="0" rtlCol="0" anchor="ctr"/>
+          <a:lstStyle/>
+          <a:p>
+            <a:pPr algn="r" indent="0" marL="0">
+              <a:buNone/>
+            </a:pPr>
+            <a:r>
+              <a:rPr lang="en-US" sz="1200" dirty="0">
+                <a:solidFill>
+                  <a:srgbClr val="9AA3AD"/>
+                </a:solidFill>
+                <a:latin typeface="Inter" pitchFamily="34" charset="0"/>
+                <a:ea typeface="Inter" pitchFamily="34" charset="-122"/>
+                <a:cs typeface="Inter" pitchFamily="34" charset="-120"/>
+              </a:rPr>
+              <a:t>4</a:t>
+            </a:r>
+            <a:endParaRPr lang="en-US" sz="1200" dirty="0"/>
+          </a:p>
+        </p:txBody>
+      </p:sp>
+      <p:sp>
+        <p:nvSpPr>
+          <p:cNvPr id="21" name="Text 19"/>
+          <p:cNvSpPr txBox="1"/>
+          <p:nvPr/>
+        </p:nvSpPr>
+        <p:spPr>
+          <a:xfrm>
+            <a:off x="1014984" y="2756916"/>
+            <a:ext cx="2011680" cy="352044"/>
           </a:xfrm>
           <a:prstGeom prst="rect">
             <a:avLst/>
@@ -10174,14 +10330,14 @@
       </p:sp>
       <p:sp>
         <p:nvSpPr>
-          <p:cNvPr id="18" name="Shape 16"/>
-          <p:cNvSpPr/>
-          <p:nvPr/>
-        </p:nvSpPr>
-        <p:spPr>
-          <a:xfrm>
-            <a:off x="2670048" y="2836126"/>
-            <a:ext cx="1628648" cy="193624"/>
+          <p:cNvPr id="22" name="Shape 20"/>
+          <p:cNvSpPr/>
+          <p:nvPr/>
+        </p:nvSpPr>
+        <p:spPr>
+          <a:xfrm>
+            <a:off x="3099816" y="2836126"/>
+            <a:ext cx="1329944" cy="193624"/>
           </a:xfrm>
           <a:prstGeom prst="rect">
             <a:avLst/>
@@ -10194,13 +10350,13 @@
       </p:sp>
       <p:sp>
         <p:nvSpPr>
-          <p:cNvPr id="19" name="Text 17"/>
-          <p:cNvSpPr txBox="1"/>
-          <p:nvPr/>
-        </p:nvSpPr>
-        <p:spPr>
-          <a:xfrm>
-            <a:off x="4818888" y="2756916"/>
+          <p:cNvPr id="23" name="Text 21"/>
+          <p:cNvSpPr txBox="1"/>
+          <p:nvPr/>
+        </p:nvSpPr>
+        <p:spPr>
+          <a:xfrm>
+            <a:off x="4864608" y="2756916"/>
             <a:ext cx="1051560" cy="352044"/>
           </a:xfrm>
           <a:prstGeom prst="rect">
@@ -10233,14 +10389,53 @@
       </p:sp>
       <p:sp>
         <p:nvSpPr>
-          <p:cNvPr id="20" name="Text 18"/>
+          <p:cNvPr id="24" name="Text 22"/>
           <p:cNvSpPr txBox="1"/>
           <p:nvPr/>
         </p:nvSpPr>
         <p:spPr>
           <a:xfrm>
             <a:off x="658368" y="3108960"/>
-            <a:ext cx="1938528" cy="352044"/>
+            <a:ext cx="310896" cy="352044"/>
+          </a:xfrm>
+          <a:prstGeom prst="rect">
+            <a:avLst/>
+          </a:prstGeom>
+          <a:noFill/>
+          <a:ln/>
+        </p:spPr>
+        <p:txBody>
+          <a:bodyPr wrap="square" lIns="0" tIns="0" rIns="0" bIns="0" rtlCol="0" anchor="ctr"/>
+          <a:lstStyle/>
+          <a:p>
+            <a:pPr algn="r" indent="0" marL="0">
+              <a:buNone/>
+            </a:pPr>
+            <a:r>
+              <a:rPr lang="en-US" sz="1200" dirty="0">
+                <a:solidFill>
+                  <a:srgbClr val="9AA3AD"/>
+                </a:solidFill>
+                <a:latin typeface="Inter" pitchFamily="34" charset="0"/>
+                <a:ea typeface="Inter" pitchFamily="34" charset="-122"/>
+                <a:cs typeface="Inter" pitchFamily="34" charset="-120"/>
+              </a:rPr>
+              <a:t>5</a:t>
+            </a:r>
+            <a:endParaRPr lang="en-US" sz="1200" dirty="0"/>
+          </a:p>
+        </p:txBody>
+      </p:sp>
+      <p:sp>
+        <p:nvSpPr>
+          <p:cNvPr id="25" name="Text 23"/>
+          <p:cNvSpPr txBox="1"/>
+          <p:nvPr/>
+        </p:nvSpPr>
+        <p:spPr>
+          <a:xfrm>
+            <a:off x="1014984" y="3108960"/>
+            <a:ext cx="2011680" cy="352044"/>
           </a:xfrm>
           <a:prstGeom prst="rect">
             <a:avLst/>
@@ -10272,14 +10467,14 @@
       </p:sp>
       <p:sp>
         <p:nvSpPr>
-          <p:cNvPr id="21" name="Shape 19"/>
-          <p:cNvSpPr/>
-          <p:nvPr/>
-        </p:nvSpPr>
-        <p:spPr>
-          <a:xfrm>
-            <a:off x="2670048" y="3188170"/>
-            <a:ext cx="1628648" cy="193624"/>
+          <p:cNvPr id="26" name="Shape 24"/>
+          <p:cNvSpPr/>
+          <p:nvPr/>
+        </p:nvSpPr>
+        <p:spPr>
+          <a:xfrm>
+            <a:off x="3099816" y="3188170"/>
+            <a:ext cx="1329944" cy="193624"/>
           </a:xfrm>
           <a:prstGeom prst="rect">
             <a:avLst/>
@@ -10292,13 +10487,13 @@
       </p:sp>
       <p:sp>
         <p:nvSpPr>
-          <p:cNvPr id="22" name="Text 20"/>
-          <p:cNvSpPr txBox="1"/>
-          <p:nvPr/>
-        </p:nvSpPr>
-        <p:spPr>
-          <a:xfrm>
-            <a:off x="4818888" y="3108960"/>
+          <p:cNvPr id="27" name="Text 25"/>
+          <p:cNvSpPr txBox="1"/>
+          <p:nvPr/>
+        </p:nvSpPr>
+        <p:spPr>
+          <a:xfrm>
+            <a:off x="4864608" y="3108960"/>
             <a:ext cx="1051560" cy="352044"/>
           </a:xfrm>
           <a:prstGeom prst="rect">
@@ -10331,14 +10526,53 @@
       </p:sp>
       <p:sp>
         <p:nvSpPr>
-          <p:cNvPr id="23" name="Text 21"/>
+          <p:cNvPr id="28" name="Text 26"/>
           <p:cNvSpPr txBox="1"/>
           <p:nvPr/>
         </p:nvSpPr>
         <p:spPr>
           <a:xfrm>
             <a:off x="658368" y="3461004"/>
-            <a:ext cx="1938528" cy="352044"/>
+            <a:ext cx="310896" cy="352044"/>
+          </a:xfrm>
+          <a:prstGeom prst="rect">
+            <a:avLst/>
+          </a:prstGeom>
+          <a:noFill/>
+          <a:ln/>
+        </p:spPr>
+        <p:txBody>
+          <a:bodyPr wrap="square" lIns="0" tIns="0" rIns="0" bIns="0" rtlCol="0" anchor="ctr"/>
+          <a:lstStyle/>
+          <a:p>
+            <a:pPr algn="r" indent="0" marL="0">
+              <a:buNone/>
+            </a:pPr>
+            <a:r>
+              <a:rPr lang="en-US" sz="1200" dirty="0">
+                <a:solidFill>
+                  <a:srgbClr val="9AA3AD"/>
+                </a:solidFill>
+                <a:latin typeface="Inter" pitchFamily="34" charset="0"/>
+                <a:ea typeface="Inter" pitchFamily="34" charset="-122"/>
+                <a:cs typeface="Inter" pitchFamily="34" charset="-120"/>
+              </a:rPr>
+              <a:t>6</a:t>
+            </a:r>
+            <a:endParaRPr lang="en-US" sz="1200" dirty="0"/>
+          </a:p>
+        </p:txBody>
+      </p:sp>
+      <p:sp>
+        <p:nvSpPr>
+          <p:cNvPr id="29" name="Text 27"/>
+          <p:cNvSpPr txBox="1"/>
+          <p:nvPr/>
+        </p:nvSpPr>
+        <p:spPr>
+          <a:xfrm>
+            <a:off x="1014984" y="3461004"/>
+            <a:ext cx="2011680" cy="352044"/>
           </a:xfrm>
           <a:prstGeom prst="rect">
             <a:avLst/>
@@ -10370,14 +10604,14 @@
       </p:sp>
       <p:sp>
         <p:nvSpPr>
-          <p:cNvPr id="24" name="Shape 22"/>
-          <p:cNvSpPr/>
-          <p:nvPr/>
-        </p:nvSpPr>
-        <p:spPr>
-          <a:xfrm>
-            <a:off x="2670048" y="3540214"/>
-            <a:ext cx="1395984" cy="193624"/>
+          <p:cNvPr id="30" name="Shape 28"/>
+          <p:cNvSpPr/>
+          <p:nvPr/>
+        </p:nvSpPr>
+        <p:spPr>
+          <a:xfrm>
+            <a:off x="3099816" y="3540214"/>
+            <a:ext cx="1139952" cy="193624"/>
           </a:xfrm>
           <a:prstGeom prst="rect">
             <a:avLst/>
@@ -10390,13 +10624,13 @@
       </p:sp>
       <p:sp>
         <p:nvSpPr>
-          <p:cNvPr id="25" name="Text 23"/>
-          <p:cNvSpPr txBox="1"/>
-          <p:nvPr/>
-        </p:nvSpPr>
-        <p:spPr>
-          <a:xfrm>
-            <a:off x="4818888" y="3461004"/>
+          <p:cNvPr id="31" name="Text 29"/>
+          <p:cNvSpPr txBox="1"/>
+          <p:nvPr/>
+        </p:nvSpPr>
+        <p:spPr>
+          <a:xfrm>
+            <a:off x="4864608" y="3461004"/>
             <a:ext cx="1051560" cy="352044"/>
           </a:xfrm>
           <a:prstGeom prst="rect">
@@ -10429,14 +10663,53 @@
       </p:sp>
       <p:sp>
         <p:nvSpPr>
-          <p:cNvPr id="26" name="Text 24"/>
+          <p:cNvPr id="32" name="Text 30"/>
           <p:cNvSpPr txBox="1"/>
           <p:nvPr/>
         </p:nvSpPr>
         <p:spPr>
           <a:xfrm>
             <a:off x="658368" y="3813048"/>
-            <a:ext cx="1938528" cy="352044"/>
+            <a:ext cx="310896" cy="352044"/>
+          </a:xfrm>
+          <a:prstGeom prst="rect">
+            <a:avLst/>
+          </a:prstGeom>
+          <a:noFill/>
+          <a:ln/>
+        </p:spPr>
+        <p:txBody>
+          <a:bodyPr wrap="square" lIns="0" tIns="0" rIns="0" bIns="0" rtlCol="0" anchor="ctr"/>
+          <a:lstStyle/>
+          <a:p>
+            <a:pPr algn="r" indent="0" marL="0">
+              <a:buNone/>
+            </a:pPr>
+            <a:r>
+              <a:rPr lang="en-US" sz="1200" dirty="0">
+                <a:solidFill>
+                  <a:srgbClr val="9AA3AD"/>
+                </a:solidFill>
+                <a:latin typeface="Inter" pitchFamily="34" charset="0"/>
+                <a:ea typeface="Inter" pitchFamily="34" charset="-122"/>
+                <a:cs typeface="Inter" pitchFamily="34" charset="-120"/>
+              </a:rPr>
+              <a:t>7</a:t>
+            </a:r>
+            <a:endParaRPr lang="en-US" sz="1200" dirty="0"/>
+          </a:p>
+        </p:txBody>
+      </p:sp>
+      <p:sp>
+        <p:nvSpPr>
+          <p:cNvPr id="33" name="Text 31"/>
+          <p:cNvSpPr txBox="1"/>
+          <p:nvPr/>
+        </p:nvSpPr>
+        <p:spPr>
+          <a:xfrm>
+            <a:off x="1014984" y="3813048"/>
+            <a:ext cx="2011680" cy="352044"/>
           </a:xfrm>
           <a:prstGeom prst="rect">
             <a:avLst/>
@@ -10468,14 +10741,14 @@
       </p:sp>
       <p:sp>
         <p:nvSpPr>
-          <p:cNvPr id="27" name="Shape 25"/>
-          <p:cNvSpPr/>
-          <p:nvPr/>
-        </p:nvSpPr>
-        <p:spPr>
-          <a:xfrm>
-            <a:off x="2670048" y="3892258"/>
-            <a:ext cx="1395984" cy="193624"/>
+          <p:cNvPr id="34" name="Shape 32"/>
+          <p:cNvSpPr/>
+          <p:nvPr/>
+        </p:nvSpPr>
+        <p:spPr>
+          <a:xfrm>
+            <a:off x="3099816" y="3892258"/>
+            <a:ext cx="1139952" cy="193624"/>
           </a:xfrm>
           <a:prstGeom prst="rect">
             <a:avLst/>
@@ -10488,13 +10761,13 @@
       </p:sp>
       <p:sp>
         <p:nvSpPr>
-          <p:cNvPr id="28" name="Text 26"/>
-          <p:cNvSpPr txBox="1"/>
-          <p:nvPr/>
-        </p:nvSpPr>
-        <p:spPr>
-          <a:xfrm>
-            <a:off x="4818888" y="3813048"/>
+          <p:cNvPr id="35" name="Text 33"/>
+          <p:cNvSpPr txBox="1"/>
+          <p:nvPr/>
+        </p:nvSpPr>
+        <p:spPr>
+          <a:xfrm>
+            <a:off x="4864608" y="3813048"/>
             <a:ext cx="1051560" cy="352044"/>
           </a:xfrm>
           <a:prstGeom prst="rect">
@@ -10527,14 +10800,53 @@
       </p:sp>
       <p:sp>
         <p:nvSpPr>
-          <p:cNvPr id="29" name="Text 27"/>
+          <p:cNvPr id="36" name="Text 34"/>
           <p:cNvSpPr txBox="1"/>
           <p:nvPr/>
         </p:nvSpPr>
         <p:spPr>
           <a:xfrm>
             <a:off x="658368" y="4165092"/>
-            <a:ext cx="1938528" cy="352044"/>
+            <a:ext cx="310896" cy="352044"/>
+          </a:xfrm>
+          <a:prstGeom prst="rect">
+            <a:avLst/>
+          </a:prstGeom>
+          <a:noFill/>
+          <a:ln/>
+        </p:spPr>
+        <p:txBody>
+          <a:bodyPr wrap="square" lIns="0" tIns="0" rIns="0" bIns="0" rtlCol="0" anchor="ctr"/>
+          <a:lstStyle/>
+          <a:p>
+            <a:pPr algn="r" indent="0" marL="0">
+              <a:buNone/>
+            </a:pPr>
+            <a:r>
+              <a:rPr lang="en-US" sz="1200" dirty="0">
+                <a:solidFill>
+                  <a:srgbClr val="9AA3AD"/>
+                </a:solidFill>
+                <a:latin typeface="Inter" pitchFamily="34" charset="0"/>
+                <a:ea typeface="Inter" pitchFamily="34" charset="-122"/>
+                <a:cs typeface="Inter" pitchFamily="34" charset="-120"/>
+              </a:rPr>
+              <a:t>8</a:t>
+            </a:r>
+            <a:endParaRPr lang="en-US" sz="1200" dirty="0"/>
+          </a:p>
+        </p:txBody>
+      </p:sp>
+      <p:sp>
+        <p:nvSpPr>
+          <p:cNvPr id="37" name="Text 35"/>
+          <p:cNvSpPr txBox="1"/>
+          <p:nvPr/>
+        </p:nvSpPr>
+        <p:spPr>
+          <a:xfrm>
+            <a:off x="1014984" y="4165092"/>
+            <a:ext cx="2011680" cy="352044"/>
           </a:xfrm>
           <a:prstGeom prst="rect">
             <a:avLst/>
@@ -10566,14 +10878,14 @@
       </p:sp>
       <p:sp>
         <p:nvSpPr>
-          <p:cNvPr id="30" name="Shape 28"/>
-          <p:cNvSpPr/>
-          <p:nvPr/>
-        </p:nvSpPr>
-        <p:spPr>
-          <a:xfrm>
-            <a:off x="2670048" y="4244302"/>
-            <a:ext cx="1163320" cy="193624"/>
+          <p:cNvPr id="38" name="Shape 36"/>
+          <p:cNvSpPr/>
+          <p:nvPr/>
+        </p:nvSpPr>
+        <p:spPr>
+          <a:xfrm>
+            <a:off x="3099816" y="4244302"/>
+            <a:ext cx="949960" cy="193624"/>
           </a:xfrm>
           <a:prstGeom prst="rect">
             <a:avLst/>
@@ -10586,13 +10898,13 @@
       </p:sp>
       <p:sp>
         <p:nvSpPr>
-          <p:cNvPr id="31" name="Text 29"/>
-          <p:cNvSpPr txBox="1"/>
-          <p:nvPr/>
-        </p:nvSpPr>
-        <p:spPr>
-          <a:xfrm>
-            <a:off x="4818888" y="4165092"/>
+          <p:cNvPr id="39" name="Text 37"/>
+          <p:cNvSpPr txBox="1"/>
+          <p:nvPr/>
+        </p:nvSpPr>
+        <p:spPr>
+          <a:xfrm>
+            <a:off x="4864608" y="4165092"/>
             <a:ext cx="1051560" cy="352044"/>
           </a:xfrm>
           <a:prstGeom prst="rect">
@@ -10625,14 +10937,53 @@
       </p:sp>
       <p:sp>
         <p:nvSpPr>
-          <p:cNvPr id="32" name="Text 30"/>
+          <p:cNvPr id="40" name="Text 38"/>
           <p:cNvSpPr txBox="1"/>
           <p:nvPr/>
         </p:nvSpPr>
         <p:spPr>
           <a:xfrm>
             <a:off x="658368" y="4517136"/>
-            <a:ext cx="1938528" cy="352044"/>
+            <a:ext cx="310896" cy="352044"/>
+          </a:xfrm>
+          <a:prstGeom prst="rect">
+            <a:avLst/>
+          </a:prstGeom>
+          <a:noFill/>
+          <a:ln/>
+        </p:spPr>
+        <p:txBody>
+          <a:bodyPr wrap="square" lIns="0" tIns="0" rIns="0" bIns="0" rtlCol="0" anchor="ctr"/>
+          <a:lstStyle/>
+          <a:p>
+            <a:pPr algn="r" indent="0" marL="0">
+              <a:buNone/>
+            </a:pPr>
+            <a:r>
+              <a:rPr lang="en-US" sz="1200" dirty="0">
+                <a:solidFill>
+                  <a:srgbClr val="9AA3AD"/>
+                </a:solidFill>
+                <a:latin typeface="Inter" pitchFamily="34" charset="0"/>
+                <a:ea typeface="Inter" pitchFamily="34" charset="-122"/>
+                <a:cs typeface="Inter" pitchFamily="34" charset="-120"/>
+              </a:rPr>
+              <a:t>9</a:t>
+            </a:r>
+            <a:endParaRPr lang="en-US" sz="1200" dirty="0"/>
+          </a:p>
+        </p:txBody>
+      </p:sp>
+      <p:sp>
+        <p:nvSpPr>
+          <p:cNvPr id="41" name="Text 39"/>
+          <p:cNvSpPr txBox="1"/>
+          <p:nvPr/>
+        </p:nvSpPr>
+        <p:spPr>
+          <a:xfrm>
+            <a:off x="1014984" y="4517136"/>
+            <a:ext cx="2011680" cy="352044"/>
           </a:xfrm>
           <a:prstGeom prst="rect">
             <a:avLst/>
@@ -10664,14 +11015,14 @@
       </p:sp>
       <p:sp>
         <p:nvSpPr>
-          <p:cNvPr id="33" name="Shape 31"/>
-          <p:cNvSpPr/>
-          <p:nvPr/>
-        </p:nvSpPr>
-        <p:spPr>
-          <a:xfrm>
-            <a:off x="2670048" y="4596346"/>
-            <a:ext cx="930656" cy="193624"/>
+          <p:cNvPr id="42" name="Shape 40"/>
+          <p:cNvSpPr/>
+          <p:nvPr/>
+        </p:nvSpPr>
+        <p:spPr>
+          <a:xfrm>
+            <a:off x="3099816" y="4596346"/>
+            <a:ext cx="759968" cy="193624"/>
           </a:xfrm>
           <a:prstGeom prst="rect">
             <a:avLst/>
@@ -10684,13 +11035,13 @@
       </p:sp>
       <p:sp>
         <p:nvSpPr>
-          <p:cNvPr id="34" name="Text 32"/>
-          <p:cNvSpPr txBox="1"/>
-          <p:nvPr/>
-        </p:nvSpPr>
-        <p:spPr>
-          <a:xfrm>
-            <a:off x="4818888" y="4517136"/>
+          <p:cNvPr id="43" name="Text 41"/>
+          <p:cNvSpPr txBox="1"/>
+          <p:nvPr/>
+        </p:nvSpPr>
+        <p:spPr>
+          <a:xfrm>
+            <a:off x="4864608" y="4517136"/>
             <a:ext cx="1051560" cy="352044"/>
           </a:xfrm>
           <a:prstGeom prst="rect">
@@ -10723,14 +11074,53 @@
       </p:sp>
       <p:sp>
         <p:nvSpPr>
-          <p:cNvPr id="35" name="Text 33"/>
+          <p:cNvPr id="44" name="Text 42"/>
           <p:cNvSpPr txBox="1"/>
           <p:nvPr/>
         </p:nvSpPr>
         <p:spPr>
           <a:xfrm>
             <a:off x="658368" y="4869180"/>
-            <a:ext cx="1938528" cy="352044"/>
+            <a:ext cx="310896" cy="352044"/>
+          </a:xfrm>
+          <a:prstGeom prst="rect">
+            <a:avLst/>
+          </a:prstGeom>
+          <a:noFill/>
+          <a:ln/>
+        </p:spPr>
+        <p:txBody>
+          <a:bodyPr wrap="square" lIns="0" tIns="0" rIns="0" bIns="0" rtlCol="0" anchor="ctr"/>
+          <a:lstStyle/>
+          <a:p>
+            <a:pPr algn="r" indent="0" marL="0">
+              <a:buNone/>
+            </a:pPr>
+            <a:r>
+              <a:rPr lang="en-US" sz="1200" dirty="0">
+                <a:solidFill>
+                  <a:srgbClr val="9AA3AD"/>
+                </a:solidFill>
+                <a:latin typeface="Inter" pitchFamily="34" charset="0"/>
+                <a:ea typeface="Inter" pitchFamily="34" charset="-122"/>
+                <a:cs typeface="Inter" pitchFamily="34" charset="-120"/>
+              </a:rPr>
+              <a:t>10</a:t>
+            </a:r>
+            <a:endParaRPr lang="en-US" sz="1200" dirty="0"/>
+          </a:p>
+        </p:txBody>
+      </p:sp>
+      <p:sp>
+        <p:nvSpPr>
+          <p:cNvPr id="45" name="Text 43"/>
+          <p:cNvSpPr txBox="1"/>
+          <p:nvPr/>
+        </p:nvSpPr>
+        <p:spPr>
+          <a:xfrm>
+            <a:off x="1014984" y="4869180"/>
+            <a:ext cx="2011680" cy="352044"/>
           </a:xfrm>
           <a:prstGeom prst="rect">
             <a:avLst/>
@@ -10762,14 +11152,14 @@
       </p:sp>
       <p:sp>
         <p:nvSpPr>
-          <p:cNvPr id="36" name="Shape 34"/>
-          <p:cNvSpPr/>
-          <p:nvPr/>
-        </p:nvSpPr>
-        <p:spPr>
-          <a:xfrm>
-            <a:off x="2670048" y="4948390"/>
-            <a:ext cx="930656" cy="193624"/>
+          <p:cNvPr id="46" name="Shape 44"/>
+          <p:cNvSpPr/>
+          <p:nvPr/>
+        </p:nvSpPr>
+        <p:spPr>
+          <a:xfrm>
+            <a:off x="3099816" y="4948390"/>
+            <a:ext cx="759968" cy="193624"/>
           </a:xfrm>
           <a:prstGeom prst="rect">
             <a:avLst/>
@@ -10782,13 +11172,13 @@
       </p:sp>
       <p:sp>
         <p:nvSpPr>
-          <p:cNvPr id="37" name="Text 35"/>
-          <p:cNvSpPr txBox="1"/>
-          <p:nvPr/>
-        </p:nvSpPr>
-        <p:spPr>
-          <a:xfrm>
-            <a:off x="4818888" y="4869180"/>
+          <p:cNvPr id="47" name="Text 45"/>
+          <p:cNvSpPr txBox="1"/>
+          <p:nvPr/>
+        </p:nvSpPr>
+        <p:spPr>
+          <a:xfrm>
+            <a:off x="4864608" y="4869180"/>
             <a:ext cx="1051560" cy="352044"/>
           </a:xfrm>
           <a:prstGeom prst="rect">
@@ -10821,14 +11211,53 @@
       </p:sp>
       <p:sp>
         <p:nvSpPr>
-          <p:cNvPr id="38" name="Text 36"/>
+          <p:cNvPr id="48" name="Text 46"/>
           <p:cNvSpPr txBox="1"/>
           <p:nvPr/>
         </p:nvSpPr>
         <p:spPr>
           <a:xfrm>
             <a:off x="658368" y="5221224"/>
-            <a:ext cx="1938528" cy="352044"/>
+            <a:ext cx="310896" cy="352044"/>
+          </a:xfrm>
+          <a:prstGeom prst="rect">
+            <a:avLst/>
+          </a:prstGeom>
+          <a:noFill/>
+          <a:ln/>
+        </p:spPr>
+        <p:txBody>
+          <a:bodyPr wrap="square" lIns="0" tIns="0" rIns="0" bIns="0" rtlCol="0" anchor="ctr"/>
+          <a:lstStyle/>
+          <a:p>
+            <a:pPr algn="r" indent="0" marL="0">
+              <a:buNone/>
+            </a:pPr>
+            <a:r>
+              <a:rPr lang="en-US" sz="1200" dirty="0">
+                <a:solidFill>
+                  <a:srgbClr val="9AA3AD"/>
+                </a:solidFill>
+                <a:latin typeface="Inter" pitchFamily="34" charset="0"/>
+                <a:ea typeface="Inter" pitchFamily="34" charset="-122"/>
+                <a:cs typeface="Inter" pitchFamily="34" charset="-120"/>
+              </a:rPr>
+              <a:t>11</a:t>
+            </a:r>
+            <a:endParaRPr lang="en-US" sz="1200" dirty="0"/>
+          </a:p>
+        </p:txBody>
+      </p:sp>
+      <p:sp>
+        <p:nvSpPr>
+          <p:cNvPr id="49" name="Text 47"/>
+          <p:cNvSpPr txBox="1"/>
+          <p:nvPr/>
+        </p:nvSpPr>
+        <p:spPr>
+          <a:xfrm>
+            <a:off x="1014984" y="5221224"/>
+            <a:ext cx="2011680" cy="352044"/>
           </a:xfrm>
           <a:prstGeom prst="rect">
             <a:avLst/>
@@ -10860,14 +11289,14 @@
       </p:sp>
       <p:sp>
         <p:nvSpPr>
-          <p:cNvPr id="39" name="Shape 37"/>
-          <p:cNvSpPr/>
-          <p:nvPr/>
-        </p:nvSpPr>
-        <p:spPr>
-          <a:xfrm>
-            <a:off x="2670048" y="5300434"/>
-            <a:ext cx="930656" cy="193624"/>
+          <p:cNvPr id="50" name="Shape 48"/>
+          <p:cNvSpPr/>
+          <p:nvPr/>
+        </p:nvSpPr>
+        <p:spPr>
+          <a:xfrm>
+            <a:off x="3099816" y="5300434"/>
+            <a:ext cx="759968" cy="193624"/>
           </a:xfrm>
           <a:prstGeom prst="rect">
             <a:avLst/>
@@ -10880,13 +11309,13 @@
       </p:sp>
       <p:sp>
         <p:nvSpPr>
-          <p:cNvPr id="40" name="Text 38"/>
-          <p:cNvSpPr txBox="1"/>
-          <p:nvPr/>
-        </p:nvSpPr>
-        <p:spPr>
-          <a:xfrm>
-            <a:off x="4818888" y="5221224"/>
+          <p:cNvPr id="51" name="Text 49"/>
+          <p:cNvSpPr txBox="1"/>
+          <p:nvPr/>
+        </p:nvSpPr>
+        <p:spPr>
+          <a:xfrm>
+            <a:off x="4864608" y="5221224"/>
             <a:ext cx="1051560" cy="352044"/>
           </a:xfrm>
           <a:prstGeom prst="rect">
@@ -10919,14 +11348,53 @@
       </p:sp>
       <p:sp>
         <p:nvSpPr>
-          <p:cNvPr id="41" name="Text 39"/>
+          <p:cNvPr id="52" name="Text 50"/>
           <p:cNvSpPr txBox="1"/>
           <p:nvPr/>
         </p:nvSpPr>
         <p:spPr>
           <a:xfrm>
             <a:off x="658368" y="5573268"/>
-            <a:ext cx="1938528" cy="352044"/>
+            <a:ext cx="310896" cy="352044"/>
+          </a:xfrm>
+          <a:prstGeom prst="rect">
+            <a:avLst/>
+          </a:prstGeom>
+          <a:noFill/>
+          <a:ln/>
+        </p:spPr>
+        <p:txBody>
+          <a:bodyPr wrap="square" lIns="0" tIns="0" rIns="0" bIns="0" rtlCol="0" anchor="ctr"/>
+          <a:lstStyle/>
+          <a:p>
+            <a:pPr algn="r" indent="0" marL="0">
+              <a:buNone/>
+            </a:pPr>
+            <a:r>
+              <a:rPr lang="en-US" sz="1200" dirty="0">
+                <a:solidFill>
+                  <a:srgbClr val="9AA3AD"/>
+                </a:solidFill>
+                <a:latin typeface="Inter" pitchFamily="34" charset="0"/>
+                <a:ea typeface="Inter" pitchFamily="34" charset="-122"/>
+                <a:cs typeface="Inter" pitchFamily="34" charset="-120"/>
+              </a:rPr>
+              <a:t>12</a:t>
+            </a:r>
+            <a:endParaRPr lang="en-US" sz="1200" dirty="0"/>
+          </a:p>
+        </p:txBody>
+      </p:sp>
+      <p:sp>
+        <p:nvSpPr>
+          <p:cNvPr id="53" name="Text 51"/>
+          <p:cNvSpPr txBox="1"/>
+          <p:nvPr/>
+        </p:nvSpPr>
+        <p:spPr>
+          <a:xfrm>
+            <a:off x="1014984" y="5573268"/>
+            <a:ext cx="2011680" cy="352044"/>
           </a:xfrm>
           <a:prstGeom prst="rect">
             <a:avLst/>
@@ -10958,14 +11426,14 @@
       </p:sp>
       <p:sp>
         <p:nvSpPr>
-          <p:cNvPr id="42" name="Shape 40"/>
-          <p:cNvSpPr/>
-          <p:nvPr/>
-        </p:nvSpPr>
-        <p:spPr>
-          <a:xfrm>
-            <a:off x="2670048" y="5652478"/>
-            <a:ext cx="930656" cy="193624"/>
+          <p:cNvPr id="54" name="Shape 52"/>
+          <p:cNvSpPr/>
+          <p:nvPr/>
+        </p:nvSpPr>
+        <p:spPr>
+          <a:xfrm>
+            <a:off x="3099816" y="5652478"/>
+            <a:ext cx="759968" cy="193624"/>
           </a:xfrm>
           <a:prstGeom prst="rect">
             <a:avLst/>
@@ -10978,13 +11446,13 @@
       </p:sp>
       <p:sp>
         <p:nvSpPr>
-          <p:cNvPr id="43" name="Text 41"/>
-          <p:cNvSpPr txBox="1"/>
-          <p:nvPr/>
-        </p:nvSpPr>
-        <p:spPr>
-          <a:xfrm>
-            <a:off x="4818888" y="5573268"/>
+          <p:cNvPr id="55" name="Text 53"/>
+          <p:cNvSpPr txBox="1"/>
+          <p:nvPr/>
+        </p:nvSpPr>
+        <p:spPr>
+          <a:xfrm>
+            <a:off x="4864608" y="5573268"/>
             <a:ext cx="1051560" cy="352044"/>
           </a:xfrm>
           <a:prstGeom prst="rect">
@@ -11017,14 +11485,53 @@
       </p:sp>
       <p:sp>
         <p:nvSpPr>
-          <p:cNvPr id="44" name="Text 42"/>
+          <p:cNvPr id="56" name="Text 54"/>
           <p:cNvSpPr txBox="1"/>
           <p:nvPr/>
         </p:nvSpPr>
         <p:spPr>
           <a:xfrm>
             <a:off x="6208776" y="1700784"/>
-            <a:ext cx="1938528" cy="352044"/>
+            <a:ext cx="310896" cy="352044"/>
+          </a:xfrm>
+          <a:prstGeom prst="rect">
+            <a:avLst/>
+          </a:prstGeom>
+          <a:noFill/>
+          <a:ln/>
+        </p:spPr>
+        <p:txBody>
+          <a:bodyPr wrap="square" lIns="0" tIns="0" rIns="0" bIns="0" rtlCol="0" anchor="ctr"/>
+          <a:lstStyle/>
+          <a:p>
+            <a:pPr algn="r" indent="0" marL="0">
+              <a:buNone/>
+            </a:pPr>
+            <a:r>
+              <a:rPr lang="en-US" sz="1200" dirty="0">
+                <a:solidFill>
+                  <a:srgbClr val="9AA3AD"/>
+                </a:solidFill>
+                <a:latin typeface="Inter" pitchFamily="34" charset="0"/>
+                <a:ea typeface="Inter" pitchFamily="34" charset="-122"/>
+                <a:cs typeface="Inter" pitchFamily="34" charset="-120"/>
+              </a:rPr>
+              <a:t>13</a:t>
+            </a:r>
+            <a:endParaRPr lang="en-US" sz="1200" dirty="0"/>
+          </a:p>
+        </p:txBody>
+      </p:sp>
+      <p:sp>
+        <p:nvSpPr>
+          <p:cNvPr id="57" name="Text 55"/>
+          <p:cNvSpPr txBox="1"/>
+          <p:nvPr/>
+        </p:nvSpPr>
+        <p:spPr>
+          <a:xfrm>
+            <a:off x="6565392" y="1700784"/>
+            <a:ext cx="2011680" cy="352044"/>
           </a:xfrm>
           <a:prstGeom prst="rect">
             <a:avLst/>
@@ -11056,14 +11563,14 @@
       </p:sp>
       <p:sp>
         <p:nvSpPr>
-          <p:cNvPr id="45" name="Shape 43"/>
-          <p:cNvSpPr/>
-          <p:nvPr/>
-        </p:nvSpPr>
-        <p:spPr>
-          <a:xfrm>
-            <a:off x="8220456" y="1779994"/>
-            <a:ext cx="930656" cy="193624"/>
+          <p:cNvPr id="58" name="Shape 56"/>
+          <p:cNvSpPr/>
+          <p:nvPr/>
+        </p:nvSpPr>
+        <p:spPr>
+          <a:xfrm>
+            <a:off x="8650224" y="1779994"/>
+            <a:ext cx="759968" cy="193624"/>
           </a:xfrm>
           <a:prstGeom prst="rect">
             <a:avLst/>
@@ -11076,13 +11583,13 @@
       </p:sp>
       <p:sp>
         <p:nvSpPr>
-          <p:cNvPr id="46" name="Text 44"/>
-          <p:cNvSpPr txBox="1"/>
-          <p:nvPr/>
-        </p:nvSpPr>
-        <p:spPr>
-          <a:xfrm>
-            <a:off x="10369296" y="1700784"/>
+          <p:cNvPr id="59" name="Text 57"/>
+          <p:cNvSpPr txBox="1"/>
+          <p:nvPr/>
+        </p:nvSpPr>
+        <p:spPr>
+          <a:xfrm>
+            <a:off x="10415016" y="1700784"/>
             <a:ext cx="1051560" cy="352044"/>
           </a:xfrm>
           <a:prstGeom prst="rect">
@@ -11115,14 +11622,53 @@
       </p:sp>
       <p:sp>
         <p:nvSpPr>
-          <p:cNvPr id="47" name="Text 45"/>
+          <p:cNvPr id="60" name="Text 58"/>
           <p:cNvSpPr txBox="1"/>
           <p:nvPr/>
         </p:nvSpPr>
         <p:spPr>
           <a:xfrm>
             <a:off x="6208776" y="2052828"/>
-            <a:ext cx="1938528" cy="352044"/>
+            <a:ext cx="310896" cy="352044"/>
+          </a:xfrm>
+          <a:prstGeom prst="rect">
+            <a:avLst/>
+          </a:prstGeom>
+          <a:noFill/>
+          <a:ln/>
+        </p:spPr>
+        <p:txBody>
+          <a:bodyPr wrap="square" lIns="0" tIns="0" rIns="0" bIns="0" rtlCol="0" anchor="ctr"/>
+          <a:lstStyle/>
+          <a:p>
+            <a:pPr algn="r" indent="0" marL="0">
+              <a:buNone/>
+            </a:pPr>
+            <a:r>
+              <a:rPr lang="en-US" sz="1200" dirty="0">
+                <a:solidFill>
+                  <a:srgbClr val="9AA3AD"/>
+                </a:solidFill>
+                <a:latin typeface="Inter" pitchFamily="34" charset="0"/>
+                <a:ea typeface="Inter" pitchFamily="34" charset="-122"/>
+                <a:cs typeface="Inter" pitchFamily="34" charset="-120"/>
+              </a:rPr>
+              <a:t>14</a:t>
+            </a:r>
+            <a:endParaRPr lang="en-US" sz="1200" dirty="0"/>
+          </a:p>
+        </p:txBody>
+      </p:sp>
+      <p:sp>
+        <p:nvSpPr>
+          <p:cNvPr id="61" name="Text 59"/>
+          <p:cNvSpPr txBox="1"/>
+          <p:nvPr/>
+        </p:nvSpPr>
+        <p:spPr>
+          <a:xfrm>
+            <a:off x="6565392" y="2052828"/>
+            <a:ext cx="2011680" cy="352044"/>
           </a:xfrm>
           <a:prstGeom prst="rect">
             <a:avLst/>
@@ -11154,14 +11700,14 @@
       </p:sp>
       <p:sp>
         <p:nvSpPr>
-          <p:cNvPr id="48" name="Shape 46"/>
-          <p:cNvSpPr/>
-          <p:nvPr/>
-        </p:nvSpPr>
-        <p:spPr>
-          <a:xfrm>
-            <a:off x="8220456" y="2132038"/>
-            <a:ext cx="930656" cy="193624"/>
+          <p:cNvPr id="62" name="Shape 60"/>
+          <p:cNvSpPr/>
+          <p:nvPr/>
+        </p:nvSpPr>
+        <p:spPr>
+          <a:xfrm>
+            <a:off x="8650224" y="2132038"/>
+            <a:ext cx="759968" cy="193624"/>
           </a:xfrm>
           <a:prstGeom prst="rect">
             <a:avLst/>
@@ -11174,13 +11720,13 @@
       </p:sp>
       <p:sp>
         <p:nvSpPr>
-          <p:cNvPr id="49" name="Text 47"/>
-          <p:cNvSpPr txBox="1"/>
-          <p:nvPr/>
-        </p:nvSpPr>
-        <p:spPr>
-          <a:xfrm>
-            <a:off x="10369296" y="2052828"/>
+          <p:cNvPr id="63" name="Text 61"/>
+          <p:cNvSpPr txBox="1"/>
+          <p:nvPr/>
+        </p:nvSpPr>
+        <p:spPr>
+          <a:xfrm>
+            <a:off x="10415016" y="2052828"/>
             <a:ext cx="1051560" cy="352044"/>
           </a:xfrm>
           <a:prstGeom prst="rect">
@@ -11213,14 +11759,53 @@
       </p:sp>
       <p:sp>
         <p:nvSpPr>
-          <p:cNvPr id="50" name="Text 48"/>
+          <p:cNvPr id="64" name="Text 62"/>
           <p:cNvSpPr txBox="1"/>
           <p:nvPr/>
         </p:nvSpPr>
         <p:spPr>
           <a:xfrm>
             <a:off x="6208776" y="2404872"/>
-            <a:ext cx="1938528" cy="352044"/>
+            <a:ext cx="310896" cy="352044"/>
+          </a:xfrm>
+          <a:prstGeom prst="rect">
+            <a:avLst/>
+          </a:prstGeom>
+          <a:noFill/>
+          <a:ln/>
+        </p:spPr>
+        <p:txBody>
+          <a:bodyPr wrap="square" lIns="0" tIns="0" rIns="0" bIns="0" rtlCol="0" anchor="ctr"/>
+          <a:lstStyle/>
+          <a:p>
+            <a:pPr algn="r" indent="0" marL="0">
+              <a:buNone/>
+            </a:pPr>
+            <a:r>
+              <a:rPr lang="en-US" sz="1200" dirty="0">
+                <a:solidFill>
+                  <a:srgbClr val="9AA3AD"/>
+                </a:solidFill>
+                <a:latin typeface="Inter" pitchFamily="34" charset="0"/>
+                <a:ea typeface="Inter" pitchFamily="34" charset="-122"/>
+                <a:cs typeface="Inter" pitchFamily="34" charset="-120"/>
+              </a:rPr>
+              <a:t>15</a:t>
+            </a:r>
+            <a:endParaRPr lang="en-US" sz="1200" dirty="0"/>
+          </a:p>
+        </p:txBody>
+      </p:sp>
+      <p:sp>
+        <p:nvSpPr>
+          <p:cNvPr id="65" name="Text 63"/>
+          <p:cNvSpPr txBox="1"/>
+          <p:nvPr/>
+        </p:nvSpPr>
+        <p:spPr>
+          <a:xfrm>
+            <a:off x="6565392" y="2404872"/>
+            <a:ext cx="2011680" cy="352044"/>
           </a:xfrm>
           <a:prstGeom prst="rect">
             <a:avLst/>
@@ -11252,14 +11837,14 @@
       </p:sp>
       <p:sp>
         <p:nvSpPr>
-          <p:cNvPr id="51" name="Shape 49"/>
-          <p:cNvSpPr/>
-          <p:nvPr/>
-        </p:nvSpPr>
-        <p:spPr>
-          <a:xfrm>
-            <a:off x="8220456" y="2484082"/>
-            <a:ext cx="697992" cy="193624"/>
+          <p:cNvPr id="66" name="Shape 64"/>
+          <p:cNvSpPr/>
+          <p:nvPr/>
+        </p:nvSpPr>
+        <p:spPr>
+          <a:xfrm>
+            <a:off x="8650224" y="2484082"/>
+            <a:ext cx="569976" cy="193624"/>
           </a:xfrm>
           <a:prstGeom prst="rect">
             <a:avLst/>
@@ -11272,13 +11857,13 @@
       </p:sp>
       <p:sp>
         <p:nvSpPr>
-          <p:cNvPr id="52" name="Text 50"/>
-          <p:cNvSpPr txBox="1"/>
-          <p:nvPr/>
-        </p:nvSpPr>
-        <p:spPr>
-          <a:xfrm>
-            <a:off x="10369296" y="2404872"/>
+          <p:cNvPr id="67" name="Text 65"/>
+          <p:cNvSpPr txBox="1"/>
+          <p:nvPr/>
+        </p:nvSpPr>
+        <p:spPr>
+          <a:xfrm>
+            <a:off x="10415016" y="2404872"/>
             <a:ext cx="1051560" cy="352044"/>
           </a:xfrm>
           <a:prstGeom prst="rect">
@@ -11311,14 +11896,53 @@
       </p:sp>
       <p:sp>
         <p:nvSpPr>
-          <p:cNvPr id="53" name="Text 51"/>
+          <p:cNvPr id="68" name="Text 66"/>
           <p:cNvSpPr txBox="1"/>
           <p:nvPr/>
         </p:nvSpPr>
         <p:spPr>
           <a:xfrm>
             <a:off x="6208776" y="2756916"/>
-            <a:ext cx="1938528" cy="352044"/>
+            <a:ext cx="310896" cy="352044"/>
+          </a:xfrm>
+          <a:prstGeom prst="rect">
+            <a:avLst/>
+          </a:prstGeom>
+          <a:noFill/>
+          <a:ln/>
+        </p:spPr>
+        <p:txBody>
+          <a:bodyPr wrap="square" lIns="0" tIns="0" rIns="0" bIns="0" rtlCol="0" anchor="ctr"/>
+          <a:lstStyle/>
+          <a:p>
+            <a:pPr algn="r" indent="0" marL="0">
+              <a:buNone/>
+            </a:pPr>
+            <a:r>
+              <a:rPr lang="en-US" sz="1200" dirty="0">
+                <a:solidFill>
+                  <a:srgbClr val="9AA3AD"/>
+                </a:solidFill>
+                <a:latin typeface="Inter" pitchFamily="34" charset="0"/>
+                <a:ea typeface="Inter" pitchFamily="34" charset="-122"/>
+                <a:cs typeface="Inter" pitchFamily="34" charset="-120"/>
+              </a:rPr>
+              <a:t>16</a:t>
+            </a:r>
+            <a:endParaRPr lang="en-US" sz="1200" dirty="0"/>
+          </a:p>
+        </p:txBody>
+      </p:sp>
+      <p:sp>
+        <p:nvSpPr>
+          <p:cNvPr id="69" name="Text 67"/>
+          <p:cNvSpPr txBox="1"/>
+          <p:nvPr/>
+        </p:nvSpPr>
+        <p:spPr>
+          <a:xfrm>
+            <a:off x="6565392" y="2756916"/>
+            <a:ext cx="2011680" cy="352044"/>
           </a:xfrm>
           <a:prstGeom prst="rect">
             <a:avLst/>
@@ -11350,14 +11974,14 @@
       </p:sp>
       <p:sp>
         <p:nvSpPr>
-          <p:cNvPr id="54" name="Shape 52"/>
-          <p:cNvSpPr/>
-          <p:nvPr/>
-        </p:nvSpPr>
-        <p:spPr>
-          <a:xfrm>
-            <a:off x="8220456" y="2836126"/>
-            <a:ext cx="465328" cy="193624"/>
+          <p:cNvPr id="70" name="Shape 68"/>
+          <p:cNvSpPr/>
+          <p:nvPr/>
+        </p:nvSpPr>
+        <p:spPr>
+          <a:xfrm>
+            <a:off x="8650224" y="2836126"/>
+            <a:ext cx="379984" cy="193624"/>
           </a:xfrm>
           <a:prstGeom prst="rect">
             <a:avLst/>
@@ -11370,13 +11994,13 @@
       </p:sp>
       <p:sp>
         <p:nvSpPr>
-          <p:cNvPr id="55" name="Text 53"/>
-          <p:cNvSpPr txBox="1"/>
-          <p:nvPr/>
-        </p:nvSpPr>
-        <p:spPr>
-          <a:xfrm>
-            <a:off x="10369296" y="2756916"/>
+          <p:cNvPr id="71" name="Text 69"/>
+          <p:cNvSpPr txBox="1"/>
+          <p:nvPr/>
+        </p:nvSpPr>
+        <p:spPr>
+          <a:xfrm>
+            <a:off x="10415016" y="2756916"/>
             <a:ext cx="1051560" cy="352044"/>
           </a:xfrm>
           <a:prstGeom prst="rect">
@@ -11409,14 +12033,53 @@
       </p:sp>
       <p:sp>
         <p:nvSpPr>
-          <p:cNvPr id="56" name="Text 54"/>
+          <p:cNvPr id="72" name="Text 70"/>
           <p:cNvSpPr txBox="1"/>
           <p:nvPr/>
         </p:nvSpPr>
         <p:spPr>
           <a:xfrm>
             <a:off x="6208776" y="3108960"/>
-            <a:ext cx="1938528" cy="352044"/>
+            <a:ext cx="310896" cy="352044"/>
+          </a:xfrm>
+          <a:prstGeom prst="rect">
+            <a:avLst/>
+          </a:prstGeom>
+          <a:noFill/>
+          <a:ln/>
+        </p:spPr>
+        <p:txBody>
+          <a:bodyPr wrap="square" lIns="0" tIns="0" rIns="0" bIns="0" rtlCol="0" anchor="ctr"/>
+          <a:lstStyle/>
+          <a:p>
+            <a:pPr algn="r" indent="0" marL="0">
+              <a:buNone/>
+            </a:pPr>
+            <a:r>
+              <a:rPr lang="en-US" sz="1200" dirty="0">
+                <a:solidFill>
+                  <a:srgbClr val="9AA3AD"/>
+                </a:solidFill>
+                <a:latin typeface="Inter" pitchFamily="34" charset="0"/>
+                <a:ea typeface="Inter" pitchFamily="34" charset="-122"/>
+                <a:cs typeface="Inter" pitchFamily="34" charset="-120"/>
+              </a:rPr>
+              <a:t>17</a:t>
+            </a:r>
+            <a:endParaRPr lang="en-US" sz="1200" dirty="0"/>
+          </a:p>
+        </p:txBody>
+      </p:sp>
+      <p:sp>
+        <p:nvSpPr>
+          <p:cNvPr id="73" name="Text 71"/>
+          <p:cNvSpPr txBox="1"/>
+          <p:nvPr/>
+        </p:nvSpPr>
+        <p:spPr>
+          <a:xfrm>
+            <a:off x="6565392" y="3108960"/>
+            <a:ext cx="2011680" cy="352044"/>
           </a:xfrm>
           <a:prstGeom prst="rect">
             <a:avLst/>
@@ -11448,14 +12111,14 @@
       </p:sp>
       <p:sp>
         <p:nvSpPr>
-          <p:cNvPr id="57" name="Shape 55"/>
-          <p:cNvSpPr/>
-          <p:nvPr/>
-        </p:nvSpPr>
-        <p:spPr>
-          <a:xfrm>
-            <a:off x="8220456" y="3188170"/>
-            <a:ext cx="465328" cy="193624"/>
+          <p:cNvPr id="74" name="Shape 72"/>
+          <p:cNvSpPr/>
+          <p:nvPr/>
+        </p:nvSpPr>
+        <p:spPr>
+          <a:xfrm>
+            <a:off x="8650224" y="3188170"/>
+            <a:ext cx="379984" cy="193624"/>
           </a:xfrm>
           <a:prstGeom prst="rect">
             <a:avLst/>
@@ -11468,13 +12131,13 @@
       </p:sp>
       <p:sp>
         <p:nvSpPr>
-          <p:cNvPr id="58" name="Text 56"/>
-          <p:cNvSpPr txBox="1"/>
-          <p:nvPr/>
-        </p:nvSpPr>
-        <p:spPr>
-          <a:xfrm>
-            <a:off x="10369296" y="3108960"/>
+          <p:cNvPr id="75" name="Text 73"/>
+          <p:cNvSpPr txBox="1"/>
+          <p:nvPr/>
+        </p:nvSpPr>
+        <p:spPr>
+          <a:xfrm>
+            <a:off x="10415016" y="3108960"/>
             <a:ext cx="1051560" cy="352044"/>
           </a:xfrm>
           <a:prstGeom prst="rect">
@@ -11507,14 +12170,53 @@
       </p:sp>
       <p:sp>
         <p:nvSpPr>
-          <p:cNvPr id="59" name="Text 57"/>
+          <p:cNvPr id="76" name="Text 74"/>
           <p:cNvSpPr txBox="1"/>
           <p:nvPr/>
         </p:nvSpPr>
         <p:spPr>
           <a:xfrm>
             <a:off x="6208776" y="3461004"/>
-            <a:ext cx="1938528" cy="352044"/>
+            <a:ext cx="310896" cy="352044"/>
+          </a:xfrm>
+          <a:prstGeom prst="rect">
+            <a:avLst/>
+          </a:prstGeom>
+          <a:noFill/>
+          <a:ln/>
+        </p:spPr>
+        <p:txBody>
+          <a:bodyPr wrap="square" lIns="0" tIns="0" rIns="0" bIns="0" rtlCol="0" anchor="ctr"/>
+          <a:lstStyle/>
+          <a:p>
+            <a:pPr algn="r" indent="0" marL="0">
+              <a:buNone/>
+            </a:pPr>
+            <a:r>
+              <a:rPr lang="en-US" sz="1200" dirty="0">
+                <a:solidFill>
+                  <a:srgbClr val="9AA3AD"/>
+                </a:solidFill>
+                <a:latin typeface="Inter" pitchFamily="34" charset="0"/>
+                <a:ea typeface="Inter" pitchFamily="34" charset="-122"/>
+                <a:cs typeface="Inter" pitchFamily="34" charset="-120"/>
+              </a:rPr>
+              <a:t>18</a:t>
+            </a:r>
+            <a:endParaRPr lang="en-US" sz="1200" dirty="0"/>
+          </a:p>
+        </p:txBody>
+      </p:sp>
+      <p:sp>
+        <p:nvSpPr>
+          <p:cNvPr id="77" name="Text 75"/>
+          <p:cNvSpPr txBox="1"/>
+          <p:nvPr/>
+        </p:nvSpPr>
+        <p:spPr>
+          <a:xfrm>
+            <a:off x="6565392" y="3461004"/>
+            <a:ext cx="2011680" cy="352044"/>
           </a:xfrm>
           <a:prstGeom prst="rect">
             <a:avLst/>
@@ -11546,14 +12248,14 @@
       </p:sp>
       <p:sp>
         <p:nvSpPr>
-          <p:cNvPr id="60" name="Shape 58"/>
-          <p:cNvSpPr/>
-          <p:nvPr/>
-        </p:nvSpPr>
-        <p:spPr>
-          <a:xfrm>
-            <a:off x="8220456" y="3540214"/>
-            <a:ext cx="465328" cy="193624"/>
+          <p:cNvPr id="78" name="Shape 76"/>
+          <p:cNvSpPr/>
+          <p:nvPr/>
+        </p:nvSpPr>
+        <p:spPr>
+          <a:xfrm>
+            <a:off x="8650224" y="3540214"/>
+            <a:ext cx="379984" cy="193624"/>
           </a:xfrm>
           <a:prstGeom prst="rect">
             <a:avLst/>
@@ -11566,13 +12268,13 @@
       </p:sp>
       <p:sp>
         <p:nvSpPr>
-          <p:cNvPr id="61" name="Text 59"/>
-          <p:cNvSpPr txBox="1"/>
-          <p:nvPr/>
-        </p:nvSpPr>
-        <p:spPr>
-          <a:xfrm>
-            <a:off x="10369296" y="3461004"/>
+          <p:cNvPr id="79" name="Text 77"/>
+          <p:cNvSpPr txBox="1"/>
+          <p:nvPr/>
+        </p:nvSpPr>
+        <p:spPr>
+          <a:xfrm>
+            <a:off x="10415016" y="3461004"/>
             <a:ext cx="1051560" cy="352044"/>
           </a:xfrm>
           <a:prstGeom prst="rect">
@@ -11605,14 +12307,53 @@
       </p:sp>
       <p:sp>
         <p:nvSpPr>
-          <p:cNvPr id="62" name="Text 60"/>
+          <p:cNvPr id="80" name="Text 78"/>
           <p:cNvSpPr txBox="1"/>
           <p:nvPr/>
         </p:nvSpPr>
         <p:spPr>
           <a:xfrm>
             <a:off x="6208776" y="3813048"/>
-            <a:ext cx="1938528" cy="352044"/>
+            <a:ext cx="310896" cy="352044"/>
+          </a:xfrm>
+          <a:prstGeom prst="rect">
+            <a:avLst/>
+          </a:prstGeom>
+          <a:noFill/>
+          <a:ln/>
+        </p:spPr>
+        <p:txBody>
+          <a:bodyPr wrap="square" lIns="0" tIns="0" rIns="0" bIns="0" rtlCol="0" anchor="ctr"/>
+          <a:lstStyle/>
+          <a:p>
+            <a:pPr algn="r" indent="0" marL="0">
+              <a:buNone/>
+            </a:pPr>
+            <a:r>
+              <a:rPr lang="en-US" sz="1200" dirty="0">
+                <a:solidFill>
+                  <a:srgbClr val="9AA3AD"/>
+                </a:solidFill>
+                <a:latin typeface="Inter" pitchFamily="34" charset="0"/>
+                <a:ea typeface="Inter" pitchFamily="34" charset="-122"/>
+                <a:cs typeface="Inter" pitchFamily="34" charset="-120"/>
+              </a:rPr>
+              <a:t>19</a:t>
+            </a:r>
+            <a:endParaRPr lang="en-US" sz="1200" dirty="0"/>
+          </a:p>
+        </p:txBody>
+      </p:sp>
+      <p:sp>
+        <p:nvSpPr>
+          <p:cNvPr id="81" name="Text 79"/>
+          <p:cNvSpPr txBox="1"/>
+          <p:nvPr/>
+        </p:nvSpPr>
+        <p:spPr>
+          <a:xfrm>
+            <a:off x="6565392" y="3813048"/>
+            <a:ext cx="2011680" cy="352044"/>
           </a:xfrm>
           <a:prstGeom prst="rect">
             <a:avLst/>
@@ -11644,14 +12385,14 @@
       </p:sp>
       <p:sp>
         <p:nvSpPr>
-          <p:cNvPr id="63" name="Shape 61"/>
-          <p:cNvSpPr/>
-          <p:nvPr/>
-        </p:nvSpPr>
-        <p:spPr>
-          <a:xfrm>
-            <a:off x="8220456" y="3892258"/>
-            <a:ext cx="465328" cy="193624"/>
+          <p:cNvPr id="82" name="Shape 80"/>
+          <p:cNvSpPr/>
+          <p:nvPr/>
+        </p:nvSpPr>
+        <p:spPr>
+          <a:xfrm>
+            <a:off x="8650224" y="3892258"/>
+            <a:ext cx="379984" cy="193624"/>
           </a:xfrm>
           <a:prstGeom prst="rect">
             <a:avLst/>
@@ -11664,13 +12405,13 @@
       </p:sp>
       <p:sp>
         <p:nvSpPr>
-          <p:cNvPr id="64" name="Text 62"/>
-          <p:cNvSpPr txBox="1"/>
-          <p:nvPr/>
-        </p:nvSpPr>
-        <p:spPr>
-          <a:xfrm>
-            <a:off x="10369296" y="3813048"/>
+          <p:cNvPr id="83" name="Text 81"/>
+          <p:cNvSpPr txBox="1"/>
+          <p:nvPr/>
+        </p:nvSpPr>
+        <p:spPr>
+          <a:xfrm>
+            <a:off x="10415016" y="3813048"/>
             <a:ext cx="1051560" cy="352044"/>
           </a:xfrm>
           <a:prstGeom prst="rect">
@@ -11703,14 +12444,53 @@
       </p:sp>
       <p:sp>
         <p:nvSpPr>
-          <p:cNvPr id="65" name="Text 63"/>
+          <p:cNvPr id="84" name="Text 82"/>
           <p:cNvSpPr txBox="1"/>
           <p:nvPr/>
         </p:nvSpPr>
         <p:spPr>
           <a:xfrm>
             <a:off x="6208776" y="4165092"/>
-            <a:ext cx="1938528" cy="352044"/>
+            <a:ext cx="310896" cy="352044"/>
+          </a:xfrm>
+          <a:prstGeom prst="rect">
+            <a:avLst/>
+          </a:prstGeom>
+          <a:noFill/>
+          <a:ln/>
+        </p:spPr>
+        <p:txBody>
+          <a:bodyPr wrap="square" lIns="0" tIns="0" rIns="0" bIns="0" rtlCol="0" anchor="ctr"/>
+          <a:lstStyle/>
+          <a:p>
+            <a:pPr algn="r" indent="0" marL="0">
+              <a:buNone/>
+            </a:pPr>
+            <a:r>
+              <a:rPr lang="en-US" sz="1200" dirty="0">
+                <a:solidFill>
+                  <a:srgbClr val="9AA3AD"/>
+                </a:solidFill>
+                <a:latin typeface="Inter" pitchFamily="34" charset="0"/>
+                <a:ea typeface="Inter" pitchFamily="34" charset="-122"/>
+                <a:cs typeface="Inter" pitchFamily="34" charset="-120"/>
+              </a:rPr>
+              <a:t>20</a:t>
+            </a:r>
+            <a:endParaRPr lang="en-US" sz="1200" dirty="0"/>
+          </a:p>
+        </p:txBody>
+      </p:sp>
+      <p:sp>
+        <p:nvSpPr>
+          <p:cNvPr id="85" name="Text 83"/>
+          <p:cNvSpPr txBox="1"/>
+          <p:nvPr/>
+        </p:nvSpPr>
+        <p:spPr>
+          <a:xfrm>
+            <a:off x="6565392" y="4165092"/>
+            <a:ext cx="2011680" cy="352044"/>
           </a:xfrm>
           <a:prstGeom prst="rect">
             <a:avLst/>
@@ -11742,14 +12522,14 @@
       </p:sp>
       <p:sp>
         <p:nvSpPr>
-          <p:cNvPr id="66" name="Shape 64"/>
-          <p:cNvSpPr/>
-          <p:nvPr/>
-        </p:nvSpPr>
-        <p:spPr>
-          <a:xfrm>
-            <a:off x="8220456" y="4244302"/>
-            <a:ext cx="465328" cy="193624"/>
+          <p:cNvPr id="86" name="Shape 84"/>
+          <p:cNvSpPr/>
+          <p:nvPr/>
+        </p:nvSpPr>
+        <p:spPr>
+          <a:xfrm>
+            <a:off x="8650224" y="4244302"/>
+            <a:ext cx="379984" cy="193624"/>
           </a:xfrm>
           <a:prstGeom prst="rect">
             <a:avLst/>
@@ -11762,13 +12542,13 @@
       </p:sp>
       <p:sp>
         <p:nvSpPr>
-          <p:cNvPr id="67" name="Text 65"/>
-          <p:cNvSpPr txBox="1"/>
-          <p:nvPr/>
-        </p:nvSpPr>
-        <p:spPr>
-          <a:xfrm>
-            <a:off x="10369296" y="4165092"/>
+          <p:cNvPr id="87" name="Text 85"/>
+          <p:cNvSpPr txBox="1"/>
+          <p:nvPr/>
+        </p:nvSpPr>
+        <p:spPr>
+          <a:xfrm>
+            <a:off x="10415016" y="4165092"/>
             <a:ext cx="1051560" cy="352044"/>
           </a:xfrm>
           <a:prstGeom prst="rect">
@@ -11801,14 +12581,53 @@
       </p:sp>
       <p:sp>
         <p:nvSpPr>
-          <p:cNvPr id="68" name="Text 66"/>
+          <p:cNvPr id="88" name="Text 86"/>
           <p:cNvSpPr txBox="1"/>
           <p:nvPr/>
         </p:nvSpPr>
         <p:spPr>
           <a:xfrm>
             <a:off x="6208776" y="4517136"/>
-            <a:ext cx="1938528" cy="352044"/>
+            <a:ext cx="310896" cy="352044"/>
+          </a:xfrm>
+          <a:prstGeom prst="rect">
+            <a:avLst/>
+          </a:prstGeom>
+          <a:noFill/>
+          <a:ln/>
+        </p:spPr>
+        <p:txBody>
+          <a:bodyPr wrap="square" lIns="0" tIns="0" rIns="0" bIns="0" rtlCol="0" anchor="ctr"/>
+          <a:lstStyle/>
+          <a:p>
+            <a:pPr algn="r" indent="0" marL="0">
+              <a:buNone/>
+            </a:pPr>
+            <a:r>
+              <a:rPr lang="en-US" sz="1200" dirty="0">
+                <a:solidFill>
+                  <a:srgbClr val="9AA3AD"/>
+                </a:solidFill>
+                <a:latin typeface="Inter" pitchFamily="34" charset="0"/>
+                <a:ea typeface="Inter" pitchFamily="34" charset="-122"/>
+                <a:cs typeface="Inter" pitchFamily="34" charset="-120"/>
+              </a:rPr>
+              <a:t>21</a:t>
+            </a:r>
+            <a:endParaRPr lang="en-US" sz="1200" dirty="0"/>
+          </a:p>
+        </p:txBody>
+      </p:sp>
+      <p:sp>
+        <p:nvSpPr>
+          <p:cNvPr id="89" name="Text 87"/>
+          <p:cNvSpPr txBox="1"/>
+          <p:nvPr/>
+        </p:nvSpPr>
+        <p:spPr>
+          <a:xfrm>
+            <a:off x="6565392" y="4517136"/>
+            <a:ext cx="2011680" cy="352044"/>
           </a:xfrm>
           <a:prstGeom prst="rect">
             <a:avLst/>
@@ -11840,14 +12659,14 @@
       </p:sp>
       <p:sp>
         <p:nvSpPr>
-          <p:cNvPr id="69" name="Shape 67"/>
-          <p:cNvSpPr/>
-          <p:nvPr/>
-        </p:nvSpPr>
-        <p:spPr>
-          <a:xfrm>
-            <a:off x="8220456" y="4596346"/>
-            <a:ext cx="465328" cy="193624"/>
+          <p:cNvPr id="90" name="Shape 88"/>
+          <p:cNvSpPr/>
+          <p:nvPr/>
+        </p:nvSpPr>
+        <p:spPr>
+          <a:xfrm>
+            <a:off x="8650224" y="4596346"/>
+            <a:ext cx="379984" cy="193624"/>
           </a:xfrm>
           <a:prstGeom prst="rect">
             <a:avLst/>
@@ -11860,13 +12679,13 @@
       </p:sp>
       <p:sp>
         <p:nvSpPr>
-          <p:cNvPr id="70" name="Text 68"/>
-          <p:cNvSpPr txBox="1"/>
-          <p:nvPr/>
-        </p:nvSpPr>
-        <p:spPr>
-          <a:xfrm>
-            <a:off x="10369296" y="4517136"/>
+          <p:cNvPr id="91" name="Text 89"/>
+          <p:cNvSpPr txBox="1"/>
+          <p:nvPr/>
+        </p:nvSpPr>
+        <p:spPr>
+          <a:xfrm>
+            <a:off x="10415016" y="4517136"/>
             <a:ext cx="1051560" cy="352044"/>
           </a:xfrm>
           <a:prstGeom prst="rect">
@@ -11899,14 +12718,53 @@
       </p:sp>
       <p:sp>
         <p:nvSpPr>
-          <p:cNvPr id="71" name="Text 69"/>
+          <p:cNvPr id="92" name="Text 90"/>
           <p:cNvSpPr txBox="1"/>
           <p:nvPr/>
         </p:nvSpPr>
         <p:spPr>
           <a:xfrm>
             <a:off x="6208776" y="4869180"/>
-            <a:ext cx="1938528" cy="352044"/>
+            <a:ext cx="310896" cy="352044"/>
+          </a:xfrm>
+          <a:prstGeom prst="rect">
+            <a:avLst/>
+          </a:prstGeom>
+          <a:noFill/>
+          <a:ln/>
+        </p:spPr>
+        <p:txBody>
+          <a:bodyPr wrap="square" lIns="0" tIns="0" rIns="0" bIns="0" rtlCol="0" anchor="ctr"/>
+          <a:lstStyle/>
+          <a:p>
+            <a:pPr algn="r" indent="0" marL="0">
+              <a:buNone/>
+            </a:pPr>
+            <a:r>
+              <a:rPr lang="en-US" sz="1200" dirty="0">
+                <a:solidFill>
+                  <a:srgbClr val="9AA3AD"/>
+                </a:solidFill>
+                <a:latin typeface="Inter" pitchFamily="34" charset="0"/>
+                <a:ea typeface="Inter" pitchFamily="34" charset="-122"/>
+                <a:cs typeface="Inter" pitchFamily="34" charset="-120"/>
+              </a:rPr>
+              <a:t>22</a:t>
+            </a:r>
+            <a:endParaRPr lang="en-US" sz="1200" dirty="0"/>
+          </a:p>
+        </p:txBody>
+      </p:sp>
+      <p:sp>
+        <p:nvSpPr>
+          <p:cNvPr id="93" name="Text 91"/>
+          <p:cNvSpPr txBox="1"/>
+          <p:nvPr/>
+        </p:nvSpPr>
+        <p:spPr>
+          <a:xfrm>
+            <a:off x="6565392" y="4869180"/>
+            <a:ext cx="2011680" cy="352044"/>
           </a:xfrm>
           <a:prstGeom prst="rect">
             <a:avLst/>
@@ -11938,14 +12796,14 @@
       </p:sp>
       <p:sp>
         <p:nvSpPr>
-          <p:cNvPr id="72" name="Shape 70"/>
-          <p:cNvSpPr/>
-          <p:nvPr/>
-        </p:nvSpPr>
-        <p:spPr>
-          <a:xfrm>
-            <a:off x="8220456" y="4948390"/>
-            <a:ext cx="232664" cy="193624"/>
+          <p:cNvPr id="94" name="Shape 92"/>
+          <p:cNvSpPr/>
+          <p:nvPr/>
+        </p:nvSpPr>
+        <p:spPr>
+          <a:xfrm>
+            <a:off x="8650224" y="4948390"/>
+            <a:ext cx="189992" cy="193624"/>
           </a:xfrm>
           <a:prstGeom prst="rect">
             <a:avLst/>
@@ -11958,13 +12816,13 @@
       </p:sp>
       <p:sp>
         <p:nvSpPr>
-          <p:cNvPr id="73" name="Text 71"/>
-          <p:cNvSpPr txBox="1"/>
-          <p:nvPr/>
-        </p:nvSpPr>
-        <p:spPr>
-          <a:xfrm>
-            <a:off x="10369296" y="4869180"/>
+          <p:cNvPr id="95" name="Text 93"/>
+          <p:cNvSpPr txBox="1"/>
+          <p:nvPr/>
+        </p:nvSpPr>
+        <p:spPr>
+          <a:xfrm>
+            <a:off x="10415016" y="4869180"/>
             <a:ext cx="1051560" cy="352044"/>
           </a:xfrm>
           <a:prstGeom prst="rect">
@@ -11997,14 +12855,53 @@
       </p:sp>
       <p:sp>
         <p:nvSpPr>
-          <p:cNvPr id="74" name="Text 72"/>
+          <p:cNvPr id="96" name="Text 94"/>
           <p:cNvSpPr txBox="1"/>
           <p:nvPr/>
         </p:nvSpPr>
         <p:spPr>
           <a:xfrm>
             <a:off x="6208776" y="5221224"/>
-            <a:ext cx="1938528" cy="352044"/>
+            <a:ext cx="310896" cy="352044"/>
+          </a:xfrm>
+          <a:prstGeom prst="rect">
+            <a:avLst/>
+          </a:prstGeom>
+          <a:noFill/>
+          <a:ln/>
+        </p:spPr>
+        <p:txBody>
+          <a:bodyPr wrap="square" lIns="0" tIns="0" rIns="0" bIns="0" rtlCol="0" anchor="ctr"/>
+          <a:lstStyle/>
+          <a:p>
+            <a:pPr algn="r" indent="0" marL="0">
+              <a:buNone/>
+            </a:pPr>
+            <a:r>
+              <a:rPr lang="en-US" sz="1200" dirty="0">
+                <a:solidFill>
+                  <a:srgbClr val="9AA3AD"/>
+                </a:solidFill>
+                <a:latin typeface="Inter" pitchFamily="34" charset="0"/>
+                <a:ea typeface="Inter" pitchFamily="34" charset="-122"/>
+                <a:cs typeface="Inter" pitchFamily="34" charset="-120"/>
+              </a:rPr>
+              <a:t>23</a:t>
+            </a:r>
+            <a:endParaRPr lang="en-US" sz="1200" dirty="0"/>
+          </a:p>
+        </p:txBody>
+      </p:sp>
+      <p:sp>
+        <p:nvSpPr>
+          <p:cNvPr id="97" name="Text 95"/>
+          <p:cNvSpPr txBox="1"/>
+          <p:nvPr/>
+        </p:nvSpPr>
+        <p:spPr>
+          <a:xfrm>
+            <a:off x="6565392" y="5221224"/>
+            <a:ext cx="2011680" cy="352044"/>
           </a:xfrm>
           <a:prstGeom prst="rect">
             <a:avLst/>
@@ -12036,14 +12933,14 @@
       </p:sp>
       <p:sp>
         <p:nvSpPr>
-          <p:cNvPr id="75" name="Shape 73"/>
-          <p:cNvSpPr/>
-          <p:nvPr/>
-        </p:nvSpPr>
-        <p:spPr>
-          <a:xfrm>
-            <a:off x="8220456" y="5300434"/>
-            <a:ext cx="232664" cy="193624"/>
+          <p:cNvPr id="98" name="Shape 96"/>
+          <p:cNvSpPr/>
+          <p:nvPr/>
+        </p:nvSpPr>
+        <p:spPr>
+          <a:xfrm>
+            <a:off x="8650224" y="5300434"/>
+            <a:ext cx="189992" cy="193624"/>
           </a:xfrm>
           <a:prstGeom prst="rect">
             <a:avLst/>
@@ -12056,13 +12953,13 @@
       </p:sp>
       <p:sp>
         <p:nvSpPr>
-          <p:cNvPr id="76" name="Text 74"/>
-          <p:cNvSpPr txBox="1"/>
-          <p:nvPr/>
-        </p:nvSpPr>
-        <p:spPr>
-          <a:xfrm>
-            <a:off x="10369296" y="5221224"/>
+          <p:cNvPr id="99" name="Text 97"/>
+          <p:cNvSpPr txBox="1"/>
+          <p:nvPr/>
+        </p:nvSpPr>
+        <p:spPr>
+          <a:xfrm>
+            <a:off x="10415016" y="5221224"/>
             <a:ext cx="1051560" cy="352044"/>
           </a:xfrm>
           <a:prstGeom prst="rect">
@@ -12095,7 +12992,27 @@
       </p:sp>
       <p:sp>
         <p:nvSpPr>
-          <p:cNvPr id="77" name="Shape 75"/>
+          <p:cNvPr id="100" name="Shape 98"/>
+          <p:cNvSpPr/>
+          <p:nvPr/>
+        </p:nvSpPr>
+        <p:spPr>
+          <a:xfrm>
+            <a:off x="6085332" y="1700784"/>
+            <a:ext cx="10973" cy="4224528"/>
+          </a:xfrm>
+          <a:prstGeom prst="rect">
+            <a:avLst/>
+          </a:prstGeom>
+          <a:solidFill>
+            <a:srgbClr val="D9D9D9"/>
+          </a:solidFill>
+          <a:ln/>
+        </p:spPr>
+      </p:sp>
+      <p:sp>
+        <p:nvSpPr>
+          <p:cNvPr id="101" name="Shape 99"/>
           <p:cNvSpPr/>
           <p:nvPr/>
         </p:nvSpPr>
@@ -12115,7 +13032,7 @@
       </p:sp>
       <p:sp>
         <p:nvSpPr>
-          <p:cNvPr id="78" name="Text 76"/>
+          <p:cNvPr id="102" name="Text 100"/>
           <p:cNvSpPr txBox="1"/>
           <p:nvPr/>
         </p:nvSpPr>

--- a/day2-deck/decks/Store Records - Review.pptx
+++ b/day2-deck/decks/Store Records - Review.pptx
@@ -1035,7 +1035,7 @@
           <a:p>
             <a:r>
               <a:rPr lang="en-US" dirty="0"/>
-              <a:t>Source: Qlik - Fixed Ops Accounting TB (Family FIXED GROSS, service + parts, body shop excluded), pulled Oct 8 2026. History Jan 2021 - Sep 2026; months before a store opened are ignored. Same-store, INEOS excluded. Matches the P&amp;L for every store except GMC PRESCOTT service (TB higher by $153,746 Jan-Sep 2026, $286,430 Jan-Sep 2025; GMC PRESCOTT's combined record holds on both). Combined service + parts, Jan-Sep 2026 vs the store's best prior Jan-Sep.</a:t>
+              <a:t>Takeaway (off the slide): Hyundai Prescott, Lincoln, Lexus and Audi Henderson beat their previous best by the most in percentage terms.Source: Qlik - Fixed Ops Accounting TB (Family FIXED GROSS, service + parts, body shop excluded), pulled Oct 8 2026. History Jan 2021 - Sep 2026; months before a store opened are ignored. Same-store, INEOS excluded. Matches the P&amp;L for every store except GMC PRESCOTT service (TB higher by $153,746 Jan-Sep 2026, $286,430 Jan-Sep 2025; GMC PRESCOTT's combined record holds on both). Combined service + parts, Jan-Sep 2026 vs the store's best prior Jan-Sep.</a:t>
             </a:r>
             <a:endParaRPr lang="en-US" dirty="0"/>
           </a:p>
@@ -1123,7 +1123,7 @@
           <a:p>
             <a:r>
               <a:rPr lang="en-US" dirty="0"/>
-              <a:t>Source: Qlik - Fixed Ops Accounting TB (Family FIXED GROSS, service + parts, body shop excluded), pulled Oct 8 2026. History Jan 2021 - Sep 2026; months before a store opened are ignored. Same-store, INEOS excluded. Matches the P&amp;L for every store except GMC PRESCOTT service (TB higher by $153,746 Jan-Sep 2026, $286,430 Jan-Sep 2025; GMC PRESCOTT's combined record holds on both). Combined service + parts, Jan-Sep 2026 vs the store's best prior Jan-Sep.</a:t>
+              <a:t>Takeaway (off the slide): Toyota Henderson, Audi Henderson, Lexus and Lincoln beat their previous best by the most in dollars.Source: Qlik - Fixed Ops Accounting TB (Family FIXED GROSS, service + parts, body shop excluded), pulled Oct 8 2026. History Jan 2021 - Sep 2026; months before a store opened are ignored. Same-store, INEOS excluded. Matches the P&amp;L for every store except GMC PRESCOTT service (TB higher by $153,746 Jan-Sep 2026, $286,430 Jan-Sep 2025; GMC PRESCOTT's combined record holds on both). Combined service + parts, Jan-Sep 2026 vs the store's best prior Jan-Sep.</a:t>
             </a:r>
             <a:endParaRPr lang="en-US" dirty="0"/>
           </a:p>
@@ -1211,7 +1211,7 @@
           <a:p>
             <a:r>
               <a:rPr lang="en-US" dirty="0"/>
-              <a:t>Source: Qlik - Fixed Ops Accounting TB (Family FIXED GROSS, service + parts, body shop excluded), pulled Oct 8 2026. History Jan 2021 - Sep 2026; months before a store opened are ignored. Same-store, INEOS excluded. Matches the P&amp;L for every store except GMC PRESCOTT service (TB higher by $153,746 Jan-Sep 2026, $286,430 Jan-Sep 2025; GMC PRESCOTT's combined record holds on both). Count of times a store set a new all-time monthly high in service, parts or combined gross, Jan-Sep 2026. Each new high counts, so a record beaten twice counts twice.</a:t>
+              <a:t>Takeaway (off the slide): 23 of 33 stores set a new monthly record in 2026; Honda Spokane and Nissan set the most, 9 each.Source: Qlik - Fixed Ops Accounting TB (Family FIXED GROSS, service + parts, body shop excluded), pulled Oct 8 2026. History Jan 2021 - Sep 2026; months before a store opened are ignored. Same-store, INEOS excluded. Matches the P&amp;L for every store except GMC PRESCOTT service (TB higher by $153,746 Jan-Sep 2026, $286,430 Jan-Sep 2025; GMC PRESCOTT's combined record holds on both). Count of times a store set a new all-time monthly high in service, parts or combined gross, Jan-Sep 2026. Each new high counts, so a record beaten twice counts twice.</a:t>
             </a:r>
             <a:endParaRPr lang="en-US" dirty="0"/>
           </a:p>
@@ -7982,7 +7982,7 @@
         <p:spPr>
           <a:xfrm>
             <a:off x="457200" y="1207008"/>
-            <a:ext cx="11274552" cy="4782312"/>
+            <a:ext cx="11274552" cy="5148072"/>
           </a:xfrm>
           <a:prstGeom prst="rect">
             <a:avLst/>
@@ -8665,65 +8665,6 @@
               <a:t>What changed? Each of these stores tells the room one thing they did differently this year.</a:t>
             </a:r>
             <a:endParaRPr lang="en-US" sz="1700" dirty="0"/>
-          </a:p>
-        </p:txBody>
-      </p:sp>
-      <p:sp>
-        <p:nvSpPr>
-          <p:cNvPr id="27" name="Shape 25"/>
-          <p:cNvSpPr/>
-          <p:nvPr/>
-        </p:nvSpPr>
-        <p:spPr>
-          <a:xfrm>
-            <a:off x="457200" y="6126480"/>
-            <a:ext cx="11274552" cy="348996"/>
-          </a:xfrm>
-          <a:prstGeom prst="rect">
-            <a:avLst/>
-          </a:prstGeom>
-          <a:solidFill>
-            <a:srgbClr val="E6F6EE"/>
-          </a:solidFill>
-          <a:ln/>
-        </p:spPr>
-      </p:sp>
-      <p:sp>
-        <p:nvSpPr>
-          <p:cNvPr id="28" name="Text 26"/>
-          <p:cNvSpPr txBox="1"/>
-          <p:nvPr/>
-        </p:nvSpPr>
-        <p:spPr>
-          <a:xfrm>
-            <a:off x="658368" y="6144768"/>
-            <a:ext cx="10927080" cy="312420"/>
-          </a:xfrm>
-          <a:prstGeom prst="rect">
-            <a:avLst/>
-          </a:prstGeom>
-          <a:noFill/>
-          <a:ln/>
-        </p:spPr>
-        <p:txBody>
-          <a:bodyPr wrap="square" lIns="0" tIns="0" rIns="0" bIns="0" rtlCol="0" anchor="ctr"/>
-          <a:lstStyle/>
-          <a:p>
-            <a:pPr indent="0" marL="0">
-              <a:buNone/>
-            </a:pPr>
-            <a:r>
-              <a:rPr lang="en-US" sz="1450" b="1" dirty="0">
-                <a:solidFill>
-                  <a:srgbClr val="0B7A4A"/>
-                </a:solidFill>
-                <a:latin typeface="Inter" pitchFamily="34" charset="0"/>
-                <a:ea typeface="Inter" pitchFamily="34" charset="-122"/>
-                <a:cs typeface="Inter" pitchFamily="34" charset="-120"/>
-              </a:rPr>
-              <a:t>Hyundai Prescott, Lincoln, Lexus and Audi Henderson beat their previous best by the most in percentage terms.</a:t>
-            </a:r>
-            <a:endParaRPr lang="en-US" sz="1450" dirty="0"/>
           </a:p>
         </p:txBody>
       </p:sp>
@@ -8866,7 +8807,7 @@
         <p:spPr>
           <a:xfrm>
             <a:off x="457200" y="1207008"/>
-            <a:ext cx="11274552" cy="4782312"/>
+            <a:ext cx="11274552" cy="5148072"/>
           </a:xfrm>
           <a:prstGeom prst="rect">
             <a:avLst/>
@@ -9549,65 +9490,6 @@
               <a:t>What changed? Each of these stores tells the room one thing they did differently this year.</a:t>
             </a:r>
             <a:endParaRPr lang="en-US" sz="1700" dirty="0"/>
-          </a:p>
-        </p:txBody>
-      </p:sp>
-      <p:sp>
-        <p:nvSpPr>
-          <p:cNvPr id="27" name="Shape 25"/>
-          <p:cNvSpPr/>
-          <p:nvPr/>
-        </p:nvSpPr>
-        <p:spPr>
-          <a:xfrm>
-            <a:off x="457200" y="6126480"/>
-            <a:ext cx="11274552" cy="364236"/>
-          </a:xfrm>
-          <a:prstGeom prst="rect">
-            <a:avLst/>
-          </a:prstGeom>
-          <a:solidFill>
-            <a:srgbClr val="E6F6EE"/>
-          </a:solidFill>
-          <a:ln/>
-        </p:spPr>
-      </p:sp>
-      <p:sp>
-        <p:nvSpPr>
-          <p:cNvPr id="28" name="Text 26"/>
-          <p:cNvSpPr txBox="1"/>
-          <p:nvPr/>
-        </p:nvSpPr>
-        <p:spPr>
-          <a:xfrm>
-            <a:off x="658368" y="6144768"/>
-            <a:ext cx="10927080" cy="327660"/>
-          </a:xfrm>
-          <a:prstGeom prst="rect">
-            <a:avLst/>
-          </a:prstGeom>
-          <a:noFill/>
-          <a:ln/>
-        </p:spPr>
-        <p:txBody>
-          <a:bodyPr wrap="square" lIns="0" tIns="0" rIns="0" bIns="0" rtlCol="0" anchor="ctr"/>
-          <a:lstStyle/>
-          <a:p>
-            <a:pPr indent="0" marL="0">
-              <a:buNone/>
-            </a:pPr>
-            <a:r>
-              <a:rPr lang="en-US" sz="1550" b="1" dirty="0">
-                <a:solidFill>
-                  <a:srgbClr val="0B7A4A"/>
-                </a:solidFill>
-                <a:latin typeface="Inter" pitchFamily="34" charset="0"/>
-                <a:ea typeface="Inter" pitchFamily="34" charset="-122"/>
-                <a:cs typeface="Inter" pitchFamily="34" charset="-120"/>
-              </a:rPr>
-              <a:t>Toyota Henderson, Audi Henderson, Lexus and Lincoln beat their previous best by the most in dollars.</a:t>
-            </a:r>
-            <a:endParaRPr lang="en-US" sz="1550" dirty="0"/>
           </a:p>
         </p:txBody>
       </p:sp>
@@ -9750,7 +9632,7 @@
         <p:spPr>
           <a:xfrm>
             <a:off x="457200" y="1207008"/>
-            <a:ext cx="11274552" cy="4782312"/>
+            <a:ext cx="11274552" cy="5148072"/>
           </a:xfrm>
           <a:prstGeom prst="rect">
             <a:avLst/>
@@ -9848,7 +9730,7 @@
         <p:spPr>
           <a:xfrm>
             <a:off x="658368" y="1700784"/>
-            <a:ext cx="310896" cy="352044"/>
+            <a:ext cx="310896" cy="382524"/>
           </a:xfrm>
           <a:prstGeom prst="rect">
             <a:avLst/>
@@ -9887,7 +9769,7 @@
         <p:spPr>
           <a:xfrm>
             <a:off x="1014984" y="1700784"/>
-            <a:ext cx="2011680" cy="352044"/>
+            <a:ext cx="2011680" cy="382524"/>
           </a:xfrm>
           <a:prstGeom prst="rect">
             <a:avLst/>
@@ -9925,8 +9807,8 @@
         </p:nvSpPr>
         <p:spPr>
           <a:xfrm>
-            <a:off x="3099816" y="1779994"/>
-            <a:ext cx="1709928" cy="193624"/>
+            <a:off x="3099816" y="1786852"/>
+            <a:ext cx="1709928" cy="210388"/>
           </a:xfrm>
           <a:prstGeom prst="rect">
             <a:avLst/>
@@ -9946,7 +9828,7 @@
         <p:spPr>
           <a:xfrm>
             <a:off x="4864608" y="1700784"/>
-            <a:ext cx="1051560" cy="352044"/>
+            <a:ext cx="1051560" cy="382524"/>
           </a:xfrm>
           <a:prstGeom prst="rect">
             <a:avLst/>
@@ -9984,8 +9866,8 @@
         </p:nvSpPr>
         <p:spPr>
           <a:xfrm>
-            <a:off x="658368" y="2052828"/>
-            <a:ext cx="310896" cy="352044"/>
+            <a:off x="658368" y="2083308"/>
+            <a:ext cx="310896" cy="382524"/>
           </a:xfrm>
           <a:prstGeom prst="rect">
             <a:avLst/>
@@ -10023,8 +9905,8 @@
         </p:nvSpPr>
         <p:spPr>
           <a:xfrm>
-            <a:off x="1014984" y="2052828"/>
-            <a:ext cx="2011680" cy="352044"/>
+            <a:off x="1014984" y="2083308"/>
+            <a:ext cx="2011680" cy="382524"/>
           </a:xfrm>
           <a:prstGeom prst="rect">
             <a:avLst/>
@@ -10062,8 +9944,8 @@
         </p:nvSpPr>
         <p:spPr>
           <a:xfrm>
-            <a:off x="3099816" y="2132038"/>
-            <a:ext cx="1709928" cy="193624"/>
+            <a:off x="3099816" y="2169376"/>
+            <a:ext cx="1709928" cy="210388"/>
           </a:xfrm>
           <a:prstGeom prst="rect">
             <a:avLst/>
@@ -10082,8 +9964,8 @@
         </p:nvSpPr>
         <p:spPr>
           <a:xfrm>
-            <a:off x="4864608" y="2052828"/>
-            <a:ext cx="1051560" cy="352044"/>
+            <a:off x="4864608" y="2083308"/>
+            <a:ext cx="1051560" cy="382524"/>
           </a:xfrm>
           <a:prstGeom prst="rect">
             <a:avLst/>
@@ -10121,8 +10003,8 @@
         </p:nvSpPr>
         <p:spPr>
           <a:xfrm>
-            <a:off x="658368" y="2404872"/>
-            <a:ext cx="310896" cy="352044"/>
+            <a:off x="658368" y="2465832"/>
+            <a:ext cx="310896" cy="382524"/>
           </a:xfrm>
           <a:prstGeom prst="rect">
             <a:avLst/>
@@ -10160,8 +10042,8 @@
         </p:nvSpPr>
         <p:spPr>
           <a:xfrm>
-            <a:off x="1014984" y="2404872"/>
-            <a:ext cx="2011680" cy="352044"/>
+            <a:off x="1014984" y="2465832"/>
+            <a:ext cx="2011680" cy="382524"/>
           </a:xfrm>
           <a:prstGeom prst="rect">
             <a:avLst/>
@@ -10199,8 +10081,8 @@
         </p:nvSpPr>
         <p:spPr>
           <a:xfrm>
-            <a:off x="3099816" y="2484082"/>
-            <a:ext cx="1519936" cy="193624"/>
+            <a:off x="3099816" y="2551900"/>
+            <a:ext cx="1519936" cy="210388"/>
           </a:xfrm>
           <a:prstGeom prst="rect">
             <a:avLst/>
@@ -10219,8 +10101,8 @@
         </p:nvSpPr>
         <p:spPr>
           <a:xfrm>
-            <a:off x="4864608" y="2404872"/>
-            <a:ext cx="1051560" cy="352044"/>
+            <a:off x="4864608" y="2465832"/>
+            <a:ext cx="1051560" cy="382524"/>
           </a:xfrm>
           <a:prstGeom prst="rect">
             <a:avLst/>
@@ -10258,8 +10140,8 @@
         </p:nvSpPr>
         <p:spPr>
           <a:xfrm>
-            <a:off x="658368" y="2756916"/>
-            <a:ext cx="310896" cy="352044"/>
+            <a:off x="658368" y="2848356"/>
+            <a:ext cx="310896" cy="382524"/>
           </a:xfrm>
           <a:prstGeom prst="rect">
             <a:avLst/>
@@ -10297,8 +10179,8 @@
         </p:nvSpPr>
         <p:spPr>
           <a:xfrm>
-            <a:off x="1014984" y="2756916"/>
-            <a:ext cx="2011680" cy="352044"/>
+            <a:off x="1014984" y="2848356"/>
+            <a:ext cx="2011680" cy="382524"/>
           </a:xfrm>
           <a:prstGeom prst="rect">
             <a:avLst/>
@@ -10336,8 +10218,8 @@
         </p:nvSpPr>
         <p:spPr>
           <a:xfrm>
-            <a:off x="3099816" y="2836126"/>
-            <a:ext cx="1329944" cy="193624"/>
+            <a:off x="3099816" y="2934424"/>
+            <a:ext cx="1329944" cy="210388"/>
           </a:xfrm>
           <a:prstGeom prst="rect">
             <a:avLst/>
@@ -10356,8 +10238,8 @@
         </p:nvSpPr>
         <p:spPr>
           <a:xfrm>
-            <a:off x="4864608" y="2756916"/>
-            <a:ext cx="1051560" cy="352044"/>
+            <a:off x="4864608" y="2848356"/>
+            <a:ext cx="1051560" cy="382524"/>
           </a:xfrm>
           <a:prstGeom prst="rect">
             <a:avLst/>
@@ -10395,8 +10277,8 @@
         </p:nvSpPr>
         <p:spPr>
           <a:xfrm>
-            <a:off x="658368" y="3108960"/>
-            <a:ext cx="310896" cy="352044"/>
+            <a:off x="658368" y="3230880"/>
+            <a:ext cx="310896" cy="382524"/>
           </a:xfrm>
           <a:prstGeom prst="rect">
             <a:avLst/>
@@ -10434,8 +10316,8 @@
         </p:nvSpPr>
         <p:spPr>
           <a:xfrm>
-            <a:off x="1014984" y="3108960"/>
-            <a:ext cx="2011680" cy="352044"/>
+            <a:off x="1014984" y="3230880"/>
+            <a:ext cx="2011680" cy="382524"/>
           </a:xfrm>
           <a:prstGeom prst="rect">
             <a:avLst/>
@@ -10473,8 +10355,8 @@
         </p:nvSpPr>
         <p:spPr>
           <a:xfrm>
-            <a:off x="3099816" y="3188170"/>
-            <a:ext cx="1329944" cy="193624"/>
+            <a:off x="3099816" y="3316948"/>
+            <a:ext cx="1329944" cy="210388"/>
           </a:xfrm>
           <a:prstGeom prst="rect">
             <a:avLst/>
@@ -10493,8 +10375,8 @@
         </p:nvSpPr>
         <p:spPr>
           <a:xfrm>
-            <a:off x="4864608" y="3108960"/>
-            <a:ext cx="1051560" cy="352044"/>
+            <a:off x="4864608" y="3230880"/>
+            <a:ext cx="1051560" cy="382524"/>
           </a:xfrm>
           <a:prstGeom prst="rect">
             <a:avLst/>
@@ -10532,8 +10414,8 @@
         </p:nvSpPr>
         <p:spPr>
           <a:xfrm>
-            <a:off x="658368" y="3461004"/>
-            <a:ext cx="310896" cy="352044"/>
+            <a:off x="658368" y="3613404"/>
+            <a:ext cx="310896" cy="382524"/>
           </a:xfrm>
           <a:prstGeom prst="rect">
             <a:avLst/>
@@ -10571,8 +10453,8 @@
         </p:nvSpPr>
         <p:spPr>
           <a:xfrm>
-            <a:off x="1014984" y="3461004"/>
-            <a:ext cx="2011680" cy="352044"/>
+            <a:off x="1014984" y="3613404"/>
+            <a:ext cx="2011680" cy="382524"/>
           </a:xfrm>
           <a:prstGeom prst="rect">
             <a:avLst/>
@@ -10610,8 +10492,8 @@
         </p:nvSpPr>
         <p:spPr>
           <a:xfrm>
-            <a:off x="3099816" y="3540214"/>
-            <a:ext cx="1139952" cy="193624"/>
+            <a:off x="3099816" y="3699472"/>
+            <a:ext cx="1139952" cy="210388"/>
           </a:xfrm>
           <a:prstGeom prst="rect">
             <a:avLst/>
@@ -10630,8 +10512,8 @@
         </p:nvSpPr>
         <p:spPr>
           <a:xfrm>
-            <a:off x="4864608" y="3461004"/>
-            <a:ext cx="1051560" cy="352044"/>
+            <a:off x="4864608" y="3613404"/>
+            <a:ext cx="1051560" cy="382524"/>
           </a:xfrm>
           <a:prstGeom prst="rect">
             <a:avLst/>
@@ -10669,8 +10551,8 @@
         </p:nvSpPr>
         <p:spPr>
           <a:xfrm>
-            <a:off x="658368" y="3813048"/>
-            <a:ext cx="310896" cy="352044"/>
+            <a:off x="658368" y="3995928"/>
+            <a:ext cx="310896" cy="382524"/>
           </a:xfrm>
           <a:prstGeom prst="rect">
             <a:avLst/>
@@ -10708,8 +10590,8 @@
         </p:nvSpPr>
         <p:spPr>
           <a:xfrm>
-            <a:off x="1014984" y="3813048"/>
-            <a:ext cx="2011680" cy="352044"/>
+            <a:off x="1014984" y="3995928"/>
+            <a:ext cx="2011680" cy="382524"/>
           </a:xfrm>
           <a:prstGeom prst="rect">
             <a:avLst/>
@@ -10747,8 +10629,8 @@
         </p:nvSpPr>
         <p:spPr>
           <a:xfrm>
-            <a:off x="3099816" y="3892258"/>
-            <a:ext cx="1139952" cy="193624"/>
+            <a:off x="3099816" y="4081996"/>
+            <a:ext cx="1139952" cy="210388"/>
           </a:xfrm>
           <a:prstGeom prst="rect">
             <a:avLst/>
@@ -10767,8 +10649,8 @@
         </p:nvSpPr>
         <p:spPr>
           <a:xfrm>
-            <a:off x="4864608" y="3813048"/>
-            <a:ext cx="1051560" cy="352044"/>
+            <a:off x="4864608" y="3995928"/>
+            <a:ext cx="1051560" cy="382524"/>
           </a:xfrm>
           <a:prstGeom prst="rect">
             <a:avLst/>
@@ -10806,8 +10688,8 @@
         </p:nvSpPr>
         <p:spPr>
           <a:xfrm>
-            <a:off x="658368" y="4165092"/>
-            <a:ext cx="310896" cy="352044"/>
+            <a:off x="658368" y="4378452"/>
+            <a:ext cx="310896" cy="382524"/>
           </a:xfrm>
           <a:prstGeom prst="rect">
             <a:avLst/>
@@ -10845,8 +10727,8 @@
         </p:nvSpPr>
         <p:spPr>
           <a:xfrm>
-            <a:off x="1014984" y="4165092"/>
-            <a:ext cx="2011680" cy="352044"/>
+            <a:off x="1014984" y="4378452"/>
+            <a:ext cx="2011680" cy="382524"/>
           </a:xfrm>
           <a:prstGeom prst="rect">
             <a:avLst/>
@@ -10884,8 +10766,8 @@
         </p:nvSpPr>
         <p:spPr>
           <a:xfrm>
-            <a:off x="3099816" y="4244302"/>
-            <a:ext cx="949960" cy="193624"/>
+            <a:off x="3099816" y="4464520"/>
+            <a:ext cx="949960" cy="210388"/>
           </a:xfrm>
           <a:prstGeom prst="rect">
             <a:avLst/>
@@ -10904,8 +10786,8 @@
         </p:nvSpPr>
         <p:spPr>
           <a:xfrm>
-            <a:off x="4864608" y="4165092"/>
-            <a:ext cx="1051560" cy="352044"/>
+            <a:off x="4864608" y="4378452"/>
+            <a:ext cx="1051560" cy="382524"/>
           </a:xfrm>
           <a:prstGeom prst="rect">
             <a:avLst/>
@@ -10943,8 +10825,8 @@
         </p:nvSpPr>
         <p:spPr>
           <a:xfrm>
-            <a:off x="658368" y="4517136"/>
-            <a:ext cx="310896" cy="352044"/>
+            <a:off x="658368" y="4760976"/>
+            <a:ext cx="310896" cy="382524"/>
           </a:xfrm>
           <a:prstGeom prst="rect">
             <a:avLst/>
@@ -10982,8 +10864,8 @@
         </p:nvSpPr>
         <p:spPr>
           <a:xfrm>
-            <a:off x="1014984" y="4517136"/>
-            <a:ext cx="2011680" cy="352044"/>
+            <a:off x="1014984" y="4760976"/>
+            <a:ext cx="2011680" cy="382524"/>
           </a:xfrm>
           <a:prstGeom prst="rect">
             <a:avLst/>
@@ -11021,8 +10903,8 @@
         </p:nvSpPr>
         <p:spPr>
           <a:xfrm>
-            <a:off x="3099816" y="4596346"/>
-            <a:ext cx="759968" cy="193624"/>
+            <a:off x="3099816" y="4847044"/>
+            <a:ext cx="759968" cy="210388"/>
           </a:xfrm>
           <a:prstGeom prst="rect">
             <a:avLst/>
@@ -11041,8 +10923,8 @@
         </p:nvSpPr>
         <p:spPr>
           <a:xfrm>
-            <a:off x="4864608" y="4517136"/>
-            <a:ext cx="1051560" cy="352044"/>
+            <a:off x="4864608" y="4760976"/>
+            <a:ext cx="1051560" cy="382524"/>
           </a:xfrm>
           <a:prstGeom prst="rect">
             <a:avLst/>
@@ -11080,8 +10962,8 @@
         </p:nvSpPr>
         <p:spPr>
           <a:xfrm>
-            <a:off x="658368" y="4869180"/>
-            <a:ext cx="310896" cy="352044"/>
+            <a:off x="658368" y="5143500"/>
+            <a:ext cx="310896" cy="382524"/>
           </a:xfrm>
           <a:prstGeom prst="rect">
             <a:avLst/>
@@ -11119,8 +11001,8 @@
         </p:nvSpPr>
         <p:spPr>
           <a:xfrm>
-            <a:off x="1014984" y="4869180"/>
-            <a:ext cx="2011680" cy="352044"/>
+            <a:off x="1014984" y="5143500"/>
+            <a:ext cx="2011680" cy="382524"/>
           </a:xfrm>
           <a:prstGeom prst="rect">
             <a:avLst/>
@@ -11158,8 +11040,8 @@
         </p:nvSpPr>
         <p:spPr>
           <a:xfrm>
-            <a:off x="3099816" y="4948390"/>
-            <a:ext cx="759968" cy="193624"/>
+            <a:off x="3099816" y="5229568"/>
+            <a:ext cx="759968" cy="210388"/>
           </a:xfrm>
           <a:prstGeom prst="rect">
             <a:avLst/>
@@ -11178,8 +11060,8 @@
         </p:nvSpPr>
         <p:spPr>
           <a:xfrm>
-            <a:off x="4864608" y="4869180"/>
-            <a:ext cx="1051560" cy="352044"/>
+            <a:off x="4864608" y="5143500"/>
+            <a:ext cx="1051560" cy="382524"/>
           </a:xfrm>
           <a:prstGeom prst="rect">
             <a:avLst/>
@@ -11217,8 +11099,8 @@
         </p:nvSpPr>
         <p:spPr>
           <a:xfrm>
-            <a:off x="658368" y="5221224"/>
-            <a:ext cx="310896" cy="352044"/>
+            <a:off x="658368" y="5526024"/>
+            <a:ext cx="310896" cy="382524"/>
           </a:xfrm>
           <a:prstGeom prst="rect">
             <a:avLst/>
@@ -11256,8 +11138,8 @@
         </p:nvSpPr>
         <p:spPr>
           <a:xfrm>
-            <a:off x="1014984" y="5221224"/>
-            <a:ext cx="2011680" cy="352044"/>
+            <a:off x="1014984" y="5526024"/>
+            <a:ext cx="2011680" cy="382524"/>
           </a:xfrm>
           <a:prstGeom prst="rect">
             <a:avLst/>
@@ -11295,8 +11177,8 @@
         </p:nvSpPr>
         <p:spPr>
           <a:xfrm>
-            <a:off x="3099816" y="5300434"/>
-            <a:ext cx="759968" cy="193624"/>
+            <a:off x="3099816" y="5612092"/>
+            <a:ext cx="759968" cy="210388"/>
           </a:xfrm>
           <a:prstGeom prst="rect">
             <a:avLst/>
@@ -11315,8 +11197,8 @@
         </p:nvSpPr>
         <p:spPr>
           <a:xfrm>
-            <a:off x="4864608" y="5221224"/>
-            <a:ext cx="1051560" cy="352044"/>
+            <a:off x="4864608" y="5526024"/>
+            <a:ext cx="1051560" cy="382524"/>
           </a:xfrm>
           <a:prstGeom prst="rect">
             <a:avLst/>
@@ -11354,8 +11236,8 @@
         </p:nvSpPr>
         <p:spPr>
           <a:xfrm>
-            <a:off x="658368" y="5573268"/>
-            <a:ext cx="310896" cy="352044"/>
+            <a:off x="658368" y="5908548"/>
+            <a:ext cx="310896" cy="382524"/>
           </a:xfrm>
           <a:prstGeom prst="rect">
             <a:avLst/>
@@ -11393,8 +11275,8 @@
         </p:nvSpPr>
         <p:spPr>
           <a:xfrm>
-            <a:off x="1014984" y="5573268"/>
-            <a:ext cx="2011680" cy="352044"/>
+            <a:off x="1014984" y="5908548"/>
+            <a:ext cx="2011680" cy="382524"/>
           </a:xfrm>
           <a:prstGeom prst="rect">
             <a:avLst/>
@@ -11432,8 +11314,8 @@
         </p:nvSpPr>
         <p:spPr>
           <a:xfrm>
-            <a:off x="3099816" y="5652478"/>
-            <a:ext cx="759968" cy="193624"/>
+            <a:off x="3099816" y="5994616"/>
+            <a:ext cx="759968" cy="210388"/>
           </a:xfrm>
           <a:prstGeom prst="rect">
             <a:avLst/>
@@ -11452,8 +11334,8 @@
         </p:nvSpPr>
         <p:spPr>
           <a:xfrm>
-            <a:off x="4864608" y="5573268"/>
-            <a:ext cx="1051560" cy="352044"/>
+            <a:off x="4864608" y="5908548"/>
+            <a:ext cx="1051560" cy="382524"/>
           </a:xfrm>
           <a:prstGeom prst="rect">
             <a:avLst/>
@@ -11492,7 +11374,7 @@
         <p:spPr>
           <a:xfrm>
             <a:off x="6208776" y="1700784"/>
-            <a:ext cx="310896" cy="352044"/>
+            <a:ext cx="310896" cy="382524"/>
           </a:xfrm>
           <a:prstGeom prst="rect">
             <a:avLst/>
@@ -11531,7 +11413,7 @@
         <p:spPr>
           <a:xfrm>
             <a:off x="6565392" y="1700784"/>
-            <a:ext cx="2011680" cy="352044"/>
+            <a:ext cx="2011680" cy="382524"/>
           </a:xfrm>
           <a:prstGeom prst="rect">
             <a:avLst/>
@@ -11569,8 +11451,8 @@
         </p:nvSpPr>
         <p:spPr>
           <a:xfrm>
-            <a:off x="8650224" y="1779994"/>
-            <a:ext cx="759968" cy="193624"/>
+            <a:off x="8650224" y="1786852"/>
+            <a:ext cx="759968" cy="210388"/>
           </a:xfrm>
           <a:prstGeom prst="rect">
             <a:avLst/>
@@ -11590,7 +11472,7 @@
         <p:spPr>
           <a:xfrm>
             <a:off x="10415016" y="1700784"/>
-            <a:ext cx="1051560" cy="352044"/>
+            <a:ext cx="1051560" cy="382524"/>
           </a:xfrm>
           <a:prstGeom prst="rect">
             <a:avLst/>
@@ -11628,8 +11510,8 @@
         </p:nvSpPr>
         <p:spPr>
           <a:xfrm>
-            <a:off x="6208776" y="2052828"/>
-            <a:ext cx="310896" cy="352044"/>
+            <a:off x="6208776" y="2083308"/>
+            <a:ext cx="310896" cy="382524"/>
           </a:xfrm>
           <a:prstGeom prst="rect">
             <a:avLst/>
@@ -11667,8 +11549,8 @@
         </p:nvSpPr>
         <p:spPr>
           <a:xfrm>
-            <a:off x="6565392" y="2052828"/>
-            <a:ext cx="2011680" cy="352044"/>
+            <a:off x="6565392" y="2083308"/>
+            <a:ext cx="2011680" cy="382524"/>
           </a:xfrm>
           <a:prstGeom prst="rect">
             <a:avLst/>
@@ -11706,8 +11588,8 @@
         </p:nvSpPr>
         <p:spPr>
           <a:xfrm>
-            <a:off x="8650224" y="2132038"/>
-            <a:ext cx="759968" cy="193624"/>
+            <a:off x="8650224" y="2169376"/>
+            <a:ext cx="759968" cy="210388"/>
           </a:xfrm>
           <a:prstGeom prst="rect">
             <a:avLst/>
@@ -11726,8 +11608,8 @@
         </p:nvSpPr>
         <p:spPr>
           <a:xfrm>
-            <a:off x="10415016" y="2052828"/>
-            <a:ext cx="1051560" cy="352044"/>
+            <a:off x="10415016" y="2083308"/>
+            <a:ext cx="1051560" cy="382524"/>
           </a:xfrm>
           <a:prstGeom prst="rect">
             <a:avLst/>
@@ -11765,8 +11647,8 @@
         </p:nvSpPr>
         <p:spPr>
           <a:xfrm>
-            <a:off x="6208776" y="2404872"/>
-            <a:ext cx="310896" cy="352044"/>
+            <a:off x="6208776" y="2465832"/>
+            <a:ext cx="310896" cy="382524"/>
           </a:xfrm>
           <a:prstGeom prst="rect">
             <a:avLst/>
@@ -11804,8 +11686,8 @@
         </p:nvSpPr>
         <p:spPr>
           <a:xfrm>
-            <a:off x="6565392" y="2404872"/>
-            <a:ext cx="2011680" cy="352044"/>
+            <a:off x="6565392" y="2465832"/>
+            <a:ext cx="2011680" cy="382524"/>
           </a:xfrm>
           <a:prstGeom prst="rect">
             <a:avLst/>
@@ -11843,8 +11725,8 @@
         </p:nvSpPr>
         <p:spPr>
           <a:xfrm>
-            <a:off x="8650224" y="2484082"/>
-            <a:ext cx="569976" cy="193624"/>
+            <a:off x="8650224" y="2551900"/>
+            <a:ext cx="569976" cy="210388"/>
           </a:xfrm>
           <a:prstGeom prst="rect">
             <a:avLst/>
@@ -11863,8 +11745,8 @@
         </p:nvSpPr>
         <p:spPr>
           <a:xfrm>
-            <a:off x="10415016" y="2404872"/>
-            <a:ext cx="1051560" cy="352044"/>
+            <a:off x="10415016" y="2465832"/>
+            <a:ext cx="1051560" cy="382524"/>
           </a:xfrm>
           <a:prstGeom prst="rect">
             <a:avLst/>
@@ -11902,8 +11784,8 @@
         </p:nvSpPr>
         <p:spPr>
           <a:xfrm>
-            <a:off x="6208776" y="2756916"/>
-            <a:ext cx="310896" cy="352044"/>
+            <a:off x="6208776" y="2848356"/>
+            <a:ext cx="310896" cy="382524"/>
           </a:xfrm>
           <a:prstGeom prst="rect">
             <a:avLst/>
@@ -11941,8 +11823,8 @@
         </p:nvSpPr>
         <p:spPr>
           <a:xfrm>
-            <a:off x="6565392" y="2756916"/>
-            <a:ext cx="2011680" cy="352044"/>
+            <a:off x="6565392" y="2848356"/>
+            <a:ext cx="2011680" cy="382524"/>
           </a:xfrm>
           <a:prstGeom prst="rect">
             <a:avLst/>
@@ -11980,8 +11862,8 @@
         </p:nvSpPr>
         <p:spPr>
           <a:xfrm>
-            <a:off x="8650224" y="2836126"/>
-            <a:ext cx="379984" cy="193624"/>
+            <a:off x="8650224" y="2934424"/>
+            <a:ext cx="379984" cy="210388"/>
           </a:xfrm>
           <a:prstGeom prst="rect">
             <a:avLst/>
@@ -12000,8 +11882,8 @@
         </p:nvSpPr>
         <p:spPr>
           <a:xfrm>
-            <a:off x="10415016" y="2756916"/>
-            <a:ext cx="1051560" cy="352044"/>
+            <a:off x="10415016" y="2848356"/>
+            <a:ext cx="1051560" cy="382524"/>
           </a:xfrm>
           <a:prstGeom prst="rect">
             <a:avLst/>
@@ -12039,8 +11921,8 @@
         </p:nvSpPr>
         <p:spPr>
           <a:xfrm>
-            <a:off x="6208776" y="3108960"/>
-            <a:ext cx="310896" cy="352044"/>
+            <a:off x="6208776" y="3230880"/>
+            <a:ext cx="310896" cy="382524"/>
           </a:xfrm>
           <a:prstGeom prst="rect">
             <a:avLst/>
@@ -12078,8 +11960,8 @@
         </p:nvSpPr>
         <p:spPr>
           <a:xfrm>
-            <a:off x="6565392" y="3108960"/>
-            <a:ext cx="2011680" cy="352044"/>
+            <a:off x="6565392" y="3230880"/>
+            <a:ext cx="2011680" cy="382524"/>
           </a:xfrm>
           <a:prstGeom prst="rect">
             <a:avLst/>
@@ -12117,8 +11999,8 @@
         </p:nvSpPr>
         <p:spPr>
           <a:xfrm>
-            <a:off x="8650224" y="3188170"/>
-            <a:ext cx="379984" cy="193624"/>
+            <a:off x="8650224" y="3316948"/>
+            <a:ext cx="379984" cy="210388"/>
           </a:xfrm>
           <a:prstGeom prst="rect">
             <a:avLst/>
@@ -12137,8 +12019,8 @@
         </p:nvSpPr>
         <p:spPr>
           <a:xfrm>
-            <a:off x="10415016" y="3108960"/>
-            <a:ext cx="1051560" cy="352044"/>
+            <a:off x="10415016" y="3230880"/>
+            <a:ext cx="1051560" cy="382524"/>
           </a:xfrm>
           <a:prstGeom prst="rect">
             <a:avLst/>
@@ -12176,8 +12058,8 @@
         </p:nvSpPr>
         <p:spPr>
           <a:xfrm>
-            <a:off x="6208776" y="3461004"/>
-            <a:ext cx="310896" cy="352044"/>
+            <a:off x="6208776" y="3613404"/>
+            <a:ext cx="310896" cy="382524"/>
           </a:xfrm>
           <a:prstGeom prst="rect">
             <a:avLst/>
@@ -12215,8 +12097,8 @@
         </p:nvSpPr>
         <p:spPr>
           <a:xfrm>
-            <a:off x="6565392" y="3461004"/>
-            <a:ext cx="2011680" cy="352044"/>
+            <a:off x="6565392" y="3613404"/>
+            <a:ext cx="2011680" cy="382524"/>
           </a:xfrm>
           <a:prstGeom prst="rect">
             <a:avLst/>
@@ -12254,8 +12136,8 @@
         </p:nvSpPr>
         <p:spPr>
           <a:xfrm>
-            <a:off x="8650224" y="3540214"/>
-            <a:ext cx="379984" cy="193624"/>
+            <a:off x="8650224" y="3699472"/>
+            <a:ext cx="379984" cy="210388"/>
           </a:xfrm>
           <a:prstGeom prst="rect">
             <a:avLst/>
@@ -12274,8 +12156,8 @@
         </p:nvSpPr>
         <p:spPr>
           <a:xfrm>
-            <a:off x="10415016" y="3461004"/>
-            <a:ext cx="1051560" cy="352044"/>
+            <a:off x="10415016" y="3613404"/>
+            <a:ext cx="1051560" cy="382524"/>
           </a:xfrm>
           <a:prstGeom prst="rect">
             <a:avLst/>
@@ -12313,8 +12195,8 @@
         </p:nvSpPr>
         <p:spPr>
           <a:xfrm>
-            <a:off x="6208776" y="3813048"/>
-            <a:ext cx="310896" cy="352044"/>
+            <a:off x="6208776" y="3995928"/>
+            <a:ext cx="310896" cy="382524"/>
           </a:xfrm>
           <a:prstGeom prst="rect">
             <a:avLst/>
@@ -12352,8 +12234,8 @@
         </p:nvSpPr>
         <p:spPr>
           <a:xfrm>
-            <a:off x="6565392" y="3813048"/>
-            <a:ext cx="2011680" cy="352044"/>
+            <a:off x="6565392" y="3995928"/>
+            <a:ext cx="2011680" cy="382524"/>
           </a:xfrm>
           <a:prstGeom prst="rect">
             <a:avLst/>
@@ -12391,8 +12273,8 @@
         </p:nvSpPr>
         <p:spPr>
           <a:xfrm>
-            <a:off x="8650224" y="3892258"/>
-            <a:ext cx="379984" cy="193624"/>
+            <a:off x="8650224" y="4081996"/>
+            <a:ext cx="379984" cy="210388"/>
           </a:xfrm>
           <a:prstGeom prst="rect">
             <a:avLst/>
@@ -12411,8 +12293,8 @@
         </p:nvSpPr>
         <p:spPr>
           <a:xfrm>
-            <a:off x="10415016" y="3813048"/>
-            <a:ext cx="1051560" cy="352044"/>
+            <a:off x="10415016" y="3995928"/>
+            <a:ext cx="1051560" cy="382524"/>
           </a:xfrm>
           <a:prstGeom prst="rect">
             <a:avLst/>
@@ -12450,8 +12332,8 @@
         </p:nvSpPr>
         <p:spPr>
           <a:xfrm>
-            <a:off x="6208776" y="4165092"/>
-            <a:ext cx="310896" cy="352044"/>
+            <a:off x="6208776" y="4378452"/>
+            <a:ext cx="310896" cy="382524"/>
           </a:xfrm>
           <a:prstGeom prst="rect">
             <a:avLst/>
@@ -12489,8 +12371,8 @@
         </p:nvSpPr>
         <p:spPr>
           <a:xfrm>
-            <a:off x="6565392" y="4165092"/>
-            <a:ext cx="2011680" cy="352044"/>
+            <a:off x="6565392" y="4378452"/>
+            <a:ext cx="2011680" cy="382524"/>
           </a:xfrm>
           <a:prstGeom prst="rect">
             <a:avLst/>
@@ -12528,8 +12410,8 @@
         </p:nvSpPr>
         <p:spPr>
           <a:xfrm>
-            <a:off x="8650224" y="4244302"/>
-            <a:ext cx="379984" cy="193624"/>
+            <a:off x="8650224" y="4464520"/>
+            <a:ext cx="379984" cy="210388"/>
           </a:xfrm>
           <a:prstGeom prst="rect">
             <a:avLst/>
@@ -12548,8 +12430,8 @@
         </p:nvSpPr>
         <p:spPr>
           <a:xfrm>
-            <a:off x="10415016" y="4165092"/>
-            <a:ext cx="1051560" cy="352044"/>
+            <a:off x="10415016" y="4378452"/>
+            <a:ext cx="1051560" cy="382524"/>
           </a:xfrm>
           <a:prstGeom prst="rect">
             <a:avLst/>
@@ -12587,8 +12469,8 @@
         </p:nvSpPr>
         <p:spPr>
           <a:xfrm>
-            <a:off x="6208776" y="4517136"/>
-            <a:ext cx="310896" cy="352044"/>
+            <a:off x="6208776" y="4760976"/>
+            <a:ext cx="310896" cy="382524"/>
           </a:xfrm>
           <a:prstGeom prst="rect">
             <a:avLst/>
@@ -12626,8 +12508,8 @@
         </p:nvSpPr>
         <p:spPr>
           <a:xfrm>
-            <a:off x="6565392" y="4517136"/>
-            <a:ext cx="2011680" cy="352044"/>
+            <a:off x="6565392" y="4760976"/>
+            <a:ext cx="2011680" cy="382524"/>
           </a:xfrm>
           <a:prstGeom prst="rect">
             <a:avLst/>
@@ -12665,8 +12547,8 @@
         </p:nvSpPr>
         <p:spPr>
           <a:xfrm>
-            <a:off x="8650224" y="4596346"/>
-            <a:ext cx="379984" cy="193624"/>
+            <a:off x="8650224" y="4847044"/>
+            <a:ext cx="379984" cy="210388"/>
           </a:xfrm>
           <a:prstGeom prst="rect">
             <a:avLst/>
@@ -12685,8 +12567,8 @@
         </p:nvSpPr>
         <p:spPr>
           <a:xfrm>
-            <a:off x="10415016" y="4517136"/>
-            <a:ext cx="1051560" cy="352044"/>
+            <a:off x="10415016" y="4760976"/>
+            <a:ext cx="1051560" cy="382524"/>
           </a:xfrm>
           <a:prstGeom prst="rect">
             <a:avLst/>
@@ -12724,8 +12606,8 @@
         </p:nvSpPr>
         <p:spPr>
           <a:xfrm>
-            <a:off x="6208776" y="4869180"/>
-            <a:ext cx="310896" cy="352044"/>
+            <a:off x="6208776" y="5143500"/>
+            <a:ext cx="310896" cy="382524"/>
           </a:xfrm>
           <a:prstGeom prst="rect">
             <a:avLst/>
@@ -12763,8 +12645,8 @@
         </p:nvSpPr>
         <p:spPr>
           <a:xfrm>
-            <a:off x="6565392" y="4869180"/>
-            <a:ext cx="2011680" cy="352044"/>
+            <a:off x="6565392" y="5143500"/>
+            <a:ext cx="2011680" cy="382524"/>
           </a:xfrm>
           <a:prstGeom prst="rect">
             <a:avLst/>
@@ -12802,8 +12684,8 @@
         </p:nvSpPr>
         <p:spPr>
           <a:xfrm>
-            <a:off x="8650224" y="4948390"/>
-            <a:ext cx="189992" cy="193624"/>
+            <a:off x="8650224" y="5229568"/>
+            <a:ext cx="189992" cy="210388"/>
           </a:xfrm>
           <a:prstGeom prst="rect">
             <a:avLst/>
@@ -12822,8 +12704,8 @@
         </p:nvSpPr>
         <p:spPr>
           <a:xfrm>
-            <a:off x="10415016" y="4869180"/>
-            <a:ext cx="1051560" cy="352044"/>
+            <a:off x="10415016" y="5143500"/>
+            <a:ext cx="1051560" cy="382524"/>
           </a:xfrm>
           <a:prstGeom prst="rect">
             <a:avLst/>
@@ -12861,8 +12743,8 @@
         </p:nvSpPr>
         <p:spPr>
           <a:xfrm>
-            <a:off x="6208776" y="5221224"/>
-            <a:ext cx="310896" cy="352044"/>
+            <a:off x="6208776" y="5526024"/>
+            <a:ext cx="310896" cy="382524"/>
           </a:xfrm>
           <a:prstGeom prst="rect">
             <a:avLst/>
@@ -12900,8 +12782,8 @@
         </p:nvSpPr>
         <p:spPr>
           <a:xfrm>
-            <a:off x="6565392" y="5221224"/>
-            <a:ext cx="2011680" cy="352044"/>
+            <a:off x="6565392" y="5526024"/>
+            <a:ext cx="2011680" cy="382524"/>
           </a:xfrm>
           <a:prstGeom prst="rect">
             <a:avLst/>
@@ -12939,8 +12821,8 @@
         </p:nvSpPr>
         <p:spPr>
           <a:xfrm>
-            <a:off x="8650224" y="5300434"/>
-            <a:ext cx="189992" cy="193624"/>
+            <a:off x="8650224" y="5612092"/>
+            <a:ext cx="189992" cy="210388"/>
           </a:xfrm>
           <a:prstGeom prst="rect">
             <a:avLst/>
@@ -12959,8 +12841,8 @@
         </p:nvSpPr>
         <p:spPr>
           <a:xfrm>
-            <a:off x="10415016" y="5221224"/>
-            <a:ext cx="1051560" cy="352044"/>
+            <a:off x="10415016" y="5526024"/>
+            <a:ext cx="1051560" cy="382524"/>
           </a:xfrm>
           <a:prstGeom prst="rect">
             <a:avLst/>
@@ -12999,7 +12881,7 @@
         <p:spPr>
           <a:xfrm>
             <a:off x="6085332" y="1700784"/>
-            <a:ext cx="10973" cy="4224528"/>
+            <a:ext cx="10973" cy="4590288"/>
           </a:xfrm>
           <a:prstGeom prst="rect">
             <a:avLst/>
@@ -13009,65 +12891,6 @@
           </a:solidFill>
           <a:ln/>
         </p:spPr>
-      </p:sp>
-      <p:sp>
-        <p:nvSpPr>
-          <p:cNvPr id="101" name="Shape 99"/>
-          <p:cNvSpPr/>
-          <p:nvPr/>
-        </p:nvSpPr>
-        <p:spPr>
-          <a:xfrm>
-            <a:off x="457200" y="6126480"/>
-            <a:ext cx="11274552" cy="371856"/>
-          </a:xfrm>
-          <a:prstGeom prst="rect">
-            <a:avLst/>
-          </a:prstGeom>
-          <a:solidFill>
-            <a:srgbClr val="E6F6EE"/>
-          </a:solidFill>
-          <a:ln/>
-        </p:spPr>
-      </p:sp>
-      <p:sp>
-        <p:nvSpPr>
-          <p:cNvPr id="102" name="Text 100"/>
-          <p:cNvSpPr txBox="1"/>
-          <p:nvPr/>
-        </p:nvSpPr>
-        <p:spPr>
-          <a:xfrm>
-            <a:off x="658368" y="6144768"/>
-            <a:ext cx="10927080" cy="335280"/>
-          </a:xfrm>
-          <a:prstGeom prst="rect">
-            <a:avLst/>
-          </a:prstGeom>
-          <a:noFill/>
-          <a:ln/>
-        </p:spPr>
-        <p:txBody>
-          <a:bodyPr wrap="square" lIns="0" tIns="0" rIns="0" bIns="0" rtlCol="0" anchor="ctr"/>
-          <a:lstStyle/>
-          <a:p>
-            <a:pPr indent="0" marL="0">
-              <a:buNone/>
-            </a:pPr>
-            <a:r>
-              <a:rPr lang="en-US" sz="1600" b="1" dirty="0">
-                <a:solidFill>
-                  <a:srgbClr val="0B7A4A"/>
-                </a:solidFill>
-                <a:latin typeface="Inter" pitchFamily="34" charset="0"/>
-                <a:ea typeface="Inter" pitchFamily="34" charset="-122"/>
-                <a:cs typeface="Inter" pitchFamily="34" charset="-120"/>
-              </a:rPr>
-              <a:t>23 of 33 stores set a new monthly record in 2026; Honda Spokane and Nissan set the most, 9 each.</a:t>
-            </a:r>
-            <a:endParaRPr lang="en-US" sz="1600" dirty="0"/>
-          </a:p>
-        </p:txBody>
       </p:sp>
     </p:spTree>
   </p:cSld>

--- a/day2-deck/decks/Store Records - Review.pptx
+++ b/day2-deck/decks/Store Records - Review.pptx
@@ -1035,7 +1035,7 @@
           <a:p>
             <a:r>
               <a:rPr lang="en-US" dirty="0"/>
-              <a:t>Takeaway (off the slide): Hyundai Prescott, Lincoln, Lexus and Audi Henderson beat their previous best by the most in percentage terms.Source: Qlik - Fixed Ops Accounting TB (Family FIXED GROSS, service + parts, body shop excluded), pulled Oct 8 2026. History Jan 2021 - Sep 2026; months before a store opened are ignored. Same-store, INEOS excluded. Matches the P&amp;L for every store except GMC PRESCOTT service (TB higher by $153,746 Jan-Sep 2026, $286,430 Jan-Sep 2025; GMC PRESCOTT's combined record holds on both). Combined service + parts, Jan-Sep 2026 vs the store's best prior Jan-Sep.</a:t>
+              <a:t>Takeaway with the store call-outs (off the slide): Hyundai Prescott, Lincoln, Lexus and Audi Henderson beat their previous best by the most in percentage terms.Source: Qlik - Fixed Ops Accounting TB (Family FIXED GROSS, service + parts, body shop excluded), pulled Oct 8 2026. History Jan 2021 - Sep 2026; months before a store opened are ignored. Same-store, INEOS excluded. Matches the P&amp;L for every store except GMC PRESCOTT service (TB higher by $153,746 Jan-Sep 2026, $286,430 Jan-Sep 2025; GMC PRESCOTT's combined record holds on both). Combined service + parts, Jan-Sep 2026 vs the store's best prior Jan-Sep.</a:t>
             </a:r>
             <a:endParaRPr lang="en-US" dirty="0"/>
           </a:p>
@@ -1123,7 +1123,7 @@
           <a:p>
             <a:r>
               <a:rPr lang="en-US" dirty="0"/>
-              <a:t>Takeaway (off the slide): Toyota Henderson, Audi Henderson, Lexus and Lincoln beat their previous best by the most in dollars.Source: Qlik - Fixed Ops Accounting TB (Family FIXED GROSS, service + parts, body shop excluded), pulled Oct 8 2026. History Jan 2021 - Sep 2026; months before a store opened are ignored. Same-store, INEOS excluded. Matches the P&amp;L for every store except GMC PRESCOTT service (TB higher by $153,746 Jan-Sep 2026, $286,430 Jan-Sep 2025; GMC PRESCOTT's combined record holds on both). Combined service + parts, Jan-Sep 2026 vs the store's best prior Jan-Sep.</a:t>
+              <a:t>Takeaway with the store call-outs (off the slide): Toyota Henderson, Audi Henderson, Lexus and Lincoln beat their previous best by the most in dollars.Source: Qlik - Fixed Ops Accounting TB (Family FIXED GROSS, service + parts, body shop excluded), pulled Oct 8 2026. History Jan 2021 - Sep 2026; months before a store opened are ignored. Same-store, INEOS excluded. Matches the P&amp;L for every store except GMC PRESCOTT service (TB higher by $153,746 Jan-Sep 2026, $286,430 Jan-Sep 2025; GMC PRESCOTT's combined record holds on both). Combined service + parts, Jan-Sep 2026 vs the store's best prior Jan-Sep.</a:t>
             </a:r>
             <a:endParaRPr lang="en-US" dirty="0"/>
           </a:p>
@@ -1211,7 +1211,7 @@
           <a:p>
             <a:r>
               <a:rPr lang="en-US" dirty="0"/>
-              <a:t>Takeaway (off the slide): 23 of 33 stores set a new monthly record in 2026; Honda Spokane and Nissan set the most, 9 each.Source: Qlik - Fixed Ops Accounting TB (Family FIXED GROSS, service + parts, body shop excluded), pulled Oct 8 2026. History Jan 2021 - Sep 2026; months before a store opened are ignored. Same-store, INEOS excluded. Matches the P&amp;L for every store except GMC PRESCOTT service (TB higher by $153,746 Jan-Sep 2026, $286,430 Jan-Sep 2025; GMC PRESCOTT's combined record holds on both). Count of times a store set a new all-time monthly high in service, parts or combined gross, Jan-Sep 2026. Each new high counts, so a record beaten twice counts twice.</a:t>
+              <a:t>Takeaway with the store call-outs (off the slide): 23 of 33 stores set a new monthly record in 2026; Honda Spokane and Nissan set the most, 9 each.Source: Qlik - Fixed Ops Accounting TB (Family FIXED GROSS, service + parts, body shop excluded), pulled Oct 8 2026. History Jan 2021 - Sep 2026; months before a store opened are ignored. Same-store, INEOS excluded. Matches the P&amp;L for every store except GMC PRESCOTT service (TB higher by $153,746 Jan-Sep 2026, $286,430 Jan-Sep 2025; GMC PRESCOTT's combined record holds on both). Count of times a store set a new all-time monthly high in service, parts or combined gross, Jan-Sep 2026. Each new high counts, so a record beaten twice counts twice.</a:t>
             </a:r>
             <a:endParaRPr lang="en-US" dirty="0"/>
           </a:p>
@@ -9632,7 +9632,7 @@
         <p:spPr>
           <a:xfrm>
             <a:off x="457200" y="1207008"/>
-            <a:ext cx="11274552" cy="5148072"/>
+            <a:ext cx="11274552" cy="4782312"/>
           </a:xfrm>
           <a:prstGeom prst="rect">
             <a:avLst/>
@@ -9730,7 +9730,7 @@
         <p:spPr>
           <a:xfrm>
             <a:off x="658368" y="1700784"/>
-            <a:ext cx="310896" cy="382524"/>
+            <a:ext cx="310896" cy="352044"/>
           </a:xfrm>
           <a:prstGeom prst="rect">
             <a:avLst/>
@@ -9769,7 +9769,7 @@
         <p:spPr>
           <a:xfrm>
             <a:off x="1014984" y="1700784"/>
-            <a:ext cx="2011680" cy="382524"/>
+            <a:ext cx="2011680" cy="352044"/>
           </a:xfrm>
           <a:prstGeom prst="rect">
             <a:avLst/>
@@ -9807,8 +9807,8 @@
         </p:nvSpPr>
         <p:spPr>
           <a:xfrm>
-            <a:off x="3099816" y="1786852"/>
-            <a:ext cx="1709928" cy="210388"/>
+            <a:off x="3099816" y="1779994"/>
+            <a:ext cx="1709928" cy="193624"/>
           </a:xfrm>
           <a:prstGeom prst="rect">
             <a:avLst/>
@@ -9828,7 +9828,7 @@
         <p:spPr>
           <a:xfrm>
             <a:off x="4864608" y="1700784"/>
-            <a:ext cx="1051560" cy="382524"/>
+            <a:ext cx="1051560" cy="352044"/>
           </a:xfrm>
           <a:prstGeom prst="rect">
             <a:avLst/>
@@ -9866,8 +9866,8 @@
         </p:nvSpPr>
         <p:spPr>
           <a:xfrm>
-            <a:off x="658368" y="2083308"/>
-            <a:ext cx="310896" cy="382524"/>
+            <a:off x="658368" y="2052828"/>
+            <a:ext cx="310896" cy="352044"/>
           </a:xfrm>
           <a:prstGeom prst="rect">
             <a:avLst/>
@@ -9905,8 +9905,8 @@
         </p:nvSpPr>
         <p:spPr>
           <a:xfrm>
-            <a:off x="1014984" y="2083308"/>
-            <a:ext cx="2011680" cy="382524"/>
+            <a:off x="1014984" y="2052828"/>
+            <a:ext cx="2011680" cy="352044"/>
           </a:xfrm>
           <a:prstGeom prst="rect">
             <a:avLst/>
@@ -9944,8 +9944,8 @@
         </p:nvSpPr>
         <p:spPr>
           <a:xfrm>
-            <a:off x="3099816" y="2169376"/>
-            <a:ext cx="1709928" cy="210388"/>
+            <a:off x="3099816" y="2132038"/>
+            <a:ext cx="1709928" cy="193624"/>
           </a:xfrm>
           <a:prstGeom prst="rect">
             <a:avLst/>
@@ -9964,8 +9964,8 @@
         </p:nvSpPr>
         <p:spPr>
           <a:xfrm>
-            <a:off x="4864608" y="2083308"/>
-            <a:ext cx="1051560" cy="382524"/>
+            <a:off x="4864608" y="2052828"/>
+            <a:ext cx="1051560" cy="352044"/>
           </a:xfrm>
           <a:prstGeom prst="rect">
             <a:avLst/>
@@ -10003,8 +10003,8 @@
         </p:nvSpPr>
         <p:spPr>
           <a:xfrm>
-            <a:off x="658368" y="2465832"/>
-            <a:ext cx="310896" cy="382524"/>
+            <a:off x="658368" y="2404872"/>
+            <a:ext cx="310896" cy="352044"/>
           </a:xfrm>
           <a:prstGeom prst="rect">
             <a:avLst/>
@@ -10042,8 +10042,8 @@
         </p:nvSpPr>
         <p:spPr>
           <a:xfrm>
-            <a:off x="1014984" y="2465832"/>
-            <a:ext cx="2011680" cy="382524"/>
+            <a:off x="1014984" y="2404872"/>
+            <a:ext cx="2011680" cy="352044"/>
           </a:xfrm>
           <a:prstGeom prst="rect">
             <a:avLst/>
@@ -10081,8 +10081,8 @@
         </p:nvSpPr>
         <p:spPr>
           <a:xfrm>
-            <a:off x="3099816" y="2551900"/>
-            <a:ext cx="1519936" cy="210388"/>
+            <a:off x="3099816" y="2484082"/>
+            <a:ext cx="1519936" cy="193624"/>
           </a:xfrm>
           <a:prstGeom prst="rect">
             <a:avLst/>
@@ -10101,8 +10101,8 @@
         </p:nvSpPr>
         <p:spPr>
           <a:xfrm>
-            <a:off x="4864608" y="2465832"/>
-            <a:ext cx="1051560" cy="382524"/>
+            <a:off x="4864608" y="2404872"/>
+            <a:ext cx="1051560" cy="352044"/>
           </a:xfrm>
           <a:prstGeom prst="rect">
             <a:avLst/>
@@ -10140,8 +10140,8 @@
         </p:nvSpPr>
         <p:spPr>
           <a:xfrm>
-            <a:off x="658368" y="2848356"/>
-            <a:ext cx="310896" cy="382524"/>
+            <a:off x="658368" y="2756916"/>
+            <a:ext cx="310896" cy="352044"/>
           </a:xfrm>
           <a:prstGeom prst="rect">
             <a:avLst/>
@@ -10179,8 +10179,8 @@
         </p:nvSpPr>
         <p:spPr>
           <a:xfrm>
-            <a:off x="1014984" y="2848356"/>
-            <a:ext cx="2011680" cy="382524"/>
+            <a:off x="1014984" y="2756916"/>
+            <a:ext cx="2011680" cy="352044"/>
           </a:xfrm>
           <a:prstGeom prst="rect">
             <a:avLst/>
@@ -10218,8 +10218,8 @@
         </p:nvSpPr>
         <p:spPr>
           <a:xfrm>
-            <a:off x="3099816" y="2934424"/>
-            <a:ext cx="1329944" cy="210388"/>
+            <a:off x="3099816" y="2836126"/>
+            <a:ext cx="1329944" cy="193624"/>
           </a:xfrm>
           <a:prstGeom prst="rect">
             <a:avLst/>
@@ -10238,8 +10238,8 @@
         </p:nvSpPr>
         <p:spPr>
           <a:xfrm>
-            <a:off x="4864608" y="2848356"/>
-            <a:ext cx="1051560" cy="382524"/>
+            <a:off x="4864608" y="2756916"/>
+            <a:ext cx="1051560" cy="352044"/>
           </a:xfrm>
           <a:prstGeom prst="rect">
             <a:avLst/>
@@ -10277,8 +10277,8 @@
         </p:nvSpPr>
         <p:spPr>
           <a:xfrm>
-            <a:off x="658368" y="3230880"/>
-            <a:ext cx="310896" cy="382524"/>
+            <a:off x="658368" y="3108960"/>
+            <a:ext cx="310896" cy="352044"/>
           </a:xfrm>
           <a:prstGeom prst="rect">
             <a:avLst/>
@@ -10316,8 +10316,8 @@
         </p:nvSpPr>
         <p:spPr>
           <a:xfrm>
-            <a:off x="1014984" y="3230880"/>
-            <a:ext cx="2011680" cy="382524"/>
+            <a:off x="1014984" y="3108960"/>
+            <a:ext cx="2011680" cy="352044"/>
           </a:xfrm>
           <a:prstGeom prst="rect">
             <a:avLst/>
@@ -10355,8 +10355,8 @@
         </p:nvSpPr>
         <p:spPr>
           <a:xfrm>
-            <a:off x="3099816" y="3316948"/>
-            <a:ext cx="1329944" cy="210388"/>
+            <a:off x="3099816" y="3188170"/>
+            <a:ext cx="1329944" cy="193624"/>
           </a:xfrm>
           <a:prstGeom prst="rect">
             <a:avLst/>
@@ -10375,8 +10375,8 @@
         </p:nvSpPr>
         <p:spPr>
           <a:xfrm>
-            <a:off x="4864608" y="3230880"/>
-            <a:ext cx="1051560" cy="382524"/>
+            <a:off x="4864608" y="3108960"/>
+            <a:ext cx="1051560" cy="352044"/>
           </a:xfrm>
           <a:prstGeom prst="rect">
             <a:avLst/>
@@ -10414,8 +10414,8 @@
         </p:nvSpPr>
         <p:spPr>
           <a:xfrm>
-            <a:off x="658368" y="3613404"/>
-            <a:ext cx="310896" cy="382524"/>
+            <a:off x="658368" y="3461004"/>
+            <a:ext cx="310896" cy="352044"/>
           </a:xfrm>
           <a:prstGeom prst="rect">
             <a:avLst/>
@@ -10453,8 +10453,8 @@
         </p:nvSpPr>
         <p:spPr>
           <a:xfrm>
-            <a:off x="1014984" y="3613404"/>
-            <a:ext cx="2011680" cy="382524"/>
+            <a:off x="1014984" y="3461004"/>
+            <a:ext cx="2011680" cy="352044"/>
           </a:xfrm>
           <a:prstGeom prst="rect">
             <a:avLst/>
@@ -10492,8 +10492,8 @@
         </p:nvSpPr>
         <p:spPr>
           <a:xfrm>
-            <a:off x="3099816" y="3699472"/>
-            <a:ext cx="1139952" cy="210388"/>
+            <a:off x="3099816" y="3540214"/>
+            <a:ext cx="1139952" cy="193624"/>
           </a:xfrm>
           <a:prstGeom prst="rect">
             <a:avLst/>
@@ -10512,8 +10512,8 @@
         </p:nvSpPr>
         <p:spPr>
           <a:xfrm>
-            <a:off x="4864608" y="3613404"/>
-            <a:ext cx="1051560" cy="382524"/>
+            <a:off x="4864608" y="3461004"/>
+            <a:ext cx="1051560" cy="352044"/>
           </a:xfrm>
           <a:prstGeom prst="rect">
             <a:avLst/>
@@ -10551,8 +10551,8 @@
         </p:nvSpPr>
         <p:spPr>
           <a:xfrm>
-            <a:off x="658368" y="3995928"/>
-            <a:ext cx="310896" cy="382524"/>
+            <a:off x="658368" y="3813048"/>
+            <a:ext cx="310896" cy="352044"/>
           </a:xfrm>
           <a:prstGeom prst="rect">
             <a:avLst/>
@@ -10590,8 +10590,8 @@
         </p:nvSpPr>
         <p:spPr>
           <a:xfrm>
-            <a:off x="1014984" y="3995928"/>
-            <a:ext cx="2011680" cy="382524"/>
+            <a:off x="1014984" y="3813048"/>
+            <a:ext cx="2011680" cy="352044"/>
           </a:xfrm>
           <a:prstGeom prst="rect">
             <a:avLst/>
@@ -10629,8 +10629,8 @@
         </p:nvSpPr>
         <p:spPr>
           <a:xfrm>
-            <a:off x="3099816" y="4081996"/>
-            <a:ext cx="1139952" cy="210388"/>
+            <a:off x="3099816" y="3892258"/>
+            <a:ext cx="1139952" cy="193624"/>
           </a:xfrm>
           <a:prstGeom prst="rect">
             <a:avLst/>
@@ -10649,8 +10649,8 @@
         </p:nvSpPr>
         <p:spPr>
           <a:xfrm>
-            <a:off x="4864608" y="3995928"/>
-            <a:ext cx="1051560" cy="382524"/>
+            <a:off x="4864608" y="3813048"/>
+            <a:ext cx="1051560" cy="352044"/>
           </a:xfrm>
           <a:prstGeom prst="rect">
             <a:avLst/>
@@ -10688,8 +10688,8 @@
         </p:nvSpPr>
         <p:spPr>
           <a:xfrm>
-            <a:off x="658368" y="4378452"/>
-            <a:ext cx="310896" cy="382524"/>
+            <a:off x="658368" y="4165092"/>
+            <a:ext cx="310896" cy="352044"/>
           </a:xfrm>
           <a:prstGeom prst="rect">
             <a:avLst/>
@@ -10727,8 +10727,8 @@
         </p:nvSpPr>
         <p:spPr>
           <a:xfrm>
-            <a:off x="1014984" y="4378452"/>
-            <a:ext cx="2011680" cy="382524"/>
+            <a:off x="1014984" y="4165092"/>
+            <a:ext cx="2011680" cy="352044"/>
           </a:xfrm>
           <a:prstGeom prst="rect">
             <a:avLst/>
@@ -10766,8 +10766,8 @@
         </p:nvSpPr>
         <p:spPr>
           <a:xfrm>
-            <a:off x="3099816" y="4464520"/>
-            <a:ext cx="949960" cy="210388"/>
+            <a:off x="3099816" y="4244302"/>
+            <a:ext cx="949960" cy="193624"/>
           </a:xfrm>
           <a:prstGeom prst="rect">
             <a:avLst/>
@@ -10786,8 +10786,8 @@
         </p:nvSpPr>
         <p:spPr>
           <a:xfrm>
-            <a:off x="4864608" y="4378452"/>
-            <a:ext cx="1051560" cy="382524"/>
+            <a:off x="4864608" y="4165092"/>
+            <a:ext cx="1051560" cy="352044"/>
           </a:xfrm>
           <a:prstGeom prst="rect">
             <a:avLst/>
@@ -10825,8 +10825,8 @@
         </p:nvSpPr>
         <p:spPr>
           <a:xfrm>
-            <a:off x="658368" y="4760976"/>
-            <a:ext cx="310896" cy="382524"/>
+            <a:off x="658368" y="4517136"/>
+            <a:ext cx="310896" cy="352044"/>
           </a:xfrm>
           <a:prstGeom prst="rect">
             <a:avLst/>
@@ -10864,8 +10864,8 @@
         </p:nvSpPr>
         <p:spPr>
           <a:xfrm>
-            <a:off x="1014984" y="4760976"/>
-            <a:ext cx="2011680" cy="382524"/>
+            <a:off x="1014984" y="4517136"/>
+            <a:ext cx="2011680" cy="352044"/>
           </a:xfrm>
           <a:prstGeom prst="rect">
             <a:avLst/>
@@ -10903,8 +10903,8 @@
         </p:nvSpPr>
         <p:spPr>
           <a:xfrm>
-            <a:off x="3099816" y="4847044"/>
-            <a:ext cx="759968" cy="210388"/>
+            <a:off x="3099816" y="4596346"/>
+            <a:ext cx="759968" cy="193624"/>
           </a:xfrm>
           <a:prstGeom prst="rect">
             <a:avLst/>
@@ -10923,8 +10923,8 @@
         </p:nvSpPr>
         <p:spPr>
           <a:xfrm>
-            <a:off x="4864608" y="4760976"/>
-            <a:ext cx="1051560" cy="382524"/>
+            <a:off x="4864608" y="4517136"/>
+            <a:ext cx="1051560" cy="352044"/>
           </a:xfrm>
           <a:prstGeom prst="rect">
             <a:avLst/>
@@ -10962,8 +10962,8 @@
         </p:nvSpPr>
         <p:spPr>
           <a:xfrm>
-            <a:off x="658368" y="5143500"/>
-            <a:ext cx="310896" cy="382524"/>
+            <a:off x="658368" y="4869180"/>
+            <a:ext cx="310896" cy="352044"/>
           </a:xfrm>
           <a:prstGeom prst="rect">
             <a:avLst/>
@@ -11001,8 +11001,8 @@
         </p:nvSpPr>
         <p:spPr>
           <a:xfrm>
-            <a:off x="1014984" y="5143500"/>
-            <a:ext cx="2011680" cy="382524"/>
+            <a:off x="1014984" y="4869180"/>
+            <a:ext cx="2011680" cy="352044"/>
           </a:xfrm>
           <a:prstGeom prst="rect">
             <a:avLst/>
@@ -11040,8 +11040,8 @@
         </p:nvSpPr>
         <p:spPr>
           <a:xfrm>
-            <a:off x="3099816" y="5229568"/>
-            <a:ext cx="759968" cy="210388"/>
+            <a:off x="3099816" y="4948390"/>
+            <a:ext cx="759968" cy="193624"/>
           </a:xfrm>
           <a:prstGeom prst="rect">
             <a:avLst/>
@@ -11060,8 +11060,8 @@
         </p:nvSpPr>
         <p:spPr>
           <a:xfrm>
-            <a:off x="4864608" y="5143500"/>
-            <a:ext cx="1051560" cy="382524"/>
+            <a:off x="4864608" y="4869180"/>
+            <a:ext cx="1051560" cy="352044"/>
           </a:xfrm>
           <a:prstGeom prst="rect">
             <a:avLst/>
@@ -11099,8 +11099,8 @@
         </p:nvSpPr>
         <p:spPr>
           <a:xfrm>
-            <a:off x="658368" y="5526024"/>
-            <a:ext cx="310896" cy="382524"/>
+            <a:off x="658368" y="5221224"/>
+            <a:ext cx="310896" cy="352044"/>
           </a:xfrm>
           <a:prstGeom prst="rect">
             <a:avLst/>
@@ -11138,8 +11138,8 @@
         </p:nvSpPr>
         <p:spPr>
           <a:xfrm>
-            <a:off x="1014984" y="5526024"/>
-            <a:ext cx="2011680" cy="382524"/>
+            <a:off x="1014984" y="5221224"/>
+            <a:ext cx="2011680" cy="352044"/>
           </a:xfrm>
           <a:prstGeom prst="rect">
             <a:avLst/>
@@ -11177,8 +11177,8 @@
         </p:nvSpPr>
         <p:spPr>
           <a:xfrm>
-            <a:off x="3099816" y="5612092"/>
-            <a:ext cx="759968" cy="210388"/>
+            <a:off x="3099816" y="5300434"/>
+            <a:ext cx="759968" cy="193624"/>
           </a:xfrm>
           <a:prstGeom prst="rect">
             <a:avLst/>
@@ -11197,8 +11197,8 @@
         </p:nvSpPr>
         <p:spPr>
           <a:xfrm>
-            <a:off x="4864608" y="5526024"/>
-            <a:ext cx="1051560" cy="382524"/>
+            <a:off x="4864608" y="5221224"/>
+            <a:ext cx="1051560" cy="352044"/>
           </a:xfrm>
           <a:prstGeom prst="rect">
             <a:avLst/>
@@ -11236,8 +11236,8 @@
         </p:nvSpPr>
         <p:spPr>
           <a:xfrm>
-            <a:off x="658368" y="5908548"/>
-            <a:ext cx="310896" cy="382524"/>
+            <a:off x="658368" y="5573268"/>
+            <a:ext cx="310896" cy="352044"/>
           </a:xfrm>
           <a:prstGeom prst="rect">
             <a:avLst/>
@@ -11275,8 +11275,8 @@
         </p:nvSpPr>
         <p:spPr>
           <a:xfrm>
-            <a:off x="1014984" y="5908548"/>
-            <a:ext cx="2011680" cy="382524"/>
+            <a:off x="1014984" y="5573268"/>
+            <a:ext cx="2011680" cy="352044"/>
           </a:xfrm>
           <a:prstGeom prst="rect">
             <a:avLst/>
@@ -11314,8 +11314,8 @@
         </p:nvSpPr>
         <p:spPr>
           <a:xfrm>
-            <a:off x="3099816" y="5994616"/>
-            <a:ext cx="759968" cy="210388"/>
+            <a:off x="3099816" y="5652478"/>
+            <a:ext cx="759968" cy="193624"/>
           </a:xfrm>
           <a:prstGeom prst="rect">
             <a:avLst/>
@@ -11334,8 +11334,8 @@
         </p:nvSpPr>
         <p:spPr>
           <a:xfrm>
-            <a:off x="4864608" y="5908548"/>
-            <a:ext cx="1051560" cy="382524"/>
+            <a:off x="4864608" y="5573268"/>
+            <a:ext cx="1051560" cy="352044"/>
           </a:xfrm>
           <a:prstGeom prst="rect">
             <a:avLst/>
@@ -11374,7 +11374,7 @@
         <p:spPr>
           <a:xfrm>
             <a:off x="6208776" y="1700784"/>
-            <a:ext cx="310896" cy="382524"/>
+            <a:ext cx="310896" cy="352044"/>
           </a:xfrm>
           <a:prstGeom prst="rect">
             <a:avLst/>
@@ -11413,7 +11413,7 @@
         <p:spPr>
           <a:xfrm>
             <a:off x="6565392" y="1700784"/>
-            <a:ext cx="2011680" cy="382524"/>
+            <a:ext cx="2011680" cy="352044"/>
           </a:xfrm>
           <a:prstGeom prst="rect">
             <a:avLst/>
@@ -11451,8 +11451,8 @@
         </p:nvSpPr>
         <p:spPr>
           <a:xfrm>
-            <a:off x="8650224" y="1786852"/>
-            <a:ext cx="759968" cy="210388"/>
+            <a:off x="8650224" y="1779994"/>
+            <a:ext cx="759968" cy="193624"/>
           </a:xfrm>
           <a:prstGeom prst="rect">
             <a:avLst/>
@@ -11472,7 +11472,7 @@
         <p:spPr>
           <a:xfrm>
             <a:off x="10415016" y="1700784"/>
-            <a:ext cx="1051560" cy="382524"/>
+            <a:ext cx="1051560" cy="352044"/>
           </a:xfrm>
           <a:prstGeom prst="rect">
             <a:avLst/>
@@ -11510,8 +11510,8 @@
         </p:nvSpPr>
         <p:spPr>
           <a:xfrm>
-            <a:off x="6208776" y="2083308"/>
-            <a:ext cx="310896" cy="382524"/>
+            <a:off x="6208776" y="2052828"/>
+            <a:ext cx="310896" cy="352044"/>
           </a:xfrm>
           <a:prstGeom prst="rect">
             <a:avLst/>
@@ -11549,8 +11549,8 @@
         </p:nvSpPr>
         <p:spPr>
           <a:xfrm>
-            <a:off x="6565392" y="2083308"/>
-            <a:ext cx="2011680" cy="382524"/>
+            <a:off x="6565392" y="2052828"/>
+            <a:ext cx="2011680" cy="352044"/>
           </a:xfrm>
           <a:prstGeom prst="rect">
             <a:avLst/>
@@ -11588,8 +11588,8 @@
         </p:nvSpPr>
         <p:spPr>
           <a:xfrm>
-            <a:off x="8650224" y="2169376"/>
-            <a:ext cx="759968" cy="210388"/>
+            <a:off x="8650224" y="2132038"/>
+            <a:ext cx="759968" cy="193624"/>
           </a:xfrm>
           <a:prstGeom prst="rect">
             <a:avLst/>
@@ -11608,8 +11608,8 @@
         </p:nvSpPr>
         <p:spPr>
           <a:xfrm>
-            <a:off x="10415016" y="2083308"/>
-            <a:ext cx="1051560" cy="382524"/>
+            <a:off x="10415016" y="2052828"/>
+            <a:ext cx="1051560" cy="352044"/>
           </a:xfrm>
           <a:prstGeom prst="rect">
             <a:avLst/>
@@ -11647,8 +11647,8 @@
         </p:nvSpPr>
         <p:spPr>
           <a:xfrm>
-            <a:off x="6208776" y="2465832"/>
-            <a:ext cx="310896" cy="382524"/>
+            <a:off x="6208776" y="2404872"/>
+            <a:ext cx="310896" cy="352044"/>
           </a:xfrm>
           <a:prstGeom prst="rect">
             <a:avLst/>
@@ -11686,8 +11686,8 @@
         </p:nvSpPr>
         <p:spPr>
           <a:xfrm>
-            <a:off x="6565392" y="2465832"/>
-            <a:ext cx="2011680" cy="382524"/>
+            <a:off x="6565392" y="2404872"/>
+            <a:ext cx="2011680" cy="352044"/>
           </a:xfrm>
           <a:prstGeom prst="rect">
             <a:avLst/>
@@ -11725,8 +11725,8 @@
         </p:nvSpPr>
         <p:spPr>
           <a:xfrm>
-            <a:off x="8650224" y="2551900"/>
-            <a:ext cx="569976" cy="210388"/>
+            <a:off x="8650224" y="2484082"/>
+            <a:ext cx="569976" cy="193624"/>
           </a:xfrm>
           <a:prstGeom prst="rect">
             <a:avLst/>
@@ -11745,8 +11745,8 @@
         </p:nvSpPr>
         <p:spPr>
           <a:xfrm>
-            <a:off x="10415016" y="2465832"/>
-            <a:ext cx="1051560" cy="382524"/>
+            <a:off x="10415016" y="2404872"/>
+            <a:ext cx="1051560" cy="352044"/>
           </a:xfrm>
           <a:prstGeom prst="rect">
             <a:avLst/>
@@ -11784,8 +11784,8 @@
         </p:nvSpPr>
         <p:spPr>
           <a:xfrm>
-            <a:off x="6208776" y="2848356"/>
-            <a:ext cx="310896" cy="382524"/>
+            <a:off x="6208776" y="2756916"/>
+            <a:ext cx="310896" cy="352044"/>
           </a:xfrm>
           <a:prstGeom prst="rect">
             <a:avLst/>
@@ -11823,8 +11823,8 @@
         </p:nvSpPr>
         <p:spPr>
           <a:xfrm>
-            <a:off x="6565392" y="2848356"/>
-            <a:ext cx="2011680" cy="382524"/>
+            <a:off x="6565392" y="2756916"/>
+            <a:ext cx="2011680" cy="352044"/>
           </a:xfrm>
           <a:prstGeom prst="rect">
             <a:avLst/>
@@ -11862,8 +11862,8 @@
         </p:nvSpPr>
         <p:spPr>
           <a:xfrm>
-            <a:off x="8650224" y="2934424"/>
-            <a:ext cx="379984" cy="210388"/>
+            <a:off x="8650224" y="2836126"/>
+            <a:ext cx="379984" cy="193624"/>
           </a:xfrm>
           <a:prstGeom prst="rect">
             <a:avLst/>
@@ -11882,8 +11882,8 @@
         </p:nvSpPr>
         <p:spPr>
           <a:xfrm>
-            <a:off x="10415016" y="2848356"/>
-            <a:ext cx="1051560" cy="382524"/>
+            <a:off x="10415016" y="2756916"/>
+            <a:ext cx="1051560" cy="352044"/>
           </a:xfrm>
           <a:prstGeom prst="rect">
             <a:avLst/>
@@ -11921,8 +11921,8 @@
         </p:nvSpPr>
         <p:spPr>
           <a:xfrm>
-            <a:off x="6208776" y="3230880"/>
-            <a:ext cx="310896" cy="382524"/>
+            <a:off x="6208776" y="3108960"/>
+            <a:ext cx="310896" cy="352044"/>
           </a:xfrm>
           <a:prstGeom prst="rect">
             <a:avLst/>
@@ -11960,8 +11960,8 @@
         </p:nvSpPr>
         <p:spPr>
           <a:xfrm>
-            <a:off x="6565392" y="3230880"/>
-            <a:ext cx="2011680" cy="382524"/>
+            <a:off x="6565392" y="3108960"/>
+            <a:ext cx="2011680" cy="352044"/>
           </a:xfrm>
           <a:prstGeom prst="rect">
             <a:avLst/>
@@ -11999,8 +11999,8 @@
         </p:nvSpPr>
         <p:spPr>
           <a:xfrm>
-            <a:off x="8650224" y="3316948"/>
-            <a:ext cx="379984" cy="210388"/>
+            <a:off x="8650224" y="3188170"/>
+            <a:ext cx="379984" cy="193624"/>
           </a:xfrm>
           <a:prstGeom prst="rect">
             <a:avLst/>
@@ -12019,8 +12019,8 @@
         </p:nvSpPr>
         <p:spPr>
           <a:xfrm>
-            <a:off x="10415016" y="3230880"/>
-            <a:ext cx="1051560" cy="382524"/>
+            <a:off x="10415016" y="3108960"/>
+            <a:ext cx="1051560" cy="352044"/>
           </a:xfrm>
           <a:prstGeom prst="rect">
             <a:avLst/>
@@ -12058,8 +12058,8 @@
         </p:nvSpPr>
         <p:spPr>
           <a:xfrm>
-            <a:off x="6208776" y="3613404"/>
-            <a:ext cx="310896" cy="382524"/>
+            <a:off x="6208776" y="3461004"/>
+            <a:ext cx="310896" cy="352044"/>
           </a:xfrm>
           <a:prstGeom prst="rect">
             <a:avLst/>
@@ -12097,8 +12097,8 @@
         </p:nvSpPr>
         <p:spPr>
           <a:xfrm>
-            <a:off x="6565392" y="3613404"/>
-            <a:ext cx="2011680" cy="382524"/>
+            <a:off x="6565392" y="3461004"/>
+            <a:ext cx="2011680" cy="352044"/>
           </a:xfrm>
           <a:prstGeom prst="rect">
             <a:avLst/>
@@ -12136,8 +12136,8 @@
         </p:nvSpPr>
         <p:spPr>
           <a:xfrm>
-            <a:off x="8650224" y="3699472"/>
-            <a:ext cx="379984" cy="210388"/>
+            <a:off x="8650224" y="3540214"/>
+            <a:ext cx="379984" cy="193624"/>
           </a:xfrm>
           <a:prstGeom prst="rect">
             <a:avLst/>
@@ -12156,8 +12156,8 @@
         </p:nvSpPr>
         <p:spPr>
           <a:xfrm>
-            <a:off x="10415016" y="3613404"/>
-            <a:ext cx="1051560" cy="382524"/>
+            <a:off x="10415016" y="3461004"/>
+            <a:ext cx="1051560" cy="352044"/>
           </a:xfrm>
           <a:prstGeom prst="rect">
             <a:avLst/>
@@ -12195,8 +12195,8 @@
         </p:nvSpPr>
         <p:spPr>
           <a:xfrm>
-            <a:off x="6208776" y="3995928"/>
-            <a:ext cx="310896" cy="382524"/>
+            <a:off x="6208776" y="3813048"/>
+            <a:ext cx="310896" cy="352044"/>
           </a:xfrm>
           <a:prstGeom prst="rect">
             <a:avLst/>
@@ -12234,8 +12234,8 @@
         </p:nvSpPr>
         <p:spPr>
           <a:xfrm>
-            <a:off x="6565392" y="3995928"/>
-            <a:ext cx="2011680" cy="382524"/>
+            <a:off x="6565392" y="3813048"/>
+            <a:ext cx="2011680" cy="352044"/>
           </a:xfrm>
           <a:prstGeom prst="rect">
             <a:avLst/>
@@ -12273,8 +12273,8 @@
         </p:nvSpPr>
         <p:spPr>
           <a:xfrm>
-            <a:off x="8650224" y="4081996"/>
-            <a:ext cx="379984" cy="210388"/>
+            <a:off x="8650224" y="3892258"/>
+            <a:ext cx="379984" cy="193624"/>
           </a:xfrm>
           <a:prstGeom prst="rect">
             <a:avLst/>
@@ -12293,8 +12293,8 @@
         </p:nvSpPr>
         <p:spPr>
           <a:xfrm>
-            <a:off x="10415016" y="3995928"/>
-            <a:ext cx="1051560" cy="382524"/>
+            <a:off x="10415016" y="3813048"/>
+            <a:ext cx="1051560" cy="352044"/>
           </a:xfrm>
           <a:prstGeom prst="rect">
             <a:avLst/>
@@ -12332,8 +12332,8 @@
         </p:nvSpPr>
         <p:spPr>
           <a:xfrm>
-            <a:off x="6208776" y="4378452"/>
-            <a:ext cx="310896" cy="382524"/>
+            <a:off x="6208776" y="4165092"/>
+            <a:ext cx="310896" cy="352044"/>
           </a:xfrm>
           <a:prstGeom prst="rect">
             <a:avLst/>
@@ -12371,8 +12371,8 @@
         </p:nvSpPr>
         <p:spPr>
           <a:xfrm>
-            <a:off x="6565392" y="4378452"/>
-            <a:ext cx="2011680" cy="382524"/>
+            <a:off x="6565392" y="4165092"/>
+            <a:ext cx="2011680" cy="352044"/>
           </a:xfrm>
           <a:prstGeom prst="rect">
             <a:avLst/>
@@ -12410,8 +12410,8 @@
         </p:nvSpPr>
         <p:spPr>
           <a:xfrm>
-            <a:off x="8650224" y="4464520"/>
-            <a:ext cx="379984" cy="210388"/>
+            <a:off x="8650224" y="4244302"/>
+            <a:ext cx="379984" cy="193624"/>
           </a:xfrm>
           <a:prstGeom prst="rect">
             <a:avLst/>
@@ -12430,8 +12430,8 @@
         </p:nvSpPr>
         <p:spPr>
           <a:xfrm>
-            <a:off x="10415016" y="4378452"/>
-            <a:ext cx="1051560" cy="382524"/>
+            <a:off x="10415016" y="4165092"/>
+            <a:ext cx="1051560" cy="352044"/>
           </a:xfrm>
           <a:prstGeom prst="rect">
             <a:avLst/>
@@ -12469,8 +12469,8 @@
         </p:nvSpPr>
         <p:spPr>
           <a:xfrm>
-            <a:off x="6208776" y="4760976"/>
-            <a:ext cx="310896" cy="382524"/>
+            <a:off x="6208776" y="4517136"/>
+            <a:ext cx="310896" cy="352044"/>
           </a:xfrm>
           <a:prstGeom prst="rect">
             <a:avLst/>
@@ -12508,8 +12508,8 @@
         </p:nvSpPr>
         <p:spPr>
           <a:xfrm>
-            <a:off x="6565392" y="4760976"/>
-            <a:ext cx="2011680" cy="382524"/>
+            <a:off x="6565392" y="4517136"/>
+            <a:ext cx="2011680" cy="352044"/>
           </a:xfrm>
           <a:prstGeom prst="rect">
             <a:avLst/>
@@ -12547,8 +12547,8 @@
         </p:nvSpPr>
         <p:spPr>
           <a:xfrm>
-            <a:off x="8650224" y="4847044"/>
-            <a:ext cx="379984" cy="210388"/>
+            <a:off x="8650224" y="4596346"/>
+            <a:ext cx="379984" cy="193624"/>
           </a:xfrm>
           <a:prstGeom prst="rect">
             <a:avLst/>
@@ -12567,8 +12567,8 @@
         </p:nvSpPr>
         <p:spPr>
           <a:xfrm>
-            <a:off x="10415016" y="4760976"/>
-            <a:ext cx="1051560" cy="382524"/>
+            <a:off x="10415016" y="4517136"/>
+            <a:ext cx="1051560" cy="352044"/>
           </a:xfrm>
           <a:prstGeom prst="rect">
             <a:avLst/>
@@ -12606,8 +12606,8 @@
         </p:nvSpPr>
         <p:spPr>
           <a:xfrm>
-            <a:off x="6208776" y="5143500"/>
-            <a:ext cx="310896" cy="382524"/>
+            <a:off x="6208776" y="4869180"/>
+            <a:ext cx="310896" cy="352044"/>
           </a:xfrm>
           <a:prstGeom prst="rect">
             <a:avLst/>
@@ -12645,8 +12645,8 @@
         </p:nvSpPr>
         <p:spPr>
           <a:xfrm>
-            <a:off x="6565392" y="5143500"/>
-            <a:ext cx="2011680" cy="382524"/>
+            <a:off x="6565392" y="4869180"/>
+            <a:ext cx="2011680" cy="352044"/>
           </a:xfrm>
           <a:prstGeom prst="rect">
             <a:avLst/>
@@ -12684,8 +12684,8 @@
         </p:nvSpPr>
         <p:spPr>
           <a:xfrm>
-            <a:off x="8650224" y="5229568"/>
-            <a:ext cx="189992" cy="210388"/>
+            <a:off x="8650224" y="4948390"/>
+            <a:ext cx="189992" cy="193624"/>
           </a:xfrm>
           <a:prstGeom prst="rect">
             <a:avLst/>
@@ -12704,8 +12704,8 @@
         </p:nvSpPr>
         <p:spPr>
           <a:xfrm>
-            <a:off x="10415016" y="5143500"/>
-            <a:ext cx="1051560" cy="382524"/>
+            <a:off x="10415016" y="4869180"/>
+            <a:ext cx="1051560" cy="352044"/>
           </a:xfrm>
           <a:prstGeom prst="rect">
             <a:avLst/>
@@ -12743,8 +12743,8 @@
         </p:nvSpPr>
         <p:spPr>
           <a:xfrm>
-            <a:off x="6208776" y="5526024"/>
-            <a:ext cx="310896" cy="382524"/>
+            <a:off x="6208776" y="5221224"/>
+            <a:ext cx="310896" cy="352044"/>
           </a:xfrm>
           <a:prstGeom prst="rect">
             <a:avLst/>
@@ -12782,8 +12782,8 @@
         </p:nvSpPr>
         <p:spPr>
           <a:xfrm>
-            <a:off x="6565392" y="5526024"/>
-            <a:ext cx="2011680" cy="382524"/>
+            <a:off x="6565392" y="5221224"/>
+            <a:ext cx="2011680" cy="352044"/>
           </a:xfrm>
           <a:prstGeom prst="rect">
             <a:avLst/>
@@ -12821,8 +12821,8 @@
         </p:nvSpPr>
         <p:spPr>
           <a:xfrm>
-            <a:off x="8650224" y="5612092"/>
-            <a:ext cx="189992" cy="210388"/>
+            <a:off x="8650224" y="5300434"/>
+            <a:ext cx="189992" cy="193624"/>
           </a:xfrm>
           <a:prstGeom prst="rect">
             <a:avLst/>
@@ -12841,8 +12841,8 @@
         </p:nvSpPr>
         <p:spPr>
           <a:xfrm>
-            <a:off x="10415016" y="5526024"/>
-            <a:ext cx="1051560" cy="382524"/>
+            <a:off x="10415016" y="5221224"/>
+            <a:ext cx="1051560" cy="352044"/>
           </a:xfrm>
           <a:prstGeom prst="rect">
             <a:avLst/>
@@ -12881,7 +12881,7 @@
         <p:spPr>
           <a:xfrm>
             <a:off x="6085332" y="1700784"/>
-            <a:ext cx="10973" cy="4590288"/>
+            <a:ext cx="10973" cy="4224528"/>
           </a:xfrm>
           <a:prstGeom prst="rect">
             <a:avLst/>
@@ -12891,6 +12891,65 @@
           </a:solidFill>
           <a:ln/>
         </p:spPr>
+      </p:sp>
+      <p:sp>
+        <p:nvSpPr>
+          <p:cNvPr id="102" name="Shape 99"/>
+          <p:cNvSpPr/>
+          <p:nvPr/>
+        </p:nvSpPr>
+        <p:spPr>
+          <a:xfrm>
+            <a:off x="457200" y="6126480"/>
+            <a:ext cx="11274552" cy="371856"/>
+          </a:xfrm>
+          <a:prstGeom prst="rect">
+            <a:avLst/>
+          </a:prstGeom>
+          <a:solidFill>
+            <a:srgbClr val="E6F6EE"/>
+          </a:solidFill>
+          <a:ln/>
+        </p:spPr>
+      </p:sp>
+      <p:sp>
+        <p:nvSpPr>
+          <p:cNvPr id="103" name="Text 100"/>
+          <p:cNvSpPr txBox="1"/>
+          <p:nvPr/>
+        </p:nvSpPr>
+        <p:spPr>
+          <a:xfrm>
+            <a:off x="658368" y="6144768"/>
+            <a:ext cx="10927080" cy="335280"/>
+          </a:xfrm>
+          <a:prstGeom prst="rect">
+            <a:avLst/>
+          </a:prstGeom>
+          <a:noFill/>
+          <a:ln/>
+        </p:spPr>
+        <p:txBody>
+          <a:bodyPr wrap="square" lIns="0" tIns="0" rIns="0" bIns="0" rtlCol="0" anchor="ctr"/>
+          <a:lstStyle/>
+          <a:p>
+            <a:pPr indent="0" marL="0">
+              <a:buNone/>
+            </a:pPr>
+            <a:r>
+              <a:rPr lang="en-US" sz="1600" b="1" dirty="0">
+                <a:solidFill>
+                  <a:srgbClr val="0B7A4A"/>
+                </a:solidFill>
+                <a:latin typeface="Inter" pitchFamily="34" charset="0"/>
+                <a:ea typeface="Inter" pitchFamily="34" charset="-122"/>
+                <a:cs typeface="Inter" pitchFamily="34" charset="-120"/>
+              </a:rPr>
+              <a:t>23 of 33 stores set a new monthly record in 2026.</a:t>
+            </a:r>
+            <a:endParaRPr lang="en-US" sz="1600" dirty="0"/>
+          </a:p>
+        </p:txBody>
       </p:sp>
     </p:spTree>
   </p:cSld>
